--- a/slides/Lecture_Chapter13.pptx
+++ b/slides/Lecture_Chapter13.pptx
@@ -13,10 +13,13 @@
     <p:sldId id="396" r:id="rId7"/>
     <p:sldId id="397" r:id="rId8"/>
     <p:sldId id="398" r:id="rId9"/>
-    <p:sldId id="399" r:id="rId10"/>
-    <p:sldId id="400" r:id="rId11"/>
-    <p:sldId id="401" r:id="rId12"/>
-    <p:sldId id="402" r:id="rId13"/>
+    <p:sldId id="405" r:id="rId10"/>
+    <p:sldId id="403" r:id="rId11"/>
+    <p:sldId id="404" r:id="rId12"/>
+    <p:sldId id="399" r:id="rId13"/>
+    <p:sldId id="400" r:id="rId14"/>
+    <p:sldId id="401" r:id="rId15"/>
+    <p:sldId id="402" r:id="rId16"/>
   </p:sldIdLst>
   <p:sldSz cx="12192000" cy="6858000"/>
   <p:notesSz cx="6858000" cy="9144000"/>
@@ -128,6 +131,9 @@
             <p14:sldId id="396"/>
             <p14:sldId id="397"/>
             <p14:sldId id="398"/>
+            <p14:sldId id="405"/>
+            <p14:sldId id="403"/>
+            <p14:sldId id="404"/>
             <p14:sldId id="399"/>
             <p14:sldId id="400"/>
             <p14:sldId id="401"/>
@@ -290,7 +296,7 @@
           <a:p>
             <a:fld id="{3E22BF2E-04DA-469E-97C5-BB68A0368813}" type="datetimeFigureOut">
               <a:rPr lang="en-US" smtClean="0"/>
-              <a:t>11/14/2025</a:t>
+              <a:t>11/29/2025</a:t>
             </a:fld>
             <a:endParaRPr lang="en-US"/>
           </a:p>
@@ -488,7 +494,7 @@
           <a:p>
             <a:fld id="{3E22BF2E-04DA-469E-97C5-BB68A0368813}" type="datetimeFigureOut">
               <a:rPr lang="en-US" smtClean="0"/>
-              <a:t>11/14/2025</a:t>
+              <a:t>11/29/2025</a:t>
             </a:fld>
             <a:endParaRPr lang="en-US"/>
           </a:p>
@@ -696,7 +702,7 @@
           <a:p>
             <a:fld id="{3E22BF2E-04DA-469E-97C5-BB68A0368813}" type="datetimeFigureOut">
               <a:rPr lang="en-US" smtClean="0"/>
-              <a:t>11/14/2025</a:t>
+              <a:t>11/29/2025</a:t>
             </a:fld>
             <a:endParaRPr lang="en-US"/>
           </a:p>
@@ -904,7 +910,7 @@
           <a:p>
             <a:fld id="{3E22BF2E-04DA-469E-97C5-BB68A0368813}" type="datetimeFigureOut">
               <a:rPr lang="en-US" smtClean="0"/>
-              <a:t>11/14/2025</a:t>
+              <a:t>11/29/2025</a:t>
             </a:fld>
             <a:endParaRPr lang="en-US"/>
           </a:p>
@@ -1179,7 +1185,7 @@
           <a:p>
             <a:fld id="{3E22BF2E-04DA-469E-97C5-BB68A0368813}" type="datetimeFigureOut">
               <a:rPr lang="en-US" smtClean="0"/>
-              <a:t>11/14/2025</a:t>
+              <a:t>11/29/2025</a:t>
             </a:fld>
             <a:endParaRPr lang="en-US"/>
           </a:p>
@@ -1444,7 +1450,7 @@
           <a:p>
             <a:fld id="{3E22BF2E-04DA-469E-97C5-BB68A0368813}" type="datetimeFigureOut">
               <a:rPr lang="en-US" smtClean="0"/>
-              <a:t>11/14/2025</a:t>
+              <a:t>11/29/2025</a:t>
             </a:fld>
             <a:endParaRPr lang="en-US"/>
           </a:p>
@@ -1856,7 +1862,7 @@
           <a:p>
             <a:fld id="{3E22BF2E-04DA-469E-97C5-BB68A0368813}" type="datetimeFigureOut">
               <a:rPr lang="en-US" smtClean="0"/>
-              <a:t>11/14/2025</a:t>
+              <a:t>11/29/2025</a:t>
             </a:fld>
             <a:endParaRPr lang="en-US"/>
           </a:p>
@@ -1997,7 +2003,7 @@
           <a:p>
             <a:fld id="{3E22BF2E-04DA-469E-97C5-BB68A0368813}" type="datetimeFigureOut">
               <a:rPr lang="en-US" smtClean="0"/>
-              <a:t>11/14/2025</a:t>
+              <a:t>11/29/2025</a:t>
             </a:fld>
             <a:endParaRPr lang="en-US"/>
           </a:p>
@@ -2110,7 +2116,7 @@
           <a:p>
             <a:fld id="{3E22BF2E-04DA-469E-97C5-BB68A0368813}" type="datetimeFigureOut">
               <a:rPr lang="en-US" smtClean="0"/>
-              <a:t>11/14/2025</a:t>
+              <a:t>11/29/2025</a:t>
             </a:fld>
             <a:endParaRPr lang="en-US"/>
           </a:p>
@@ -2421,7 +2427,7 @@
           <a:p>
             <a:fld id="{3E22BF2E-04DA-469E-97C5-BB68A0368813}" type="datetimeFigureOut">
               <a:rPr lang="en-US" smtClean="0"/>
-              <a:t>11/14/2025</a:t>
+              <a:t>11/29/2025</a:t>
             </a:fld>
             <a:endParaRPr lang="en-US"/>
           </a:p>
@@ -2709,7 +2715,7 @@
           <a:p>
             <a:fld id="{3E22BF2E-04DA-469E-97C5-BB68A0368813}" type="datetimeFigureOut">
               <a:rPr lang="en-US" smtClean="0"/>
-              <a:t>11/14/2025</a:t>
+              <a:t>11/29/2025</a:t>
             </a:fld>
             <a:endParaRPr lang="en-US"/>
           </a:p>
@@ -2950,7 +2956,7 @@
           <a:p>
             <a:fld id="{3E22BF2E-04DA-469E-97C5-BB68A0368813}" type="datetimeFigureOut">
               <a:rPr lang="en-US" smtClean="0"/>
-              <a:t>11/14/2025</a:t>
+              <a:t>11/29/2025</a:t>
             </a:fld>
             <a:endParaRPr lang="en-US"/>
           </a:p>
@@ -3467,7 +3473,7 @@
         </p:blipFill>
         <p:spPr bwMode="auto">
           <a:xfrm>
-            <a:off x="3653200" y="-18278"/>
+            <a:off x="3523485" y="10"/>
             <a:ext cx="8668512" cy="6857990"/>
           </a:xfrm>
           <a:prstGeom prst="rect">
@@ -3927,6 +3933,53 @@
           </a:prstGeom>
         </p:spPr>
       </p:pic>
+      <p:pic>
+        <p:nvPicPr>
+          <p:cNvPr id="6" name="Picture 5">
+            <a:extLst>
+              <a:ext uri="{FF2B5EF4-FFF2-40B4-BE49-F238E27FC236}">
+                <a16:creationId xmlns:a16="http://schemas.microsoft.com/office/drawing/2014/main" id="{8AD28C7D-14A3-CFEB-3DEC-2E01272844F2}"/>
+              </a:ext>
+            </a:extLst>
+          </p:cNvPr>
+          <p:cNvPicPr>
+            <a:picLocks noChangeAspect="1" noChangeArrowheads="1"/>
+          </p:cNvPicPr>
+          <p:nvPr/>
+        </p:nvPicPr>
+        <p:blipFill>
+          <a:blip r:embed="rId5">
+            <a:extLst>
+              <a:ext uri="{28A0092B-C50C-407E-A947-70E740481C1C}">
+                <a14:useLocalDpi xmlns:a14="http://schemas.microsoft.com/office/drawing/2010/main" val="0"/>
+              </a:ext>
+            </a:extLst>
+          </a:blip>
+          <a:srcRect/>
+          <a:stretch>
+            <a:fillRect/>
+          </a:stretch>
+        </p:blipFill>
+        <p:spPr bwMode="auto">
+          <a:xfrm>
+            <a:off x="7869289" y="209383"/>
+            <a:ext cx="4182403" cy="1000945"/>
+          </a:xfrm>
+          <a:prstGeom prst="rect">
+            <a:avLst/>
+          </a:prstGeom>
+          <a:noFill/>
+          <a:extLst>
+            <a:ext uri="{909E8E84-426E-40DD-AFC4-6F175D3DCCD1}">
+              <a14:hiddenFill xmlns:a14="http://schemas.microsoft.com/office/drawing/2010/main">
+                <a:solidFill>
+                  <a:srgbClr val="FFFFFF"/>
+                </a:solidFill>
+              </a14:hiddenFill>
+            </a:ext>
+          </a:extLst>
+        </p:spPr>
+      </p:pic>
     </p:spTree>
     <p:extLst>
       <p:ext uri="{BB962C8B-B14F-4D97-AF65-F5344CB8AC3E}">
@@ -3941,6 +3994,1482 @@
 </file>
 
 <file path=ppt/slides/slide10.xml><?xml version="1.0" encoding="utf-8"?>
+<p:sld xmlns:a="http://schemas.openxmlformats.org/drawingml/2006/main" xmlns:r="http://schemas.openxmlformats.org/officeDocument/2006/relationships" xmlns:p="http://schemas.openxmlformats.org/presentationml/2006/main">
+  <p:cSld>
+    <p:spTree>
+      <p:nvGrpSpPr>
+        <p:cNvPr id="1" name=""/>
+        <p:cNvGrpSpPr/>
+        <p:nvPr/>
+      </p:nvGrpSpPr>
+      <p:grpSpPr>
+        <a:xfrm>
+          <a:off x="0" y="0"/>
+          <a:ext cx="0" cy="0"/>
+          <a:chOff x="0" y="0"/>
+          <a:chExt cx="0" cy="0"/>
+        </a:xfrm>
+      </p:grpSpPr>
+      <p:sp>
+        <p:nvSpPr>
+          <p:cNvPr id="2" name="Title 1">
+            <a:extLst>
+              <a:ext uri="{FF2B5EF4-FFF2-40B4-BE49-F238E27FC236}">
+                <a16:creationId xmlns:a16="http://schemas.microsoft.com/office/drawing/2014/main" id="{EEC235DA-6659-FCD2-0535-D2F5B36B0BBF}"/>
+              </a:ext>
+            </a:extLst>
+          </p:cNvPr>
+          <p:cNvSpPr>
+            <a:spLocks noGrp="1"/>
+          </p:cNvSpPr>
+          <p:nvPr>
+            <p:ph type="title"/>
+          </p:nvPr>
+        </p:nvSpPr>
+        <p:spPr/>
+        <p:txBody>
+          <a:bodyPr/>
+          <a:lstStyle/>
+          <a:p>
+            <a:r>
+              <a:rPr lang="en-US" dirty="0"/>
+              <a:t>Actor-Critic Methods</a:t>
+            </a:r>
+          </a:p>
+        </p:txBody>
+      </p:sp>
+      <p:sp>
+        <p:nvSpPr>
+          <p:cNvPr id="3" name="Text Placeholder 2">
+            <a:extLst>
+              <a:ext uri="{FF2B5EF4-FFF2-40B4-BE49-F238E27FC236}">
+                <a16:creationId xmlns:a16="http://schemas.microsoft.com/office/drawing/2014/main" id="{F7904E83-698E-5514-E2C1-DE4C72B84BEF}"/>
+              </a:ext>
+            </a:extLst>
+          </p:cNvPr>
+          <p:cNvSpPr>
+            <a:spLocks noGrp="1"/>
+          </p:cNvSpPr>
+          <p:nvPr>
+            <p:ph type="body" idx="1"/>
+          </p:nvPr>
+        </p:nvSpPr>
+        <p:spPr/>
+        <p:txBody>
+          <a:bodyPr/>
+          <a:lstStyle/>
+          <a:p>
+            <a:r>
+              <a:rPr lang="en-US" dirty="0"/>
+              <a:t>Combining parameterized policies with parameterized value functions</a:t>
+            </a:r>
+          </a:p>
+        </p:txBody>
+      </p:sp>
+    </p:spTree>
+    <p:extLst>
+      <p:ext uri="{BB962C8B-B14F-4D97-AF65-F5344CB8AC3E}">
+        <p14:creationId xmlns:p14="http://schemas.microsoft.com/office/powerpoint/2010/main" val="1039217872"/>
+      </p:ext>
+    </p:extLst>
+  </p:cSld>
+  <p:clrMapOvr>
+    <a:masterClrMapping/>
+  </p:clrMapOvr>
+</p:sld>
+</file>
+
+<file path=ppt/slides/slide11.xml><?xml version="1.0" encoding="utf-8"?>
+<p:sld xmlns:a="http://schemas.openxmlformats.org/drawingml/2006/main" xmlns:r="http://schemas.openxmlformats.org/officeDocument/2006/relationships" xmlns:p="http://schemas.openxmlformats.org/presentationml/2006/main">
+  <p:cSld>
+    <p:spTree>
+      <p:nvGrpSpPr>
+        <p:cNvPr id="1" name=""/>
+        <p:cNvGrpSpPr/>
+        <p:nvPr/>
+      </p:nvGrpSpPr>
+      <p:grpSpPr>
+        <a:xfrm>
+          <a:off x="0" y="0"/>
+          <a:ext cx="0" cy="0"/>
+          <a:chOff x="0" y="0"/>
+          <a:chExt cx="0" cy="0"/>
+        </a:xfrm>
+      </p:grpSpPr>
+      <p:sp>
+        <p:nvSpPr>
+          <p:cNvPr id="4" name="Title 3">
+            <a:extLst>
+              <a:ext uri="{FF2B5EF4-FFF2-40B4-BE49-F238E27FC236}">
+                <a16:creationId xmlns:a16="http://schemas.microsoft.com/office/drawing/2014/main" id="{C058F417-5DF6-F5B5-A385-666C67922FA0}"/>
+              </a:ext>
+            </a:extLst>
+          </p:cNvPr>
+          <p:cNvSpPr>
+            <a:spLocks noGrp="1"/>
+          </p:cNvSpPr>
+          <p:nvPr>
+            <p:ph type="title"/>
+          </p:nvPr>
+        </p:nvSpPr>
+        <p:spPr/>
+        <p:txBody>
+          <a:bodyPr/>
+          <a:lstStyle/>
+          <a:p>
+            <a:r>
+              <a:rPr lang="en-US" dirty="0"/>
+              <a:t>Actor-Critic Methods</a:t>
+            </a:r>
+          </a:p>
+        </p:txBody>
+      </p:sp>
+      <mc:AlternateContent xmlns:mc="http://schemas.openxmlformats.org/markup-compatibility/2006">
+        <mc:Choice xmlns:a14="http://schemas.microsoft.com/office/drawing/2010/main" Requires="a14">
+          <p:sp>
+            <p:nvSpPr>
+              <p:cNvPr id="5" name="Content Placeholder 4">
+                <a:extLst>
+                  <a:ext uri="{FF2B5EF4-FFF2-40B4-BE49-F238E27FC236}">
+                    <a16:creationId xmlns:a16="http://schemas.microsoft.com/office/drawing/2014/main" id="{5DE7457B-2499-5391-0012-F1D1EE0A7C01}"/>
+                  </a:ext>
+                </a:extLst>
+              </p:cNvPr>
+              <p:cNvSpPr>
+                <a:spLocks noGrp="1"/>
+              </p:cNvSpPr>
+              <p:nvPr>
+                <p:ph idx="1"/>
+              </p:nvPr>
+            </p:nvSpPr>
+            <p:spPr>
+              <a:xfrm>
+                <a:off x="838200" y="1397330"/>
+                <a:ext cx="7081157" cy="4779633"/>
+              </a:xfrm>
+            </p:spPr>
+            <p:txBody>
+              <a:bodyPr>
+                <a:normAutofit fontScale="62500" lnSpcReduction="20000"/>
+              </a:bodyPr>
+              <a:lstStyle/>
+              <a:p>
+                <a:r>
+                  <a:rPr lang="en-US" b="1" dirty="0"/>
+                  <a:t>Idea</a:t>
+                </a:r>
+                <a:r>
+                  <a:rPr lang="en-US" dirty="0"/>
+                  <a:t>: estimate a parameterized policy and a parameterized value function at the same time.</a:t>
+                </a:r>
+              </a:p>
+              <a:p>
+                <a:endParaRPr lang="en-US" dirty="0"/>
+              </a:p>
+              <a:p>
+                <a:r>
+                  <a:rPr lang="en-US" b="1" dirty="0"/>
+                  <a:t>Actor</a:t>
+                </a:r>
+                <a:r>
+                  <a:rPr lang="en-US" dirty="0"/>
+                  <a:t>: estimates the policy and decides on actions.</a:t>
+                </a:r>
+              </a:p>
+              <a:p>
+                <a:endParaRPr lang="en-US" dirty="0"/>
+              </a:p>
+              <a:p>
+                <a:r>
+                  <a:rPr lang="en-US" b="1" dirty="0"/>
+                  <a:t>Critic</a:t>
+                </a:r>
+                <a:r>
+                  <a:rPr lang="en-US" dirty="0"/>
+                  <a:t>: estimates the TD error using its value function estimate</a:t>
+                </a:r>
+              </a:p>
+              <a:p>
+                <a:pPr marL="0" indent="0">
+                  <a:buNone/>
+                </a:pPr>
+                <a14:m>
+                  <m:oMathPara xmlns:m="http://schemas.openxmlformats.org/officeDocument/2006/math">
+                    <m:oMathParaPr>
+                      <m:jc m:val="centerGroup"/>
+                    </m:oMathParaPr>
+                    <m:oMath xmlns:m="http://schemas.openxmlformats.org/officeDocument/2006/math">
+                      <m:sSub>
+                        <m:sSubPr>
+                          <m:ctrlPr>
+                            <a:rPr lang="en-US" b="0" i="1" smtClean="0">
+                              <a:latin typeface="Cambria Math" panose="02040503050406030204" pitchFamily="18" charset="0"/>
+                            </a:rPr>
+                          </m:ctrlPr>
+                        </m:sSubPr>
+                        <m:e>
+                          <m:r>
+                            <a:rPr lang="en-US" b="0" i="1" smtClean="0">
+                              <a:latin typeface="Cambria Math" panose="02040503050406030204" pitchFamily="18" charset="0"/>
+                            </a:rPr>
+                            <m:t>𝛿</m:t>
+                          </m:r>
+                        </m:e>
+                        <m:sub>
+                          <m:r>
+                            <a:rPr lang="en-US" b="0" i="1" smtClean="0">
+                              <a:latin typeface="Cambria Math" panose="02040503050406030204" pitchFamily="18" charset="0"/>
+                            </a:rPr>
+                            <m:t>𝑡</m:t>
+                          </m:r>
+                        </m:sub>
+                      </m:sSub>
+                      <m:r>
+                        <a:rPr lang="en-US" b="0" i="1" smtClean="0">
+                          <a:latin typeface="Cambria Math" panose="02040503050406030204" pitchFamily="18" charset="0"/>
+                        </a:rPr>
+                        <m:t>=</m:t>
+                      </m:r>
+                      <m:sSub>
+                        <m:sSubPr>
+                          <m:ctrlPr>
+                            <a:rPr lang="en-US" b="0" i="1" smtClean="0">
+                              <a:latin typeface="Cambria Math" panose="02040503050406030204" pitchFamily="18" charset="0"/>
+                            </a:rPr>
+                          </m:ctrlPr>
+                        </m:sSubPr>
+                        <m:e>
+                          <m:r>
+                            <a:rPr lang="en-US" b="0" i="1" smtClean="0">
+                              <a:latin typeface="Cambria Math" panose="02040503050406030204" pitchFamily="18" charset="0"/>
+                            </a:rPr>
+                            <m:t>𝑅</m:t>
+                          </m:r>
+                        </m:e>
+                        <m:sub>
+                          <m:r>
+                            <a:rPr lang="en-US" b="0" i="1" smtClean="0">
+                              <a:latin typeface="Cambria Math" panose="02040503050406030204" pitchFamily="18" charset="0"/>
+                            </a:rPr>
+                            <m:t>𝑡</m:t>
+                          </m:r>
+                          <m:r>
+                            <a:rPr lang="en-US" b="0" i="1" smtClean="0">
+                              <a:latin typeface="Cambria Math" panose="02040503050406030204" pitchFamily="18" charset="0"/>
+                            </a:rPr>
+                            <m:t>+1</m:t>
+                          </m:r>
+                        </m:sub>
+                      </m:sSub>
+                      <m:r>
+                        <a:rPr lang="en-US" b="0" i="1" smtClean="0">
+                          <a:latin typeface="Cambria Math" panose="02040503050406030204" pitchFamily="18" charset="0"/>
+                        </a:rPr>
+                        <m:t>+</m:t>
+                      </m:r>
+                      <m:r>
+                        <a:rPr lang="en-US" b="0" i="1" smtClean="0">
+                          <a:latin typeface="Cambria Math" panose="02040503050406030204" pitchFamily="18" charset="0"/>
+                        </a:rPr>
+                        <m:t>𝛾</m:t>
+                      </m:r>
+                      <m:r>
+                        <a:rPr lang="en-US" b="0" i="1" smtClean="0">
+                          <a:latin typeface="Cambria Math" panose="02040503050406030204" pitchFamily="18" charset="0"/>
+                        </a:rPr>
+                        <m:t>𝑉</m:t>
+                      </m:r>
+                      <m:d>
+                        <m:dPr>
+                          <m:ctrlPr>
+                            <a:rPr lang="en-US" b="0" i="1" smtClean="0">
+                              <a:latin typeface="Cambria Math" panose="02040503050406030204" pitchFamily="18" charset="0"/>
+                            </a:rPr>
+                          </m:ctrlPr>
+                        </m:dPr>
+                        <m:e>
+                          <m:sSub>
+                            <m:sSubPr>
+                              <m:ctrlPr>
+                                <a:rPr lang="en-US" b="0" i="1" smtClean="0">
+                                  <a:latin typeface="Cambria Math" panose="02040503050406030204" pitchFamily="18" charset="0"/>
+                                </a:rPr>
+                              </m:ctrlPr>
+                            </m:sSubPr>
+                            <m:e>
+                              <m:r>
+                                <a:rPr lang="en-US" b="0" i="1" smtClean="0">
+                                  <a:latin typeface="Cambria Math" panose="02040503050406030204" pitchFamily="18" charset="0"/>
+                                </a:rPr>
+                                <m:t>𝑆</m:t>
+                              </m:r>
+                            </m:e>
+                            <m:sub>
+                              <m:r>
+                                <a:rPr lang="en-US" b="0" i="1" smtClean="0">
+                                  <a:latin typeface="Cambria Math" panose="02040503050406030204" pitchFamily="18" charset="0"/>
+                                </a:rPr>
+                                <m:t>𝑡</m:t>
+                              </m:r>
+                              <m:r>
+                                <a:rPr lang="en-US" b="0" i="1" smtClean="0">
+                                  <a:latin typeface="Cambria Math" panose="02040503050406030204" pitchFamily="18" charset="0"/>
+                                </a:rPr>
+                                <m:t>+1</m:t>
+                              </m:r>
+                            </m:sub>
+                          </m:sSub>
+                        </m:e>
+                      </m:d>
+                      <m:r>
+                        <a:rPr lang="en-US" b="0" i="1" smtClean="0">
+                          <a:latin typeface="Cambria Math" panose="02040503050406030204" pitchFamily="18" charset="0"/>
+                        </a:rPr>
+                        <m:t>−</m:t>
+                      </m:r>
+                      <m:r>
+                        <a:rPr lang="en-US" b="0" i="1" smtClean="0">
+                          <a:latin typeface="Cambria Math" panose="02040503050406030204" pitchFamily="18" charset="0"/>
+                        </a:rPr>
+                        <m:t>𝑉</m:t>
+                      </m:r>
+                      <m:r>
+                        <a:rPr lang="en-US" b="0" i="1" smtClean="0">
+                          <a:latin typeface="Cambria Math" panose="02040503050406030204" pitchFamily="18" charset="0"/>
+                        </a:rPr>
+                        <m:t>(</m:t>
+                      </m:r>
+                      <m:sSub>
+                        <m:sSubPr>
+                          <m:ctrlPr>
+                            <a:rPr lang="en-US" b="0" i="1" smtClean="0">
+                              <a:latin typeface="Cambria Math" panose="02040503050406030204" pitchFamily="18" charset="0"/>
+                            </a:rPr>
+                          </m:ctrlPr>
+                        </m:sSubPr>
+                        <m:e>
+                          <m:r>
+                            <a:rPr lang="en-US" b="0" i="1" smtClean="0">
+                              <a:latin typeface="Cambria Math" panose="02040503050406030204" pitchFamily="18" charset="0"/>
+                            </a:rPr>
+                            <m:t>𝑆</m:t>
+                          </m:r>
+                        </m:e>
+                        <m:sub>
+                          <m:r>
+                            <a:rPr lang="en-US" b="0" i="1" smtClean="0">
+                              <a:latin typeface="Cambria Math" panose="02040503050406030204" pitchFamily="18" charset="0"/>
+                            </a:rPr>
+                            <m:t>𝑡</m:t>
+                          </m:r>
+                        </m:sub>
+                      </m:sSub>
+                      <m:r>
+                        <a:rPr lang="en-US" b="0" i="1" smtClean="0">
+                          <a:latin typeface="Cambria Math" panose="02040503050406030204" pitchFamily="18" charset="0"/>
+                        </a:rPr>
+                        <m:t>)</m:t>
+                      </m:r>
+                    </m:oMath>
+                  </m:oMathPara>
+                </a14:m>
+                <a:endParaRPr lang="en-US" dirty="0"/>
+              </a:p>
+              <a:p>
+                <a:endParaRPr lang="en-US" dirty="0"/>
+              </a:p>
+              <a:p>
+                <a:endParaRPr lang="en-US" dirty="0"/>
+              </a:p>
+              <a:p>
+                <a:r>
+                  <a:rPr lang="en-US" dirty="0"/>
+                  <a:t>The critic judges the actor’s action by comparing the received reward to the expected difference in value. </a:t>
+                </a:r>
+              </a:p>
+              <a:p>
+                <a:r>
+                  <a:rPr lang="en-US" dirty="0"/>
+                  <a:t>The TD error is used to update both approximations.</a:t>
+                </a:r>
+              </a:p>
+              <a:p>
+                <a:r>
+                  <a:rPr lang="en-US" dirty="0"/>
+                  <a:t>A positive TD error indicates the last action performed better than expected and the tendency to pick it should be strengthened, whereas if the TD error is negative, it suggests the tendency should be weakened.</a:t>
+                </a:r>
+              </a:p>
+              <a:p>
+                <a:endParaRPr lang="en-US" dirty="0"/>
+              </a:p>
+              <a:p>
+                <a:endParaRPr lang="en-US" dirty="0"/>
+              </a:p>
+            </p:txBody>
+          </p:sp>
+        </mc:Choice>
+        <mc:Fallback>
+          <p:sp>
+            <p:nvSpPr>
+              <p:cNvPr id="5" name="Content Placeholder 4">
+                <a:extLst>
+                  <a:ext uri="{FF2B5EF4-FFF2-40B4-BE49-F238E27FC236}">
+                    <a16:creationId xmlns:a16="http://schemas.microsoft.com/office/drawing/2014/main" id="{5DE7457B-2499-5391-0012-F1D1EE0A7C01}"/>
+                  </a:ext>
+                </a:extLst>
+              </p:cNvPr>
+              <p:cNvSpPr>
+                <a:spLocks noGrp="1" noRot="1" noChangeAspect="1" noMove="1" noResize="1" noEditPoints="1" noAdjustHandles="1" noChangeArrowheads="1" noChangeShapeType="1" noTextEdit="1"/>
+              </p:cNvSpPr>
+              <p:nvPr>
+                <p:ph idx="1"/>
+              </p:nvPr>
+            </p:nvSpPr>
+            <p:spPr>
+              <a:xfrm>
+                <a:off x="838200" y="1397330"/>
+                <a:ext cx="7081157" cy="4779633"/>
+              </a:xfrm>
+              <a:blipFill>
+                <a:blip r:embed="rId2"/>
+                <a:stretch>
+                  <a:fillRect l="-603" t="-1913"/>
+                </a:stretch>
+              </a:blipFill>
+            </p:spPr>
+            <p:txBody>
+              <a:bodyPr/>
+              <a:lstStyle/>
+              <a:p>
+                <a:r>
+                  <a:rPr lang="en-US">
+                    <a:noFill/>
+                  </a:rPr>
+                  <a:t> </a:t>
+                </a:r>
+              </a:p>
+            </p:txBody>
+          </p:sp>
+        </mc:Fallback>
+      </mc:AlternateContent>
+      <p:pic>
+        <p:nvPicPr>
+          <p:cNvPr id="6" name="Picture 5">
+            <a:extLst>
+              <a:ext uri="{FF2B5EF4-FFF2-40B4-BE49-F238E27FC236}">
+                <a16:creationId xmlns:a16="http://schemas.microsoft.com/office/drawing/2014/main" id="{2DED067C-18CB-0247-F450-1737DF323D2A}"/>
+              </a:ext>
+            </a:extLst>
+          </p:cNvPr>
+          <p:cNvPicPr>
+            <a:picLocks noChangeAspect="1"/>
+          </p:cNvPicPr>
+          <p:nvPr/>
+        </p:nvPicPr>
+        <p:blipFill>
+          <a:blip r:embed="rId3"/>
+          <a:stretch>
+            <a:fillRect/>
+          </a:stretch>
+        </p:blipFill>
+        <p:spPr>
+          <a:xfrm>
+            <a:off x="8153831" y="1549987"/>
+            <a:ext cx="3362325" cy="3333750"/>
+          </a:xfrm>
+          <a:prstGeom prst="rect">
+            <a:avLst/>
+          </a:prstGeom>
+        </p:spPr>
+      </p:pic>
+      <p:sp>
+        <p:nvSpPr>
+          <p:cNvPr id="2" name="Right Brace 1">
+            <a:extLst>
+              <a:ext uri="{FF2B5EF4-FFF2-40B4-BE49-F238E27FC236}">
+                <a16:creationId xmlns:a16="http://schemas.microsoft.com/office/drawing/2014/main" id="{F21A47E0-5923-32BA-8CA1-9B8A44E0B299}"/>
+              </a:ext>
+            </a:extLst>
+          </p:cNvPr>
+          <p:cNvSpPr/>
+          <p:nvPr/>
+        </p:nvSpPr>
+        <p:spPr>
+          <a:xfrm rot="5400000">
+            <a:off x="4168912" y="2577439"/>
+            <a:ext cx="163381" cy="1689815"/>
+          </a:xfrm>
+          <a:prstGeom prst="rightBrace">
+            <a:avLst/>
+          </a:prstGeom>
+        </p:spPr>
+        <p:style>
+          <a:lnRef idx="2">
+            <a:schemeClr val="accent1"/>
+          </a:lnRef>
+          <a:fillRef idx="0">
+            <a:schemeClr val="accent1"/>
+          </a:fillRef>
+          <a:effectRef idx="1">
+            <a:schemeClr val="accent1"/>
+          </a:effectRef>
+          <a:fontRef idx="minor">
+            <a:schemeClr val="tx1"/>
+          </a:fontRef>
+        </p:style>
+        <p:txBody>
+          <a:bodyPr rtlCol="0" anchor="ctr"/>
+          <a:lstStyle/>
+          <a:p>
+            <a:pPr algn="ctr"/>
+            <a:endParaRPr lang="en-US"/>
+          </a:p>
+        </p:txBody>
+      </p:sp>
+      <mc:AlternateContent xmlns:mc="http://schemas.openxmlformats.org/markup-compatibility/2006">
+        <mc:Choice xmlns:a14="http://schemas.microsoft.com/office/drawing/2010/main" Requires="a14">
+          <p:sp>
+            <p:nvSpPr>
+              <p:cNvPr id="3" name="TextBox 2">
+                <a:extLst>
+                  <a:ext uri="{FF2B5EF4-FFF2-40B4-BE49-F238E27FC236}">
+                    <a16:creationId xmlns:a16="http://schemas.microsoft.com/office/drawing/2014/main" id="{FE44EC0C-68CE-F46E-BDCD-00F436214356}"/>
+                  </a:ext>
+                </a:extLst>
+              </p:cNvPr>
+              <p:cNvSpPr txBox="1"/>
+              <p:nvPr/>
+            </p:nvSpPr>
+            <p:spPr>
+              <a:xfrm>
+                <a:off x="3955535" y="3504037"/>
+                <a:ext cx="590133" cy="369332"/>
+              </a:xfrm>
+              <a:prstGeom prst="rect">
+                <a:avLst/>
+              </a:prstGeom>
+              <a:noFill/>
+            </p:spPr>
+            <p:txBody>
+              <a:bodyPr wrap="square" rtlCol="0">
+                <a:spAutoFit/>
+              </a:bodyPr>
+              <a:lstStyle/>
+              <a:p>
+                <a14:m>
+                  <m:oMathPara xmlns:m="http://schemas.openxmlformats.org/officeDocument/2006/math">
+                    <m:oMathParaPr>
+                      <m:jc m:val="centerGroup"/>
+                    </m:oMathParaPr>
+                    <m:oMath xmlns:m="http://schemas.openxmlformats.org/officeDocument/2006/math">
+                      <m:sSub>
+                        <m:sSubPr>
+                          <m:ctrlPr>
+                            <a:rPr lang="en-US" b="0" i="1" smtClean="0">
+                              <a:latin typeface="Cambria Math" panose="02040503050406030204" pitchFamily="18" charset="0"/>
+                            </a:rPr>
+                          </m:ctrlPr>
+                        </m:sSubPr>
+                        <m:e>
+                          <m:r>
+                            <a:rPr lang="en-US" b="0" i="1" smtClean="0">
+                              <a:latin typeface="Cambria Math" panose="02040503050406030204" pitchFamily="18" charset="0"/>
+                            </a:rPr>
+                            <m:t>𝐺</m:t>
+                          </m:r>
+                        </m:e>
+                        <m:sub>
+                          <m:r>
+                            <a:rPr lang="en-US" b="0" i="1" smtClean="0">
+                              <a:latin typeface="Cambria Math" panose="02040503050406030204" pitchFamily="18" charset="0"/>
+                            </a:rPr>
+                            <m:t>𝑡</m:t>
+                          </m:r>
+                        </m:sub>
+                      </m:sSub>
+                    </m:oMath>
+                  </m:oMathPara>
+                </a14:m>
+                <a:endParaRPr lang="en-US" dirty="0"/>
+              </a:p>
+            </p:txBody>
+          </p:sp>
+        </mc:Choice>
+        <mc:Fallback>
+          <p:sp>
+            <p:nvSpPr>
+              <p:cNvPr id="3" name="TextBox 2">
+                <a:extLst>
+                  <a:ext uri="{FF2B5EF4-FFF2-40B4-BE49-F238E27FC236}">
+                    <a16:creationId xmlns:a16="http://schemas.microsoft.com/office/drawing/2014/main" id="{FE44EC0C-68CE-F46E-BDCD-00F436214356}"/>
+                  </a:ext>
+                </a:extLst>
+              </p:cNvPr>
+              <p:cNvSpPr txBox="1">
+                <a:spLocks noRot="1" noChangeAspect="1" noMove="1" noResize="1" noEditPoints="1" noAdjustHandles="1" noChangeArrowheads="1" noChangeShapeType="1" noTextEdit="1"/>
+              </p:cNvSpPr>
+              <p:nvPr/>
+            </p:nvSpPr>
+            <p:spPr>
+              <a:xfrm>
+                <a:off x="3955535" y="3504037"/>
+                <a:ext cx="590133" cy="369332"/>
+              </a:xfrm>
+              <a:prstGeom prst="rect">
+                <a:avLst/>
+              </a:prstGeom>
+              <a:blipFill>
+                <a:blip r:embed="rId4"/>
+                <a:stretch>
+                  <a:fillRect/>
+                </a:stretch>
+              </a:blipFill>
+            </p:spPr>
+            <p:txBody>
+              <a:bodyPr/>
+              <a:lstStyle/>
+              <a:p>
+                <a:r>
+                  <a:rPr lang="en-US">
+                    <a:noFill/>
+                  </a:rPr>
+                  <a:t> </a:t>
+                </a:r>
+              </a:p>
+            </p:txBody>
+          </p:sp>
+        </mc:Fallback>
+      </mc:AlternateContent>
+    </p:spTree>
+    <p:extLst>
+      <p:ext uri="{BB962C8B-B14F-4D97-AF65-F5344CB8AC3E}">
+        <p14:creationId xmlns:p14="http://schemas.microsoft.com/office/powerpoint/2010/main" val="3798270662"/>
+      </p:ext>
+    </p:extLst>
+  </p:cSld>
+  <p:clrMapOvr>
+    <a:masterClrMapping/>
+  </p:clrMapOvr>
+</p:sld>
+</file>
+
+<file path=ppt/slides/slide12.xml><?xml version="1.0" encoding="utf-8"?>
+<p:sld xmlns:a="http://schemas.openxmlformats.org/drawingml/2006/main" xmlns:r="http://schemas.openxmlformats.org/officeDocument/2006/relationships" xmlns:p="http://schemas.openxmlformats.org/presentationml/2006/main">
+  <p:cSld>
+    <p:spTree>
+      <p:nvGrpSpPr>
+        <p:cNvPr id="1" name=""/>
+        <p:cNvGrpSpPr/>
+        <p:nvPr/>
+      </p:nvGrpSpPr>
+      <p:grpSpPr>
+        <a:xfrm>
+          <a:off x="0" y="0"/>
+          <a:ext cx="0" cy="0"/>
+          <a:chOff x="0" y="0"/>
+          <a:chExt cx="0" cy="0"/>
+        </a:xfrm>
+      </p:grpSpPr>
+      <p:sp>
+        <p:nvSpPr>
+          <p:cNvPr id="2" name="Title 1">
+            <a:extLst>
+              <a:ext uri="{FF2B5EF4-FFF2-40B4-BE49-F238E27FC236}">
+                <a16:creationId xmlns:a16="http://schemas.microsoft.com/office/drawing/2014/main" id="{4DC2DFE1-72DC-68CD-CBDF-6806168FD6EE}"/>
+              </a:ext>
+            </a:extLst>
+          </p:cNvPr>
+          <p:cNvSpPr>
+            <a:spLocks noGrp="1"/>
+          </p:cNvSpPr>
+          <p:nvPr>
+            <p:ph type="title"/>
+          </p:nvPr>
+        </p:nvSpPr>
+        <p:spPr/>
+        <p:txBody>
+          <a:bodyPr/>
+          <a:lstStyle/>
+          <a:p>
+            <a:r>
+              <a:rPr lang="en-US" dirty="0"/>
+              <a:t>One-Step Actor-Critic Algorithm</a:t>
+            </a:r>
+          </a:p>
+        </p:txBody>
+      </p:sp>
+      <p:pic>
+        <p:nvPicPr>
+          <p:cNvPr id="7" name="Picture 6">
+            <a:extLst>
+              <a:ext uri="{FF2B5EF4-FFF2-40B4-BE49-F238E27FC236}">
+                <a16:creationId xmlns:a16="http://schemas.microsoft.com/office/drawing/2014/main" id="{2C127B90-B61D-6A2E-A61B-CCCEFCCC5B63}"/>
+              </a:ext>
+            </a:extLst>
+          </p:cNvPr>
+          <p:cNvPicPr>
+            <a:picLocks noChangeAspect="1"/>
+          </p:cNvPicPr>
+          <p:nvPr/>
+        </p:nvPicPr>
+        <p:blipFill>
+          <a:blip r:embed="rId2"/>
+          <a:stretch>
+            <a:fillRect/>
+          </a:stretch>
+        </p:blipFill>
+        <p:spPr>
+          <a:xfrm>
+            <a:off x="1633938" y="1412757"/>
+            <a:ext cx="8821552" cy="4989901"/>
+          </a:xfrm>
+          <a:prstGeom prst="rect">
+            <a:avLst/>
+          </a:prstGeom>
+        </p:spPr>
+      </p:pic>
+      <p:sp>
+        <p:nvSpPr>
+          <p:cNvPr id="5" name="Speech Bubble: Rectangle with Corners Rounded 4">
+            <a:extLst>
+              <a:ext uri="{FF2B5EF4-FFF2-40B4-BE49-F238E27FC236}">
+                <a16:creationId xmlns:a16="http://schemas.microsoft.com/office/drawing/2014/main" id="{D8C230AF-79C2-A184-7ED5-1506ABF95837}"/>
+              </a:ext>
+            </a:extLst>
+          </p:cNvPr>
+          <p:cNvSpPr/>
+          <p:nvPr/>
+        </p:nvSpPr>
+        <p:spPr>
+          <a:xfrm>
+            <a:off x="9116078" y="2371412"/>
+            <a:ext cx="865538" cy="259172"/>
+          </a:xfrm>
+          <a:prstGeom prst="wedgeRoundRectCallout">
+            <a:avLst>
+              <a:gd name="adj1" fmla="val -84315"/>
+              <a:gd name="adj2" fmla="val 24880"/>
+              <a:gd name="adj3" fmla="val 16667"/>
+            </a:avLst>
+          </a:prstGeom>
+        </p:spPr>
+        <p:style>
+          <a:lnRef idx="2">
+            <a:schemeClr val="accent2">
+              <a:shade val="15000"/>
+            </a:schemeClr>
+          </a:lnRef>
+          <a:fillRef idx="1">
+            <a:schemeClr val="accent2"/>
+          </a:fillRef>
+          <a:effectRef idx="0">
+            <a:schemeClr val="accent2"/>
+          </a:effectRef>
+          <a:fontRef idx="minor">
+            <a:schemeClr val="lt1"/>
+          </a:fontRef>
+        </p:style>
+        <p:txBody>
+          <a:bodyPr rtlCol="0" anchor="ctr"/>
+          <a:lstStyle/>
+          <a:p>
+            <a:pPr algn="ctr"/>
+            <a:r>
+              <a:rPr lang="en-US" dirty="0"/>
+              <a:t>critic</a:t>
+            </a:r>
+          </a:p>
+        </p:txBody>
+      </p:sp>
+      <p:sp>
+        <p:nvSpPr>
+          <p:cNvPr id="4" name="Speech Bubble: Rectangle with Corners Rounded 3">
+            <a:extLst>
+              <a:ext uri="{FF2B5EF4-FFF2-40B4-BE49-F238E27FC236}">
+                <a16:creationId xmlns:a16="http://schemas.microsoft.com/office/drawing/2014/main" id="{F7A4F288-A0A2-EAB0-0BC3-B1E0033FD846}"/>
+              </a:ext>
+            </a:extLst>
+          </p:cNvPr>
+          <p:cNvSpPr/>
+          <p:nvPr/>
+        </p:nvSpPr>
+        <p:spPr>
+          <a:xfrm>
+            <a:off x="8250540" y="1946286"/>
+            <a:ext cx="865538" cy="259172"/>
+          </a:xfrm>
+          <a:prstGeom prst="wedgeRoundRectCallout">
+            <a:avLst>
+              <a:gd name="adj1" fmla="val -121411"/>
+              <a:gd name="adj2" fmla="val 67368"/>
+              <a:gd name="adj3" fmla="val 16667"/>
+            </a:avLst>
+          </a:prstGeom>
+        </p:spPr>
+        <p:style>
+          <a:lnRef idx="2">
+            <a:schemeClr val="accent2">
+              <a:shade val="15000"/>
+            </a:schemeClr>
+          </a:lnRef>
+          <a:fillRef idx="1">
+            <a:schemeClr val="accent2"/>
+          </a:fillRef>
+          <a:effectRef idx="0">
+            <a:schemeClr val="accent2"/>
+          </a:effectRef>
+          <a:fontRef idx="minor">
+            <a:schemeClr val="lt1"/>
+          </a:fontRef>
+        </p:style>
+        <p:txBody>
+          <a:bodyPr rtlCol="0" anchor="ctr"/>
+          <a:lstStyle/>
+          <a:p>
+            <a:pPr algn="ctr"/>
+            <a:r>
+              <a:rPr lang="en-US" dirty="0"/>
+              <a:t>actor</a:t>
+            </a:r>
+          </a:p>
+        </p:txBody>
+      </p:sp>
+      <mc:AlternateContent xmlns:mc="http://schemas.openxmlformats.org/markup-compatibility/2006">
+        <mc:Choice xmlns:a14="http://schemas.microsoft.com/office/drawing/2010/main" Requires="a14">
+          <p:sp>
+            <p:nvSpPr>
+              <p:cNvPr id="10" name="Speech Bubble: Rectangle with Corners Rounded 9">
+                <a:extLst>
+                  <a:ext uri="{FF2B5EF4-FFF2-40B4-BE49-F238E27FC236}">
+                    <a16:creationId xmlns:a16="http://schemas.microsoft.com/office/drawing/2014/main" id="{13A4B9D4-E0AA-951D-C0AB-75C0453EEC3C}"/>
+                  </a:ext>
+                </a:extLst>
+              </p:cNvPr>
+              <p:cNvSpPr/>
+              <p:nvPr/>
+            </p:nvSpPr>
+            <p:spPr>
+              <a:xfrm>
+                <a:off x="118664" y="3429000"/>
+                <a:ext cx="1758998" cy="670095"/>
+              </a:xfrm>
+              <a:prstGeom prst="wedgeRoundRectCallout">
+                <a:avLst>
+                  <a:gd name="adj1" fmla="val 73313"/>
+                  <a:gd name="adj2" fmla="val 22694"/>
+                  <a:gd name="adj3" fmla="val 16667"/>
+                </a:avLst>
+              </a:prstGeom>
+            </p:spPr>
+            <p:style>
+              <a:lnRef idx="2">
+                <a:schemeClr val="accent2">
+                  <a:shade val="15000"/>
+                </a:schemeClr>
+              </a:lnRef>
+              <a:fillRef idx="1">
+                <a:schemeClr val="accent2"/>
+              </a:fillRef>
+              <a:effectRef idx="0">
+                <a:schemeClr val="accent2"/>
+              </a:effectRef>
+              <a:fontRef idx="minor">
+                <a:schemeClr val="lt1"/>
+              </a:fontRef>
+            </p:style>
+            <p:txBody>
+              <a:bodyPr rtlCol="0" anchor="ctr"/>
+              <a:lstStyle/>
+              <a:p>
+                <a:pPr algn="ctr"/>
+                <a:r>
+                  <a:rPr lang="en-US" dirty="0"/>
+                  <a:t>Takes care of discounting </a:t>
+                </a:r>
+                <a14:m>
+                  <m:oMath xmlns:m="http://schemas.openxmlformats.org/officeDocument/2006/math">
+                    <m:sSup>
+                      <m:sSupPr>
+                        <m:ctrlPr>
+                          <a:rPr lang="en-US" b="0" i="1" smtClean="0">
+                            <a:latin typeface="Cambria Math" panose="02040503050406030204" pitchFamily="18" charset="0"/>
+                          </a:rPr>
+                        </m:ctrlPr>
+                      </m:sSupPr>
+                      <m:e>
+                        <m:r>
+                          <a:rPr lang="en-US" b="0" i="1" smtClean="0">
+                            <a:latin typeface="Cambria Math" panose="02040503050406030204" pitchFamily="18" charset="0"/>
+                          </a:rPr>
+                          <m:t>𝛾</m:t>
+                        </m:r>
+                      </m:e>
+                      <m:sup>
+                        <m:r>
+                          <a:rPr lang="en-US" b="0" i="1" smtClean="0">
+                            <a:latin typeface="Cambria Math" panose="02040503050406030204" pitchFamily="18" charset="0"/>
+                          </a:rPr>
+                          <m:t>𝑡</m:t>
+                        </m:r>
+                      </m:sup>
+                    </m:sSup>
+                  </m:oMath>
+                </a14:m>
+                <a:endParaRPr lang="en-US" dirty="0"/>
+              </a:p>
+            </p:txBody>
+          </p:sp>
+        </mc:Choice>
+        <mc:Fallback>
+          <p:sp>
+            <p:nvSpPr>
+              <p:cNvPr id="10" name="Speech Bubble: Rectangle with Corners Rounded 9">
+                <a:extLst>
+                  <a:ext uri="{FF2B5EF4-FFF2-40B4-BE49-F238E27FC236}">
+                    <a16:creationId xmlns:a16="http://schemas.microsoft.com/office/drawing/2014/main" id="{13A4B9D4-E0AA-951D-C0AB-75C0453EEC3C}"/>
+                  </a:ext>
+                </a:extLst>
+              </p:cNvPr>
+              <p:cNvSpPr>
+                <a:spLocks noRot="1" noChangeAspect="1" noMove="1" noResize="1" noEditPoints="1" noAdjustHandles="1" noChangeArrowheads="1" noChangeShapeType="1" noTextEdit="1"/>
+              </p:cNvSpPr>
+              <p:nvPr/>
+            </p:nvSpPr>
+            <p:spPr>
+              <a:xfrm>
+                <a:off x="118664" y="3429000"/>
+                <a:ext cx="1758998" cy="670095"/>
+              </a:xfrm>
+              <a:prstGeom prst="wedgeRoundRectCallout">
+                <a:avLst>
+                  <a:gd name="adj1" fmla="val 73313"/>
+                  <a:gd name="adj2" fmla="val 22694"/>
+                  <a:gd name="adj3" fmla="val 16667"/>
+                </a:avLst>
+              </a:prstGeom>
+              <a:blipFill>
+                <a:blip r:embed="rId3"/>
+                <a:stretch>
+                  <a:fillRect t="-1786" b="-11607"/>
+                </a:stretch>
+              </a:blipFill>
+            </p:spPr>
+            <p:txBody>
+              <a:bodyPr/>
+              <a:lstStyle/>
+              <a:p>
+                <a:r>
+                  <a:rPr lang="en-US">
+                    <a:noFill/>
+                  </a:rPr>
+                  <a:t> </a:t>
+                </a:r>
+              </a:p>
+            </p:txBody>
+          </p:sp>
+        </mc:Fallback>
+      </mc:AlternateContent>
+      <p:sp>
+        <p:nvSpPr>
+          <p:cNvPr id="11" name="Rectangle 10">
+            <a:extLst>
+              <a:ext uri="{FF2B5EF4-FFF2-40B4-BE49-F238E27FC236}">
+                <a16:creationId xmlns:a16="http://schemas.microsoft.com/office/drawing/2014/main" id="{05DCB902-4519-6052-12CC-ADD3BFE4DF5D}"/>
+              </a:ext>
+            </a:extLst>
+          </p:cNvPr>
+          <p:cNvSpPr/>
+          <p:nvPr/>
+        </p:nvSpPr>
+        <p:spPr>
+          <a:xfrm>
+            <a:off x="2442225" y="4809326"/>
+            <a:ext cx="3093036" cy="272226"/>
+          </a:xfrm>
+          <a:prstGeom prst="rect">
+            <a:avLst/>
+          </a:prstGeom>
+          <a:noFill/>
+          <a:ln w="28575" cap="flat" cmpd="sng" algn="ctr">
+            <a:solidFill>
+              <a:schemeClr val="accent2"/>
+            </a:solidFill>
+            <a:prstDash val="solid"/>
+            <a:round/>
+            <a:headEnd type="none" w="med" len="med"/>
+            <a:tailEnd type="none" w="med" len="med"/>
+          </a:ln>
+        </p:spPr>
+        <p:style>
+          <a:lnRef idx="0">
+            <a:scrgbClr r="0" g="0" b="0"/>
+          </a:lnRef>
+          <a:fillRef idx="0">
+            <a:scrgbClr r="0" g="0" b="0"/>
+          </a:fillRef>
+          <a:effectRef idx="0">
+            <a:scrgbClr r="0" g="0" b="0"/>
+          </a:effectRef>
+          <a:fontRef idx="minor">
+            <a:schemeClr val="accent2"/>
+          </a:fontRef>
+        </p:style>
+        <p:txBody>
+          <a:bodyPr rtlCol="0" anchor="ctr"/>
+          <a:lstStyle/>
+          <a:p>
+            <a:pPr algn="ctr"/>
+            <a:endParaRPr lang="en-US"/>
+          </a:p>
+        </p:txBody>
+      </p:sp>
+      <mc:AlternateContent xmlns:mc="http://schemas.openxmlformats.org/markup-compatibility/2006">
+        <mc:Choice xmlns:a14="http://schemas.microsoft.com/office/drawing/2010/main" Requires="a14">
+          <p:sp>
+            <p:nvSpPr>
+              <p:cNvPr id="12" name="Speech Bubble: Rectangle with Corners Rounded 11">
+                <a:extLst>
+                  <a:ext uri="{FF2B5EF4-FFF2-40B4-BE49-F238E27FC236}">
+                    <a16:creationId xmlns:a16="http://schemas.microsoft.com/office/drawing/2014/main" id="{A8ECFCE4-C642-EBAF-5270-39245F140766}"/>
+                  </a:ext>
+                </a:extLst>
+              </p:cNvPr>
+              <p:cNvSpPr/>
+              <p:nvPr/>
+            </p:nvSpPr>
+            <p:spPr>
+              <a:xfrm>
+                <a:off x="6096000" y="4385243"/>
+                <a:ext cx="3910632" cy="336241"/>
+              </a:xfrm>
+              <a:prstGeom prst="wedgeRoundRectCallout">
+                <a:avLst>
+                  <a:gd name="adj1" fmla="val -67147"/>
+                  <a:gd name="adj2" fmla="val 91629"/>
+                  <a:gd name="adj3" fmla="val 16667"/>
+                </a:avLst>
+              </a:prstGeom>
+            </p:spPr>
+            <p:style>
+              <a:lnRef idx="2">
+                <a:schemeClr val="accent2">
+                  <a:shade val="15000"/>
+                </a:schemeClr>
+              </a:lnRef>
+              <a:fillRef idx="1">
+                <a:schemeClr val="accent2"/>
+              </a:fillRef>
+              <a:effectRef idx="0">
+                <a:schemeClr val="accent2"/>
+              </a:effectRef>
+              <a:fontRef idx="minor">
+                <a:schemeClr val="lt1"/>
+              </a:fontRef>
+            </p:style>
+            <p:txBody>
+              <a:bodyPr rtlCol="0" anchor="ctr"/>
+              <a:lstStyle/>
+              <a:p>
+                <a:pPr algn="ctr"/>
+                <a:r>
+                  <a:rPr lang="en-US" dirty="0"/>
+                  <a:t>TD error: how much is </a:t>
+                </a:r>
+                <a14:m>
+                  <m:oMath xmlns:m="http://schemas.openxmlformats.org/officeDocument/2006/math">
+                    <m:r>
+                      <a:rPr lang="en-US" b="0" i="1" smtClean="0">
+                        <a:latin typeface="Cambria Math" panose="02040503050406030204" pitchFamily="18" charset="0"/>
+                      </a:rPr>
+                      <m:t>𝐺</m:t>
+                    </m:r>
+                  </m:oMath>
+                </a14:m>
+                <a:r>
+                  <a:rPr lang="en-US" dirty="0"/>
+                  <a:t> better than </a:t>
+                </a:r>
+                <a14:m>
+                  <m:oMath xmlns:m="http://schemas.openxmlformats.org/officeDocument/2006/math">
+                    <m:acc>
+                      <m:accPr>
+                        <m:chr m:val="̂"/>
+                        <m:ctrlPr>
+                          <a:rPr lang="en-US" b="0" i="1" smtClean="0">
+                            <a:latin typeface="Cambria Math" panose="02040503050406030204" pitchFamily="18" charset="0"/>
+                          </a:rPr>
+                        </m:ctrlPr>
+                      </m:accPr>
+                      <m:e>
+                        <m:r>
+                          <a:rPr lang="en-US" b="0" i="1" smtClean="0">
+                            <a:latin typeface="Cambria Math" panose="02040503050406030204" pitchFamily="18" charset="0"/>
+                          </a:rPr>
+                          <m:t>𝑣</m:t>
+                        </m:r>
+                      </m:e>
+                    </m:acc>
+                  </m:oMath>
+                </a14:m>
+                <a:r>
+                  <a:rPr lang="en-US" dirty="0"/>
+                  <a:t> </a:t>
+                </a:r>
+              </a:p>
+            </p:txBody>
+          </p:sp>
+        </mc:Choice>
+        <mc:Fallback>
+          <p:sp>
+            <p:nvSpPr>
+              <p:cNvPr id="12" name="Speech Bubble: Rectangle with Corners Rounded 11">
+                <a:extLst>
+                  <a:ext uri="{FF2B5EF4-FFF2-40B4-BE49-F238E27FC236}">
+                    <a16:creationId xmlns:a16="http://schemas.microsoft.com/office/drawing/2014/main" id="{A8ECFCE4-C642-EBAF-5270-39245F140766}"/>
+                  </a:ext>
+                </a:extLst>
+              </p:cNvPr>
+              <p:cNvSpPr>
+                <a:spLocks noRot="1" noChangeAspect="1" noMove="1" noResize="1" noEditPoints="1" noAdjustHandles="1" noChangeArrowheads="1" noChangeShapeType="1" noTextEdit="1"/>
+              </p:cNvSpPr>
+              <p:nvPr/>
+            </p:nvSpPr>
+            <p:spPr>
+              <a:xfrm>
+                <a:off x="6096000" y="4385243"/>
+                <a:ext cx="3910632" cy="336241"/>
+              </a:xfrm>
+              <a:prstGeom prst="wedgeRoundRectCallout">
+                <a:avLst>
+                  <a:gd name="adj1" fmla="val -67147"/>
+                  <a:gd name="adj2" fmla="val 91629"/>
+                  <a:gd name="adj3" fmla="val 16667"/>
+                </a:avLst>
+              </a:prstGeom>
+              <a:blipFill>
+                <a:blip r:embed="rId4"/>
+                <a:stretch>
+                  <a:fillRect t="-7143" r="-4961"/>
+                </a:stretch>
+              </a:blipFill>
+            </p:spPr>
+            <p:txBody>
+              <a:bodyPr/>
+              <a:lstStyle/>
+              <a:p>
+                <a:r>
+                  <a:rPr lang="en-US">
+                    <a:noFill/>
+                  </a:rPr>
+                  <a:t> </a:t>
+                </a:r>
+              </a:p>
+            </p:txBody>
+          </p:sp>
+        </mc:Fallback>
+      </mc:AlternateContent>
+      <p:sp>
+        <p:nvSpPr>
+          <p:cNvPr id="13" name="Rectangle 12">
+            <a:extLst>
+              <a:ext uri="{FF2B5EF4-FFF2-40B4-BE49-F238E27FC236}">
+                <a16:creationId xmlns:a16="http://schemas.microsoft.com/office/drawing/2014/main" id="{44E06FFA-E200-E681-2E5D-039A57F537AC}"/>
+              </a:ext>
+            </a:extLst>
+          </p:cNvPr>
+          <p:cNvSpPr/>
+          <p:nvPr/>
+        </p:nvSpPr>
+        <p:spPr>
+          <a:xfrm>
+            <a:off x="2442225" y="5377090"/>
+            <a:ext cx="3093036" cy="272226"/>
+          </a:xfrm>
+          <a:prstGeom prst="rect">
+            <a:avLst/>
+          </a:prstGeom>
+          <a:noFill/>
+          <a:ln w="28575" cap="flat" cmpd="sng" algn="ctr">
+            <a:solidFill>
+              <a:schemeClr val="accent2"/>
+            </a:solidFill>
+            <a:prstDash val="solid"/>
+            <a:round/>
+            <a:headEnd type="none" w="med" len="med"/>
+            <a:tailEnd type="none" w="med" len="med"/>
+          </a:ln>
+        </p:spPr>
+        <p:style>
+          <a:lnRef idx="0">
+            <a:scrgbClr r="0" g="0" b="0"/>
+          </a:lnRef>
+          <a:fillRef idx="0">
+            <a:scrgbClr r="0" g="0" b="0"/>
+          </a:fillRef>
+          <a:effectRef idx="0">
+            <a:scrgbClr r="0" g="0" b="0"/>
+          </a:effectRef>
+          <a:fontRef idx="minor">
+            <a:schemeClr val="accent2"/>
+          </a:fontRef>
+        </p:style>
+        <p:txBody>
+          <a:bodyPr rtlCol="0" anchor="ctr"/>
+          <a:lstStyle/>
+          <a:p>
+            <a:pPr algn="ctr"/>
+            <a:endParaRPr lang="en-US"/>
+          </a:p>
+        </p:txBody>
+      </p:sp>
+      <p:sp>
+        <p:nvSpPr>
+          <p:cNvPr id="14" name="Speech Bubble: Rectangle with Corners Rounded 13">
+            <a:extLst>
+              <a:ext uri="{FF2B5EF4-FFF2-40B4-BE49-F238E27FC236}">
+                <a16:creationId xmlns:a16="http://schemas.microsoft.com/office/drawing/2014/main" id="{E94F9DD5-BDBE-9FDD-3254-2C368EE7BF6A}"/>
+              </a:ext>
+            </a:extLst>
+          </p:cNvPr>
+          <p:cNvSpPr/>
+          <p:nvPr/>
+        </p:nvSpPr>
+        <p:spPr>
+          <a:xfrm>
+            <a:off x="6494448" y="5644274"/>
+            <a:ext cx="4296868" cy="336241"/>
+          </a:xfrm>
+          <a:prstGeom prst="wedgeRoundRectCallout">
+            <a:avLst>
+              <a:gd name="adj1" fmla="val -80690"/>
+              <a:gd name="adj2" fmla="val -60063"/>
+              <a:gd name="adj3" fmla="val 16667"/>
+            </a:avLst>
+          </a:prstGeom>
+        </p:spPr>
+        <p:style>
+          <a:lnRef idx="2">
+            <a:schemeClr val="accent2">
+              <a:shade val="15000"/>
+            </a:schemeClr>
+          </a:lnRef>
+          <a:fillRef idx="1">
+            <a:schemeClr val="accent2"/>
+          </a:fillRef>
+          <a:effectRef idx="0">
+            <a:schemeClr val="accent2"/>
+          </a:effectRef>
+          <a:fontRef idx="minor">
+            <a:schemeClr val="lt1"/>
+          </a:fontRef>
+        </p:style>
+        <p:txBody>
+          <a:bodyPr rtlCol="0" anchor="ctr"/>
+          <a:lstStyle/>
+          <a:p>
+            <a:pPr algn="ctr"/>
+            <a:r>
+              <a:rPr lang="en-US" dirty="0"/>
+              <a:t>Update the actor (policy) </a:t>
+            </a:r>
+            <a:r>
+              <a:rPr lang="en-US"/>
+              <a:t>= REINFORCE</a:t>
+            </a:r>
+            <a:endParaRPr lang="en-US" dirty="0"/>
+          </a:p>
+        </p:txBody>
+      </p:sp>
+      <p:sp>
+        <p:nvSpPr>
+          <p:cNvPr id="3" name="Rectangle 2">
+            <a:extLst>
+              <a:ext uri="{FF2B5EF4-FFF2-40B4-BE49-F238E27FC236}">
+                <a16:creationId xmlns:a16="http://schemas.microsoft.com/office/drawing/2014/main" id="{7975E55E-B47E-0E56-E14A-333A3D6DE67C}"/>
+              </a:ext>
+            </a:extLst>
+          </p:cNvPr>
+          <p:cNvSpPr/>
+          <p:nvPr/>
+        </p:nvSpPr>
+        <p:spPr>
+          <a:xfrm>
+            <a:off x="2442225" y="5125835"/>
+            <a:ext cx="3093036" cy="206971"/>
+          </a:xfrm>
+          <a:prstGeom prst="rect">
+            <a:avLst/>
+          </a:prstGeom>
+          <a:noFill/>
+          <a:ln w="28575" cap="flat" cmpd="sng" algn="ctr">
+            <a:solidFill>
+              <a:schemeClr val="accent2"/>
+            </a:solidFill>
+            <a:prstDash val="solid"/>
+            <a:round/>
+            <a:headEnd type="none" w="med" len="med"/>
+            <a:tailEnd type="none" w="med" len="med"/>
+          </a:ln>
+        </p:spPr>
+        <p:style>
+          <a:lnRef idx="0">
+            <a:scrgbClr r="0" g="0" b="0"/>
+          </a:lnRef>
+          <a:fillRef idx="0">
+            <a:scrgbClr r="0" g="0" b="0"/>
+          </a:fillRef>
+          <a:effectRef idx="0">
+            <a:scrgbClr r="0" g="0" b="0"/>
+          </a:effectRef>
+          <a:fontRef idx="minor">
+            <a:schemeClr val="accent2"/>
+          </a:fontRef>
+        </p:style>
+        <p:txBody>
+          <a:bodyPr rtlCol="0" anchor="ctr"/>
+          <a:lstStyle/>
+          <a:p>
+            <a:pPr algn="ctr"/>
+            <a:endParaRPr lang="en-US"/>
+          </a:p>
+        </p:txBody>
+      </p:sp>
+      <mc:AlternateContent xmlns:mc="http://schemas.openxmlformats.org/markup-compatibility/2006">
+        <mc:Choice xmlns:a14="http://schemas.microsoft.com/office/drawing/2010/main" Requires="a14">
+          <p:sp>
+            <p:nvSpPr>
+              <p:cNvPr id="6" name="Speech Bubble: Rectangle with Corners Rounded 5">
+                <a:extLst>
+                  <a:ext uri="{FF2B5EF4-FFF2-40B4-BE49-F238E27FC236}">
+                    <a16:creationId xmlns:a16="http://schemas.microsoft.com/office/drawing/2014/main" id="{4E143229-2BAE-E79E-F2D9-252EB18CD2C7}"/>
+                  </a:ext>
+                </a:extLst>
+              </p:cNvPr>
+              <p:cNvSpPr/>
+              <p:nvPr/>
+            </p:nvSpPr>
+            <p:spPr>
+              <a:xfrm>
+                <a:off x="6494448" y="5229320"/>
+                <a:ext cx="4296868" cy="336241"/>
+              </a:xfrm>
+              <a:prstGeom prst="wedgeRoundRectCallout">
+                <a:avLst>
+                  <a:gd name="adj1" fmla="val -82308"/>
+                  <a:gd name="adj2" fmla="val -47607"/>
+                  <a:gd name="adj3" fmla="val 16667"/>
+                </a:avLst>
+              </a:prstGeom>
+            </p:spPr>
+            <p:style>
+              <a:lnRef idx="2">
+                <a:schemeClr val="accent2">
+                  <a:shade val="15000"/>
+                </a:schemeClr>
+              </a:lnRef>
+              <a:fillRef idx="1">
+                <a:schemeClr val="accent2"/>
+              </a:fillRef>
+              <a:effectRef idx="0">
+                <a:schemeClr val="accent2"/>
+              </a:effectRef>
+              <a:fontRef idx="minor">
+                <a:schemeClr val="lt1"/>
+              </a:fontRef>
+            </p:style>
+            <p:txBody>
+              <a:bodyPr rtlCol="0" anchor="ctr"/>
+              <a:lstStyle/>
+              <a:p>
+                <a:pPr algn="ctr"/>
+                <a:r>
+                  <a:rPr lang="en-US" dirty="0"/>
+                  <a:t>Update the critic (value function) = </a:t>
+                </a:r>
+                <a14:m>
+                  <m:oMath xmlns:m="http://schemas.openxmlformats.org/officeDocument/2006/math">
+                    <m:r>
+                      <a:rPr lang="en-US" i="1" dirty="0" smtClean="0">
+                        <a:latin typeface="Cambria Math" panose="02040503050406030204" pitchFamily="18" charset="0"/>
+                      </a:rPr>
+                      <m:t>𝑇𝐷</m:t>
+                    </m:r>
+                    <m:r>
+                      <a:rPr lang="en-US" i="1" dirty="0" smtClean="0">
+                        <a:latin typeface="Cambria Math" panose="02040503050406030204" pitchFamily="18" charset="0"/>
+                      </a:rPr>
+                      <m:t>(0)</m:t>
+                    </m:r>
+                  </m:oMath>
+                </a14:m>
+                <a:endParaRPr lang="en-US" dirty="0"/>
+              </a:p>
+            </p:txBody>
+          </p:sp>
+        </mc:Choice>
+        <mc:Fallback>
+          <p:sp>
+            <p:nvSpPr>
+              <p:cNvPr id="6" name="Speech Bubble: Rectangle with Corners Rounded 5">
+                <a:extLst>
+                  <a:ext uri="{FF2B5EF4-FFF2-40B4-BE49-F238E27FC236}">
+                    <a16:creationId xmlns:a16="http://schemas.microsoft.com/office/drawing/2014/main" id="{4E143229-2BAE-E79E-F2D9-252EB18CD2C7}"/>
+                  </a:ext>
+                </a:extLst>
+              </p:cNvPr>
+              <p:cNvSpPr>
+                <a:spLocks noRot="1" noChangeAspect="1" noMove="1" noResize="1" noEditPoints="1" noAdjustHandles="1" noChangeArrowheads="1" noChangeShapeType="1" noTextEdit="1"/>
+              </p:cNvSpPr>
+              <p:nvPr/>
+            </p:nvSpPr>
+            <p:spPr>
+              <a:xfrm>
+                <a:off x="6494448" y="5229320"/>
+                <a:ext cx="4296868" cy="336241"/>
+              </a:xfrm>
+              <a:prstGeom prst="wedgeRoundRectCallout">
+                <a:avLst>
+                  <a:gd name="adj1" fmla="val -82308"/>
+                  <a:gd name="adj2" fmla="val -47607"/>
+                  <a:gd name="adj3" fmla="val 16667"/>
+                </a:avLst>
+              </a:prstGeom>
+              <a:blipFill>
+                <a:blip r:embed="rId5"/>
+                <a:stretch>
+                  <a:fillRect t="-10345" b="-29310"/>
+                </a:stretch>
+              </a:blipFill>
+            </p:spPr>
+            <p:txBody>
+              <a:bodyPr/>
+              <a:lstStyle/>
+              <a:p>
+                <a:r>
+                  <a:rPr lang="en-US">
+                    <a:noFill/>
+                  </a:rPr>
+                  <a:t> </a:t>
+                </a:r>
+              </a:p>
+            </p:txBody>
+          </p:sp>
+        </mc:Fallback>
+      </mc:AlternateContent>
+    </p:spTree>
+    <p:extLst>
+      <p:ext uri="{BB962C8B-B14F-4D97-AF65-F5344CB8AC3E}">
+        <p14:creationId xmlns:p14="http://schemas.microsoft.com/office/powerpoint/2010/main" val="2787183778"/>
+      </p:ext>
+    </p:extLst>
+  </p:cSld>
+  <p:clrMapOvr>
+    <a:masterClrMapping/>
+  </p:clrMapOvr>
+</p:sld>
+</file>
+
+<file path=ppt/slides/slide13.xml><?xml version="1.0" encoding="utf-8"?>
 <p:sld xmlns:a="http://schemas.openxmlformats.org/drawingml/2006/main" xmlns:r="http://schemas.openxmlformats.org/officeDocument/2006/relationships" xmlns:p="http://schemas.openxmlformats.org/presentationml/2006/main">
   <p:cSld>
     <p:spTree>
@@ -4168,7 +5697,7 @@
 </p:sld>
 </file>
 
-<file path=ppt/slides/slide11.xml><?xml version="1.0" encoding="utf-8"?>
+<file path=ppt/slides/slide14.xml><?xml version="1.0" encoding="utf-8"?>
 <p:sld xmlns:a="http://schemas.openxmlformats.org/drawingml/2006/main" xmlns:r="http://schemas.openxmlformats.org/officeDocument/2006/relationships" xmlns:p="http://schemas.openxmlformats.org/presentationml/2006/main">
   <p:cSld>
     <p:spTree>
@@ -4215,8 +5744,8 @@
           </a:p>
         </p:txBody>
       </p:sp>
-      <mc:AlternateContent xmlns:mc="http://schemas.openxmlformats.org/markup-compatibility/2006">
-        <mc:Choice xmlns:a14="http://schemas.microsoft.com/office/drawing/2010/main" Requires="a14">
+      <mc:AlternateContent xmlns:mc="http://schemas.openxmlformats.org/markup-compatibility/2006" xmlns:a14="http://schemas.microsoft.com/office/drawing/2010/main">
+        <mc:Choice Requires="a14">
           <p:sp>
             <p:nvSpPr>
               <p:cNvPr id="3" name="Content Placeholder 2">
@@ -4852,7 +6381,7 @@
                       <m:sSubSup>
                         <m:sSubSupPr>
                           <m:ctrlPr>
-                            <a:rPr lang="en-US" b="0" i="0" smtClean="0">
+                            <a:rPr lang="en-US" b="0" i="1" smtClean="0">
                               <a:latin typeface="Cambria Math" panose="02040503050406030204" pitchFamily="18" charset="0"/>
                             </a:rPr>
                           </m:ctrlPr>
@@ -4885,7 +6414,7 @@
                       <m:sSub>
                         <m:sSubPr>
                           <m:ctrlPr>
-                            <a:rPr lang="en-US" b="0" i="0" smtClean="0">
+                            <a:rPr lang="en-US" b="0" i="1" smtClean="0">
                               <a:latin typeface="Cambria Math" panose="02040503050406030204" pitchFamily="18" charset="0"/>
                             </a:rPr>
                           </m:ctrlPr>
@@ -4910,7 +6439,7 @@
                       <m:d>
                         <m:dPr>
                           <m:ctrlPr>
-                            <a:rPr lang="en-US" b="0" i="0" smtClean="0">
+                            <a:rPr lang="en-US" b="0" i="1" smtClean="0">
                               <a:latin typeface="Cambria Math" panose="02040503050406030204" pitchFamily="18" charset="0"/>
                             </a:rPr>
                           </m:ctrlPr>
@@ -5029,7 +6558,7 @@
             </p:txBody>
           </p:sp>
         </mc:Choice>
-        <mc:Fallback>
+        <mc:Fallback xmlns="">
           <p:sp>
             <p:nvSpPr>
               <p:cNvPr id="3" name="Content Placeholder 2">
@@ -5123,8 +6652,8 @@
             </a:prstGeom>
           </p:spPr>
         </p:pic>
-        <mc:AlternateContent xmlns:mc="http://schemas.openxmlformats.org/markup-compatibility/2006">
-          <mc:Choice xmlns:a14="http://schemas.microsoft.com/office/drawing/2010/main" Requires="a14">
+        <mc:AlternateContent xmlns:mc="http://schemas.openxmlformats.org/markup-compatibility/2006" xmlns:a14="http://schemas.microsoft.com/office/drawing/2010/main">
+          <mc:Choice Requires="a14">
             <p:sp>
               <p:nvSpPr>
                 <p:cNvPr id="7" name="TextBox 6">
@@ -5174,7 +6703,7 @@
               </p:txBody>
             </p:sp>
           </mc:Choice>
-          <mc:Fallback>
+          <mc:Fallback xmlns="">
             <p:sp>
               <p:nvSpPr>
                 <p:cNvPr id="7" name="TextBox 6">
@@ -5311,8 +6840,8 @@
           </a:p>
         </p:txBody>
       </p:sp>
-      <mc:AlternateContent xmlns:mc="http://schemas.openxmlformats.org/markup-compatibility/2006">
-        <mc:Choice xmlns:a14="http://schemas.microsoft.com/office/drawing/2010/main" Requires="a14">
+      <mc:AlternateContent xmlns:mc="http://schemas.openxmlformats.org/markup-compatibility/2006" xmlns:a14="http://schemas.microsoft.com/office/drawing/2010/main">
+        <mc:Choice Requires="a14">
           <p:sp>
             <p:nvSpPr>
               <p:cNvPr id="9" name="Speech Bubble: Rectangle with Corners Rounded 8">
@@ -5378,7 +6907,7 @@
             </p:txBody>
           </p:sp>
         </mc:Choice>
-        <mc:Fallback>
+        <mc:Fallback xmlns="">
           <p:sp>
             <p:nvSpPr>
               <p:cNvPr id="9" name="Speech Bubble: Rectangle with Corners Rounded 8">
@@ -5440,7 +6969,7 @@
 </p:sld>
 </file>
 
-<file path=ppt/slides/slide12.xml><?xml version="1.0" encoding="utf-8"?>
+<file path=ppt/slides/slide15.xml><?xml version="1.0" encoding="utf-8"?>
 <p:sld xmlns:a="http://schemas.openxmlformats.org/drawingml/2006/main" xmlns:r="http://schemas.openxmlformats.org/officeDocument/2006/relationships" xmlns:p="http://schemas.openxmlformats.org/presentationml/2006/main">
   <p:cSld>
     <p:spTree>
@@ -8613,7 +10142,10 @@
           <a:bodyPr/>
           <a:lstStyle/>
           <a:p>
-            <a:endParaRPr lang="en-US" dirty="0"/>
+            <a:r>
+              <a:rPr lang="en-US" dirty="0"/>
+              <a:t>Learn policies directly</a:t>
+            </a:r>
           </a:p>
         </p:txBody>
       </p:sp>
@@ -8675,8 +10207,8 @@
           </a:p>
         </p:txBody>
       </p:sp>
-      <mc:AlternateContent xmlns:mc="http://schemas.openxmlformats.org/markup-compatibility/2006">
-        <mc:Choice xmlns:a14="http://schemas.microsoft.com/office/drawing/2010/main" Requires="a14">
+      <mc:AlternateContent xmlns:mc="http://schemas.openxmlformats.org/markup-compatibility/2006" xmlns:a14="http://schemas.microsoft.com/office/drawing/2010/main">
+        <mc:Choice Requires="a14">
           <p:sp>
             <p:nvSpPr>
               <p:cNvPr id="5" name="Content Placeholder 4">
@@ -9375,7 +10907,7 @@
             </p:txBody>
           </p:sp>
         </mc:Choice>
-        <mc:Fallback>
+        <mc:Fallback xmlns="">
           <p:sp>
             <p:nvSpPr>
               <p:cNvPr id="5" name="Content Placeholder 4">
@@ -9477,8 +11009,8 @@
           </a:p>
         </p:txBody>
       </p:sp>
-      <mc:AlternateContent xmlns:mc="http://schemas.openxmlformats.org/markup-compatibility/2006">
-        <mc:Choice xmlns:a14="http://schemas.microsoft.com/office/drawing/2010/main" Requires="a14">
+      <mc:AlternateContent xmlns:mc="http://schemas.openxmlformats.org/markup-compatibility/2006" xmlns:a14="http://schemas.microsoft.com/office/drawing/2010/main">
+        <mc:Choice Requires="a14">
           <p:sp>
             <p:nvSpPr>
               <p:cNvPr id="3" name="Content Placeholder 2">
@@ -10213,7 +11745,7 @@
             </p:txBody>
           </p:sp>
         </mc:Choice>
-        <mc:Fallback>
+        <mc:Fallback xmlns="">
           <p:sp>
             <p:nvSpPr>
               <p:cNvPr id="3" name="Content Placeholder 2">
@@ -10283,8 +11815,8 @@
           <a:chExt cx="0" cy="0"/>
         </a:xfrm>
       </p:grpSpPr>
-      <mc:AlternateContent xmlns:mc="http://schemas.openxmlformats.org/markup-compatibility/2006">
-        <mc:Choice xmlns:a14="http://schemas.microsoft.com/office/drawing/2010/main" Requires="a14">
+      <mc:AlternateContent xmlns:mc="http://schemas.openxmlformats.org/markup-compatibility/2006" xmlns:a14="http://schemas.microsoft.com/office/drawing/2010/main">
+        <mc:Choice Requires="a14">
           <p:sp>
             <p:nvSpPr>
               <p:cNvPr id="2" name="Title 1">
@@ -10328,7 +11860,7 @@
             </p:txBody>
           </p:sp>
         </mc:Choice>
-        <mc:Fallback>
+        <mc:Fallback xmlns="">
           <p:sp>
             <p:nvSpPr>
               <p:cNvPr id="2" name="Title 1">
@@ -10368,8 +11900,8 @@
           </p:sp>
         </mc:Fallback>
       </mc:AlternateContent>
-      <mc:AlternateContent xmlns:mc="http://schemas.openxmlformats.org/markup-compatibility/2006">
-        <mc:Choice xmlns:a14="http://schemas.microsoft.com/office/drawing/2010/main" Requires="a14">
+      <mc:AlternateContent xmlns:mc="http://schemas.openxmlformats.org/markup-compatibility/2006" xmlns:a14="http://schemas.microsoft.com/office/drawing/2010/main">
+        <mc:Choice Requires="a14">
           <p:sp>
             <p:nvSpPr>
               <p:cNvPr id="3" name="Content Placeholder 2">
@@ -10469,7 +12001,7 @@
             </p:txBody>
           </p:sp>
         </mc:Choice>
-        <mc:Fallback>
+        <mc:Fallback xmlns="">
           <p:sp>
             <p:nvSpPr>
               <p:cNvPr id="3" name="Content Placeholder 2">
@@ -10585,14 +12117,21 @@
                 <p:ph idx="1"/>
               </p:nvPr>
             </p:nvSpPr>
-            <p:spPr/>
+            <p:spPr>
+              <a:xfrm>
+                <a:off x="838200" y="1397330"/>
+                <a:ext cx="10515600" cy="4207733"/>
+              </a:xfrm>
+            </p:spPr>
             <p:txBody>
-              <a:bodyPr/>
+              <a:bodyPr>
+                <a:normAutofit fontScale="77500" lnSpcReduction="20000"/>
+              </a:bodyPr>
               <a:lstStyle/>
               <a:p>
                 <a:r>
                   <a:rPr lang="en-US" dirty="0"/>
-                  <a:t>We define the performance measure as the value of following </a:t>
+                  <a:t>We define the performance measure as the true value of following </a:t>
                 </a:r>
                 <a14:m>
                   <m:oMath xmlns:m="http://schemas.openxmlformats.org/officeDocument/2006/math">
@@ -10794,7 +12333,7 @@
                 </a:r>
                 <a:r>
                   <a:rPr lang="en-US" dirty="0"/>
-                  <a:t>gives us</a:t>
+                  <a:t>gives us an analytical expression for the gradient of the  with respect to the policy parameters:  </a:t>
                 </a:r>
               </a:p>
               <a:p>
@@ -11056,6 +12595,9 @@
                 <a:endParaRPr lang="en-US" dirty="0"/>
               </a:p>
               <a:p>
+                <a:endParaRPr lang="en-US" dirty="0"/>
+              </a:p>
+              <a:p>
                 <a:r>
                   <a:rPr lang="en-US" dirty="0"/>
                   <a:t>The theorem also provides a </a:t>
@@ -11090,10 +12632,14 @@
               </p:nvPr>
             </p:nvSpPr>
             <p:spPr>
+              <a:xfrm>
+                <a:off x="838200" y="1397330"/>
+                <a:ext cx="10515600" cy="4207733"/>
+              </a:xfrm>
               <a:blipFill>
                 <a:blip r:embed="rId2"/>
                 <a:stretch>
-                  <a:fillRect l="-1043" t="-2168" b="-3444"/>
+                  <a:fillRect l="-696" t="-2899"/>
                 </a:stretch>
               </a:blipFill>
             </p:spPr>
@@ -11128,13 +12674,13 @@
             </p:nvSpPr>
             <p:spPr>
               <a:xfrm>
-                <a:off x="4572000" y="4914027"/>
+                <a:off x="3266712" y="4174126"/>
                 <a:ext cx="2380231" cy="677074"/>
               </a:xfrm>
               <a:prstGeom prst="wedgeRoundRectCallout">
                 <a:avLst>
-                  <a:gd name="adj1" fmla="val -14870"/>
-                  <a:gd name="adj2" fmla="val -135014"/>
+                  <a:gd name="adj1" fmla="val 47007"/>
+                  <a:gd name="adj2" fmla="val -135015"/>
                   <a:gd name="adj3" fmla="val 16667"/>
                 </a:avLst>
               </a:prstGeom>
@@ -11196,20 +12742,20 @@
             </p:nvSpPr>
             <p:spPr>
               <a:xfrm>
-                <a:off x="4572000" y="4914027"/>
+                <a:off x="3266712" y="4174126"/>
                 <a:ext cx="2380231" cy="677074"/>
               </a:xfrm>
               <a:prstGeom prst="wedgeRoundRectCallout">
                 <a:avLst>
-                  <a:gd name="adj1" fmla="val -14870"/>
-                  <a:gd name="adj2" fmla="val -135014"/>
+                  <a:gd name="adj1" fmla="val 47007"/>
+                  <a:gd name="adj2" fmla="val -135015"/>
                   <a:gd name="adj3" fmla="val 16667"/>
                 </a:avLst>
               </a:prstGeom>
               <a:blipFill>
                 <a:blip r:embed="rId3"/>
                 <a:stretch>
-                  <a:fillRect b="-5687"/>
+                  <a:fillRect b="-5660"/>
                 </a:stretch>
               </a:blipFill>
             </p:spPr>
@@ -11228,6 +12774,764 @@
           </p:sp>
         </mc:Fallback>
       </mc:AlternateContent>
+      <p:sp>
+        <p:nvSpPr>
+          <p:cNvPr id="5" name="Speech Bubble: Rectangle with Corners Rounded 4">
+            <a:extLst>
+              <a:ext uri="{FF2B5EF4-FFF2-40B4-BE49-F238E27FC236}">
+                <a16:creationId xmlns:a16="http://schemas.microsoft.com/office/drawing/2014/main" id="{697DAF61-031E-194F-48E3-7DEA0929C087}"/>
+              </a:ext>
+            </a:extLst>
+          </p:cNvPr>
+          <p:cNvSpPr/>
+          <p:nvPr/>
+        </p:nvSpPr>
+        <p:spPr>
+          <a:xfrm>
+            <a:off x="8284859" y="4174126"/>
+            <a:ext cx="2275529" cy="677074"/>
+          </a:xfrm>
+          <a:prstGeom prst="wedgeRoundRectCallout">
+            <a:avLst>
+              <a:gd name="adj1" fmla="val -59926"/>
+              <a:gd name="adj2" fmla="val -130324"/>
+              <a:gd name="adj3" fmla="val 16667"/>
+            </a:avLst>
+          </a:prstGeom>
+        </p:spPr>
+        <p:style>
+          <a:lnRef idx="2">
+            <a:schemeClr val="accent3">
+              <a:shade val="15000"/>
+            </a:schemeClr>
+          </a:lnRef>
+          <a:fillRef idx="1">
+            <a:schemeClr val="accent3"/>
+          </a:fillRef>
+          <a:effectRef idx="0">
+            <a:schemeClr val="accent3"/>
+          </a:effectRef>
+          <a:fontRef idx="minor">
+            <a:schemeClr val="lt1"/>
+          </a:fontRef>
+        </p:style>
+        <p:txBody>
+          <a:bodyPr rtlCol="0" anchor="ctr"/>
+          <a:lstStyle/>
+          <a:p>
+            <a:pPr algn="ctr"/>
+            <a:r>
+              <a:rPr lang="en-US" dirty="0"/>
+              <a:t>Derived from the def. of the policy.</a:t>
+            </a:r>
+            <a:endParaRPr lang="en-US" sz="1600" dirty="0"/>
+          </a:p>
+        </p:txBody>
+      </p:sp>
+      <mc:AlternateContent xmlns:mc="http://schemas.openxmlformats.org/markup-compatibility/2006">
+        <mc:Choice xmlns:a14="http://schemas.microsoft.com/office/drawing/2010/main" Requires="a14">
+          <p:sp>
+            <p:nvSpPr>
+              <p:cNvPr id="9" name="TextBox 8">
+                <a:extLst>
+                  <a:ext uri="{FF2B5EF4-FFF2-40B4-BE49-F238E27FC236}">
+                    <a16:creationId xmlns:a16="http://schemas.microsoft.com/office/drawing/2014/main" id="{81844A3E-07DE-7E32-BBD9-C2EA15BF5B63}"/>
+                  </a:ext>
+                </a:extLst>
+              </p:cNvPr>
+              <p:cNvSpPr txBox="1"/>
+              <p:nvPr/>
+            </p:nvSpPr>
+            <p:spPr>
+              <a:xfrm>
+                <a:off x="2840922" y="5618339"/>
+                <a:ext cx="6097162" cy="874535"/>
+              </a:xfrm>
+              <a:prstGeom prst="rect">
+                <a:avLst/>
+              </a:prstGeom>
+            </p:spPr>
+            <p:style>
+              <a:lnRef idx="2">
+                <a:schemeClr val="accent3">
+                  <a:shade val="15000"/>
+                </a:schemeClr>
+              </a:lnRef>
+              <a:fillRef idx="1">
+                <a:schemeClr val="accent3"/>
+              </a:fillRef>
+              <a:effectRef idx="0">
+                <a:schemeClr val="accent3"/>
+              </a:effectRef>
+              <a:fontRef idx="minor">
+                <a:schemeClr val="lt1"/>
+              </a:fontRef>
+            </p:style>
+            <p:txBody>
+              <a:bodyPr wrap="square">
+                <a:spAutoFit/>
+              </a:bodyPr>
+              <a:lstStyle/>
+              <a:p>
+                <a:pPr/>
+                <a:r>
+                  <a:rPr lang="en-US" sz="1800" dirty="0"/>
+                  <a:t>Policy: </a:t>
+                </a:r>
+                <a14:m>
+                  <m:oMath xmlns:m="http://schemas.openxmlformats.org/officeDocument/2006/math">
+                    <m:r>
+                      <a:rPr lang="en-US" sz="1800" i="1" smtClean="0">
+                        <a:latin typeface="Cambria Math" panose="02040503050406030204" pitchFamily="18" charset="0"/>
+                      </a:rPr>
+                      <m:t>𝜋</m:t>
+                    </m:r>
+                    <m:d>
+                      <m:dPr>
+                        <m:ctrlPr>
+                          <a:rPr lang="en-US" sz="1800" i="1">
+                            <a:latin typeface="Cambria Math" panose="02040503050406030204" pitchFamily="18" charset="0"/>
+                          </a:rPr>
+                        </m:ctrlPr>
+                      </m:dPr>
+                      <m:e>
+                        <m:r>
+                          <a:rPr lang="en-US" sz="1800" i="1">
+                            <a:latin typeface="Cambria Math" panose="02040503050406030204" pitchFamily="18" charset="0"/>
+                          </a:rPr>
+                          <m:t>𝑎</m:t>
+                        </m:r>
+                      </m:e>
+                      <m:e>
+                        <m:r>
+                          <a:rPr lang="en-US" sz="1800" i="1">
+                            <a:latin typeface="Cambria Math" panose="02040503050406030204" pitchFamily="18" charset="0"/>
+                          </a:rPr>
+                          <m:t>𝑠</m:t>
+                        </m:r>
+                        <m:r>
+                          <a:rPr lang="en-US" sz="1800" i="1">
+                            <a:latin typeface="Cambria Math" panose="02040503050406030204" pitchFamily="18" charset="0"/>
+                          </a:rPr>
+                          <m:t>,</m:t>
+                        </m:r>
+                        <m:r>
+                          <a:rPr lang="en-US" sz="1800" b="1" i="1">
+                            <a:latin typeface="Cambria Math" panose="02040503050406030204" pitchFamily="18" charset="0"/>
+                          </a:rPr>
+                          <m:t>𝜽</m:t>
+                        </m:r>
+                      </m:e>
+                    </m:d>
+                    <m:r>
+                      <a:rPr lang="en-US" sz="1800" i="1">
+                        <a:latin typeface="Cambria Math" panose="02040503050406030204" pitchFamily="18" charset="0"/>
+                      </a:rPr>
+                      <m:t>=</m:t>
+                    </m:r>
+                    <m:f>
+                      <m:fPr>
+                        <m:ctrlPr>
+                          <a:rPr lang="en-US" sz="1800" i="1">
+                            <a:latin typeface="Cambria Math" panose="02040503050406030204" pitchFamily="18" charset="0"/>
+                          </a:rPr>
+                        </m:ctrlPr>
+                      </m:fPr>
+                      <m:num>
+                        <m:sSup>
+                          <m:sSupPr>
+                            <m:ctrlPr>
+                              <a:rPr lang="en-US" sz="1800" i="1">
+                                <a:latin typeface="Cambria Math" panose="02040503050406030204" pitchFamily="18" charset="0"/>
+                              </a:rPr>
+                            </m:ctrlPr>
+                          </m:sSupPr>
+                          <m:e>
+                            <m:r>
+                              <a:rPr lang="en-US" sz="1800" i="1">
+                                <a:latin typeface="Cambria Math" panose="02040503050406030204" pitchFamily="18" charset="0"/>
+                              </a:rPr>
+                              <m:t>𝑒</m:t>
+                            </m:r>
+                          </m:e>
+                          <m:sup>
+                            <m:r>
+                              <a:rPr lang="en-US" sz="1800" i="1">
+                                <a:latin typeface="Cambria Math" panose="02040503050406030204" pitchFamily="18" charset="0"/>
+                              </a:rPr>
+                              <m:t>h</m:t>
+                            </m:r>
+                            <m:d>
+                              <m:dPr>
+                                <m:ctrlPr>
+                                  <a:rPr lang="en-US" sz="1800" i="1">
+                                    <a:latin typeface="Cambria Math" panose="02040503050406030204" pitchFamily="18" charset="0"/>
+                                  </a:rPr>
+                                </m:ctrlPr>
+                              </m:dPr>
+                              <m:e>
+                                <m:r>
+                                  <a:rPr lang="en-US" sz="1800" i="1">
+                                    <a:latin typeface="Cambria Math" panose="02040503050406030204" pitchFamily="18" charset="0"/>
+                                  </a:rPr>
+                                  <m:t>𝑠</m:t>
+                                </m:r>
+                                <m:r>
+                                  <a:rPr lang="en-US" sz="1800" i="1">
+                                    <a:latin typeface="Cambria Math" panose="02040503050406030204" pitchFamily="18" charset="0"/>
+                                  </a:rPr>
+                                  <m:t>,</m:t>
+                                </m:r>
+                                <m:r>
+                                  <a:rPr lang="en-US" sz="1800" i="1">
+                                    <a:latin typeface="Cambria Math" panose="02040503050406030204" pitchFamily="18" charset="0"/>
+                                  </a:rPr>
+                                  <m:t>𝑎</m:t>
+                                </m:r>
+                                <m:r>
+                                  <a:rPr lang="en-US" sz="1800" i="1">
+                                    <a:latin typeface="Cambria Math" panose="02040503050406030204" pitchFamily="18" charset="0"/>
+                                  </a:rPr>
+                                  <m:t>,</m:t>
+                                </m:r>
+                                <m:r>
+                                  <a:rPr lang="en-US" sz="1800" b="1" i="1">
+                                    <a:latin typeface="Cambria Math" panose="02040503050406030204" pitchFamily="18" charset="0"/>
+                                  </a:rPr>
+                                  <m:t>𝜽</m:t>
+                                </m:r>
+                              </m:e>
+                            </m:d>
+                          </m:sup>
+                        </m:sSup>
+                      </m:num>
+                      <m:den>
+                        <m:nary>
+                          <m:naryPr>
+                            <m:chr m:val="∑"/>
+                            <m:supHide m:val="on"/>
+                            <m:ctrlPr>
+                              <a:rPr lang="en-US" sz="1800" i="1">
+                                <a:latin typeface="Cambria Math" panose="02040503050406030204" pitchFamily="18" charset="0"/>
+                              </a:rPr>
+                            </m:ctrlPr>
+                          </m:naryPr>
+                          <m:sub>
+                            <m:r>
+                              <a:rPr lang="en-US" sz="1800" i="1">
+                                <a:latin typeface="Cambria Math" panose="02040503050406030204" pitchFamily="18" charset="0"/>
+                              </a:rPr>
+                              <m:t>𝑏</m:t>
+                            </m:r>
+                          </m:sub>
+                          <m:sup/>
+                          <m:e>
+                            <m:sSup>
+                              <m:sSupPr>
+                                <m:ctrlPr>
+                                  <a:rPr lang="en-US" sz="1800" i="1">
+                                    <a:latin typeface="Cambria Math" panose="02040503050406030204" pitchFamily="18" charset="0"/>
+                                  </a:rPr>
+                                </m:ctrlPr>
+                              </m:sSupPr>
+                              <m:e>
+                                <m:r>
+                                  <a:rPr lang="en-US" sz="1800" i="1">
+                                    <a:latin typeface="Cambria Math" panose="02040503050406030204" pitchFamily="18" charset="0"/>
+                                  </a:rPr>
+                                  <m:t>𝑒</m:t>
+                                </m:r>
+                              </m:e>
+                              <m:sup>
+                                <m:r>
+                                  <a:rPr lang="en-US" sz="1800" i="1">
+                                    <a:latin typeface="Cambria Math" panose="02040503050406030204" pitchFamily="18" charset="0"/>
+                                  </a:rPr>
+                                  <m:t>h</m:t>
+                                </m:r>
+                                <m:d>
+                                  <m:dPr>
+                                    <m:ctrlPr>
+                                      <a:rPr lang="en-US" sz="1800" i="1">
+                                        <a:latin typeface="Cambria Math" panose="02040503050406030204" pitchFamily="18" charset="0"/>
+                                      </a:rPr>
+                                    </m:ctrlPr>
+                                  </m:dPr>
+                                  <m:e>
+                                    <m:r>
+                                      <a:rPr lang="en-US" sz="1800" i="1">
+                                        <a:latin typeface="Cambria Math" panose="02040503050406030204" pitchFamily="18" charset="0"/>
+                                      </a:rPr>
+                                      <m:t>𝑠</m:t>
+                                    </m:r>
+                                    <m:r>
+                                      <a:rPr lang="en-US" sz="1800" i="1">
+                                        <a:latin typeface="Cambria Math" panose="02040503050406030204" pitchFamily="18" charset="0"/>
+                                      </a:rPr>
+                                      <m:t>,</m:t>
+                                    </m:r>
+                                    <m:r>
+                                      <a:rPr lang="en-US" sz="1800" i="1">
+                                        <a:latin typeface="Cambria Math" panose="02040503050406030204" pitchFamily="18" charset="0"/>
+                                      </a:rPr>
+                                      <m:t>𝑏</m:t>
+                                    </m:r>
+                                    <m:r>
+                                      <a:rPr lang="en-US" sz="1800" i="1">
+                                        <a:latin typeface="Cambria Math" panose="02040503050406030204" pitchFamily="18" charset="0"/>
+                                      </a:rPr>
+                                      <m:t>,</m:t>
+                                    </m:r>
+                                    <m:r>
+                                      <a:rPr lang="en-US" sz="1800" b="1" i="1">
+                                        <a:latin typeface="Cambria Math" panose="02040503050406030204" pitchFamily="18" charset="0"/>
+                                      </a:rPr>
+                                      <m:t>𝜽</m:t>
+                                    </m:r>
+                                  </m:e>
+                                </m:d>
+                              </m:sup>
+                            </m:sSup>
+                          </m:e>
+                        </m:nary>
+                      </m:den>
+                    </m:f>
+                    <m:r>
+                      <a:rPr lang="en-US" sz="1800" i="1">
+                        <a:latin typeface="Cambria Math" panose="02040503050406030204" pitchFamily="18" charset="0"/>
+                      </a:rPr>
+                      <m:t> </m:t>
+                    </m:r>
+                  </m:oMath>
+                </a14:m>
+                <a:endParaRPr lang="en-US" dirty="0"/>
+              </a:p>
+              <a:p>
+                <a:pPr/>
+                <a:r>
+                  <a:rPr lang="en-US" dirty="0"/>
+                  <a:t>Gradient: </a:t>
+                </a:r>
+                <a14:m>
+                  <m:oMath xmlns:m="http://schemas.openxmlformats.org/officeDocument/2006/math">
+                    <m:r>
+                      <m:rPr>
+                        <m:sty m:val="p"/>
+                      </m:rPr>
+                      <a:rPr lang="en-US" i="1" smtClean="0">
+                        <a:latin typeface="Cambria Math" panose="02040503050406030204" pitchFamily="18" charset="0"/>
+                        <a:ea typeface="Cambria Math" panose="02040503050406030204" pitchFamily="18" charset="0"/>
+                      </a:rPr>
+                      <m:t>∇</m:t>
+                    </m:r>
+                    <m:r>
+                      <a:rPr lang="en-US" b="0" i="1" smtClean="0">
+                        <a:latin typeface="Cambria Math" panose="02040503050406030204" pitchFamily="18" charset="0"/>
+                        <a:ea typeface="Cambria Math" panose="02040503050406030204" pitchFamily="18" charset="0"/>
+                      </a:rPr>
+                      <m:t> </m:t>
+                    </m:r>
+                    <m:func>
+                      <m:funcPr>
+                        <m:ctrlPr>
+                          <a:rPr lang="en-US" b="0" i="1" smtClean="0">
+                            <a:latin typeface="Cambria Math" panose="02040503050406030204" pitchFamily="18" charset="0"/>
+                            <a:ea typeface="Cambria Math" panose="02040503050406030204" pitchFamily="18" charset="0"/>
+                          </a:rPr>
+                        </m:ctrlPr>
+                      </m:funcPr>
+                      <m:fName>
+                        <m:r>
+                          <m:rPr>
+                            <m:sty m:val="p"/>
+                          </m:rPr>
+                          <a:rPr lang="en-US" b="0" i="0" smtClean="0">
+                            <a:latin typeface="Cambria Math" panose="02040503050406030204" pitchFamily="18" charset="0"/>
+                            <a:ea typeface="Cambria Math" panose="02040503050406030204" pitchFamily="18" charset="0"/>
+                          </a:rPr>
+                          <m:t>ln</m:t>
+                        </m:r>
+                      </m:fName>
+                      <m:e>
+                        <m:r>
+                          <a:rPr lang="en-US" b="0" i="1" smtClean="0">
+                            <a:latin typeface="Cambria Math" panose="02040503050406030204" pitchFamily="18" charset="0"/>
+                            <a:ea typeface="Cambria Math" panose="02040503050406030204" pitchFamily="18" charset="0"/>
+                          </a:rPr>
+                          <m:t>𝜋</m:t>
+                        </m:r>
+                        <m:d>
+                          <m:dPr>
+                            <m:ctrlPr>
+                              <a:rPr lang="en-US" b="0" i="1" smtClean="0">
+                                <a:latin typeface="Cambria Math" panose="02040503050406030204" pitchFamily="18" charset="0"/>
+                                <a:ea typeface="Cambria Math" panose="02040503050406030204" pitchFamily="18" charset="0"/>
+                              </a:rPr>
+                            </m:ctrlPr>
+                          </m:dPr>
+                          <m:e>
+                            <m:r>
+                              <a:rPr lang="en-US" b="0" i="1" smtClean="0">
+                                <a:latin typeface="Cambria Math" panose="02040503050406030204" pitchFamily="18" charset="0"/>
+                                <a:ea typeface="Cambria Math" panose="02040503050406030204" pitchFamily="18" charset="0"/>
+                              </a:rPr>
+                              <m:t>𝑠</m:t>
+                            </m:r>
+                          </m:e>
+                          <m:e>
+                            <m:r>
+                              <a:rPr lang="en-US" b="0" i="1" smtClean="0">
+                                <a:latin typeface="Cambria Math" panose="02040503050406030204" pitchFamily="18" charset="0"/>
+                                <a:ea typeface="Cambria Math" panose="02040503050406030204" pitchFamily="18" charset="0"/>
+                              </a:rPr>
+                              <m:t>𝑎</m:t>
+                            </m:r>
+                            <m:r>
+                              <a:rPr lang="en-US" b="0" i="1" smtClean="0">
+                                <a:latin typeface="Cambria Math" panose="02040503050406030204" pitchFamily="18" charset="0"/>
+                                <a:ea typeface="Cambria Math" panose="02040503050406030204" pitchFamily="18" charset="0"/>
+                              </a:rPr>
+                              <m:t>, </m:t>
+                            </m:r>
+                            <m:r>
+                              <a:rPr lang="en-US" b="1" i="1" smtClean="0">
+                                <a:latin typeface="Cambria Math" panose="02040503050406030204" pitchFamily="18" charset="0"/>
+                                <a:ea typeface="Cambria Math" panose="02040503050406030204" pitchFamily="18" charset="0"/>
+                              </a:rPr>
+                              <m:t>𝜽</m:t>
+                            </m:r>
+                          </m:e>
+                        </m:d>
+                        <m:r>
+                          <a:rPr lang="en-US" b="0" i="1" smtClean="0">
+                            <a:latin typeface="Cambria Math" panose="02040503050406030204" pitchFamily="18" charset="0"/>
+                            <a:ea typeface="Cambria Math" panose="02040503050406030204" pitchFamily="18" charset="0"/>
+                          </a:rPr>
+                          <m:t>=</m:t>
+                        </m:r>
+                        <m:r>
+                          <a:rPr lang="en-US" b="0" i="1" smtClean="0">
+                            <a:latin typeface="Cambria Math" panose="02040503050406030204" pitchFamily="18" charset="0"/>
+                            <a:ea typeface="Cambria Math" panose="02040503050406030204" pitchFamily="18" charset="0"/>
+                          </a:rPr>
+                          <m:t>h</m:t>
+                        </m:r>
+                        <m:d>
+                          <m:dPr>
+                            <m:ctrlPr>
+                              <a:rPr lang="en-US" b="0" i="1" smtClean="0">
+                                <a:latin typeface="Cambria Math" panose="02040503050406030204" pitchFamily="18" charset="0"/>
+                                <a:ea typeface="Cambria Math" panose="02040503050406030204" pitchFamily="18" charset="0"/>
+                              </a:rPr>
+                            </m:ctrlPr>
+                          </m:dPr>
+                          <m:e>
+                            <m:r>
+                              <a:rPr lang="en-US" b="0" i="1" smtClean="0">
+                                <a:latin typeface="Cambria Math" panose="02040503050406030204" pitchFamily="18" charset="0"/>
+                                <a:ea typeface="Cambria Math" panose="02040503050406030204" pitchFamily="18" charset="0"/>
+                              </a:rPr>
+                              <m:t>𝑠</m:t>
+                            </m:r>
+                            <m:r>
+                              <a:rPr lang="en-US" b="0" i="1" smtClean="0">
+                                <a:latin typeface="Cambria Math" panose="02040503050406030204" pitchFamily="18" charset="0"/>
+                                <a:ea typeface="Cambria Math" panose="02040503050406030204" pitchFamily="18" charset="0"/>
+                              </a:rPr>
+                              <m:t>,</m:t>
+                            </m:r>
+                            <m:r>
+                              <a:rPr lang="en-US" b="0" i="1" smtClean="0">
+                                <a:latin typeface="Cambria Math" panose="02040503050406030204" pitchFamily="18" charset="0"/>
+                                <a:ea typeface="Cambria Math" panose="02040503050406030204" pitchFamily="18" charset="0"/>
+                              </a:rPr>
+                              <m:t>𝑎</m:t>
+                            </m:r>
+                          </m:e>
+                        </m:d>
+                        <m:r>
+                          <a:rPr lang="en-US" b="0" i="1" smtClean="0">
+                            <a:latin typeface="Cambria Math" panose="02040503050406030204" pitchFamily="18" charset="0"/>
+                            <a:ea typeface="Cambria Math" panose="02040503050406030204" pitchFamily="18" charset="0"/>
+                          </a:rPr>
+                          <m:t>−</m:t>
+                        </m:r>
+                        <m:nary>
+                          <m:naryPr>
+                            <m:chr m:val="∑"/>
+                            <m:ctrlPr>
+                              <a:rPr lang="en-US" b="0" i="1" smtClean="0">
+                                <a:latin typeface="Cambria Math" panose="02040503050406030204" pitchFamily="18" charset="0"/>
+                                <a:ea typeface="Cambria Math" panose="02040503050406030204" pitchFamily="18" charset="0"/>
+                              </a:rPr>
+                            </m:ctrlPr>
+                          </m:naryPr>
+                          <m:sub>
+                            <m:r>
+                              <a:rPr lang="en-US" b="0" i="1" smtClean="0">
+                                <a:latin typeface="Cambria Math" panose="02040503050406030204" pitchFamily="18" charset="0"/>
+                                <a:ea typeface="Cambria Math" panose="02040503050406030204" pitchFamily="18" charset="0"/>
+                              </a:rPr>
+                              <m:t>𝑎</m:t>
+                            </m:r>
+                          </m:sub>
+                          <m:sup>
+                            <m:r>
+                              <a:rPr lang="en-US" b="0" i="1" smtClean="0">
+                                <a:latin typeface="Cambria Math" panose="02040503050406030204" pitchFamily="18" charset="0"/>
+                                <a:ea typeface="Cambria Math" panose="02040503050406030204" pitchFamily="18" charset="0"/>
+                              </a:rPr>
+                              <m:t>′</m:t>
+                            </m:r>
+                          </m:sup>
+                          <m:e>
+                            <m:r>
+                              <a:rPr lang="en-US" b="0" i="1" smtClean="0">
+                                <a:latin typeface="Cambria Math" panose="02040503050406030204" pitchFamily="18" charset="0"/>
+                                <a:ea typeface="Cambria Math" panose="02040503050406030204" pitchFamily="18" charset="0"/>
+                              </a:rPr>
+                              <m:t>h</m:t>
+                            </m:r>
+                            <m:d>
+                              <m:dPr>
+                                <m:ctrlPr>
+                                  <a:rPr lang="en-US" b="0" i="1" smtClean="0">
+                                    <a:latin typeface="Cambria Math" panose="02040503050406030204" pitchFamily="18" charset="0"/>
+                                    <a:ea typeface="Cambria Math" panose="02040503050406030204" pitchFamily="18" charset="0"/>
+                                  </a:rPr>
+                                </m:ctrlPr>
+                              </m:dPr>
+                              <m:e>
+                                <m:r>
+                                  <a:rPr lang="en-US" b="0" i="1" smtClean="0">
+                                    <a:latin typeface="Cambria Math" panose="02040503050406030204" pitchFamily="18" charset="0"/>
+                                    <a:ea typeface="Cambria Math" panose="02040503050406030204" pitchFamily="18" charset="0"/>
+                                  </a:rPr>
+                                  <m:t>𝑠</m:t>
+                                </m:r>
+                                <m:r>
+                                  <a:rPr lang="en-US" b="0" i="1" smtClean="0">
+                                    <a:latin typeface="Cambria Math" panose="02040503050406030204" pitchFamily="18" charset="0"/>
+                                    <a:ea typeface="Cambria Math" panose="02040503050406030204" pitchFamily="18" charset="0"/>
+                                  </a:rPr>
+                                  <m:t>,</m:t>
+                                </m:r>
+                                <m:sSup>
+                                  <m:sSupPr>
+                                    <m:ctrlPr>
+                                      <a:rPr lang="en-US" b="0" i="1" smtClean="0">
+                                        <a:latin typeface="Cambria Math" panose="02040503050406030204" pitchFamily="18" charset="0"/>
+                                        <a:ea typeface="Cambria Math" panose="02040503050406030204" pitchFamily="18" charset="0"/>
+                                      </a:rPr>
+                                    </m:ctrlPr>
+                                  </m:sSupPr>
+                                  <m:e>
+                                    <m:r>
+                                      <a:rPr lang="en-US" b="0" i="1" smtClean="0">
+                                        <a:latin typeface="Cambria Math" panose="02040503050406030204" pitchFamily="18" charset="0"/>
+                                        <a:ea typeface="Cambria Math" panose="02040503050406030204" pitchFamily="18" charset="0"/>
+                                      </a:rPr>
+                                      <m:t>𝑎</m:t>
+                                    </m:r>
+                                  </m:e>
+                                  <m:sup>
+                                    <m:r>
+                                      <a:rPr lang="en-US" b="0" i="1" smtClean="0">
+                                        <a:latin typeface="Cambria Math" panose="02040503050406030204" pitchFamily="18" charset="0"/>
+                                        <a:ea typeface="Cambria Math" panose="02040503050406030204" pitchFamily="18" charset="0"/>
+                                      </a:rPr>
+                                      <m:t>′</m:t>
+                                    </m:r>
+                                  </m:sup>
+                                </m:sSup>
+                              </m:e>
+                            </m:d>
+                            <m:r>
+                              <a:rPr lang="en-US" b="0" i="1" smtClean="0">
+                                <a:latin typeface="Cambria Math" panose="02040503050406030204" pitchFamily="18" charset="0"/>
+                                <a:ea typeface="Cambria Math" panose="02040503050406030204" pitchFamily="18" charset="0"/>
+                              </a:rPr>
+                              <m:t>𝜋</m:t>
+                            </m:r>
+                            <m:r>
+                              <a:rPr lang="en-US" b="0" i="1" smtClean="0">
+                                <a:latin typeface="Cambria Math" panose="02040503050406030204" pitchFamily="18" charset="0"/>
+                                <a:ea typeface="Cambria Math" panose="02040503050406030204" pitchFamily="18" charset="0"/>
+                              </a:rPr>
+                              <m:t>(</m:t>
+                            </m:r>
+                            <m:r>
+                              <a:rPr lang="en-US" b="0" i="1" smtClean="0">
+                                <a:latin typeface="Cambria Math" panose="02040503050406030204" pitchFamily="18" charset="0"/>
+                                <a:ea typeface="Cambria Math" panose="02040503050406030204" pitchFamily="18" charset="0"/>
+                              </a:rPr>
+                              <m:t>𝑠</m:t>
+                            </m:r>
+                            <m:r>
+                              <a:rPr lang="en-US" b="0" i="1" smtClean="0">
+                                <a:latin typeface="Cambria Math" panose="02040503050406030204" pitchFamily="18" charset="0"/>
+                                <a:ea typeface="Cambria Math" panose="02040503050406030204" pitchFamily="18" charset="0"/>
+                              </a:rPr>
+                              <m:t>|</m:t>
+                            </m:r>
+                            <m:sSup>
+                              <m:sSupPr>
+                                <m:ctrlPr>
+                                  <a:rPr lang="en-US" b="0" i="1" smtClean="0">
+                                    <a:latin typeface="Cambria Math" panose="02040503050406030204" pitchFamily="18" charset="0"/>
+                                    <a:ea typeface="Cambria Math" panose="02040503050406030204" pitchFamily="18" charset="0"/>
+                                  </a:rPr>
+                                </m:ctrlPr>
+                              </m:sSupPr>
+                              <m:e>
+                                <m:r>
+                                  <a:rPr lang="en-US" b="0" i="1" smtClean="0">
+                                    <a:latin typeface="Cambria Math" panose="02040503050406030204" pitchFamily="18" charset="0"/>
+                                    <a:ea typeface="Cambria Math" panose="02040503050406030204" pitchFamily="18" charset="0"/>
+                                  </a:rPr>
+                                  <m:t>𝑎</m:t>
+                                </m:r>
+                              </m:e>
+                              <m:sup>
+                                <m:r>
+                                  <a:rPr lang="en-US" b="0" i="1" smtClean="0">
+                                    <a:latin typeface="Cambria Math" panose="02040503050406030204" pitchFamily="18" charset="0"/>
+                                    <a:ea typeface="Cambria Math" panose="02040503050406030204" pitchFamily="18" charset="0"/>
+                                  </a:rPr>
+                                  <m:t>′</m:t>
+                                </m:r>
+                              </m:sup>
+                            </m:sSup>
+                            <m:r>
+                              <a:rPr lang="en-US" b="0" i="1" smtClean="0">
+                                <a:latin typeface="Cambria Math" panose="02040503050406030204" pitchFamily="18" charset="0"/>
+                                <a:ea typeface="Cambria Math" panose="02040503050406030204" pitchFamily="18" charset="0"/>
+                              </a:rPr>
+                              <m:t>, </m:t>
+                            </m:r>
+                            <m:r>
+                              <a:rPr lang="en-US" b="1" i="1" smtClean="0">
+                                <a:latin typeface="Cambria Math" panose="02040503050406030204" pitchFamily="18" charset="0"/>
+                                <a:ea typeface="Cambria Math" panose="02040503050406030204" pitchFamily="18" charset="0"/>
+                              </a:rPr>
+                              <m:t>𝜽</m:t>
+                            </m:r>
+                            <m:r>
+                              <a:rPr lang="en-US" b="0" i="1" smtClean="0">
+                                <a:latin typeface="Cambria Math" panose="02040503050406030204" pitchFamily="18" charset="0"/>
+                                <a:ea typeface="Cambria Math" panose="02040503050406030204" pitchFamily="18" charset="0"/>
+                              </a:rPr>
+                              <m:t>)</m:t>
+                            </m:r>
+                          </m:e>
+                        </m:nary>
+                      </m:e>
+                    </m:func>
+                  </m:oMath>
+                </a14:m>
+                <a:endParaRPr lang="en-US" dirty="0"/>
+              </a:p>
+            </p:txBody>
+          </p:sp>
+        </mc:Choice>
+        <mc:Fallback>
+          <p:sp>
+            <p:nvSpPr>
+              <p:cNvPr id="9" name="TextBox 8">
+                <a:extLst>
+                  <a:ext uri="{FF2B5EF4-FFF2-40B4-BE49-F238E27FC236}">
+                    <a16:creationId xmlns:a16="http://schemas.microsoft.com/office/drawing/2014/main" id="{81844A3E-07DE-7E32-BBD9-C2EA15BF5B63}"/>
+                  </a:ext>
+                </a:extLst>
+              </p:cNvPr>
+              <p:cNvSpPr txBox="1">
+                <a:spLocks noRot="1" noChangeAspect="1" noMove="1" noResize="1" noEditPoints="1" noAdjustHandles="1" noChangeArrowheads="1" noChangeShapeType="1" noTextEdit="1"/>
+              </p:cNvSpPr>
+              <p:nvPr/>
+            </p:nvSpPr>
+            <p:spPr>
+              <a:xfrm>
+                <a:off x="2840922" y="5618339"/>
+                <a:ext cx="6097162" cy="874535"/>
+              </a:xfrm>
+              <a:prstGeom prst="rect">
+                <a:avLst/>
+              </a:prstGeom>
+              <a:blipFill>
+                <a:blip r:embed="rId4"/>
+                <a:stretch>
+                  <a:fillRect l="-698" b="-75342"/>
+                </a:stretch>
+              </a:blipFill>
+            </p:spPr>
+            <p:txBody>
+              <a:bodyPr/>
+              <a:lstStyle/>
+              <a:p>
+                <a:r>
+                  <a:rPr lang="en-US">
+                    <a:noFill/>
+                  </a:rPr>
+                  <a:t> </a:t>
+                </a:r>
+              </a:p>
+            </p:txBody>
+          </p:sp>
+        </mc:Fallback>
+      </mc:AlternateContent>
+      <p:sp>
+        <p:nvSpPr>
+          <p:cNvPr id="10" name="Speech Bubble: Rectangle with Corners Rounded 9">
+            <a:extLst>
+              <a:ext uri="{FF2B5EF4-FFF2-40B4-BE49-F238E27FC236}">
+                <a16:creationId xmlns:a16="http://schemas.microsoft.com/office/drawing/2014/main" id="{8CBD3B62-118E-3C2C-74E7-15BD5B192BE0}"/>
+              </a:ext>
+            </a:extLst>
+          </p:cNvPr>
+          <p:cNvSpPr/>
+          <p:nvPr/>
+        </p:nvSpPr>
+        <p:spPr>
+          <a:xfrm>
+            <a:off x="5751645" y="4181102"/>
+            <a:ext cx="2380231" cy="677074"/>
+          </a:xfrm>
+          <a:prstGeom prst="wedgeRoundRectCallout">
+            <a:avLst>
+              <a:gd name="adj1" fmla="val -7539"/>
+              <a:gd name="adj2" fmla="val -132953"/>
+              <a:gd name="adj3" fmla="val 16667"/>
+            </a:avLst>
+          </a:prstGeom>
+        </p:spPr>
+        <p:style>
+          <a:lnRef idx="2">
+            <a:schemeClr val="accent2">
+              <a:shade val="15000"/>
+            </a:schemeClr>
+          </a:lnRef>
+          <a:fillRef idx="1">
+            <a:schemeClr val="accent2"/>
+          </a:fillRef>
+          <a:effectRef idx="0">
+            <a:schemeClr val="accent2"/>
+          </a:effectRef>
+          <a:fontRef idx="minor">
+            <a:schemeClr val="lt1"/>
+          </a:fontRef>
+        </p:style>
+        <p:txBody>
+          <a:bodyPr rtlCol="0" anchor="ctr"/>
+          <a:lstStyle/>
+          <a:p>
+            <a:pPr algn="ctr"/>
+            <a:r>
+              <a:rPr lang="en-US" dirty="0"/>
+              <a:t>Depends on estimates for q</a:t>
+            </a:r>
+          </a:p>
+        </p:txBody>
+      </p:sp>
     </p:spTree>
     <p:extLst>
       <p:ext uri="{BB962C8B-B14F-4D97-AF65-F5344CB8AC3E}">
@@ -11281,7 +13585,7 @@
           <a:p>
             <a:r>
               <a:rPr lang="en-US" dirty="0"/>
-              <a:t>REINFORCE: MC Policy Gradient</a:t>
+              <a:t>REINFORCE Update</a:t>
             </a:r>
           </a:p>
         </p:txBody>
@@ -11306,13 +13610,13 @@
             </p:nvSpPr>
             <p:spPr>
               <a:xfrm>
-                <a:off x="838200" y="1397331"/>
-                <a:ext cx="4878545" cy="2218388"/>
+                <a:off x="838199" y="2237959"/>
+                <a:ext cx="6176853" cy="3298764"/>
               </a:xfrm>
             </p:spPr>
             <p:txBody>
               <a:bodyPr>
-                <a:normAutofit fontScale="62500" lnSpcReduction="20000"/>
+                <a:normAutofit fontScale="77500" lnSpcReduction="20000"/>
               </a:bodyPr>
               <a:lstStyle/>
               <a:p>
@@ -11639,6 +13943,97 @@
                             </m:sub>
                             <m:sup/>
                             <m:e>
+                              <m:r>
+                                <a:rPr lang="en-US" i="1">
+                                  <a:latin typeface="Cambria Math" panose="02040503050406030204" pitchFamily="18" charset="0"/>
+                                  <a:ea typeface="Cambria Math" panose="02040503050406030204" pitchFamily="18" charset="0"/>
+                                </a:rPr>
+                                <m:t>𝜋</m:t>
+                              </m:r>
+                              <m:d>
+                                <m:dPr>
+                                  <m:ctrlPr>
+                                    <a:rPr lang="en-US" i="1">
+                                      <a:latin typeface="Cambria Math" panose="02040503050406030204" pitchFamily="18" charset="0"/>
+                                      <a:ea typeface="Cambria Math" panose="02040503050406030204" pitchFamily="18" charset="0"/>
+                                    </a:rPr>
+                                  </m:ctrlPr>
+                                </m:dPr>
+                                <m:e>
+                                  <m:sSub>
+                                    <m:sSubPr>
+                                      <m:ctrlPr>
+                                        <a:rPr lang="en-US" i="1">
+                                          <a:latin typeface="Cambria Math" panose="02040503050406030204" pitchFamily="18" charset="0"/>
+                                          <a:ea typeface="Cambria Math" panose="02040503050406030204" pitchFamily="18" charset="0"/>
+                                        </a:rPr>
+                                      </m:ctrlPr>
+                                    </m:sSubPr>
+                                    <m:e>
+                                      <m:r>
+                                        <a:rPr lang="en-US" i="1">
+                                          <a:latin typeface="Cambria Math" panose="02040503050406030204" pitchFamily="18" charset="0"/>
+                                          <a:ea typeface="Cambria Math" panose="02040503050406030204" pitchFamily="18" charset="0"/>
+                                        </a:rPr>
+                                        <m:t>𝐴</m:t>
+                                      </m:r>
+                                    </m:e>
+                                    <m:sub>
+                                      <m:r>
+                                        <a:rPr lang="en-US" i="1">
+                                          <a:latin typeface="Cambria Math" panose="02040503050406030204" pitchFamily="18" charset="0"/>
+                                          <a:ea typeface="Cambria Math" panose="02040503050406030204" pitchFamily="18" charset="0"/>
+                                        </a:rPr>
+                                        <m:t>𝑡</m:t>
+                                      </m:r>
+                                    </m:sub>
+                                  </m:sSub>
+                                </m:e>
+                                <m:e>
+                                  <m:sSub>
+                                    <m:sSubPr>
+                                      <m:ctrlPr>
+                                        <a:rPr lang="en-US" i="1">
+                                          <a:latin typeface="Cambria Math" panose="02040503050406030204" pitchFamily="18" charset="0"/>
+                                          <a:ea typeface="Cambria Math" panose="02040503050406030204" pitchFamily="18" charset="0"/>
+                                        </a:rPr>
+                                      </m:ctrlPr>
+                                    </m:sSubPr>
+                                    <m:e>
+                                      <m:r>
+                                        <a:rPr lang="en-US" i="1">
+                                          <a:latin typeface="Cambria Math" panose="02040503050406030204" pitchFamily="18" charset="0"/>
+                                          <a:ea typeface="Cambria Math" panose="02040503050406030204" pitchFamily="18" charset="0"/>
+                                        </a:rPr>
+                                        <m:t>𝑆</m:t>
+                                      </m:r>
+                                    </m:e>
+                                    <m:sub>
+                                      <m:r>
+                                        <a:rPr lang="en-US" i="1">
+                                          <a:latin typeface="Cambria Math" panose="02040503050406030204" pitchFamily="18" charset="0"/>
+                                          <a:ea typeface="Cambria Math" panose="02040503050406030204" pitchFamily="18" charset="0"/>
+                                        </a:rPr>
+                                        <m:t>𝑡</m:t>
+                                      </m:r>
+                                    </m:sub>
+                                  </m:sSub>
+                                  <m:r>
+                                    <a:rPr lang="en-US" i="1">
+                                      <a:latin typeface="Cambria Math" panose="02040503050406030204" pitchFamily="18" charset="0"/>
+                                      <a:ea typeface="Cambria Math" panose="02040503050406030204" pitchFamily="18" charset="0"/>
+                                    </a:rPr>
+                                    <m:t>,</m:t>
+                                  </m:r>
+                                  <m:r>
+                                    <a:rPr lang="en-US" b="1" i="1">
+                                      <a:latin typeface="Cambria Math" panose="02040503050406030204" pitchFamily="18" charset="0"/>
+                                      <a:ea typeface="Cambria Math" panose="02040503050406030204" pitchFamily="18" charset="0"/>
+                                    </a:rPr>
+                                    <m:t>𝜽</m:t>
+                                  </m:r>
+                                </m:e>
+                              </m:d>
                               <m:sSub>
                                 <m:sSubPr>
                                   <m:ctrlPr>
@@ -11677,13 +14072,34 @@
                                   </m:ctrlPr>
                                 </m:dPr>
                                 <m:e>
-                                  <m:r>
-                                    <a:rPr lang="en-US" i="1">
-                                      <a:latin typeface="Cambria Math" panose="02040503050406030204" pitchFamily="18" charset="0"/>
-                                      <a:ea typeface="Cambria Math" panose="02040503050406030204" pitchFamily="18" charset="0"/>
-                                    </a:rPr>
-                                    <m:t>𝑠</m:t>
-                                  </m:r>
+                                  <m:sSub>
+                                    <m:sSubPr>
+                                      <m:ctrlPr>
+                                        <a:rPr lang="en-US" b="0" i="1" smtClean="0">
+                                          <a:latin typeface="Cambria Math" panose="02040503050406030204" pitchFamily="18" charset="0"/>
+                                          <a:ea typeface="Cambria Math" panose="02040503050406030204" pitchFamily="18" charset="0"/>
+                                        </a:rPr>
+                                      </m:ctrlPr>
+                                    </m:sSubPr>
+                                    <m:e>
+                                      <m:r>
+                                        <a:rPr lang="en-US" b="0" i="1" smtClean="0">
+                                          <a:latin typeface="Cambria Math" panose="02040503050406030204" pitchFamily="18" charset="0"/>
+                                          <a:ea typeface="Cambria Math" panose="02040503050406030204" pitchFamily="18" charset="0"/>
+                                        </a:rPr>
+                                        <m:t>𝑆</m:t>
+                                      </m:r>
+                                    </m:e>
+                                    <m:sub>
+                                      <m:r>
+                                        <a:rPr lang="en-US" b="0" i="1" smtClean="0">
+                                          <a:latin typeface="Cambria Math" panose="02040503050406030204" pitchFamily="18" charset="0"/>
+                                          <a:ea typeface="Cambria Math" panose="02040503050406030204" pitchFamily="18" charset="0"/>
+                                        </a:rPr>
+                                        <m:t>𝑡</m:t>
+                                      </m:r>
+                                    </m:sub>
+                                  </m:sSub>
                                   <m:r>
                                     <a:rPr lang="en-US" i="1">
                                       <a:latin typeface="Cambria Math" panose="02040503050406030204" pitchFamily="18" charset="0"/>
@@ -11700,49 +14116,103 @@
                                   </m:r>
                                 </m:e>
                               </m:d>
-                              <m:r>
-                                <m:rPr>
-                                  <m:sty m:val="p"/>
-                                </m:rPr>
-                                <a:rPr lang="en-US">
-                                  <a:latin typeface="Cambria Math" panose="02040503050406030204" pitchFamily="18" charset="0"/>
-                                  <a:ea typeface="Cambria Math" panose="02040503050406030204" pitchFamily="18" charset="0"/>
-                                </a:rPr>
-                                <m:t>∇</m:t>
-                              </m:r>
-                              <m:r>
-                                <a:rPr lang="en-US" i="1">
-                                  <a:latin typeface="Cambria Math" panose="02040503050406030204" pitchFamily="18" charset="0"/>
-                                  <a:ea typeface="Cambria Math" panose="02040503050406030204" pitchFamily="18" charset="0"/>
-                                </a:rPr>
-                                <m:t>𝜋</m:t>
-                              </m:r>
-                              <m:d>
-                                <m:dPr>
+                              <m:f>
+                                <m:fPr>
                                   <m:ctrlPr>
                                     <a:rPr lang="en-US" i="1">
                                       <a:latin typeface="Cambria Math" panose="02040503050406030204" pitchFamily="18" charset="0"/>
                                       <a:ea typeface="Cambria Math" panose="02040503050406030204" pitchFamily="18" charset="0"/>
                                     </a:rPr>
                                   </m:ctrlPr>
-                                </m:dPr>
-                                <m:e>
+                                </m:fPr>
+                                <m:num>
+                                  <m:r>
+                                    <m:rPr>
+                                      <m:sty m:val="p"/>
+                                    </m:rPr>
+                                    <a:rPr lang="en-US" i="1">
+                                      <a:latin typeface="Cambria Math" panose="02040503050406030204" pitchFamily="18" charset="0"/>
+                                      <a:ea typeface="Cambria Math" panose="02040503050406030204" pitchFamily="18" charset="0"/>
+                                    </a:rPr>
+                                    <m:t>∇</m:t>
+                                  </m:r>
                                   <m:r>
                                     <a:rPr lang="en-US" i="1">
                                       <a:latin typeface="Cambria Math" panose="02040503050406030204" pitchFamily="18" charset="0"/>
                                       <a:ea typeface="Cambria Math" panose="02040503050406030204" pitchFamily="18" charset="0"/>
                                     </a:rPr>
-                                    <m:t>𝑎</m:t>
+                                    <m:t>𝜋</m:t>
                                   </m:r>
-                                </m:e>
-                                <m:e>
                                   <m:r>
                                     <a:rPr lang="en-US" i="1">
                                       <a:latin typeface="Cambria Math" panose="02040503050406030204" pitchFamily="18" charset="0"/>
                                       <a:ea typeface="Cambria Math" panose="02040503050406030204" pitchFamily="18" charset="0"/>
                                     </a:rPr>
-                                    <m:t>𝑠</m:t>
+                                    <m:t>(</m:t>
                                   </m:r>
+                                  <m:sSub>
+                                    <m:sSubPr>
+                                      <m:ctrlPr>
+                                        <a:rPr lang="en-US" i="1">
+                                          <a:latin typeface="Cambria Math" panose="02040503050406030204" pitchFamily="18" charset="0"/>
+                                          <a:ea typeface="Cambria Math" panose="02040503050406030204" pitchFamily="18" charset="0"/>
+                                        </a:rPr>
+                                      </m:ctrlPr>
+                                    </m:sSubPr>
+                                    <m:e>
+                                      <m:r>
+                                        <a:rPr lang="en-US" i="1">
+                                          <a:latin typeface="Cambria Math" panose="02040503050406030204" pitchFamily="18" charset="0"/>
+                                          <a:ea typeface="Cambria Math" panose="02040503050406030204" pitchFamily="18" charset="0"/>
+                                        </a:rPr>
+                                        <m:t>𝐴</m:t>
+                                      </m:r>
+                                    </m:e>
+                                    <m:sub>
+                                      <m:r>
+                                        <a:rPr lang="en-US" i="1">
+                                          <a:latin typeface="Cambria Math" panose="02040503050406030204" pitchFamily="18" charset="0"/>
+                                          <a:ea typeface="Cambria Math" panose="02040503050406030204" pitchFamily="18" charset="0"/>
+                                        </a:rPr>
+                                        <m:t>𝑡</m:t>
+                                      </m:r>
+                                    </m:sub>
+                                  </m:sSub>
+                                  <m:r>
+                                    <a:rPr lang="en-US" i="1">
+                                      <a:latin typeface="Cambria Math" panose="02040503050406030204" pitchFamily="18" charset="0"/>
+                                      <a:ea typeface="Cambria Math" panose="02040503050406030204" pitchFamily="18" charset="0"/>
+                                    </a:rPr>
+                                    <m:t>|</m:t>
+                                  </m:r>
+                                  <m:sSub>
+                                    <m:sSubPr>
+                                      <m:ctrlPr>
+                                        <a:rPr lang="en-US" i="1">
+                                          <a:latin typeface="Cambria Math" panose="02040503050406030204" pitchFamily="18" charset="0"/>
+                                          <a:ea typeface="Cambria Math" panose="02040503050406030204" pitchFamily="18" charset="0"/>
+                                        </a:rPr>
+                                      </m:ctrlPr>
+                                    </m:sSubPr>
+                                    <m:e>
+                                      <m:r>
+                                        <a:rPr lang="en-US" i="1">
+                                          <a:latin typeface="Cambria Math" panose="02040503050406030204" pitchFamily="18" charset="0"/>
+                                          <a:ea typeface="Cambria Math" panose="02040503050406030204" pitchFamily="18" charset="0"/>
+                                        </a:rPr>
+                                        <m:t>𝑆</m:t>
+                                      </m:r>
+                                    </m:e>
+                                    <m:sub>
+                                      <m:r>
+                                        <a:rPr lang="en-US" i="1">
+                                          <a:latin typeface="Cambria Math" panose="02040503050406030204" pitchFamily="18" charset="0"/>
+                                          <a:ea typeface="Cambria Math" panose="02040503050406030204" pitchFamily="18" charset="0"/>
+                                        </a:rPr>
+                                        <m:t>𝑡</m:t>
+                                      </m:r>
+                                    </m:sub>
+                                  </m:sSub>
                                   <m:r>
                                     <a:rPr lang="en-US" i="1">
                                       <a:latin typeface="Cambria Math" panose="02040503050406030204" pitchFamily="18" charset="0"/>
@@ -11757,8 +14227,115 @@
                                     </a:rPr>
                                     <m:t>𝜽</m:t>
                                   </m:r>
-                                </m:e>
-                              </m:d>
+                                  <m:r>
+                                    <a:rPr lang="en-US" i="1">
+                                      <a:latin typeface="Cambria Math" panose="02040503050406030204" pitchFamily="18" charset="0"/>
+                                      <a:ea typeface="Cambria Math" panose="02040503050406030204" pitchFamily="18" charset="0"/>
+                                    </a:rPr>
+                                    <m:t>)</m:t>
+                                  </m:r>
+                                </m:num>
+                                <m:den>
+                                  <m:r>
+                                    <a:rPr lang="en-US" i="1">
+                                      <a:latin typeface="Cambria Math" panose="02040503050406030204" pitchFamily="18" charset="0"/>
+                                      <a:ea typeface="Cambria Math" panose="02040503050406030204" pitchFamily="18" charset="0"/>
+                                    </a:rPr>
+                                    <m:t>𝜋</m:t>
+                                  </m:r>
+                                  <m:r>
+                                    <a:rPr lang="en-US" i="1">
+                                      <a:latin typeface="Cambria Math" panose="02040503050406030204" pitchFamily="18" charset="0"/>
+                                      <a:ea typeface="Cambria Math" panose="02040503050406030204" pitchFamily="18" charset="0"/>
+                                    </a:rPr>
+                                    <m:t>(</m:t>
+                                  </m:r>
+                                  <m:sSub>
+                                    <m:sSubPr>
+                                      <m:ctrlPr>
+                                        <a:rPr lang="en-US" i="1">
+                                          <a:latin typeface="Cambria Math" panose="02040503050406030204" pitchFamily="18" charset="0"/>
+                                          <a:ea typeface="Cambria Math" panose="02040503050406030204" pitchFamily="18" charset="0"/>
+                                        </a:rPr>
+                                      </m:ctrlPr>
+                                    </m:sSubPr>
+                                    <m:e>
+                                      <m:r>
+                                        <a:rPr lang="en-US" i="1">
+                                          <a:latin typeface="Cambria Math" panose="02040503050406030204" pitchFamily="18" charset="0"/>
+                                          <a:ea typeface="Cambria Math" panose="02040503050406030204" pitchFamily="18" charset="0"/>
+                                        </a:rPr>
+                                        <m:t>𝐴</m:t>
+                                      </m:r>
+                                    </m:e>
+                                    <m:sub>
+                                      <m:r>
+                                        <a:rPr lang="en-US" i="1">
+                                          <a:latin typeface="Cambria Math" panose="02040503050406030204" pitchFamily="18" charset="0"/>
+                                          <a:ea typeface="Cambria Math" panose="02040503050406030204" pitchFamily="18" charset="0"/>
+                                        </a:rPr>
+                                        <m:t>𝑡</m:t>
+                                      </m:r>
+                                    </m:sub>
+                                  </m:sSub>
+                                  <m:r>
+                                    <a:rPr lang="en-US" i="1">
+                                      <a:latin typeface="Cambria Math" panose="02040503050406030204" pitchFamily="18" charset="0"/>
+                                      <a:ea typeface="Cambria Math" panose="02040503050406030204" pitchFamily="18" charset="0"/>
+                                    </a:rPr>
+                                    <m:t>|</m:t>
+                                  </m:r>
+                                  <m:sSub>
+                                    <m:sSubPr>
+                                      <m:ctrlPr>
+                                        <a:rPr lang="en-US" i="1">
+                                          <a:latin typeface="Cambria Math" panose="02040503050406030204" pitchFamily="18" charset="0"/>
+                                          <a:ea typeface="Cambria Math" panose="02040503050406030204" pitchFamily="18" charset="0"/>
+                                        </a:rPr>
+                                      </m:ctrlPr>
+                                    </m:sSubPr>
+                                    <m:e>
+                                      <m:r>
+                                        <a:rPr lang="en-US" i="1">
+                                          <a:latin typeface="Cambria Math" panose="02040503050406030204" pitchFamily="18" charset="0"/>
+                                          <a:ea typeface="Cambria Math" panose="02040503050406030204" pitchFamily="18" charset="0"/>
+                                        </a:rPr>
+                                        <m:t>𝑆</m:t>
+                                      </m:r>
+                                    </m:e>
+                                    <m:sub>
+                                      <m:r>
+                                        <a:rPr lang="en-US" i="1">
+                                          <a:latin typeface="Cambria Math" panose="02040503050406030204" pitchFamily="18" charset="0"/>
+                                          <a:ea typeface="Cambria Math" panose="02040503050406030204" pitchFamily="18" charset="0"/>
+                                        </a:rPr>
+                                        <m:t>𝑡</m:t>
+                                      </m:r>
+                                    </m:sub>
+                                  </m:sSub>
+                                  <m:r>
+                                    <a:rPr lang="en-US" i="1">
+                                      <a:latin typeface="Cambria Math" panose="02040503050406030204" pitchFamily="18" charset="0"/>
+                                      <a:ea typeface="Cambria Math" panose="02040503050406030204" pitchFamily="18" charset="0"/>
+                                    </a:rPr>
+                                    <m:t>,</m:t>
+                                  </m:r>
+                                  <m:r>
+                                    <a:rPr lang="en-US" b="1" i="1">
+                                      <a:latin typeface="Cambria Math" panose="02040503050406030204" pitchFamily="18" charset="0"/>
+                                      <a:ea typeface="Cambria Math" panose="02040503050406030204" pitchFamily="18" charset="0"/>
+                                    </a:rPr>
+                                    <m:t>𝜽</m:t>
+                                  </m:r>
+                                  <m:r>
+                                    <a:rPr lang="en-US" i="1">
+                                      <a:latin typeface="Cambria Math" panose="02040503050406030204" pitchFamily="18" charset="0"/>
+                                      <a:ea typeface="Cambria Math" panose="02040503050406030204" pitchFamily="18" charset="0"/>
+                                    </a:rPr>
+                                    <m:t>)</m:t>
+                                  </m:r>
+                                </m:den>
+                              </m:f>
                             </m:e>
                           </m:nary>
                         </m:e>
@@ -12075,15 +14652,235 @@
                         </m:e>
                       </m:d>
                     </m:oMath>
+                    <m:oMath xmlns:m="http://schemas.openxmlformats.org/officeDocument/2006/math">
+                      <m:r>
+                        <a:rPr lang="en-US" b="0" i="1" smtClean="0">
+                          <a:latin typeface="Cambria Math" panose="02040503050406030204" pitchFamily="18" charset="0"/>
+                          <a:ea typeface="Cambria Math" panose="02040503050406030204" pitchFamily="18" charset="0"/>
+                        </a:rPr>
+                        <m:t> </m:t>
+                      </m:r>
+                    </m:oMath>
+                    <m:oMath xmlns:m="http://schemas.openxmlformats.org/officeDocument/2006/math">
+                      <m:r>
+                        <m:rPr>
+                          <m:aln/>
+                        </m:rPr>
+                        <a:rPr lang="en-US" i="1">
+                          <a:latin typeface="Cambria Math" panose="02040503050406030204" pitchFamily="18" charset="0"/>
+                          <a:ea typeface="Cambria Math" panose="02040503050406030204" pitchFamily="18" charset="0"/>
+                        </a:rPr>
+                        <m:t>=</m:t>
+                      </m:r>
+                      <m:sSub>
+                        <m:sSubPr>
+                          <m:ctrlPr>
+                            <a:rPr lang="en-US" i="1">
+                              <a:latin typeface="Cambria Math" panose="02040503050406030204" pitchFamily="18" charset="0"/>
+                              <a:ea typeface="Cambria Math" panose="02040503050406030204" pitchFamily="18" charset="0"/>
+                            </a:rPr>
+                          </m:ctrlPr>
+                        </m:sSubPr>
+                        <m:e>
+                          <m:r>
+                            <a:rPr lang="en-US" i="1">
+                              <a:latin typeface="Cambria Math" panose="02040503050406030204" pitchFamily="18" charset="0"/>
+                              <a:ea typeface="Cambria Math" panose="02040503050406030204" pitchFamily="18" charset="0"/>
+                            </a:rPr>
+                            <m:t>𝔼</m:t>
+                          </m:r>
+                        </m:e>
+                        <m:sub>
+                          <m:r>
+                            <a:rPr lang="en-US" i="1">
+                              <a:latin typeface="Cambria Math" panose="02040503050406030204" pitchFamily="18" charset="0"/>
+                              <a:ea typeface="Cambria Math" panose="02040503050406030204" pitchFamily="18" charset="0"/>
+                            </a:rPr>
+                            <m:t>𝜋</m:t>
+                          </m:r>
+                        </m:sub>
+                      </m:sSub>
+                      <m:d>
+                        <m:dPr>
+                          <m:begChr m:val="["/>
+                          <m:endChr m:val="]"/>
+                          <m:ctrlPr>
+                            <a:rPr lang="en-US" i="1">
+                              <a:latin typeface="Cambria Math" panose="02040503050406030204" pitchFamily="18" charset="0"/>
+                              <a:ea typeface="Cambria Math" panose="02040503050406030204" pitchFamily="18" charset="0"/>
+                            </a:rPr>
+                          </m:ctrlPr>
+                        </m:dPr>
+                        <m:e>
+                          <m:sSub>
+                            <m:sSubPr>
+                              <m:ctrlPr>
+                                <a:rPr lang="en-US" i="1">
+                                  <a:latin typeface="Cambria Math" panose="02040503050406030204" pitchFamily="18" charset="0"/>
+                                  <a:ea typeface="Cambria Math" panose="02040503050406030204" pitchFamily="18" charset="0"/>
+                                </a:rPr>
+                              </m:ctrlPr>
+                            </m:sSubPr>
+                            <m:e>
+                              <m:r>
+                                <a:rPr lang="en-US" i="1">
+                                  <a:latin typeface="Cambria Math" panose="02040503050406030204" pitchFamily="18" charset="0"/>
+                                  <a:ea typeface="Cambria Math" panose="02040503050406030204" pitchFamily="18" charset="0"/>
+                                </a:rPr>
+                                <m:t>𝐺</m:t>
+                              </m:r>
+                            </m:e>
+                            <m:sub>
+                              <m:r>
+                                <a:rPr lang="en-US" i="1">
+                                  <a:latin typeface="Cambria Math" panose="02040503050406030204" pitchFamily="18" charset="0"/>
+                                  <a:ea typeface="Cambria Math" panose="02040503050406030204" pitchFamily="18" charset="0"/>
+                                </a:rPr>
+                                <m:t>𝑡</m:t>
+                              </m:r>
+                            </m:sub>
+                          </m:sSub>
+                          <m:func>
+                            <m:funcPr>
+                              <m:ctrlPr>
+                                <a:rPr lang="en-US" b="0" i="1" smtClean="0">
+                                  <a:latin typeface="Cambria Math" panose="02040503050406030204" pitchFamily="18" charset="0"/>
+                                  <a:ea typeface="Cambria Math" panose="02040503050406030204" pitchFamily="18" charset="0"/>
+                                </a:rPr>
+                              </m:ctrlPr>
+                            </m:funcPr>
+                            <m:fName>
+                              <m:r>
+                                <m:rPr>
+                                  <m:sty m:val="p"/>
+                                </m:rPr>
+                                <a:rPr lang="en-US" b="0" i="0" smtClean="0">
+                                  <a:latin typeface="Cambria Math" panose="02040503050406030204" pitchFamily="18" charset="0"/>
+                                  <a:ea typeface="Cambria Math" panose="02040503050406030204" pitchFamily="18" charset="0"/>
+                                </a:rPr>
+                                <m:t>ln</m:t>
+                              </m:r>
+                            </m:fName>
+                            <m:e>
+                              <m:r>
+                                <m:rPr>
+                                  <m:sty m:val="p"/>
+                                </m:rPr>
+                                <a:rPr lang="en-US" i="1">
+                                  <a:latin typeface="Cambria Math" panose="02040503050406030204" pitchFamily="18" charset="0"/>
+                                  <a:ea typeface="Cambria Math" panose="02040503050406030204" pitchFamily="18" charset="0"/>
+                                </a:rPr>
+                                <m:t>∇</m:t>
+                              </m:r>
+                              <m:r>
+                                <a:rPr lang="en-US" i="1">
+                                  <a:latin typeface="Cambria Math" panose="02040503050406030204" pitchFamily="18" charset="0"/>
+                                  <a:ea typeface="Cambria Math" panose="02040503050406030204" pitchFamily="18" charset="0"/>
+                                </a:rPr>
+                                <m:t>𝜋</m:t>
+                              </m:r>
+                              <m:r>
+                                <a:rPr lang="en-US" i="1">
+                                  <a:latin typeface="Cambria Math" panose="02040503050406030204" pitchFamily="18" charset="0"/>
+                                  <a:ea typeface="Cambria Math" panose="02040503050406030204" pitchFamily="18" charset="0"/>
+                                </a:rPr>
+                                <m:t>(</m:t>
+                              </m:r>
+                              <m:sSub>
+                                <m:sSubPr>
+                                  <m:ctrlPr>
+                                    <a:rPr lang="en-US" i="1">
+                                      <a:latin typeface="Cambria Math" panose="02040503050406030204" pitchFamily="18" charset="0"/>
+                                      <a:ea typeface="Cambria Math" panose="02040503050406030204" pitchFamily="18" charset="0"/>
+                                    </a:rPr>
+                                  </m:ctrlPr>
+                                </m:sSubPr>
+                                <m:e>
+                                  <m:r>
+                                    <a:rPr lang="en-US" i="1">
+                                      <a:latin typeface="Cambria Math" panose="02040503050406030204" pitchFamily="18" charset="0"/>
+                                      <a:ea typeface="Cambria Math" panose="02040503050406030204" pitchFamily="18" charset="0"/>
+                                    </a:rPr>
+                                    <m:t>𝐴</m:t>
+                                  </m:r>
+                                </m:e>
+                                <m:sub>
+                                  <m:r>
+                                    <a:rPr lang="en-US" i="1">
+                                      <a:latin typeface="Cambria Math" panose="02040503050406030204" pitchFamily="18" charset="0"/>
+                                      <a:ea typeface="Cambria Math" panose="02040503050406030204" pitchFamily="18" charset="0"/>
+                                    </a:rPr>
+                                    <m:t>𝑡</m:t>
+                                  </m:r>
+                                </m:sub>
+                              </m:sSub>
+                              <m:r>
+                                <a:rPr lang="en-US" i="1">
+                                  <a:latin typeface="Cambria Math" panose="02040503050406030204" pitchFamily="18" charset="0"/>
+                                  <a:ea typeface="Cambria Math" panose="02040503050406030204" pitchFamily="18" charset="0"/>
+                                </a:rPr>
+                                <m:t>|</m:t>
+                              </m:r>
+                              <m:sSub>
+                                <m:sSubPr>
+                                  <m:ctrlPr>
+                                    <a:rPr lang="en-US" i="1">
+                                      <a:latin typeface="Cambria Math" panose="02040503050406030204" pitchFamily="18" charset="0"/>
+                                      <a:ea typeface="Cambria Math" panose="02040503050406030204" pitchFamily="18" charset="0"/>
+                                    </a:rPr>
+                                  </m:ctrlPr>
+                                </m:sSubPr>
+                                <m:e>
+                                  <m:r>
+                                    <a:rPr lang="en-US" i="1">
+                                      <a:latin typeface="Cambria Math" panose="02040503050406030204" pitchFamily="18" charset="0"/>
+                                      <a:ea typeface="Cambria Math" panose="02040503050406030204" pitchFamily="18" charset="0"/>
+                                    </a:rPr>
+                                    <m:t>𝑆</m:t>
+                                  </m:r>
+                                </m:e>
+                                <m:sub>
+                                  <m:r>
+                                    <a:rPr lang="en-US" i="1">
+                                      <a:latin typeface="Cambria Math" panose="02040503050406030204" pitchFamily="18" charset="0"/>
+                                      <a:ea typeface="Cambria Math" panose="02040503050406030204" pitchFamily="18" charset="0"/>
+                                    </a:rPr>
+                                    <m:t>𝑡</m:t>
+                                  </m:r>
+                                </m:sub>
+                              </m:sSub>
+                              <m:r>
+                                <a:rPr lang="en-US" i="1">
+                                  <a:latin typeface="Cambria Math" panose="02040503050406030204" pitchFamily="18" charset="0"/>
+                                  <a:ea typeface="Cambria Math" panose="02040503050406030204" pitchFamily="18" charset="0"/>
+                                </a:rPr>
+                                <m:t>,</m:t>
+                              </m:r>
+                              <m:r>
+                                <a:rPr lang="en-US" b="1" i="1">
+                                  <a:latin typeface="Cambria Math" panose="02040503050406030204" pitchFamily="18" charset="0"/>
+                                  <a:ea typeface="Cambria Math" panose="02040503050406030204" pitchFamily="18" charset="0"/>
+                                </a:rPr>
+                                <m:t>𝜽</m:t>
+                              </m:r>
+                              <m:r>
+                                <a:rPr lang="en-US" b="1" i="1" smtClean="0">
+                                  <a:latin typeface="Cambria Math" panose="02040503050406030204" pitchFamily="18" charset="0"/>
+                                  <a:ea typeface="Cambria Math" panose="02040503050406030204" pitchFamily="18" charset="0"/>
+                                </a:rPr>
+                                <m:t>)</m:t>
+                              </m:r>
+                            </m:e>
+                          </m:func>
+                        </m:e>
+                      </m:d>
+                    </m:oMath>
                   </m:oMathPara>
                 </a14:m>
-                <a:br>
-                  <a:rPr lang="en-US" i="1" dirty="0">
-                    <a:latin typeface="Cambria Math" panose="02040503050406030204" pitchFamily="18" charset="0"/>
-                    <a:ea typeface="Cambria Math" panose="02040503050406030204" pitchFamily="18" charset="0"/>
-                  </a:rPr>
-                </a:br>
-                <a:endParaRPr lang="en-US" dirty="0"/>
+                <a:endParaRPr lang="en-US" i="1" dirty="0">
+                  <a:latin typeface="Cambria Math" panose="02040503050406030204" pitchFamily="18" charset="0"/>
+                  <a:ea typeface="Cambria Math" panose="02040503050406030204" pitchFamily="18" charset="0"/>
+                </a:endParaRPr>
               </a:p>
             </p:txBody>
           </p:sp>
@@ -12107,13 +14904,13 @@
             </p:nvSpPr>
             <p:spPr>
               <a:xfrm>
-                <a:off x="838200" y="1397331"/>
-                <a:ext cx="4878545" cy="2218388"/>
+                <a:off x="838199" y="2237959"/>
+                <a:ext cx="6176853" cy="3298764"/>
               </a:xfrm>
               <a:blipFill>
                 <a:blip r:embed="rId2"/>
                 <a:stretch>
-                  <a:fillRect/>
+                  <a:fillRect r="-3550"/>
                 </a:stretch>
               </a:blipFill>
             </p:spPr>
@@ -12132,36 +14929,6 @@
           </p:sp>
         </mc:Fallback>
       </mc:AlternateContent>
-      <p:pic>
-        <p:nvPicPr>
-          <p:cNvPr id="5" name="Picture 4">
-            <a:extLst>
-              <a:ext uri="{FF2B5EF4-FFF2-40B4-BE49-F238E27FC236}">
-                <a16:creationId xmlns:a16="http://schemas.microsoft.com/office/drawing/2014/main" id="{BF5430A8-A3FA-2729-7EE3-21CBB91D5AAF}"/>
-              </a:ext>
-            </a:extLst>
-          </p:cNvPr>
-          <p:cNvPicPr>
-            <a:picLocks noChangeAspect="1"/>
-          </p:cNvPicPr>
-          <p:nvPr/>
-        </p:nvPicPr>
-        <p:blipFill>
-          <a:blip r:embed="rId3"/>
-          <a:stretch>
-            <a:fillRect/>
-          </a:stretch>
-        </p:blipFill>
-        <p:spPr>
-          <a:xfrm>
-            <a:off x="789339" y="3651960"/>
-            <a:ext cx="8158842" cy="3006882"/>
-          </a:xfrm>
-          <a:prstGeom prst="rect">
-            <a:avLst/>
-          </a:prstGeom>
-        </p:spPr>
-      </p:pic>
       <mc:AlternateContent xmlns:mc="http://schemas.openxmlformats.org/markup-compatibility/2006">
         <mc:Choice xmlns:a14="http://schemas.microsoft.com/office/drawing/2010/main" Requires="a14">
           <p:sp>
@@ -12178,7 +14945,7 @@
             </p:nvSpPr>
             <p:spPr>
               <a:xfrm>
-                <a:off x="5344470" y="2137193"/>
+                <a:off x="7305887" y="3156676"/>
                 <a:ext cx="3783243" cy="369332"/>
               </a:xfrm>
               <a:prstGeom prst="rect">
@@ -12276,16 +15043,16 @@
             </p:nvSpPr>
             <p:spPr>
               <a:xfrm>
-                <a:off x="5344470" y="2137193"/>
+                <a:off x="7305887" y="3156676"/>
                 <a:ext cx="3783243" cy="369332"/>
               </a:xfrm>
               <a:prstGeom prst="rect">
                 <a:avLst/>
               </a:prstGeom>
               <a:blipFill>
-                <a:blip r:embed="rId4"/>
+                <a:blip r:embed="rId3"/>
                 <a:stretch>
-                  <a:fillRect l="-1452" t="-8333" b="-28333"/>
+                  <a:fillRect l="-1288" t="-8333" b="-28333"/>
                 </a:stretch>
               </a:blipFill>
             </p:spPr>
@@ -12320,7 +15087,7 @@
             </p:nvSpPr>
             <p:spPr>
               <a:xfrm>
-                <a:off x="5344469" y="3021374"/>
+                <a:off x="7305887" y="4280574"/>
                 <a:ext cx="3783243" cy="369332"/>
               </a:xfrm>
               <a:prstGeom prst="rect">
@@ -12619,16 +15386,16 @@
             </p:nvSpPr>
             <p:spPr>
               <a:xfrm>
-                <a:off x="5344469" y="3021374"/>
+                <a:off x="7305887" y="4280574"/>
                 <a:ext cx="3783243" cy="369332"/>
               </a:xfrm>
               <a:prstGeom prst="rect">
                 <a:avLst/>
               </a:prstGeom>
               <a:blipFill>
-                <a:blip r:embed="rId5"/>
+                <a:blip r:embed="rId4"/>
                 <a:stretch>
-                  <a:fillRect l="-1452" t="-8333" b="-28333"/>
+                  <a:fillRect l="-1288" t="-6557" b="-26230"/>
                 </a:stretch>
               </a:blipFill>
             </p:spPr>
@@ -12651,10 +15418,743 @@
         <mc:Choice xmlns:a14="http://schemas.microsoft.com/office/drawing/2010/main" Requires="a14">
           <p:sp>
             <p:nvSpPr>
-              <p:cNvPr id="8" name="Speech Bubble: Rectangle with Corners Rounded 7">
+              <p:cNvPr id="4" name="TextBox 3">
                 <a:extLst>
                   <a:ext uri="{FF2B5EF4-FFF2-40B4-BE49-F238E27FC236}">
-                    <a16:creationId xmlns:a16="http://schemas.microsoft.com/office/drawing/2014/main" id="{9B37B05F-CD4B-9303-6D63-7FCA7489EA9C}"/>
+                    <a16:creationId xmlns:a16="http://schemas.microsoft.com/office/drawing/2014/main" id="{D4AA782C-5593-DAF1-4AC5-86DC24584F2B}"/>
+                  </a:ext>
+                </a:extLst>
+              </p:cNvPr>
+              <p:cNvSpPr txBox="1"/>
+              <p:nvPr/>
+            </p:nvSpPr>
+            <p:spPr>
+              <a:xfrm>
+                <a:off x="7305887" y="2391815"/>
+                <a:ext cx="4183439" cy="369332"/>
+              </a:xfrm>
+              <a:prstGeom prst="rect">
+                <a:avLst/>
+              </a:prstGeom>
+              <a:noFill/>
+            </p:spPr>
+            <p:txBody>
+              <a:bodyPr wrap="square" rtlCol="0">
+                <a:spAutoFit/>
+              </a:bodyPr>
+              <a:lstStyle/>
+              <a:p>
+                <a:r>
+                  <a:rPr lang="en-US" dirty="0"/>
+                  <a:t>(replace </a:t>
+                </a:r>
+                <a14:m>
+                  <m:oMath xmlns:m="http://schemas.openxmlformats.org/officeDocument/2006/math">
+                    <m:r>
+                      <a:rPr lang="en-US" b="0" i="1" smtClean="0">
+                        <a:latin typeface="Cambria Math" panose="02040503050406030204" pitchFamily="18" charset="0"/>
+                      </a:rPr>
+                      <m:t>𝑠</m:t>
+                    </m:r>
+                  </m:oMath>
+                </a14:m>
+                <a:r>
+                  <a:rPr lang="en-US" dirty="0"/>
+                  <a:t> by the sampled </a:t>
+                </a:r>
+                <a14:m>
+                  <m:oMath xmlns:m="http://schemas.openxmlformats.org/officeDocument/2006/math">
+                    <m:sSub>
+                      <m:sSubPr>
+                        <m:ctrlPr>
+                          <a:rPr lang="en-US" i="1">
+                            <a:latin typeface="Cambria Math" panose="02040503050406030204" pitchFamily="18" charset="0"/>
+                          </a:rPr>
+                        </m:ctrlPr>
+                      </m:sSubPr>
+                      <m:e>
+                        <m:r>
+                          <a:rPr lang="en-US" b="0" i="1" smtClean="0">
+                            <a:latin typeface="Cambria Math" panose="02040503050406030204" pitchFamily="18" charset="0"/>
+                          </a:rPr>
+                          <m:t>𝑆</m:t>
+                        </m:r>
+                      </m:e>
+                      <m:sub>
+                        <m:r>
+                          <a:rPr lang="en-US" i="1">
+                            <a:latin typeface="Cambria Math" panose="02040503050406030204" pitchFamily="18" charset="0"/>
+                          </a:rPr>
+                          <m:t>𝑡</m:t>
+                        </m:r>
+                      </m:sub>
+                    </m:sSub>
+                    <m:r>
+                      <a:rPr lang="en-US" i="1">
+                        <a:latin typeface="Cambria Math" panose="02040503050406030204" pitchFamily="18" charset="0"/>
+                      </a:rPr>
+                      <m:t>~</m:t>
+                    </m:r>
+                    <m:r>
+                      <a:rPr lang="en-US" b="0" i="1" smtClean="0">
+                        <a:latin typeface="Cambria Math" panose="02040503050406030204" pitchFamily="18" charset="0"/>
+                      </a:rPr>
+                      <m:t>𝜇</m:t>
+                    </m:r>
+                  </m:oMath>
+                </a14:m>
+                <a:r>
+                  <a:rPr lang="en-US" dirty="0"/>
+                  <a:t>)</a:t>
+                </a:r>
+              </a:p>
+            </p:txBody>
+          </p:sp>
+        </mc:Choice>
+        <mc:Fallback>
+          <p:sp>
+            <p:nvSpPr>
+              <p:cNvPr id="4" name="TextBox 3">
+                <a:extLst>
+                  <a:ext uri="{FF2B5EF4-FFF2-40B4-BE49-F238E27FC236}">
+                    <a16:creationId xmlns:a16="http://schemas.microsoft.com/office/drawing/2014/main" id="{D4AA782C-5593-DAF1-4AC5-86DC24584F2B}"/>
+                  </a:ext>
+                </a:extLst>
+              </p:cNvPr>
+              <p:cNvSpPr txBox="1">
+                <a:spLocks noRot="1" noChangeAspect="1" noMove="1" noResize="1" noEditPoints="1" noAdjustHandles="1" noChangeArrowheads="1" noChangeShapeType="1" noTextEdit="1"/>
+              </p:cNvSpPr>
+              <p:nvPr/>
+            </p:nvSpPr>
+            <p:spPr>
+              <a:xfrm>
+                <a:off x="7305887" y="2391815"/>
+                <a:ext cx="4183439" cy="369332"/>
+              </a:xfrm>
+              <a:prstGeom prst="rect">
+                <a:avLst/>
+              </a:prstGeom>
+              <a:blipFill>
+                <a:blip r:embed="rId5"/>
+                <a:stretch>
+                  <a:fillRect l="-1164" t="-6557" b="-26230"/>
+                </a:stretch>
+              </a:blipFill>
+            </p:spPr>
+            <p:txBody>
+              <a:bodyPr/>
+              <a:lstStyle/>
+              <a:p>
+                <a:r>
+                  <a:rPr lang="en-US">
+                    <a:noFill/>
+                  </a:rPr>
+                  <a:t> </a:t>
+                </a:r>
+              </a:p>
+            </p:txBody>
+          </p:sp>
+        </mc:Fallback>
+      </mc:AlternateContent>
+      <mc:AlternateContent xmlns:mc="http://schemas.openxmlformats.org/markup-compatibility/2006">
+        <mc:Choice xmlns:a14="http://schemas.microsoft.com/office/drawing/2010/main" Requires="a14">
+          <p:sp>
+            <p:nvSpPr>
+              <p:cNvPr id="9" name="Content Placeholder 2">
+                <a:extLst>
+                  <a:ext uri="{FF2B5EF4-FFF2-40B4-BE49-F238E27FC236}">
+                    <a16:creationId xmlns:a16="http://schemas.microsoft.com/office/drawing/2014/main" id="{7250DF70-B205-0F67-A022-8658B6D83F38}"/>
+                  </a:ext>
+                </a:extLst>
+              </p:cNvPr>
+              <p:cNvSpPr txBox="1">
+                <a:spLocks/>
+              </p:cNvSpPr>
+              <p:nvPr/>
+            </p:nvSpPr>
+            <p:spPr>
+              <a:xfrm>
+                <a:off x="838199" y="1129111"/>
+                <a:ext cx="10169502" cy="2304802"/>
+              </a:xfrm>
+              <a:prstGeom prst="rect">
+                <a:avLst/>
+              </a:prstGeom>
+            </p:spPr>
+            <p:txBody>
+              <a:bodyPr vert="horz" lIns="91440" tIns="45720" rIns="91440" bIns="45720" rtlCol="0">
+                <a:normAutofit/>
+              </a:bodyPr>
+              <a:lstStyle>
+                <a:lvl1pPr marL="228600" indent="-228600" algn="l" defTabSz="914400" rtl="0" eaLnBrk="1" latinLnBrk="0" hangingPunct="1">
+                  <a:lnSpc>
+                    <a:spcPct val="90000"/>
+                  </a:lnSpc>
+                  <a:spcBef>
+                    <a:spcPts val="1000"/>
+                  </a:spcBef>
+                  <a:buFont typeface="Arial" panose="020B0604020202020204" pitchFamily="34" charset="0"/>
+                  <a:buChar char="•"/>
+                  <a:defRPr sz="2800" kern="1200">
+                    <a:solidFill>
+                      <a:schemeClr val="tx1"/>
+                    </a:solidFill>
+                    <a:latin typeface="+mn-lt"/>
+                    <a:ea typeface="+mn-ea"/>
+                    <a:cs typeface="+mn-cs"/>
+                  </a:defRPr>
+                </a:lvl1pPr>
+                <a:lvl2pPr marL="685800" indent="-228600" algn="l" defTabSz="914400" rtl="0" eaLnBrk="1" latinLnBrk="0" hangingPunct="1">
+                  <a:lnSpc>
+                    <a:spcPct val="90000"/>
+                  </a:lnSpc>
+                  <a:spcBef>
+                    <a:spcPts val="500"/>
+                  </a:spcBef>
+                  <a:buFont typeface="Arial" panose="020B0604020202020204" pitchFamily="34" charset="0"/>
+                  <a:buChar char="•"/>
+                  <a:defRPr sz="2400" kern="1200">
+                    <a:solidFill>
+                      <a:schemeClr val="tx1"/>
+                    </a:solidFill>
+                    <a:latin typeface="+mn-lt"/>
+                    <a:ea typeface="+mn-ea"/>
+                    <a:cs typeface="+mn-cs"/>
+                  </a:defRPr>
+                </a:lvl2pPr>
+                <a:lvl3pPr marL="1143000" indent="-228600" algn="l" defTabSz="914400" rtl="0" eaLnBrk="1" latinLnBrk="0" hangingPunct="1">
+                  <a:lnSpc>
+                    <a:spcPct val="90000"/>
+                  </a:lnSpc>
+                  <a:spcBef>
+                    <a:spcPts val="500"/>
+                  </a:spcBef>
+                  <a:buFont typeface="Arial" panose="020B0604020202020204" pitchFamily="34" charset="0"/>
+                  <a:buChar char="•"/>
+                  <a:defRPr sz="2000" kern="1200">
+                    <a:solidFill>
+                      <a:schemeClr val="tx1"/>
+                    </a:solidFill>
+                    <a:latin typeface="+mn-lt"/>
+                    <a:ea typeface="+mn-ea"/>
+                    <a:cs typeface="+mn-cs"/>
+                  </a:defRPr>
+                </a:lvl3pPr>
+                <a:lvl4pPr marL="1600200" indent="-228600" algn="l" defTabSz="914400" rtl="0" eaLnBrk="1" latinLnBrk="0" hangingPunct="1">
+                  <a:lnSpc>
+                    <a:spcPct val="90000"/>
+                  </a:lnSpc>
+                  <a:spcBef>
+                    <a:spcPts val="500"/>
+                  </a:spcBef>
+                  <a:buFont typeface="Arial" panose="020B0604020202020204" pitchFamily="34" charset="0"/>
+                  <a:buChar char="•"/>
+                  <a:defRPr sz="1800" kern="1200">
+                    <a:solidFill>
+                      <a:schemeClr val="tx1"/>
+                    </a:solidFill>
+                    <a:latin typeface="+mn-lt"/>
+                    <a:ea typeface="+mn-ea"/>
+                    <a:cs typeface="+mn-cs"/>
+                  </a:defRPr>
+                </a:lvl4pPr>
+                <a:lvl5pPr marL="2057400" indent="-228600" algn="l" defTabSz="914400" rtl="0" eaLnBrk="1" latinLnBrk="0" hangingPunct="1">
+                  <a:lnSpc>
+                    <a:spcPct val="90000"/>
+                  </a:lnSpc>
+                  <a:spcBef>
+                    <a:spcPts val="500"/>
+                  </a:spcBef>
+                  <a:buFont typeface="Arial" panose="020B0604020202020204" pitchFamily="34" charset="0"/>
+                  <a:buChar char="•"/>
+                  <a:defRPr sz="1800" kern="1200">
+                    <a:solidFill>
+                      <a:schemeClr val="tx1"/>
+                    </a:solidFill>
+                    <a:latin typeface="+mn-lt"/>
+                    <a:ea typeface="+mn-ea"/>
+                    <a:cs typeface="+mn-cs"/>
+                  </a:defRPr>
+                </a:lvl5pPr>
+                <a:lvl6pPr marL="2514600" indent="-228600" algn="l" defTabSz="914400" rtl="0" eaLnBrk="1" latinLnBrk="0" hangingPunct="1">
+                  <a:lnSpc>
+                    <a:spcPct val="90000"/>
+                  </a:lnSpc>
+                  <a:spcBef>
+                    <a:spcPts val="500"/>
+                  </a:spcBef>
+                  <a:buFont typeface="Arial" panose="020B0604020202020204" pitchFamily="34" charset="0"/>
+                  <a:buChar char="•"/>
+                  <a:defRPr sz="1800" kern="1200">
+                    <a:solidFill>
+                      <a:schemeClr val="tx1"/>
+                    </a:solidFill>
+                    <a:latin typeface="+mn-lt"/>
+                    <a:ea typeface="+mn-ea"/>
+                    <a:cs typeface="+mn-cs"/>
+                  </a:defRPr>
+                </a:lvl6pPr>
+                <a:lvl7pPr marL="2971800" indent="-228600" algn="l" defTabSz="914400" rtl="0" eaLnBrk="1" latinLnBrk="0" hangingPunct="1">
+                  <a:lnSpc>
+                    <a:spcPct val="90000"/>
+                  </a:lnSpc>
+                  <a:spcBef>
+                    <a:spcPts val="500"/>
+                  </a:spcBef>
+                  <a:buFont typeface="Arial" panose="020B0604020202020204" pitchFamily="34" charset="0"/>
+                  <a:buChar char="•"/>
+                  <a:defRPr sz="1800" kern="1200">
+                    <a:solidFill>
+                      <a:schemeClr val="tx1"/>
+                    </a:solidFill>
+                    <a:latin typeface="+mn-lt"/>
+                    <a:ea typeface="+mn-ea"/>
+                    <a:cs typeface="+mn-cs"/>
+                  </a:defRPr>
+                </a:lvl7pPr>
+                <a:lvl8pPr marL="3429000" indent="-228600" algn="l" defTabSz="914400" rtl="0" eaLnBrk="1" latinLnBrk="0" hangingPunct="1">
+                  <a:lnSpc>
+                    <a:spcPct val="90000"/>
+                  </a:lnSpc>
+                  <a:spcBef>
+                    <a:spcPts val="500"/>
+                  </a:spcBef>
+                  <a:buFont typeface="Arial" panose="020B0604020202020204" pitchFamily="34" charset="0"/>
+                  <a:buChar char="•"/>
+                  <a:defRPr sz="1800" kern="1200">
+                    <a:solidFill>
+                      <a:schemeClr val="tx1"/>
+                    </a:solidFill>
+                    <a:latin typeface="+mn-lt"/>
+                    <a:ea typeface="+mn-ea"/>
+                    <a:cs typeface="+mn-cs"/>
+                  </a:defRPr>
+                </a:lvl8pPr>
+                <a:lvl9pPr marL="3886200" indent="-228600" algn="l" defTabSz="914400" rtl="0" eaLnBrk="1" latinLnBrk="0" hangingPunct="1">
+                  <a:lnSpc>
+                    <a:spcPct val="90000"/>
+                  </a:lnSpc>
+                  <a:spcBef>
+                    <a:spcPts val="500"/>
+                  </a:spcBef>
+                  <a:buFont typeface="Arial" panose="020B0604020202020204" pitchFamily="34" charset="0"/>
+                  <a:buChar char="•"/>
+                  <a:defRPr sz="1800" kern="1200">
+                    <a:solidFill>
+                      <a:schemeClr val="tx1"/>
+                    </a:solidFill>
+                    <a:latin typeface="+mn-lt"/>
+                    <a:ea typeface="+mn-ea"/>
+                    <a:cs typeface="+mn-cs"/>
+                  </a:defRPr>
+                </a:lvl9pPr>
+              </a:lstStyle>
+              <a:p>
+                <a:pPr marL="0" indent="0">
+                  <a:buNone/>
+                </a:pPr>
+                <a:r>
+                  <a:rPr lang="en-US" dirty="0"/>
+                  <a:t>Normal stochastic gradient-ascent algorithm update:</a:t>
+                </a:r>
+                <a:br>
+                  <a:rPr lang="en-US" dirty="0"/>
+                </a:br>
+                <a:r>
+                  <a:rPr lang="en-US" dirty="0"/>
+                  <a:t>			</a:t>
+                </a:r>
+                <a14:m>
+                  <m:oMath xmlns:m="http://schemas.openxmlformats.org/officeDocument/2006/math">
+                    <m:sSub>
+                      <m:sSubPr>
+                        <m:ctrlPr>
+                          <a:rPr lang="en-US" i="1" smtClean="0">
+                            <a:latin typeface="Cambria Math" panose="02040503050406030204" pitchFamily="18" charset="0"/>
+                          </a:rPr>
+                        </m:ctrlPr>
+                      </m:sSubPr>
+                      <m:e>
+                        <m:r>
+                          <a:rPr lang="en-US" b="1" i="1">
+                            <a:latin typeface="Cambria Math" panose="02040503050406030204" pitchFamily="18" charset="0"/>
+                          </a:rPr>
+                          <m:t>𝜽</m:t>
+                        </m:r>
+                      </m:e>
+                      <m:sub>
+                        <m:r>
+                          <a:rPr lang="en-US" i="1">
+                            <a:latin typeface="Cambria Math" panose="02040503050406030204" pitchFamily="18" charset="0"/>
+                          </a:rPr>
+                          <m:t>𝑡</m:t>
+                        </m:r>
+                        <m:r>
+                          <a:rPr lang="en-US" i="1">
+                            <a:latin typeface="Cambria Math" panose="02040503050406030204" pitchFamily="18" charset="0"/>
+                          </a:rPr>
+                          <m:t>+1</m:t>
+                        </m:r>
+                      </m:sub>
+                    </m:sSub>
+                    <m:r>
+                      <a:rPr lang="en-US" i="1">
+                        <a:latin typeface="Cambria Math" panose="02040503050406030204" pitchFamily="18" charset="0"/>
+                      </a:rPr>
+                      <m:t>=</m:t>
+                    </m:r>
+                    <m:sSub>
+                      <m:sSubPr>
+                        <m:ctrlPr>
+                          <a:rPr lang="en-US" i="1">
+                            <a:latin typeface="Cambria Math" panose="02040503050406030204" pitchFamily="18" charset="0"/>
+                          </a:rPr>
+                        </m:ctrlPr>
+                      </m:sSubPr>
+                      <m:e>
+                        <m:r>
+                          <a:rPr lang="en-US" b="1" i="1">
+                            <a:latin typeface="Cambria Math" panose="02040503050406030204" pitchFamily="18" charset="0"/>
+                          </a:rPr>
+                          <m:t>𝜽</m:t>
+                        </m:r>
+                      </m:e>
+                      <m:sub>
+                        <m:r>
+                          <a:rPr lang="en-US" i="1">
+                            <a:latin typeface="Cambria Math" panose="02040503050406030204" pitchFamily="18" charset="0"/>
+                          </a:rPr>
+                          <m:t>𝑡</m:t>
+                        </m:r>
+                      </m:sub>
+                    </m:sSub>
+                    <m:r>
+                      <a:rPr lang="en-US" i="1">
+                        <a:latin typeface="Cambria Math" panose="02040503050406030204" pitchFamily="18" charset="0"/>
+                      </a:rPr>
+                      <m:t>+</m:t>
+                    </m:r>
+                    <m:r>
+                      <a:rPr lang="en-US" i="1">
+                        <a:latin typeface="Cambria Math" panose="02040503050406030204" pitchFamily="18" charset="0"/>
+                      </a:rPr>
+                      <m:t>𝛼</m:t>
+                    </m:r>
+                  </m:oMath>
+                </a14:m>
+                <a:r>
+                  <a:rPr lang="en-US" dirty="0">
+                    <a:ea typeface="Cambria Math" panose="02040503050406030204" pitchFamily="18" charset="0"/>
+                  </a:rPr>
+                  <a:t> </a:t>
+                </a:r>
+                <a14:m>
+                  <m:oMath xmlns:m="http://schemas.openxmlformats.org/officeDocument/2006/math">
+                    <m:r>
+                      <m:rPr>
+                        <m:sty m:val="p"/>
+                      </m:rPr>
+                      <a:rPr lang="en-US" i="1">
+                        <a:latin typeface="Cambria Math" panose="02040503050406030204" pitchFamily="18" charset="0"/>
+                        <a:ea typeface="Cambria Math" panose="02040503050406030204" pitchFamily="18" charset="0"/>
+                      </a:rPr>
+                      <m:t>∇</m:t>
+                    </m:r>
+                    <m:r>
+                      <a:rPr lang="en-US" i="1">
+                        <a:latin typeface="Cambria Math" panose="02040503050406030204" pitchFamily="18" charset="0"/>
+                        <a:ea typeface="Cambria Math" panose="02040503050406030204" pitchFamily="18" charset="0"/>
+                      </a:rPr>
+                      <m:t>𝐽</m:t>
+                    </m:r>
+                    <m:d>
+                      <m:dPr>
+                        <m:ctrlPr>
+                          <a:rPr lang="en-US" i="1">
+                            <a:latin typeface="Cambria Math" panose="02040503050406030204" pitchFamily="18" charset="0"/>
+                            <a:ea typeface="Cambria Math" panose="02040503050406030204" pitchFamily="18" charset="0"/>
+                          </a:rPr>
+                        </m:ctrlPr>
+                      </m:dPr>
+                      <m:e>
+                        <m:sSub>
+                          <m:sSubPr>
+                            <m:ctrlPr>
+                              <a:rPr lang="en-US" i="1">
+                                <a:latin typeface="Cambria Math" panose="02040503050406030204" pitchFamily="18" charset="0"/>
+                                <a:ea typeface="Cambria Math" panose="02040503050406030204" pitchFamily="18" charset="0"/>
+                              </a:rPr>
+                            </m:ctrlPr>
+                          </m:sSubPr>
+                          <m:e>
+                            <m:r>
+                              <a:rPr lang="en-US" b="1" i="1">
+                                <a:latin typeface="Cambria Math" panose="02040503050406030204" pitchFamily="18" charset="0"/>
+                                <a:ea typeface="Cambria Math" panose="02040503050406030204" pitchFamily="18" charset="0"/>
+                              </a:rPr>
+                              <m:t>𝜽</m:t>
+                            </m:r>
+                          </m:e>
+                          <m:sub>
+                            <m:r>
+                              <a:rPr lang="en-US" i="1">
+                                <a:latin typeface="Cambria Math" panose="02040503050406030204" pitchFamily="18" charset="0"/>
+                                <a:ea typeface="Cambria Math" panose="02040503050406030204" pitchFamily="18" charset="0"/>
+                              </a:rPr>
+                              <m:t>𝑡</m:t>
+                            </m:r>
+                          </m:sub>
+                        </m:sSub>
+                      </m:e>
+                    </m:d>
+                  </m:oMath>
+                </a14:m>
+                <a:endParaRPr lang="en-US" b="0" dirty="0">
+                  <a:ea typeface="Cambria Math" panose="02040503050406030204" pitchFamily="18" charset="0"/>
+                </a:endParaRPr>
+              </a:p>
+              <a:p>
+                <a:pPr marL="0" indent="0">
+                  <a:buNone/>
+                </a:pPr>
+                <a:endParaRPr lang="en-US" i="1" dirty="0">
+                  <a:latin typeface="Cambria Math" panose="02040503050406030204" pitchFamily="18" charset="0"/>
+                  <a:ea typeface="Cambria Math" panose="02040503050406030204" pitchFamily="18" charset="0"/>
+                </a:endParaRPr>
+              </a:p>
+            </p:txBody>
+          </p:sp>
+        </mc:Choice>
+        <mc:Fallback>
+          <p:sp>
+            <p:nvSpPr>
+              <p:cNvPr id="9" name="Content Placeholder 2">
+                <a:extLst>
+                  <a:ext uri="{FF2B5EF4-FFF2-40B4-BE49-F238E27FC236}">
+                    <a16:creationId xmlns:a16="http://schemas.microsoft.com/office/drawing/2014/main" id="{7250DF70-B205-0F67-A022-8658B6D83F38}"/>
+                  </a:ext>
+                </a:extLst>
+              </p:cNvPr>
+              <p:cNvSpPr txBox="1">
+                <a:spLocks noRot="1" noChangeAspect="1" noMove="1" noResize="1" noEditPoints="1" noAdjustHandles="1" noChangeArrowheads="1" noChangeShapeType="1" noTextEdit="1"/>
+              </p:cNvSpPr>
+              <p:nvPr/>
+            </p:nvSpPr>
+            <p:spPr>
+              <a:xfrm>
+                <a:off x="838199" y="1129111"/>
+                <a:ext cx="10169502" cy="2304802"/>
+              </a:xfrm>
+              <a:prstGeom prst="rect">
+                <a:avLst/>
+              </a:prstGeom>
+              <a:blipFill>
+                <a:blip r:embed="rId6"/>
+                <a:stretch>
+                  <a:fillRect l="-1198" t="-4497"/>
+                </a:stretch>
+              </a:blipFill>
+            </p:spPr>
+            <p:txBody>
+              <a:bodyPr/>
+              <a:lstStyle/>
+              <a:p>
+                <a:r>
+                  <a:rPr lang="en-US">
+                    <a:noFill/>
+                  </a:rPr>
+                  <a:t> </a:t>
+                </a:r>
+              </a:p>
+            </p:txBody>
+          </p:sp>
+        </mc:Fallback>
+      </mc:AlternateContent>
+      <mc:AlternateContent xmlns:mc="http://schemas.openxmlformats.org/markup-compatibility/2006">
+        <mc:Choice xmlns:a14="http://schemas.microsoft.com/office/drawing/2010/main" Requires="a14">
+          <p:sp>
+            <p:nvSpPr>
+              <p:cNvPr id="10" name="TextBox 9">
+                <a:extLst>
+                  <a:ext uri="{FF2B5EF4-FFF2-40B4-BE49-F238E27FC236}">
+                    <a16:creationId xmlns:a16="http://schemas.microsoft.com/office/drawing/2014/main" id="{BF45850D-3559-27BA-E9D9-01CB3EECB739}"/>
+                  </a:ext>
+                </a:extLst>
+              </p:cNvPr>
+              <p:cNvSpPr txBox="1"/>
+              <p:nvPr/>
+            </p:nvSpPr>
+            <p:spPr>
+              <a:xfrm>
+                <a:off x="7305887" y="5045435"/>
+                <a:ext cx="3783243" cy="491288"/>
+              </a:xfrm>
+              <a:prstGeom prst="rect">
+                <a:avLst/>
+              </a:prstGeom>
+              <a:noFill/>
+            </p:spPr>
+            <p:txBody>
+              <a:bodyPr wrap="square" rtlCol="0">
+                <a:spAutoFit/>
+              </a:bodyPr>
+              <a:lstStyle/>
+              <a:p>
+                <a:r>
+                  <a:rPr lang="en-US" dirty="0"/>
+                  <a:t>(because </a:t>
+                </a:r>
+                <a14:m>
+                  <m:oMath xmlns:m="http://schemas.openxmlformats.org/officeDocument/2006/math">
+                    <m:r>
+                      <m:rPr>
+                        <m:sty m:val="p"/>
+                      </m:rPr>
+                      <a:rPr lang="en-US" i="1">
+                        <a:latin typeface="Cambria Math" panose="02040503050406030204" pitchFamily="18" charset="0"/>
+                        <a:ea typeface="Cambria Math" panose="02040503050406030204" pitchFamily="18" charset="0"/>
+                      </a:rPr>
+                      <m:t>∇</m:t>
+                    </m:r>
+                    <m:func>
+                      <m:funcPr>
+                        <m:ctrlPr>
+                          <a:rPr lang="en-US" i="1">
+                            <a:latin typeface="Cambria Math" panose="02040503050406030204" pitchFamily="18" charset="0"/>
+                            <a:ea typeface="Cambria Math" panose="02040503050406030204" pitchFamily="18" charset="0"/>
+                          </a:rPr>
+                        </m:ctrlPr>
+                      </m:funcPr>
+                      <m:fName>
+                        <m:r>
+                          <m:rPr>
+                            <m:sty m:val="p"/>
+                          </m:rPr>
+                          <a:rPr lang="en-US">
+                            <a:latin typeface="Cambria Math" panose="02040503050406030204" pitchFamily="18" charset="0"/>
+                            <a:ea typeface="Cambria Math" panose="02040503050406030204" pitchFamily="18" charset="0"/>
+                          </a:rPr>
+                          <m:t>ln</m:t>
+                        </m:r>
+                      </m:fName>
+                      <m:e>
+                        <m:r>
+                          <a:rPr lang="en-US" i="1">
+                            <a:latin typeface="Cambria Math" panose="02040503050406030204" pitchFamily="18" charset="0"/>
+                            <a:ea typeface="Cambria Math" panose="02040503050406030204" pitchFamily="18" charset="0"/>
+                          </a:rPr>
+                          <m:t>𝑥</m:t>
+                        </m:r>
+                        <m:r>
+                          <a:rPr lang="en-US" i="1">
+                            <a:latin typeface="Cambria Math" panose="02040503050406030204" pitchFamily="18" charset="0"/>
+                            <a:ea typeface="Cambria Math" panose="02040503050406030204" pitchFamily="18" charset="0"/>
+                          </a:rPr>
+                          <m:t>=</m:t>
+                        </m:r>
+                        <m:f>
+                          <m:fPr>
+                            <m:ctrlPr>
+                              <a:rPr lang="en-US" i="1">
+                                <a:latin typeface="Cambria Math" panose="02040503050406030204" pitchFamily="18" charset="0"/>
+                                <a:ea typeface="Cambria Math" panose="02040503050406030204" pitchFamily="18" charset="0"/>
+                              </a:rPr>
+                            </m:ctrlPr>
+                          </m:fPr>
+                          <m:num>
+                            <m:r>
+                              <m:rPr>
+                                <m:sty m:val="p"/>
+                              </m:rPr>
+                              <a:rPr lang="en-US" i="1">
+                                <a:latin typeface="Cambria Math" panose="02040503050406030204" pitchFamily="18" charset="0"/>
+                                <a:ea typeface="Cambria Math" panose="02040503050406030204" pitchFamily="18" charset="0"/>
+                              </a:rPr>
+                              <m:t>∇</m:t>
+                            </m:r>
+                            <m:r>
+                              <a:rPr lang="en-US" i="1">
+                                <a:latin typeface="Cambria Math" panose="02040503050406030204" pitchFamily="18" charset="0"/>
+                                <a:ea typeface="Cambria Math" panose="02040503050406030204" pitchFamily="18" charset="0"/>
+                              </a:rPr>
+                              <m:t>𝑥</m:t>
+                            </m:r>
+                          </m:num>
+                          <m:den>
+                            <m:r>
+                              <a:rPr lang="en-US" i="1">
+                                <a:latin typeface="Cambria Math" panose="02040503050406030204" pitchFamily="18" charset="0"/>
+                                <a:ea typeface="Cambria Math" panose="02040503050406030204" pitchFamily="18" charset="0"/>
+                              </a:rPr>
+                              <m:t>𝑥</m:t>
+                            </m:r>
+                          </m:den>
+                        </m:f>
+                      </m:e>
+                    </m:func>
+                  </m:oMath>
+                </a14:m>
+                <a:r>
+                  <a:rPr lang="en-US" dirty="0"/>
+                  <a:t>)</a:t>
+                </a:r>
+              </a:p>
+            </p:txBody>
+          </p:sp>
+        </mc:Choice>
+        <mc:Fallback>
+          <p:sp>
+            <p:nvSpPr>
+              <p:cNvPr id="10" name="TextBox 9">
+                <a:extLst>
+                  <a:ext uri="{FF2B5EF4-FFF2-40B4-BE49-F238E27FC236}">
+                    <a16:creationId xmlns:a16="http://schemas.microsoft.com/office/drawing/2014/main" id="{BF45850D-3559-27BA-E9D9-01CB3EECB739}"/>
+                  </a:ext>
+                </a:extLst>
+              </p:cNvPr>
+              <p:cNvSpPr txBox="1">
+                <a:spLocks noRot="1" noChangeAspect="1" noMove="1" noResize="1" noEditPoints="1" noAdjustHandles="1" noChangeArrowheads="1" noChangeShapeType="1" noTextEdit="1"/>
+              </p:cNvSpPr>
+              <p:nvPr/>
+            </p:nvSpPr>
+            <p:spPr>
+              <a:xfrm>
+                <a:off x="7305887" y="5045435"/>
+                <a:ext cx="3783243" cy="491288"/>
+              </a:xfrm>
+              <a:prstGeom prst="rect">
+                <a:avLst/>
+              </a:prstGeom>
+              <a:blipFill>
+                <a:blip r:embed="rId7"/>
+                <a:stretch>
+                  <a:fillRect l="-1288" b="-10000"/>
+                </a:stretch>
+              </a:blipFill>
+            </p:spPr>
+            <p:txBody>
+              <a:bodyPr/>
+              <a:lstStyle/>
+              <a:p>
+                <a:r>
+                  <a:rPr lang="en-US">
+                    <a:noFill/>
+                  </a:rPr>
+                  <a:t> </a:t>
+                </a:r>
+              </a:p>
+            </p:txBody>
+          </p:sp>
+        </mc:Fallback>
+      </mc:AlternateContent>
+      <mc:AlternateContent xmlns:mc="http://schemas.openxmlformats.org/markup-compatibility/2006">
+        <mc:Choice xmlns:a14="http://schemas.microsoft.com/office/drawing/2010/main" Requires="a14">
+          <p:sp>
+            <p:nvSpPr>
+              <p:cNvPr id="11" name="Speech Bubble: Rectangle with Corners Rounded 10">
+                <a:extLst>
+                  <a:ext uri="{FF2B5EF4-FFF2-40B4-BE49-F238E27FC236}">
+                    <a16:creationId xmlns:a16="http://schemas.microsoft.com/office/drawing/2014/main" id="{0E0A6D4E-3C3A-D6B4-AF80-2EE6E3925191}"/>
                   </a:ext>
                 </a:extLst>
               </p:cNvPr>
@@ -12663,13 +16163,13 @@
             </p:nvSpPr>
             <p:spPr>
               <a:xfrm>
-                <a:off x="9046278" y="5871849"/>
-                <a:ext cx="1375090" cy="759072"/>
+                <a:off x="2101024" y="5796192"/>
+                <a:ext cx="2380231" cy="677074"/>
               </a:xfrm>
               <a:prstGeom prst="wedgeRoundRectCallout">
                 <a:avLst>
-                  <a:gd name="adj1" fmla="val -376702"/>
-                  <a:gd name="adj2" fmla="val 5786"/>
+                  <a:gd name="adj1" fmla="val -13697"/>
+                  <a:gd name="adj2" fmla="val -95839"/>
                   <a:gd name="adj3" fmla="val 16667"/>
                 </a:avLst>
               </a:prstGeom>
@@ -12695,100 +16195,116 @@
               <a:lstStyle/>
               <a:p>
                 <a:pPr algn="ctr"/>
+                <a:r>
+                  <a:rPr lang="en-US" dirty="0"/>
+                  <a:t>We can now sample </a:t>
+                </a:r>
                 <a14:m>
-                  <m:oMathPara xmlns:m="http://schemas.openxmlformats.org/officeDocument/2006/math">
-                    <m:oMathParaPr>
-                      <m:jc m:val="centerGroup"/>
-                    </m:oMathParaPr>
-                    <m:oMath xmlns:m="http://schemas.openxmlformats.org/officeDocument/2006/math">
-                      <m:r>
-                        <m:rPr>
-                          <m:sty m:val="p"/>
-                        </m:rPr>
-                        <a:rPr lang="en-US" i="1" smtClean="0">
-                          <a:latin typeface="Cambria Math" panose="02040503050406030204" pitchFamily="18" charset="0"/>
-                          <a:ea typeface="Cambria Math" panose="02040503050406030204" pitchFamily="18" charset="0"/>
-                        </a:rPr>
-                        <m:t>∇</m:t>
-                      </m:r>
-                      <m:func>
-                        <m:funcPr>
-                          <m:ctrlPr>
-                            <a:rPr lang="en-US" b="0" i="1" smtClean="0">
-                              <a:latin typeface="Cambria Math" panose="02040503050406030204" pitchFamily="18" charset="0"/>
-                              <a:ea typeface="Cambria Math" panose="02040503050406030204" pitchFamily="18" charset="0"/>
-                            </a:rPr>
-                          </m:ctrlPr>
-                        </m:funcPr>
-                        <m:fName>
-                          <m:r>
-                            <m:rPr>
-                              <m:sty m:val="p"/>
-                            </m:rPr>
-                            <a:rPr lang="en-US" b="0" i="0" smtClean="0">
-                              <a:latin typeface="Cambria Math" panose="02040503050406030204" pitchFamily="18" charset="0"/>
-                              <a:ea typeface="Cambria Math" panose="02040503050406030204" pitchFamily="18" charset="0"/>
-                            </a:rPr>
-                            <m:t>ln</m:t>
-                          </m:r>
-                        </m:fName>
-                        <m:e>
-                          <m:r>
-                            <a:rPr lang="en-US" b="0" i="1" smtClean="0">
-                              <a:latin typeface="Cambria Math" panose="02040503050406030204" pitchFamily="18" charset="0"/>
-                              <a:ea typeface="Cambria Math" panose="02040503050406030204" pitchFamily="18" charset="0"/>
-                            </a:rPr>
-                            <m:t>𝑥</m:t>
-                          </m:r>
-                          <m:r>
-                            <a:rPr lang="en-US" b="0" i="1" smtClean="0">
-                              <a:latin typeface="Cambria Math" panose="02040503050406030204" pitchFamily="18" charset="0"/>
-                              <a:ea typeface="Cambria Math" panose="02040503050406030204" pitchFamily="18" charset="0"/>
-                            </a:rPr>
-                            <m:t>=</m:t>
-                          </m:r>
-                          <m:f>
-                            <m:fPr>
-                              <m:ctrlPr>
-                                <a:rPr lang="en-US" b="0" i="1" smtClean="0">
-                                  <a:latin typeface="Cambria Math" panose="02040503050406030204" pitchFamily="18" charset="0"/>
-                                  <a:ea typeface="Cambria Math" panose="02040503050406030204" pitchFamily="18" charset="0"/>
-                                </a:rPr>
-                              </m:ctrlPr>
-                            </m:fPr>
-                            <m:num>
-                              <m:r>
-                                <m:rPr>
-                                  <m:sty m:val="p"/>
-                                </m:rPr>
-                                <a:rPr lang="en-US" b="0" i="1" smtClean="0">
-                                  <a:latin typeface="Cambria Math" panose="02040503050406030204" pitchFamily="18" charset="0"/>
-                                  <a:ea typeface="Cambria Math" panose="02040503050406030204" pitchFamily="18" charset="0"/>
-                                </a:rPr>
-                                <m:t>∇</m:t>
-                              </m:r>
-                              <m:r>
-                                <a:rPr lang="en-US" b="0" i="1" smtClean="0">
-                                  <a:latin typeface="Cambria Math" panose="02040503050406030204" pitchFamily="18" charset="0"/>
-                                  <a:ea typeface="Cambria Math" panose="02040503050406030204" pitchFamily="18" charset="0"/>
-                                </a:rPr>
-                                <m:t>𝑥</m:t>
-                              </m:r>
-                            </m:num>
-                            <m:den>
-                              <m:r>
-                                <a:rPr lang="en-US" b="0" i="1" smtClean="0">
-                                  <a:latin typeface="Cambria Math" panose="02040503050406030204" pitchFamily="18" charset="0"/>
-                                  <a:ea typeface="Cambria Math" panose="02040503050406030204" pitchFamily="18" charset="0"/>
-                                </a:rPr>
-                                <m:t>𝑥</m:t>
-                              </m:r>
-                            </m:den>
-                          </m:f>
-                        </m:e>
-                      </m:func>
-                    </m:oMath>
-                  </m:oMathPara>
+                  <m:oMath xmlns:m="http://schemas.openxmlformats.org/officeDocument/2006/math">
+                    <m:sSub>
+                      <m:sSubPr>
+                        <m:ctrlPr>
+                          <a:rPr lang="en-US" b="0" i="1" smtClean="0">
+                            <a:latin typeface="Cambria Math" panose="02040503050406030204" pitchFamily="18" charset="0"/>
+                          </a:rPr>
+                        </m:ctrlPr>
+                      </m:sSubPr>
+                      <m:e>
+                        <m:r>
+                          <a:rPr lang="en-US" b="0" i="1" smtClean="0">
+                            <a:latin typeface="Cambria Math" panose="02040503050406030204" pitchFamily="18" charset="0"/>
+                          </a:rPr>
+                          <m:t>𝐺</m:t>
+                        </m:r>
+                      </m:e>
+                      <m:sub>
+                        <m:r>
+                          <a:rPr lang="en-US" b="0" i="1" smtClean="0">
+                            <a:latin typeface="Cambria Math" panose="02040503050406030204" pitchFamily="18" charset="0"/>
+                          </a:rPr>
+                          <m:t>𝑡</m:t>
+                        </m:r>
+                      </m:sub>
+                    </m:sSub>
+                    <m:r>
+                      <a:rPr lang="en-US" b="0" i="1" smtClean="0">
+                        <a:latin typeface="Cambria Math" panose="02040503050406030204" pitchFamily="18" charset="0"/>
+                      </a:rPr>
+                      <m:t>, </m:t>
+                    </m:r>
+                    <m:sSub>
+                      <m:sSubPr>
+                        <m:ctrlPr>
+                          <a:rPr lang="en-US" b="0" i="1" smtClean="0">
+                            <a:latin typeface="Cambria Math" panose="02040503050406030204" pitchFamily="18" charset="0"/>
+                          </a:rPr>
+                        </m:ctrlPr>
+                      </m:sSubPr>
+                      <m:e>
+                        <m:r>
+                          <a:rPr lang="en-US" b="0" i="1" smtClean="0">
+                            <a:latin typeface="Cambria Math" panose="02040503050406030204" pitchFamily="18" charset="0"/>
+                          </a:rPr>
+                          <m:t>𝐴</m:t>
+                        </m:r>
+                      </m:e>
+                      <m:sub>
+                        <m:r>
+                          <a:rPr lang="en-US" b="0" i="1" smtClean="0">
+                            <a:latin typeface="Cambria Math" panose="02040503050406030204" pitchFamily="18" charset="0"/>
+                          </a:rPr>
+                          <m:t>𝑡</m:t>
+                        </m:r>
+                      </m:sub>
+                    </m:sSub>
+                  </m:oMath>
+                </a14:m>
+                <a:r>
+                  <a:rPr lang="en-US" dirty="0"/>
+                  <a:t> and </a:t>
+                </a:r>
+                <a14:m>
+                  <m:oMath xmlns:m="http://schemas.openxmlformats.org/officeDocument/2006/math">
+                    <m:sSub>
+                      <m:sSubPr>
+                        <m:ctrlPr>
+                          <a:rPr lang="en-US" b="0" i="1" smtClean="0">
+                            <a:latin typeface="Cambria Math" panose="02040503050406030204" pitchFamily="18" charset="0"/>
+                          </a:rPr>
+                        </m:ctrlPr>
+                      </m:sSubPr>
+                      <m:e>
+                        <m:r>
+                          <a:rPr lang="en-US" b="0" i="1" smtClean="0">
+                            <a:latin typeface="Cambria Math" panose="02040503050406030204" pitchFamily="18" charset="0"/>
+                          </a:rPr>
+                          <m:t>𝑆</m:t>
+                        </m:r>
+                      </m:e>
+                      <m:sub>
+                        <m:r>
+                          <a:rPr lang="en-US" b="0" i="1" smtClean="0">
+                            <a:latin typeface="Cambria Math" panose="02040503050406030204" pitchFamily="18" charset="0"/>
+                          </a:rPr>
+                          <m:t>𝑡</m:t>
+                        </m:r>
+                      </m:sub>
+                    </m:sSub>
+                  </m:oMath>
+                </a14:m>
+                <a:r>
+                  <a:rPr lang="en-US" dirty="0"/>
+                  <a:t> using </a:t>
+                </a:r>
+                <a14:m>
+                  <m:oMath xmlns:m="http://schemas.openxmlformats.org/officeDocument/2006/math">
+                    <m:r>
+                      <a:rPr lang="en-US" b="0" i="1" smtClean="0">
+                        <a:latin typeface="Cambria Math" panose="02040503050406030204" pitchFamily="18" charset="0"/>
+                      </a:rPr>
+                      <m:t>𝜋</m:t>
+                    </m:r>
+                  </m:oMath>
                 </a14:m>
                 <a:endParaRPr lang="en-US" dirty="0"/>
               </a:p>
@@ -12798,10 +16314,10 @@
         <mc:Fallback>
           <p:sp>
             <p:nvSpPr>
-              <p:cNvPr id="8" name="Speech Bubble: Rectangle with Corners Rounded 7">
+              <p:cNvPr id="11" name="Speech Bubble: Rectangle with Corners Rounded 10">
                 <a:extLst>
                   <a:ext uri="{FF2B5EF4-FFF2-40B4-BE49-F238E27FC236}">
-                    <a16:creationId xmlns:a16="http://schemas.microsoft.com/office/drawing/2014/main" id="{9B37B05F-CD4B-9303-6D63-7FCA7489EA9C}"/>
+                    <a16:creationId xmlns:a16="http://schemas.microsoft.com/office/drawing/2014/main" id="{0E0A6D4E-3C3A-D6B4-AF80-2EE6E3925191}"/>
                   </a:ext>
                 </a:extLst>
               </p:cNvPr>
@@ -12812,20 +16328,20 @@
             </p:nvSpPr>
             <p:spPr>
               <a:xfrm>
-                <a:off x="9046278" y="5871849"/>
-                <a:ext cx="1375090" cy="759072"/>
+                <a:off x="2101024" y="5796192"/>
+                <a:ext cx="2380231" cy="677074"/>
               </a:xfrm>
               <a:prstGeom prst="wedgeRoundRectCallout">
                 <a:avLst>
-                  <a:gd name="adj1" fmla="val -376702"/>
-                  <a:gd name="adj2" fmla="val 5786"/>
+                  <a:gd name="adj1" fmla="val -13697"/>
+                  <a:gd name="adj2" fmla="val -95839"/>
                   <a:gd name="adj3" fmla="val 16667"/>
                 </a:avLst>
               </a:prstGeom>
               <a:blipFill>
-                <a:blip r:embed="rId6"/>
+                <a:blip r:embed="rId8"/>
                 <a:stretch>
-                  <a:fillRect/>
+                  <a:fillRect b="-7229"/>
                 </a:stretch>
               </a:blipFill>
             </p:spPr>
@@ -12862,7 +16378,13 @@
   <p:cSld>
     <p:spTree>
       <p:nvGrpSpPr>
-        <p:cNvPr id="1" name=""/>
+        <p:cNvPr id="1" name="">
+          <a:extLst>
+            <a:ext uri="{FF2B5EF4-FFF2-40B4-BE49-F238E27FC236}">
+              <a16:creationId xmlns:a16="http://schemas.microsoft.com/office/drawing/2014/main" id="{9C1A846B-68DA-9665-F3C8-EFD6C97E66FB}"/>
+            </a:ext>
+          </a:extLst>
+        </p:cNvPr>
         <p:cNvGrpSpPr/>
         <p:nvPr/>
       </p:nvGrpSpPr>
@@ -12879,7 +16401,7 @@
           <p:cNvPr id="2" name="Title 1">
             <a:extLst>
               <a:ext uri="{FF2B5EF4-FFF2-40B4-BE49-F238E27FC236}">
-                <a16:creationId xmlns:a16="http://schemas.microsoft.com/office/drawing/2014/main" id="{4DC2DFE1-72DC-68CD-CBDF-6806168FD6EE}"/>
+                <a16:creationId xmlns:a16="http://schemas.microsoft.com/office/drawing/2014/main" id="{38B2F899-1499-8E06-0445-BD2138EDB85A}"/>
               </a:ext>
             </a:extLst>
           </p:cNvPr>
@@ -12897,17 +16419,527 @@
           <a:p>
             <a:r>
               <a:rPr lang="en-US" dirty="0"/>
-              <a:t>Actor-Critic Methods</a:t>
+              <a:t>MC Policy Gradient</a:t>
             </a:r>
           </a:p>
         </p:txBody>
       </p:sp>
+      <mc:AlternateContent xmlns:mc="http://schemas.openxmlformats.org/markup-compatibility/2006">
+        <mc:Choice xmlns:a14="http://schemas.microsoft.com/office/drawing/2010/main" Requires="a14">
+          <p:sp>
+            <p:nvSpPr>
+              <p:cNvPr id="3" name="Content Placeholder 2">
+                <a:extLst>
+                  <a:ext uri="{FF2B5EF4-FFF2-40B4-BE49-F238E27FC236}">
+                    <a16:creationId xmlns:a16="http://schemas.microsoft.com/office/drawing/2014/main" id="{8638C852-25DD-4671-ED13-10B8DE619084}"/>
+                  </a:ext>
+                </a:extLst>
+              </p:cNvPr>
+              <p:cNvSpPr>
+                <a:spLocks noGrp="1"/>
+              </p:cNvSpPr>
+              <p:nvPr>
+                <p:ph idx="1"/>
+              </p:nvPr>
+            </p:nvSpPr>
+            <p:spPr>
+              <a:xfrm>
+                <a:off x="838200" y="1124198"/>
+                <a:ext cx="9967076" cy="2527762"/>
+              </a:xfrm>
+            </p:spPr>
+            <p:txBody>
+              <a:bodyPr>
+                <a:normAutofit/>
+              </a:bodyPr>
+              <a:lstStyle/>
+              <a:p>
+                <a:pPr marL="0" indent="0" algn="ctr">
+                  <a:buNone/>
+                </a:pPr>
+                <a14:m>
+                  <m:oMathPara xmlns:m="http://schemas.openxmlformats.org/officeDocument/2006/math">
+                    <m:oMathParaPr>
+                      <m:jc m:val="centerGroup"/>
+                    </m:oMathParaPr>
+                    <m:oMath xmlns:m="http://schemas.openxmlformats.org/officeDocument/2006/math">
+                      <m:sSub>
+                        <m:sSubPr>
+                          <m:ctrlPr>
+                            <a:rPr lang="en-US" i="1" smtClean="0">
+                              <a:latin typeface="Cambria Math" panose="02040503050406030204" pitchFamily="18" charset="0"/>
+                            </a:rPr>
+                          </m:ctrlPr>
+                        </m:sSubPr>
+                        <m:e>
+                          <m:r>
+                            <a:rPr lang="en-US" b="1" i="1">
+                              <a:latin typeface="Cambria Math" panose="02040503050406030204" pitchFamily="18" charset="0"/>
+                            </a:rPr>
+                            <m:t>𝜽</m:t>
+                          </m:r>
+                        </m:e>
+                        <m:sub>
+                          <m:r>
+                            <a:rPr lang="en-US" i="1">
+                              <a:latin typeface="Cambria Math" panose="02040503050406030204" pitchFamily="18" charset="0"/>
+                            </a:rPr>
+                            <m:t>𝑡</m:t>
+                          </m:r>
+                          <m:r>
+                            <a:rPr lang="en-US" i="1">
+                              <a:latin typeface="Cambria Math" panose="02040503050406030204" pitchFamily="18" charset="0"/>
+                            </a:rPr>
+                            <m:t>+1</m:t>
+                          </m:r>
+                        </m:sub>
+                      </m:sSub>
+                      <m:r>
+                        <a:rPr lang="en-US" i="1">
+                          <a:latin typeface="Cambria Math" panose="02040503050406030204" pitchFamily="18" charset="0"/>
+                        </a:rPr>
+                        <m:t>=</m:t>
+                      </m:r>
+                      <m:sSub>
+                        <m:sSubPr>
+                          <m:ctrlPr>
+                            <a:rPr lang="en-US" i="1">
+                              <a:latin typeface="Cambria Math" panose="02040503050406030204" pitchFamily="18" charset="0"/>
+                            </a:rPr>
+                          </m:ctrlPr>
+                        </m:sSubPr>
+                        <m:e>
+                          <m:r>
+                            <a:rPr lang="en-US" b="1" i="1">
+                              <a:latin typeface="Cambria Math" panose="02040503050406030204" pitchFamily="18" charset="0"/>
+                            </a:rPr>
+                            <m:t>𝜽</m:t>
+                          </m:r>
+                        </m:e>
+                        <m:sub>
+                          <m:r>
+                            <a:rPr lang="en-US" i="1">
+                              <a:latin typeface="Cambria Math" panose="02040503050406030204" pitchFamily="18" charset="0"/>
+                            </a:rPr>
+                            <m:t>𝑡</m:t>
+                          </m:r>
+                        </m:sub>
+                      </m:sSub>
+                      <m:r>
+                        <a:rPr lang="en-US" i="1">
+                          <a:latin typeface="Cambria Math" panose="02040503050406030204" pitchFamily="18" charset="0"/>
+                        </a:rPr>
+                        <m:t>+</m:t>
+                      </m:r>
+                      <m:r>
+                        <a:rPr lang="en-US" i="1">
+                          <a:latin typeface="Cambria Math" panose="02040503050406030204" pitchFamily="18" charset="0"/>
+                        </a:rPr>
+                        <m:t>𝛼</m:t>
+                      </m:r>
+                      <m:sSub>
+                        <m:sSubPr>
+                          <m:ctrlPr>
+                            <a:rPr lang="en-US" i="1">
+                              <a:latin typeface="Cambria Math" panose="02040503050406030204" pitchFamily="18" charset="0"/>
+                              <a:ea typeface="Cambria Math" panose="02040503050406030204" pitchFamily="18" charset="0"/>
+                            </a:rPr>
+                          </m:ctrlPr>
+                        </m:sSubPr>
+                        <m:e>
+                          <m:r>
+                            <a:rPr lang="en-US" i="1">
+                              <a:latin typeface="Cambria Math" panose="02040503050406030204" pitchFamily="18" charset="0"/>
+                              <a:ea typeface="Cambria Math" panose="02040503050406030204" pitchFamily="18" charset="0"/>
+                            </a:rPr>
+                            <m:t>𝔼</m:t>
+                          </m:r>
+                        </m:e>
+                        <m:sub>
+                          <m:r>
+                            <a:rPr lang="en-US" i="1">
+                              <a:latin typeface="Cambria Math" panose="02040503050406030204" pitchFamily="18" charset="0"/>
+                              <a:ea typeface="Cambria Math" panose="02040503050406030204" pitchFamily="18" charset="0"/>
+                            </a:rPr>
+                            <m:t>𝜋</m:t>
+                          </m:r>
+                        </m:sub>
+                      </m:sSub>
+                      <m:d>
+                        <m:dPr>
+                          <m:begChr m:val="["/>
+                          <m:endChr m:val="]"/>
+                          <m:ctrlPr>
+                            <a:rPr lang="en-US" i="1">
+                              <a:latin typeface="Cambria Math" panose="02040503050406030204" pitchFamily="18" charset="0"/>
+                              <a:ea typeface="Cambria Math" panose="02040503050406030204" pitchFamily="18" charset="0"/>
+                            </a:rPr>
+                          </m:ctrlPr>
+                        </m:dPr>
+                        <m:e>
+                          <m:sSub>
+                            <m:sSubPr>
+                              <m:ctrlPr>
+                                <a:rPr lang="en-US" i="1">
+                                  <a:latin typeface="Cambria Math" panose="02040503050406030204" pitchFamily="18" charset="0"/>
+                                  <a:ea typeface="Cambria Math" panose="02040503050406030204" pitchFamily="18" charset="0"/>
+                                </a:rPr>
+                              </m:ctrlPr>
+                            </m:sSubPr>
+                            <m:e>
+                              <m:r>
+                                <a:rPr lang="en-US" i="1">
+                                  <a:latin typeface="Cambria Math" panose="02040503050406030204" pitchFamily="18" charset="0"/>
+                                  <a:ea typeface="Cambria Math" panose="02040503050406030204" pitchFamily="18" charset="0"/>
+                                </a:rPr>
+                                <m:t>𝐺</m:t>
+                              </m:r>
+                            </m:e>
+                            <m:sub>
+                              <m:r>
+                                <a:rPr lang="en-US" i="1">
+                                  <a:latin typeface="Cambria Math" panose="02040503050406030204" pitchFamily="18" charset="0"/>
+                                  <a:ea typeface="Cambria Math" panose="02040503050406030204" pitchFamily="18" charset="0"/>
+                                </a:rPr>
+                                <m:t>𝑡</m:t>
+                              </m:r>
+                            </m:sub>
+                          </m:sSub>
+                          <m:func>
+                            <m:funcPr>
+                              <m:ctrlPr>
+                                <a:rPr lang="en-US" i="1">
+                                  <a:latin typeface="Cambria Math" panose="02040503050406030204" pitchFamily="18" charset="0"/>
+                                  <a:ea typeface="Cambria Math" panose="02040503050406030204" pitchFamily="18" charset="0"/>
+                                </a:rPr>
+                              </m:ctrlPr>
+                            </m:funcPr>
+                            <m:fName>
+                              <m:r>
+                                <m:rPr>
+                                  <m:sty m:val="p"/>
+                                </m:rPr>
+                                <a:rPr lang="en-US">
+                                  <a:latin typeface="Cambria Math" panose="02040503050406030204" pitchFamily="18" charset="0"/>
+                                  <a:ea typeface="Cambria Math" panose="02040503050406030204" pitchFamily="18" charset="0"/>
+                                </a:rPr>
+                                <m:t>ln</m:t>
+                              </m:r>
+                            </m:fName>
+                            <m:e>
+                              <m:r>
+                                <m:rPr>
+                                  <m:sty m:val="p"/>
+                                </m:rPr>
+                                <a:rPr lang="en-US" i="1">
+                                  <a:latin typeface="Cambria Math" panose="02040503050406030204" pitchFamily="18" charset="0"/>
+                                  <a:ea typeface="Cambria Math" panose="02040503050406030204" pitchFamily="18" charset="0"/>
+                                </a:rPr>
+                                <m:t>∇</m:t>
+                              </m:r>
+                              <m:r>
+                                <a:rPr lang="en-US" i="1">
+                                  <a:latin typeface="Cambria Math" panose="02040503050406030204" pitchFamily="18" charset="0"/>
+                                  <a:ea typeface="Cambria Math" panose="02040503050406030204" pitchFamily="18" charset="0"/>
+                                </a:rPr>
+                                <m:t>𝜋</m:t>
+                              </m:r>
+                              <m:r>
+                                <a:rPr lang="en-US" i="1">
+                                  <a:latin typeface="Cambria Math" panose="02040503050406030204" pitchFamily="18" charset="0"/>
+                                  <a:ea typeface="Cambria Math" panose="02040503050406030204" pitchFamily="18" charset="0"/>
+                                </a:rPr>
+                                <m:t>(</m:t>
+                              </m:r>
+                              <m:sSub>
+                                <m:sSubPr>
+                                  <m:ctrlPr>
+                                    <a:rPr lang="en-US" i="1">
+                                      <a:latin typeface="Cambria Math" panose="02040503050406030204" pitchFamily="18" charset="0"/>
+                                      <a:ea typeface="Cambria Math" panose="02040503050406030204" pitchFamily="18" charset="0"/>
+                                    </a:rPr>
+                                  </m:ctrlPr>
+                                </m:sSubPr>
+                                <m:e>
+                                  <m:r>
+                                    <a:rPr lang="en-US" i="1">
+                                      <a:latin typeface="Cambria Math" panose="02040503050406030204" pitchFamily="18" charset="0"/>
+                                      <a:ea typeface="Cambria Math" panose="02040503050406030204" pitchFamily="18" charset="0"/>
+                                    </a:rPr>
+                                    <m:t>𝐴</m:t>
+                                  </m:r>
+                                </m:e>
+                                <m:sub>
+                                  <m:r>
+                                    <a:rPr lang="en-US" i="1">
+                                      <a:latin typeface="Cambria Math" panose="02040503050406030204" pitchFamily="18" charset="0"/>
+                                      <a:ea typeface="Cambria Math" panose="02040503050406030204" pitchFamily="18" charset="0"/>
+                                    </a:rPr>
+                                    <m:t>𝑡</m:t>
+                                  </m:r>
+                                </m:sub>
+                              </m:sSub>
+                              <m:r>
+                                <a:rPr lang="en-US" i="1">
+                                  <a:latin typeface="Cambria Math" panose="02040503050406030204" pitchFamily="18" charset="0"/>
+                                  <a:ea typeface="Cambria Math" panose="02040503050406030204" pitchFamily="18" charset="0"/>
+                                </a:rPr>
+                                <m:t>|</m:t>
+                              </m:r>
+                              <m:sSub>
+                                <m:sSubPr>
+                                  <m:ctrlPr>
+                                    <a:rPr lang="en-US" i="1">
+                                      <a:latin typeface="Cambria Math" panose="02040503050406030204" pitchFamily="18" charset="0"/>
+                                      <a:ea typeface="Cambria Math" panose="02040503050406030204" pitchFamily="18" charset="0"/>
+                                    </a:rPr>
+                                  </m:ctrlPr>
+                                </m:sSubPr>
+                                <m:e>
+                                  <m:r>
+                                    <a:rPr lang="en-US" i="1">
+                                      <a:latin typeface="Cambria Math" panose="02040503050406030204" pitchFamily="18" charset="0"/>
+                                      <a:ea typeface="Cambria Math" panose="02040503050406030204" pitchFamily="18" charset="0"/>
+                                    </a:rPr>
+                                    <m:t>𝑆</m:t>
+                                  </m:r>
+                                </m:e>
+                                <m:sub>
+                                  <m:r>
+                                    <a:rPr lang="en-US" i="1">
+                                      <a:latin typeface="Cambria Math" panose="02040503050406030204" pitchFamily="18" charset="0"/>
+                                      <a:ea typeface="Cambria Math" panose="02040503050406030204" pitchFamily="18" charset="0"/>
+                                    </a:rPr>
+                                    <m:t>𝑡</m:t>
+                                  </m:r>
+                                </m:sub>
+                              </m:sSub>
+                              <m:r>
+                                <a:rPr lang="en-US" i="1">
+                                  <a:latin typeface="Cambria Math" panose="02040503050406030204" pitchFamily="18" charset="0"/>
+                                  <a:ea typeface="Cambria Math" panose="02040503050406030204" pitchFamily="18" charset="0"/>
+                                </a:rPr>
+                                <m:t>,</m:t>
+                              </m:r>
+                              <m:r>
+                                <a:rPr lang="en-US" b="1" i="1">
+                                  <a:latin typeface="Cambria Math" panose="02040503050406030204" pitchFamily="18" charset="0"/>
+                                  <a:ea typeface="Cambria Math" panose="02040503050406030204" pitchFamily="18" charset="0"/>
+                                </a:rPr>
+                                <m:t>𝜽</m:t>
+                              </m:r>
+                              <m:r>
+                                <a:rPr lang="en-US" b="1" i="1">
+                                  <a:latin typeface="Cambria Math" panose="02040503050406030204" pitchFamily="18" charset="0"/>
+                                  <a:ea typeface="Cambria Math" panose="02040503050406030204" pitchFamily="18" charset="0"/>
+                                </a:rPr>
+                                <m:t>)</m:t>
+                              </m:r>
+                            </m:e>
+                          </m:func>
+                        </m:e>
+                      </m:d>
+                    </m:oMath>
+                  </m:oMathPara>
+                </a14:m>
+                <a:endParaRPr lang="en-US" dirty="0"/>
+              </a:p>
+              <a:p>
+                <a:pPr marL="0" indent="0">
+                  <a:buNone/>
+                </a:pPr>
+                <a:endParaRPr lang="en-US" dirty="0"/>
+              </a:p>
+              <a:p>
+                <a:pPr marL="0" indent="0">
+                  <a:buNone/>
+                </a:pPr>
+                <a:endParaRPr lang="en-US" dirty="0"/>
+              </a:p>
+              <a:p>
+                <a:pPr marL="0" indent="0">
+                  <a:buNone/>
+                </a:pPr>
+                <a14:m>
+                  <m:oMath xmlns:m="http://schemas.openxmlformats.org/officeDocument/2006/math">
+                    <m:sSub>
+                      <m:sSubPr>
+                        <m:ctrlPr>
+                          <a:rPr lang="en-US" b="0" i="1" smtClean="0">
+                            <a:latin typeface="Cambria Math" panose="02040503050406030204" pitchFamily="18" charset="0"/>
+                          </a:rPr>
+                        </m:ctrlPr>
+                      </m:sSubPr>
+                      <m:e>
+                        <m:r>
+                          <a:rPr lang="en-US" b="0" i="1" smtClean="0">
+                            <a:latin typeface="Cambria Math" panose="02040503050406030204" pitchFamily="18" charset="0"/>
+                          </a:rPr>
+                          <m:t>𝐴</m:t>
+                        </m:r>
+                      </m:e>
+                      <m:sub>
+                        <m:r>
+                          <a:rPr lang="en-US" b="0" i="1" smtClean="0">
+                            <a:latin typeface="Cambria Math" panose="02040503050406030204" pitchFamily="18" charset="0"/>
+                          </a:rPr>
+                          <m:t>𝑡</m:t>
+                        </m:r>
+                      </m:sub>
+                    </m:sSub>
+                    <m:r>
+                      <a:rPr lang="en-US" b="0" i="0" smtClean="0">
+                        <a:latin typeface="Cambria Math" panose="02040503050406030204" pitchFamily="18" charset="0"/>
+                      </a:rPr>
+                      <m:t>,</m:t>
+                    </m:r>
+                  </m:oMath>
+                </a14:m>
+                <a:r>
+                  <a:rPr lang="en-US" dirty="0"/>
+                  <a:t> </a:t>
+                </a:r>
+                <a14:m>
+                  <m:oMath xmlns:m="http://schemas.openxmlformats.org/officeDocument/2006/math">
+                    <m:sSub>
+                      <m:sSubPr>
+                        <m:ctrlPr>
+                          <a:rPr lang="en-US" b="0" i="1" smtClean="0">
+                            <a:latin typeface="Cambria Math" panose="02040503050406030204" pitchFamily="18" charset="0"/>
+                          </a:rPr>
+                        </m:ctrlPr>
+                      </m:sSubPr>
+                      <m:e>
+                        <m:r>
+                          <a:rPr lang="en-US" b="0" i="1" smtClean="0">
+                            <a:latin typeface="Cambria Math" panose="02040503050406030204" pitchFamily="18" charset="0"/>
+                          </a:rPr>
+                          <m:t>𝑆</m:t>
+                        </m:r>
+                      </m:e>
+                      <m:sub>
+                        <m:r>
+                          <a:rPr lang="en-US" b="0" i="1" smtClean="0">
+                            <a:latin typeface="Cambria Math" panose="02040503050406030204" pitchFamily="18" charset="0"/>
+                          </a:rPr>
+                          <m:t>𝑡</m:t>
+                        </m:r>
+                      </m:sub>
+                    </m:sSub>
+                  </m:oMath>
+                </a14:m>
+                <a:r>
+                  <a:rPr lang="en-US" dirty="0"/>
+                  <a:t> and an unbiased estimate of </a:t>
+                </a:r>
+                <a14:m>
+                  <m:oMath xmlns:m="http://schemas.openxmlformats.org/officeDocument/2006/math">
+                    <m:sSub>
+                      <m:sSubPr>
+                        <m:ctrlPr>
+                          <a:rPr lang="en-US" b="0" i="1" smtClean="0">
+                            <a:latin typeface="Cambria Math" panose="02040503050406030204" pitchFamily="18" charset="0"/>
+                          </a:rPr>
+                        </m:ctrlPr>
+                      </m:sSubPr>
+                      <m:e>
+                        <m:r>
+                          <a:rPr lang="en-US" b="0" i="1" smtClean="0">
+                            <a:latin typeface="Cambria Math" panose="02040503050406030204" pitchFamily="18" charset="0"/>
+                          </a:rPr>
+                          <m:t>𝐺</m:t>
+                        </m:r>
+                      </m:e>
+                      <m:sub>
+                        <m:r>
+                          <a:rPr lang="en-US" b="0" i="1" smtClean="0">
+                            <a:latin typeface="Cambria Math" panose="02040503050406030204" pitchFamily="18" charset="0"/>
+                          </a:rPr>
+                          <m:t>𝑡</m:t>
+                        </m:r>
+                      </m:sub>
+                    </m:sSub>
+                  </m:oMath>
+                </a14:m>
+                <a:r>
+                  <a:rPr lang="en-US" i="1" dirty="0">
+                    <a:latin typeface="Cambria Math" panose="02040503050406030204" pitchFamily="18" charset="0"/>
+                    <a:ea typeface="Cambria Math" panose="02040503050406030204" pitchFamily="18" charset="0"/>
+                  </a:rPr>
+                  <a:t> </a:t>
+                </a:r>
+                <a:r>
+                  <a:rPr lang="en-US" dirty="0"/>
+                  <a:t>under the current </a:t>
+                </a:r>
+                <a14:m>
+                  <m:oMath xmlns:m="http://schemas.openxmlformats.org/officeDocument/2006/math">
+                    <m:r>
+                      <a:rPr lang="en-US" b="0" i="1" smtClean="0">
+                        <a:latin typeface="Cambria Math" panose="02040503050406030204" pitchFamily="18" charset="0"/>
+                      </a:rPr>
+                      <m:t>𝜋</m:t>
+                    </m:r>
+                  </m:oMath>
+                </a14:m>
+                <a:r>
+                  <a:rPr lang="en-US" dirty="0"/>
+                  <a:t> can be obtained via MC.</a:t>
+                </a:r>
+              </a:p>
+            </p:txBody>
+          </p:sp>
+        </mc:Choice>
+        <mc:Fallback>
+          <p:sp>
+            <p:nvSpPr>
+              <p:cNvPr id="3" name="Content Placeholder 2">
+                <a:extLst>
+                  <a:ext uri="{FF2B5EF4-FFF2-40B4-BE49-F238E27FC236}">
+                    <a16:creationId xmlns:a16="http://schemas.microsoft.com/office/drawing/2014/main" id="{8638C852-25DD-4671-ED13-10B8DE619084}"/>
+                  </a:ext>
+                </a:extLst>
+              </p:cNvPr>
+              <p:cNvSpPr>
+                <a:spLocks noGrp="1" noRot="1" noChangeAspect="1" noMove="1" noResize="1" noEditPoints="1" noAdjustHandles="1" noChangeArrowheads="1" noChangeShapeType="1" noTextEdit="1"/>
+              </p:cNvSpPr>
+              <p:nvPr>
+                <p:ph idx="1"/>
+              </p:nvPr>
+            </p:nvSpPr>
+            <p:spPr>
+              <a:xfrm>
+                <a:off x="838200" y="1124198"/>
+                <a:ext cx="9967076" cy="2527762"/>
+              </a:xfrm>
+              <a:blipFill>
+                <a:blip r:embed="rId2"/>
+                <a:stretch>
+                  <a:fillRect l="-1284" r="-1896" b="-1446"/>
+                </a:stretch>
+              </a:blipFill>
+            </p:spPr>
+            <p:txBody>
+              <a:bodyPr/>
+              <a:lstStyle/>
+              <a:p>
+                <a:r>
+                  <a:rPr lang="en-US">
+                    <a:noFill/>
+                  </a:rPr>
+                  <a:t> </a:t>
+                </a:r>
+              </a:p>
+            </p:txBody>
+          </p:sp>
+        </mc:Fallback>
+      </mc:AlternateContent>
       <p:pic>
         <p:nvPicPr>
-          <p:cNvPr id="7" name="Picture 6">
+          <p:cNvPr id="5" name="Picture 4">
             <a:extLst>
               <a:ext uri="{FF2B5EF4-FFF2-40B4-BE49-F238E27FC236}">
-                <a16:creationId xmlns:a16="http://schemas.microsoft.com/office/drawing/2014/main" id="{2C127B90-B61D-6A2E-A61B-CCCEFCCC5B63}"/>
+                <a16:creationId xmlns:a16="http://schemas.microsoft.com/office/drawing/2014/main" id="{7A46DFC6-5448-DD38-1C4B-9AD716BBC796}"/>
               </a:ext>
             </a:extLst>
           </p:cNvPr>
@@ -12917,27 +16949,154 @@
           <p:nvPr/>
         </p:nvPicPr>
         <p:blipFill>
-          <a:blip r:embed="rId2"/>
+          <a:blip r:embed="rId3"/>
           <a:stretch>
             <a:fillRect/>
           </a:stretch>
         </p:blipFill>
         <p:spPr>
           <a:xfrm>
-            <a:off x="1599037" y="1419737"/>
-            <a:ext cx="8821552" cy="4989901"/>
+            <a:off x="2101608" y="3485992"/>
+            <a:ext cx="8158842" cy="3006882"/>
           </a:xfrm>
           <a:prstGeom prst="rect">
             <a:avLst/>
           </a:prstGeom>
         </p:spPr>
       </p:pic>
+      <mc:AlternateContent xmlns:mc="http://schemas.openxmlformats.org/markup-compatibility/2006">
+        <mc:Choice xmlns:a14="http://schemas.microsoft.com/office/drawing/2010/main" Requires="a14">
+          <p:sp>
+            <p:nvSpPr>
+              <p:cNvPr id="10" name="TextBox 9">
+                <a:extLst>
+                  <a:ext uri="{FF2B5EF4-FFF2-40B4-BE49-F238E27FC236}">
+                    <a16:creationId xmlns:a16="http://schemas.microsoft.com/office/drawing/2014/main" id="{06AF3609-FA43-5326-AF3B-FFE2F982DE19}"/>
+                  </a:ext>
+                </a:extLst>
+              </p:cNvPr>
+              <p:cNvSpPr txBox="1"/>
+              <p:nvPr/>
+            </p:nvSpPr>
+            <p:spPr>
+              <a:xfrm>
+                <a:off x="5821738" y="1794518"/>
+                <a:ext cx="2333116" cy="369332"/>
+              </a:xfrm>
+              <a:prstGeom prst="rect">
+                <a:avLst/>
+              </a:prstGeom>
+              <a:noFill/>
+            </p:spPr>
+            <p:txBody>
+              <a:bodyPr wrap="square">
+                <a:spAutoFit/>
+              </a:bodyPr>
+              <a:lstStyle/>
+              <a:p>
+                <a:pPr/>
+                <a:r>
+                  <a:rPr lang="en-US" dirty="0">
+                    <a:ea typeface="Cambria Math" panose="02040503050406030204" pitchFamily="18" charset="0"/>
+                  </a:rPr>
+                  <a:t>Proportional to </a:t>
+                </a:r>
+                <a14:m>
+                  <m:oMath xmlns:m="http://schemas.openxmlformats.org/officeDocument/2006/math">
+                    <m:r>
+                      <m:rPr>
+                        <m:sty m:val="p"/>
+                      </m:rPr>
+                      <a:rPr lang="en-US" i="0" smtClean="0">
+                        <a:latin typeface="Cambria Math" panose="02040503050406030204" pitchFamily="18" charset="0"/>
+                        <a:ea typeface="Cambria Math" panose="02040503050406030204" pitchFamily="18" charset="0"/>
+                      </a:rPr>
+                      <m:t>∇</m:t>
+                    </m:r>
+                    <m:r>
+                      <a:rPr lang="en-US" b="0" i="1" smtClean="0">
+                        <a:latin typeface="Cambria Math" panose="02040503050406030204" pitchFamily="18" charset="0"/>
+                        <a:ea typeface="Cambria Math" panose="02040503050406030204" pitchFamily="18" charset="0"/>
+                      </a:rPr>
+                      <m:t>𝐽</m:t>
+                    </m:r>
+                    <m:d>
+                      <m:dPr>
+                        <m:ctrlPr>
+                          <a:rPr lang="en-US" b="0" i="1" smtClean="0">
+                            <a:latin typeface="Cambria Math" panose="02040503050406030204" pitchFamily="18" charset="0"/>
+                            <a:ea typeface="Cambria Math" panose="02040503050406030204" pitchFamily="18" charset="0"/>
+                          </a:rPr>
+                        </m:ctrlPr>
+                      </m:dPr>
+                      <m:e>
+                        <m:r>
+                          <a:rPr lang="en-US" b="1" i="1" smtClean="0">
+                            <a:latin typeface="Cambria Math" panose="02040503050406030204" pitchFamily="18" charset="0"/>
+                            <a:ea typeface="Cambria Math" panose="02040503050406030204" pitchFamily="18" charset="0"/>
+                          </a:rPr>
+                          <m:t>𝜽</m:t>
+                        </m:r>
+                      </m:e>
+                    </m:d>
+                  </m:oMath>
+                </a14:m>
+                <a:endParaRPr lang="en-US" dirty="0"/>
+              </a:p>
+            </p:txBody>
+          </p:sp>
+        </mc:Choice>
+        <mc:Fallback>
+          <p:sp>
+            <p:nvSpPr>
+              <p:cNvPr id="10" name="TextBox 9">
+                <a:extLst>
+                  <a:ext uri="{FF2B5EF4-FFF2-40B4-BE49-F238E27FC236}">
+                    <a16:creationId xmlns:a16="http://schemas.microsoft.com/office/drawing/2014/main" id="{06AF3609-FA43-5326-AF3B-FFE2F982DE19}"/>
+                  </a:ext>
+                </a:extLst>
+              </p:cNvPr>
+              <p:cNvSpPr txBox="1">
+                <a:spLocks noRot="1" noChangeAspect="1" noMove="1" noResize="1" noEditPoints="1" noAdjustHandles="1" noChangeArrowheads="1" noChangeShapeType="1" noTextEdit="1"/>
+              </p:cNvSpPr>
+              <p:nvPr/>
+            </p:nvSpPr>
+            <p:spPr>
+              <a:xfrm>
+                <a:off x="5821738" y="1794518"/>
+                <a:ext cx="2333116" cy="369332"/>
+              </a:xfrm>
+              <a:prstGeom prst="rect">
+                <a:avLst/>
+              </a:prstGeom>
+              <a:blipFill>
+                <a:blip r:embed="rId4"/>
+                <a:stretch>
+                  <a:fillRect l="-2089" t="-6557" b="-26230"/>
+                </a:stretch>
+              </a:blipFill>
+            </p:spPr>
+            <p:txBody>
+              <a:bodyPr/>
+              <a:lstStyle/>
+              <a:p>
+                <a:r>
+                  <a:rPr lang="en-US">
+                    <a:noFill/>
+                  </a:rPr>
+                  <a:t> </a:t>
+                </a:r>
+              </a:p>
+            </p:txBody>
+          </p:sp>
+        </mc:Fallback>
+      </mc:AlternateContent>
       <p:sp>
         <p:nvSpPr>
-          <p:cNvPr id="5" name="Speech Bubble: Rectangle with Corners Rounded 4">
+          <p:cNvPr id="11" name="Right Brace 10">
             <a:extLst>
               <a:ext uri="{FF2B5EF4-FFF2-40B4-BE49-F238E27FC236}">
-                <a16:creationId xmlns:a16="http://schemas.microsoft.com/office/drawing/2014/main" id="{D8C230AF-79C2-A184-7ED5-1506ABF95837}"/>
+                <a16:creationId xmlns:a16="http://schemas.microsoft.com/office/drawing/2014/main" id="{EB3A8549-16BB-3E54-649D-973665D06710}"/>
               </a:ext>
             </a:extLst>
           </p:cNvPr>
@@ -12945,195 +17104,26 @@
           <p:nvPr/>
         </p:nvSpPr>
         <p:spPr>
-          <a:xfrm>
-            <a:off x="9116078" y="2371412"/>
-            <a:ext cx="865538" cy="259172"/>
+          <a:xfrm rot="5400000">
+            <a:off x="6795245" y="59707"/>
+            <a:ext cx="172536" cy="3254585"/>
           </a:xfrm>
-          <a:prstGeom prst="wedgeRoundRectCallout">
-            <a:avLst>
-              <a:gd name="adj1" fmla="val -84315"/>
-              <a:gd name="adj2" fmla="val 24880"/>
-              <a:gd name="adj3" fmla="val 16667"/>
-            </a:avLst>
+          <a:prstGeom prst="rightBrace">
+            <a:avLst/>
           </a:prstGeom>
         </p:spPr>
         <p:style>
           <a:lnRef idx="2">
-            <a:schemeClr val="accent2">
-              <a:shade val="15000"/>
-            </a:schemeClr>
+            <a:schemeClr val="accent1"/>
           </a:lnRef>
-          <a:fillRef idx="1">
-            <a:schemeClr val="accent2"/>
+          <a:fillRef idx="0">
+            <a:schemeClr val="accent1"/>
           </a:fillRef>
-          <a:effectRef idx="0">
-            <a:schemeClr val="accent2"/>
+          <a:effectRef idx="1">
+            <a:schemeClr val="accent1"/>
           </a:effectRef>
           <a:fontRef idx="minor">
-            <a:schemeClr val="lt1"/>
-          </a:fontRef>
-        </p:style>
-        <p:txBody>
-          <a:bodyPr rtlCol="0" anchor="ctr"/>
-          <a:lstStyle/>
-          <a:p>
-            <a:pPr algn="ctr"/>
-            <a:r>
-              <a:rPr lang="en-US" dirty="0"/>
-              <a:t>critic</a:t>
-            </a:r>
-          </a:p>
-        </p:txBody>
-      </p:sp>
-      <p:sp>
-        <p:nvSpPr>
-          <p:cNvPr id="4" name="Speech Bubble: Rectangle with Corners Rounded 3">
-            <a:extLst>
-              <a:ext uri="{FF2B5EF4-FFF2-40B4-BE49-F238E27FC236}">
-                <a16:creationId xmlns:a16="http://schemas.microsoft.com/office/drawing/2014/main" id="{F7A4F288-A0A2-EAB0-0BC3-B1E0033FD846}"/>
-              </a:ext>
-            </a:extLst>
-          </p:cNvPr>
-          <p:cNvSpPr/>
-          <p:nvPr/>
-        </p:nvSpPr>
-        <p:spPr>
-          <a:xfrm>
-            <a:off x="8250540" y="1946286"/>
-            <a:ext cx="865538" cy="259172"/>
-          </a:xfrm>
-          <a:prstGeom prst="wedgeRoundRectCallout">
-            <a:avLst>
-              <a:gd name="adj1" fmla="val -121411"/>
-              <a:gd name="adj2" fmla="val 67368"/>
-              <a:gd name="adj3" fmla="val 16667"/>
-            </a:avLst>
-          </a:prstGeom>
-        </p:spPr>
-        <p:style>
-          <a:lnRef idx="2">
-            <a:schemeClr val="accent2">
-              <a:shade val="15000"/>
-            </a:schemeClr>
-          </a:lnRef>
-          <a:fillRef idx="1">
-            <a:schemeClr val="accent2"/>
-          </a:fillRef>
-          <a:effectRef idx="0">
-            <a:schemeClr val="accent2"/>
-          </a:effectRef>
-          <a:fontRef idx="minor">
-            <a:schemeClr val="lt1"/>
-          </a:fontRef>
-        </p:style>
-        <p:txBody>
-          <a:bodyPr rtlCol="0" anchor="ctr"/>
-          <a:lstStyle/>
-          <a:p>
-            <a:pPr algn="ctr"/>
-            <a:r>
-              <a:rPr lang="en-US" dirty="0"/>
-              <a:t>actor</a:t>
-            </a:r>
-          </a:p>
-        </p:txBody>
-      </p:sp>
-      <p:sp>
-        <p:nvSpPr>
-          <p:cNvPr id="10" name="Speech Bubble: Rectangle with Corners Rounded 9">
-            <a:extLst>
-              <a:ext uri="{FF2B5EF4-FFF2-40B4-BE49-F238E27FC236}">
-                <a16:creationId xmlns:a16="http://schemas.microsoft.com/office/drawing/2014/main" id="{13A4B9D4-E0AA-951D-C0AB-75C0453EEC3C}"/>
-              </a:ext>
-            </a:extLst>
-          </p:cNvPr>
-          <p:cNvSpPr/>
-          <p:nvPr/>
-        </p:nvSpPr>
-        <p:spPr>
-          <a:xfrm>
-            <a:off x="243142" y="3429000"/>
-            <a:ext cx="1634519" cy="670095"/>
-          </a:xfrm>
-          <a:prstGeom prst="wedgeRoundRectCallout">
-            <a:avLst>
-              <a:gd name="adj1" fmla="val 73313"/>
-              <a:gd name="adj2" fmla="val 22694"/>
-              <a:gd name="adj3" fmla="val 16667"/>
-            </a:avLst>
-          </a:prstGeom>
-        </p:spPr>
-        <p:style>
-          <a:lnRef idx="2">
-            <a:schemeClr val="accent2">
-              <a:shade val="15000"/>
-            </a:schemeClr>
-          </a:lnRef>
-          <a:fillRef idx="1">
-            <a:schemeClr val="accent2"/>
-          </a:fillRef>
-          <a:effectRef idx="0">
-            <a:schemeClr val="accent2"/>
-          </a:effectRef>
-          <a:fontRef idx="minor">
-            <a:schemeClr val="lt1"/>
-          </a:fontRef>
-        </p:style>
-        <p:txBody>
-          <a:bodyPr rtlCol="0" anchor="ctr"/>
-          <a:lstStyle/>
-          <a:p>
-            <a:pPr algn="ctr"/>
-            <a:r>
-              <a:rPr lang="en-US" dirty="0"/>
-              <a:t>Takes care of discounting</a:t>
-            </a:r>
-          </a:p>
-        </p:txBody>
-      </p:sp>
-      <p:sp>
-        <p:nvSpPr>
-          <p:cNvPr id="11" name="Rectangle 10">
-            <a:extLst>
-              <a:ext uri="{FF2B5EF4-FFF2-40B4-BE49-F238E27FC236}">
-                <a16:creationId xmlns:a16="http://schemas.microsoft.com/office/drawing/2014/main" id="{05DCB902-4519-6052-12CC-ADD3BFE4DF5D}"/>
-              </a:ext>
-            </a:extLst>
-          </p:cNvPr>
-          <p:cNvSpPr/>
-          <p:nvPr/>
-        </p:nvSpPr>
-        <p:spPr>
-          <a:xfrm>
-            <a:off x="2442225" y="4809325"/>
-            <a:ext cx="3093036" cy="544451"/>
-          </a:xfrm>
-          <a:prstGeom prst="rect">
-            <a:avLst/>
-          </a:prstGeom>
-          <a:noFill/>
-          <a:ln w="28575" cap="flat" cmpd="sng" algn="ctr">
-            <a:solidFill>
-              <a:schemeClr val="accent2"/>
-            </a:solidFill>
-            <a:prstDash val="solid"/>
-            <a:round/>
-            <a:headEnd type="none" w="med" len="med"/>
-            <a:tailEnd type="none" w="med" len="med"/>
-          </a:ln>
-        </p:spPr>
-        <p:style>
-          <a:lnRef idx="0">
-            <a:scrgbClr r="0" g="0" b="0"/>
-          </a:lnRef>
-          <a:fillRef idx="0">
-            <a:scrgbClr r="0" g="0" b="0"/>
-          </a:fillRef>
-          <a:effectRef idx="0">
-            <a:scrgbClr r="0" g="0" b="0"/>
-          </a:effectRef>
-          <a:fontRef idx="minor">
-            <a:schemeClr val="accent2"/>
+            <a:schemeClr val="tx1"/>
           </a:fontRef>
         </p:style>
         <p:txBody>
@@ -13145,320 +17135,10 @@
           </a:p>
         </p:txBody>
       </p:sp>
-      <p:sp>
-        <p:nvSpPr>
-          <p:cNvPr id="12" name="Speech Bubble: Rectangle with Corners Rounded 11">
-            <a:extLst>
-              <a:ext uri="{FF2B5EF4-FFF2-40B4-BE49-F238E27FC236}">
-                <a16:creationId xmlns:a16="http://schemas.microsoft.com/office/drawing/2014/main" id="{A8ECFCE4-C642-EBAF-5270-39245F140766}"/>
-              </a:ext>
-            </a:extLst>
-          </p:cNvPr>
-          <p:cNvSpPr/>
-          <p:nvPr/>
-        </p:nvSpPr>
-        <p:spPr>
-          <a:xfrm>
-            <a:off x="7481559" y="3699481"/>
-            <a:ext cx="2130111" cy="885301"/>
-          </a:xfrm>
-          <a:prstGeom prst="wedgeRoundRectCallout">
-            <a:avLst>
-              <a:gd name="adj1" fmla="val -140668"/>
-              <a:gd name="adj2" fmla="val 77097"/>
-              <a:gd name="adj3" fmla="val 16667"/>
-            </a:avLst>
-          </a:prstGeom>
-        </p:spPr>
-        <p:style>
-          <a:lnRef idx="2">
-            <a:schemeClr val="accent2">
-              <a:shade val="15000"/>
-            </a:schemeClr>
-          </a:lnRef>
-          <a:fillRef idx="1">
-            <a:schemeClr val="accent2"/>
-          </a:fillRef>
-          <a:effectRef idx="0">
-            <a:schemeClr val="accent2"/>
-          </a:effectRef>
-          <a:fontRef idx="minor">
-            <a:schemeClr val="lt1"/>
-          </a:fontRef>
-        </p:style>
-        <p:txBody>
-          <a:bodyPr rtlCol="0" anchor="ctr"/>
-          <a:lstStyle/>
-          <a:p>
-            <a:pPr algn="ctr"/>
-            <a:r>
-              <a:rPr lang="en-US" dirty="0"/>
-              <a:t>Update critic using one-step bootstrapping</a:t>
-            </a:r>
-          </a:p>
-        </p:txBody>
-      </p:sp>
-      <p:sp>
-        <p:nvSpPr>
-          <p:cNvPr id="13" name="Rectangle 12">
-            <a:extLst>
-              <a:ext uri="{FF2B5EF4-FFF2-40B4-BE49-F238E27FC236}">
-                <a16:creationId xmlns:a16="http://schemas.microsoft.com/office/drawing/2014/main" id="{44E06FFA-E200-E681-2E5D-039A57F537AC}"/>
-              </a:ext>
-            </a:extLst>
-          </p:cNvPr>
-          <p:cNvSpPr/>
-          <p:nvPr/>
-        </p:nvSpPr>
-        <p:spPr>
-          <a:xfrm>
-            <a:off x="2442225" y="5377090"/>
-            <a:ext cx="3093036" cy="272226"/>
-          </a:xfrm>
-          <a:prstGeom prst="rect">
-            <a:avLst/>
-          </a:prstGeom>
-          <a:noFill/>
-          <a:ln w="28575" cap="flat" cmpd="sng" algn="ctr">
-            <a:solidFill>
-              <a:schemeClr val="accent2"/>
-            </a:solidFill>
-            <a:prstDash val="solid"/>
-            <a:round/>
-            <a:headEnd type="none" w="med" len="med"/>
-            <a:tailEnd type="none" w="med" len="med"/>
-          </a:ln>
-        </p:spPr>
-        <p:style>
-          <a:lnRef idx="0">
-            <a:scrgbClr r="0" g="0" b="0"/>
-          </a:lnRef>
-          <a:fillRef idx="0">
-            <a:scrgbClr r="0" g="0" b="0"/>
-          </a:fillRef>
-          <a:effectRef idx="0">
-            <a:scrgbClr r="0" g="0" b="0"/>
-          </a:effectRef>
-          <a:fontRef idx="minor">
-            <a:schemeClr val="accent2"/>
-          </a:fontRef>
-        </p:style>
-        <p:txBody>
-          <a:bodyPr rtlCol="0" anchor="ctr"/>
-          <a:lstStyle/>
-          <a:p>
-            <a:pPr algn="ctr"/>
-            <a:endParaRPr lang="en-US"/>
-          </a:p>
-        </p:txBody>
-      </p:sp>
-      <p:sp>
-        <p:nvSpPr>
-          <p:cNvPr id="14" name="Speech Bubble: Rectangle with Corners Rounded 13">
-            <a:extLst>
-              <a:ext uri="{FF2B5EF4-FFF2-40B4-BE49-F238E27FC236}">
-                <a16:creationId xmlns:a16="http://schemas.microsoft.com/office/drawing/2014/main" id="{E94F9DD5-BDBE-9FDD-3254-2C368EE7BF6A}"/>
-              </a:ext>
-            </a:extLst>
-          </p:cNvPr>
-          <p:cNvSpPr/>
-          <p:nvPr/>
-        </p:nvSpPr>
-        <p:spPr>
-          <a:xfrm>
-            <a:off x="7548451" y="5438263"/>
-            <a:ext cx="2130111" cy="336241"/>
-          </a:xfrm>
-          <a:prstGeom prst="wedgeRoundRectCallout">
-            <a:avLst>
-              <a:gd name="adj1" fmla="val -147549"/>
-              <a:gd name="adj2" fmla="val -37228"/>
-              <a:gd name="adj3" fmla="val 16667"/>
-            </a:avLst>
-          </a:prstGeom>
-        </p:spPr>
-        <p:style>
-          <a:lnRef idx="2">
-            <a:schemeClr val="accent2">
-              <a:shade val="15000"/>
-            </a:schemeClr>
-          </a:lnRef>
-          <a:fillRef idx="1">
-            <a:schemeClr val="accent2"/>
-          </a:fillRef>
-          <a:effectRef idx="0">
-            <a:schemeClr val="accent2"/>
-          </a:effectRef>
-          <a:fontRef idx="minor">
-            <a:schemeClr val="lt1"/>
-          </a:fontRef>
-        </p:style>
-        <p:txBody>
-          <a:bodyPr rtlCol="0" anchor="ctr"/>
-          <a:lstStyle/>
-          <a:p>
-            <a:pPr algn="ctr"/>
-            <a:r>
-              <a:rPr lang="en-US" dirty="0"/>
-              <a:t>Update the actor</a:t>
-            </a:r>
-          </a:p>
-        </p:txBody>
-      </p:sp>
-      <mc:AlternateContent xmlns:mc="http://schemas.openxmlformats.org/markup-compatibility/2006">
-        <mc:Choice xmlns:a14="http://schemas.microsoft.com/office/drawing/2010/main" Requires="a14">
-          <p:sp>
-            <p:nvSpPr>
-              <p:cNvPr id="15" name="Speech Bubble: Rectangle with Corners Rounded 14">
-                <a:extLst>
-                  <a:ext uri="{FF2B5EF4-FFF2-40B4-BE49-F238E27FC236}">
-                    <a16:creationId xmlns:a16="http://schemas.microsoft.com/office/drawing/2014/main" id="{FF016670-6880-57C4-48DD-2CC156F4A715}"/>
-                  </a:ext>
-                </a:extLst>
-              </p:cNvPr>
-              <p:cNvSpPr/>
-              <p:nvPr/>
-            </p:nvSpPr>
-            <p:spPr>
-              <a:xfrm>
-                <a:off x="4133992" y="5995512"/>
-                <a:ext cx="2130111" cy="336241"/>
-              </a:xfrm>
-              <a:prstGeom prst="wedgeRoundRectCallout">
-                <a:avLst>
-                  <a:gd name="adj1" fmla="val -55796"/>
-                  <a:gd name="adj2" fmla="val -163860"/>
-                  <a:gd name="adj3" fmla="val 16667"/>
-                </a:avLst>
-              </a:prstGeom>
-            </p:spPr>
-            <p:style>
-              <a:lnRef idx="2">
-                <a:schemeClr val="accent2">
-                  <a:shade val="15000"/>
-                </a:schemeClr>
-              </a:lnRef>
-              <a:fillRef idx="1">
-                <a:schemeClr val="accent2"/>
-              </a:fillRef>
-              <a:effectRef idx="0">
-                <a:schemeClr val="accent2"/>
-              </a:effectRef>
-              <a:fontRef idx="minor">
-                <a:schemeClr val="lt1"/>
-              </a:fontRef>
-            </p:style>
-            <p:txBody>
-              <a:bodyPr rtlCol="0" anchor="ctr"/>
-              <a:lstStyle/>
-              <a:p>
-                <a:pPr algn="ctr"/>
-                <a14:m>
-                  <m:oMath xmlns:m="http://schemas.openxmlformats.org/officeDocument/2006/math">
-                    <m:r>
-                      <a:rPr lang="en-US" b="0" i="1" dirty="0" smtClean="0">
-                        <a:latin typeface="Cambria Math" panose="02040503050406030204" pitchFamily="18" charset="0"/>
-                      </a:rPr>
-                      <m:t>𝛿</m:t>
-                    </m:r>
-                  </m:oMath>
-                </a14:m>
-                <a:r>
-                  <a:rPr lang="en-US" dirty="0"/>
-                  <a:t> is used for </a:t>
-                </a:r>
-                <a14:m>
-                  <m:oMath xmlns:m="http://schemas.openxmlformats.org/officeDocument/2006/math">
-                    <m:r>
-                      <a:rPr lang="en-US" b="0" i="1" smtClean="0">
-                        <a:latin typeface="Cambria Math" panose="02040503050406030204" pitchFamily="18" charset="0"/>
-                      </a:rPr>
-                      <m:t>𝐺</m:t>
-                    </m:r>
-                    <m:r>
-                      <a:rPr lang="en-US" b="0" i="1" smtClean="0">
-                        <a:latin typeface="Cambria Math" panose="02040503050406030204" pitchFamily="18" charset="0"/>
-                      </a:rPr>
-                      <m:t>−</m:t>
-                    </m:r>
-                    <m:acc>
-                      <m:accPr>
-                        <m:chr m:val="̂"/>
-                        <m:ctrlPr>
-                          <a:rPr lang="en-US" b="0" i="1" smtClean="0">
-                            <a:latin typeface="Cambria Math" panose="02040503050406030204" pitchFamily="18" charset="0"/>
-                          </a:rPr>
-                        </m:ctrlPr>
-                      </m:accPr>
-                      <m:e>
-                        <m:r>
-                          <a:rPr lang="en-US" b="0" i="1" smtClean="0">
-                            <a:latin typeface="Cambria Math" panose="02040503050406030204" pitchFamily="18" charset="0"/>
-                          </a:rPr>
-                          <m:t>𝑣</m:t>
-                        </m:r>
-                      </m:e>
-                    </m:acc>
-                  </m:oMath>
-                </a14:m>
-                <a:endParaRPr lang="en-US" dirty="0"/>
-              </a:p>
-            </p:txBody>
-          </p:sp>
-        </mc:Choice>
-        <mc:Fallback>
-          <p:sp>
-            <p:nvSpPr>
-              <p:cNvPr id="15" name="Speech Bubble: Rectangle with Corners Rounded 14">
-                <a:extLst>
-                  <a:ext uri="{FF2B5EF4-FFF2-40B4-BE49-F238E27FC236}">
-                    <a16:creationId xmlns:a16="http://schemas.microsoft.com/office/drawing/2014/main" id="{FF016670-6880-57C4-48DD-2CC156F4A715}"/>
-                  </a:ext>
-                </a:extLst>
-              </p:cNvPr>
-              <p:cNvSpPr>
-                <a:spLocks noRot="1" noChangeAspect="1" noMove="1" noResize="1" noEditPoints="1" noAdjustHandles="1" noChangeArrowheads="1" noChangeShapeType="1" noTextEdit="1"/>
-              </p:cNvSpPr>
-              <p:nvPr/>
-            </p:nvSpPr>
-            <p:spPr>
-              <a:xfrm>
-                <a:off x="4133992" y="5995512"/>
-                <a:ext cx="2130111" cy="336241"/>
-              </a:xfrm>
-              <a:prstGeom prst="wedgeRoundRectCallout">
-                <a:avLst>
-                  <a:gd name="adj1" fmla="val -55796"/>
-                  <a:gd name="adj2" fmla="val -163860"/>
-                  <a:gd name="adj3" fmla="val 16667"/>
-                </a:avLst>
-              </a:prstGeom>
-              <a:blipFill>
-                <a:blip r:embed="rId3"/>
-                <a:stretch>
-                  <a:fillRect r="-8399" b="-13710"/>
-                </a:stretch>
-              </a:blipFill>
-            </p:spPr>
-            <p:txBody>
-              <a:bodyPr/>
-              <a:lstStyle/>
-              <a:p>
-                <a:r>
-                  <a:rPr lang="en-US">
-                    <a:noFill/>
-                  </a:rPr>
-                  <a:t> </a:t>
-                </a:r>
-              </a:p>
-            </p:txBody>
-          </p:sp>
-        </mc:Fallback>
-      </mc:AlternateContent>
     </p:spTree>
     <p:extLst>
       <p:ext uri="{BB962C8B-B14F-4D97-AF65-F5344CB8AC3E}">
-        <p14:creationId xmlns:p14="http://schemas.microsoft.com/office/powerpoint/2010/main" val="2787183778"/>
+        <p14:creationId xmlns:p14="http://schemas.microsoft.com/office/powerpoint/2010/main" val="2693499901"/>
       </p:ext>
     </p:extLst>
   </p:cSld>

--- a/slides/Lecture_Chapter13.pptx
+++ b/slides/Lecture_Chapter13.pptx
@@ -296,7 +296,7 @@
           <a:p>
             <a:fld id="{3E22BF2E-04DA-469E-97C5-BB68A0368813}" type="datetimeFigureOut">
               <a:rPr lang="en-US" smtClean="0"/>
-              <a:t>11/29/2025</a:t>
+              <a:t>1/1/2026</a:t>
             </a:fld>
             <a:endParaRPr lang="en-US"/>
           </a:p>
@@ -494,7 +494,7 @@
           <a:p>
             <a:fld id="{3E22BF2E-04DA-469E-97C5-BB68A0368813}" type="datetimeFigureOut">
               <a:rPr lang="en-US" smtClean="0"/>
-              <a:t>11/29/2025</a:t>
+              <a:t>1/1/2026</a:t>
             </a:fld>
             <a:endParaRPr lang="en-US"/>
           </a:p>
@@ -702,7 +702,7 @@
           <a:p>
             <a:fld id="{3E22BF2E-04DA-469E-97C5-BB68A0368813}" type="datetimeFigureOut">
               <a:rPr lang="en-US" smtClean="0"/>
-              <a:t>11/29/2025</a:t>
+              <a:t>1/1/2026</a:t>
             </a:fld>
             <a:endParaRPr lang="en-US"/>
           </a:p>
@@ -910,7 +910,7 @@
           <a:p>
             <a:fld id="{3E22BF2E-04DA-469E-97C5-BB68A0368813}" type="datetimeFigureOut">
               <a:rPr lang="en-US" smtClean="0"/>
-              <a:t>11/29/2025</a:t>
+              <a:t>1/1/2026</a:t>
             </a:fld>
             <a:endParaRPr lang="en-US"/>
           </a:p>
@@ -1185,7 +1185,7 @@
           <a:p>
             <a:fld id="{3E22BF2E-04DA-469E-97C5-BB68A0368813}" type="datetimeFigureOut">
               <a:rPr lang="en-US" smtClean="0"/>
-              <a:t>11/29/2025</a:t>
+              <a:t>1/1/2026</a:t>
             </a:fld>
             <a:endParaRPr lang="en-US"/>
           </a:p>
@@ -1450,7 +1450,7 @@
           <a:p>
             <a:fld id="{3E22BF2E-04DA-469E-97C5-BB68A0368813}" type="datetimeFigureOut">
               <a:rPr lang="en-US" smtClean="0"/>
-              <a:t>11/29/2025</a:t>
+              <a:t>1/1/2026</a:t>
             </a:fld>
             <a:endParaRPr lang="en-US"/>
           </a:p>
@@ -1862,7 +1862,7 @@
           <a:p>
             <a:fld id="{3E22BF2E-04DA-469E-97C5-BB68A0368813}" type="datetimeFigureOut">
               <a:rPr lang="en-US" smtClean="0"/>
-              <a:t>11/29/2025</a:t>
+              <a:t>1/1/2026</a:t>
             </a:fld>
             <a:endParaRPr lang="en-US"/>
           </a:p>
@@ -2003,7 +2003,7 @@
           <a:p>
             <a:fld id="{3E22BF2E-04DA-469E-97C5-BB68A0368813}" type="datetimeFigureOut">
               <a:rPr lang="en-US" smtClean="0"/>
-              <a:t>11/29/2025</a:t>
+              <a:t>1/1/2026</a:t>
             </a:fld>
             <a:endParaRPr lang="en-US"/>
           </a:p>
@@ -2116,7 +2116,7 @@
           <a:p>
             <a:fld id="{3E22BF2E-04DA-469E-97C5-BB68A0368813}" type="datetimeFigureOut">
               <a:rPr lang="en-US" smtClean="0"/>
-              <a:t>11/29/2025</a:t>
+              <a:t>1/1/2026</a:t>
             </a:fld>
             <a:endParaRPr lang="en-US"/>
           </a:p>
@@ -2427,7 +2427,7 @@
           <a:p>
             <a:fld id="{3E22BF2E-04DA-469E-97C5-BB68A0368813}" type="datetimeFigureOut">
               <a:rPr lang="en-US" smtClean="0"/>
-              <a:t>11/29/2025</a:t>
+              <a:t>1/1/2026</a:t>
             </a:fld>
             <a:endParaRPr lang="en-US"/>
           </a:p>
@@ -2715,7 +2715,7 @@
           <a:p>
             <a:fld id="{3E22BF2E-04DA-469E-97C5-BB68A0368813}" type="datetimeFigureOut">
               <a:rPr lang="en-US" smtClean="0"/>
-              <a:t>11/29/2025</a:t>
+              <a:t>1/1/2026</a:t>
             </a:fld>
             <a:endParaRPr lang="en-US"/>
           </a:p>
@@ -2956,7 +2956,7 @@
           <a:p>
             <a:fld id="{3E22BF2E-04DA-469E-97C5-BB68A0368813}" type="datetimeFigureOut">
               <a:rPr lang="en-US" smtClean="0"/>
-              <a:t>11/29/2025</a:t>
+              <a:t>1/1/2026</a:t>
             </a:fld>
             <a:endParaRPr lang="en-US"/>
           </a:p>
@@ -4124,8 +4124,8 @@
           </a:p>
         </p:txBody>
       </p:sp>
-      <mc:AlternateContent xmlns:mc="http://schemas.openxmlformats.org/markup-compatibility/2006">
-        <mc:Choice xmlns:a14="http://schemas.microsoft.com/office/drawing/2010/main" Requires="a14">
+      <mc:AlternateContent xmlns:mc="http://schemas.openxmlformats.org/markup-compatibility/2006" xmlns:a14="http://schemas.microsoft.com/office/drawing/2010/main">
+        <mc:Choice Requires="a14">
           <p:sp>
             <p:nvSpPr>
               <p:cNvPr id="5" name="Content Placeholder 4">
@@ -4408,7 +4408,7 @@
             </p:txBody>
           </p:sp>
         </mc:Choice>
-        <mc:Fallback>
+        <mc:Fallback xmlns="">
           <p:sp>
             <p:nvSpPr>
               <p:cNvPr id="5" name="Content Placeholder 4">
@@ -4526,8 +4526,8 @@
           </a:p>
         </p:txBody>
       </p:sp>
-      <mc:AlternateContent xmlns:mc="http://schemas.openxmlformats.org/markup-compatibility/2006">
-        <mc:Choice xmlns:a14="http://schemas.microsoft.com/office/drawing/2010/main" Requires="a14">
+      <mc:AlternateContent xmlns:mc="http://schemas.openxmlformats.org/markup-compatibility/2006" xmlns:a14="http://schemas.microsoft.com/office/drawing/2010/main">
+        <mc:Choice Requires="a14">
           <p:sp>
             <p:nvSpPr>
               <p:cNvPr id="3" name="TextBox 2">
@@ -4556,6 +4556,7 @@
               </a:bodyPr>
               <a:lstStyle/>
               <a:p>
+                <a:pPr/>
                 <a14:m>
                   <m:oMathPara xmlns:m="http://schemas.openxmlformats.org/officeDocument/2006/math">
                     <m:oMathParaPr>
@@ -4595,7 +4596,7 @@
             </p:txBody>
           </p:sp>
         </mc:Choice>
-        <mc:Fallback>
+        <mc:Fallback xmlns="">
           <p:sp>
             <p:nvSpPr>
               <p:cNvPr id="3" name="TextBox 2">
@@ -4834,8 +4835,8 @@
           </a:p>
         </p:txBody>
       </p:sp>
-      <mc:AlternateContent xmlns:mc="http://schemas.openxmlformats.org/markup-compatibility/2006">
-        <mc:Choice xmlns:a14="http://schemas.microsoft.com/office/drawing/2010/main" Requires="a14">
+      <mc:AlternateContent xmlns:mc="http://schemas.openxmlformats.org/markup-compatibility/2006" xmlns:a14="http://schemas.microsoft.com/office/drawing/2010/main">
+        <mc:Choice Requires="a14">
           <p:sp>
             <p:nvSpPr>
               <p:cNvPr id="10" name="Speech Bubble: Rectangle with Corners Rounded 9">
@@ -4920,7 +4921,7 @@
             </p:txBody>
           </p:sp>
         </mc:Choice>
-        <mc:Fallback>
+        <mc:Fallback xmlns="">
           <p:sp>
             <p:nvSpPr>
               <p:cNvPr id="10" name="Speech Bubble: Rectangle with Corners Rounded 9">
@@ -5023,8 +5024,8 @@
           </a:p>
         </p:txBody>
       </p:sp>
-      <mc:AlternateContent xmlns:mc="http://schemas.openxmlformats.org/markup-compatibility/2006">
-        <mc:Choice xmlns:a14="http://schemas.microsoft.com/office/drawing/2010/main" Requires="a14">
+      <mc:AlternateContent xmlns:mc="http://schemas.openxmlformats.org/markup-compatibility/2006" xmlns:a14="http://schemas.microsoft.com/office/drawing/2010/main">
+        <mc:Choice Requires="a14">
           <p:sp>
             <p:nvSpPr>
               <p:cNvPr id="12" name="Speech Bubble: Rectangle with Corners Rounded 11">
@@ -5119,7 +5120,7 @@
             </p:txBody>
           </p:sp>
         </mc:Choice>
-        <mc:Fallback>
+        <mc:Fallback xmlns="">
           <p:sp>
             <p:nvSpPr>
               <p:cNvPr id="12" name="Speech Bubble: Rectangle with Corners Rounded 11">
@@ -5334,8 +5335,8 @@
           </a:p>
         </p:txBody>
       </p:sp>
-      <mc:AlternateContent xmlns:mc="http://schemas.openxmlformats.org/markup-compatibility/2006">
-        <mc:Choice xmlns:a14="http://schemas.microsoft.com/office/drawing/2010/main" Requires="a14">
+      <mc:AlternateContent xmlns:mc="http://schemas.openxmlformats.org/markup-compatibility/2006" xmlns:a14="http://schemas.microsoft.com/office/drawing/2010/main">
+        <mc:Choice Requires="a14">
           <p:sp>
             <p:nvSpPr>
               <p:cNvPr id="6" name="Speech Bubble: Rectangle with Corners Rounded 5">
@@ -5407,7 +5408,7 @@
             </p:txBody>
           </p:sp>
         </mc:Choice>
-        <mc:Fallback>
+        <mc:Fallback xmlns="">
           <p:sp>
             <p:nvSpPr>
               <p:cNvPr id="6" name="Speech Bubble: Rectangle with Corners Rounded 5">
@@ -8339,8 +8340,8 @@
           </p:sp>
         </mc:Fallback>
       </mc:AlternateContent>
-      <mc:AlternateContent xmlns:mc="http://schemas.openxmlformats.org/markup-compatibility/2006" xmlns:a14="http://schemas.microsoft.com/office/drawing/2010/main">
-        <mc:Choice Requires="a14">
+      <mc:AlternateContent xmlns:mc="http://schemas.openxmlformats.org/markup-compatibility/2006">
+        <mc:Choice xmlns:a14="http://schemas.microsoft.com/office/drawing/2010/main" Requires="a14">
           <p:sp>
             <p:nvSpPr>
               <p:cNvPr id="10" name="TextBox 9">
@@ -8733,7 +8734,7 @@
                 </a14:m>
                 <a:r>
                   <a:rPr lang="en-US" sz="1200" dirty="0"/>
-                  <a:t>, i.e.,</a:t>
+                  <a:t>, i.e., </a:t>
                 </a:r>
                 <a14:m>
                   <m:oMath xmlns:m="http://schemas.openxmlformats.org/officeDocument/2006/math">
@@ -8955,7 +8956,7 @@
             </p:txBody>
           </p:sp>
         </mc:Choice>
-        <mc:Fallback xmlns="">
+        <mc:Fallback>
           <p:sp>
             <p:nvSpPr>
               <p:cNvPr id="10" name="TextBox 9">
@@ -12099,8 +12100,8 @@
           </a:p>
         </p:txBody>
       </p:sp>
-      <mc:AlternateContent xmlns:mc="http://schemas.openxmlformats.org/markup-compatibility/2006">
-        <mc:Choice xmlns:a14="http://schemas.microsoft.com/office/drawing/2010/main" Requires="a14">
+      <mc:AlternateContent xmlns:mc="http://schemas.openxmlformats.org/markup-compatibility/2006" xmlns:a14="http://schemas.microsoft.com/office/drawing/2010/main">
+        <mc:Choice Requires="a14">
           <p:sp>
             <p:nvSpPr>
               <p:cNvPr id="3" name="Content Placeholder 2">
@@ -12614,7 +12615,7 @@
             </p:txBody>
           </p:sp>
         </mc:Choice>
-        <mc:Fallback>
+        <mc:Fallback xmlns="">
           <p:sp>
             <p:nvSpPr>
               <p:cNvPr id="3" name="Content Placeholder 2">
@@ -12658,8 +12659,8 @@
           </p:sp>
         </mc:Fallback>
       </mc:AlternateContent>
-      <mc:AlternateContent xmlns:mc="http://schemas.openxmlformats.org/markup-compatibility/2006">
-        <mc:Choice xmlns:a14="http://schemas.microsoft.com/office/drawing/2010/main" Requires="a14">
+      <mc:AlternateContent xmlns:mc="http://schemas.openxmlformats.org/markup-compatibility/2006" xmlns:a14="http://schemas.microsoft.com/office/drawing/2010/main">
+        <mc:Choice Requires="a14">
           <p:sp>
             <p:nvSpPr>
               <p:cNvPr id="4" name="Speech Bubble: Rectangle with Corners Rounded 3">
@@ -12725,7 +12726,7 @@
             </p:txBody>
           </p:sp>
         </mc:Choice>
-        <mc:Fallback>
+        <mc:Fallback xmlns="">
           <p:sp>
             <p:nvSpPr>
               <p:cNvPr id="4" name="Speech Bubble: Rectangle with Corners Rounded 3">
@@ -12828,8 +12829,8 @@
           </a:p>
         </p:txBody>
       </p:sp>
-      <mc:AlternateContent xmlns:mc="http://schemas.openxmlformats.org/markup-compatibility/2006">
-        <mc:Choice xmlns:a14="http://schemas.microsoft.com/office/drawing/2010/main" Requires="a14">
+      <mc:AlternateContent xmlns:mc="http://schemas.openxmlformats.org/markup-compatibility/2006" xmlns:a14="http://schemas.microsoft.com/office/drawing/2010/main">
+        <mc:Choice Requires="a14">
           <p:sp>
             <p:nvSpPr>
               <p:cNvPr id="9" name="TextBox 8">
@@ -12873,7 +12874,6 @@
               </a:bodyPr>
               <a:lstStyle/>
               <a:p>
-                <a:pPr/>
                 <a:r>
                   <a:rPr lang="en-US" sz="1800" dirty="0"/>
                   <a:t>Policy: </a:t>
@@ -13107,7 +13107,6 @@
                 <a:endParaRPr lang="en-US" dirty="0"/>
               </a:p>
               <a:p>
-                <a:pPr/>
                 <a:r>
                   <a:rPr lang="en-US" dirty="0"/>
                   <a:t>Gradient: </a:t>
@@ -13434,7 +13433,7 @@
             </p:txBody>
           </p:sp>
         </mc:Choice>
-        <mc:Fallback>
+        <mc:Fallback xmlns="">
           <p:sp>
             <p:nvSpPr>
               <p:cNvPr id="9" name="TextBox 8">
@@ -13590,8 +13589,8 @@
           </a:p>
         </p:txBody>
       </p:sp>
-      <mc:AlternateContent xmlns:mc="http://schemas.openxmlformats.org/markup-compatibility/2006">
-        <mc:Choice xmlns:a14="http://schemas.microsoft.com/office/drawing/2010/main" Requires="a14">
+      <mc:AlternateContent xmlns:mc="http://schemas.openxmlformats.org/markup-compatibility/2006" xmlns:a14="http://schemas.microsoft.com/office/drawing/2010/main">
+        <mc:Choice Requires="a14">
           <p:sp>
             <p:nvSpPr>
               <p:cNvPr id="3" name="Content Placeholder 2">
@@ -14885,7 +14884,7 @@
             </p:txBody>
           </p:sp>
         </mc:Choice>
-        <mc:Fallback>
+        <mc:Fallback xmlns="">
           <p:sp>
             <p:nvSpPr>
               <p:cNvPr id="3" name="Content Placeholder 2">
@@ -14929,8 +14928,8 @@
           </p:sp>
         </mc:Fallback>
       </mc:AlternateContent>
-      <mc:AlternateContent xmlns:mc="http://schemas.openxmlformats.org/markup-compatibility/2006">
-        <mc:Choice xmlns:a14="http://schemas.microsoft.com/office/drawing/2010/main" Requires="a14">
+      <mc:AlternateContent xmlns:mc="http://schemas.openxmlformats.org/markup-compatibility/2006" xmlns:a14="http://schemas.microsoft.com/office/drawing/2010/main">
+        <mc:Choice Requires="a14">
           <p:sp>
             <p:nvSpPr>
               <p:cNvPr id="6" name="TextBox 5">
@@ -15026,7 +15025,7 @@
             </p:txBody>
           </p:sp>
         </mc:Choice>
-        <mc:Fallback>
+        <mc:Fallback xmlns="">
           <p:sp>
             <p:nvSpPr>
               <p:cNvPr id="6" name="TextBox 5">
@@ -15071,8 +15070,8 @@
           </p:sp>
         </mc:Fallback>
       </mc:AlternateContent>
-      <mc:AlternateContent xmlns:mc="http://schemas.openxmlformats.org/markup-compatibility/2006">
-        <mc:Choice xmlns:a14="http://schemas.microsoft.com/office/drawing/2010/main" Requires="a14">
+      <mc:AlternateContent xmlns:mc="http://schemas.openxmlformats.org/markup-compatibility/2006" xmlns:a14="http://schemas.microsoft.com/office/drawing/2010/main">
+        <mc:Choice Requires="a14">
           <p:sp>
             <p:nvSpPr>
               <p:cNvPr id="7" name="TextBox 6">
@@ -15369,7 +15368,7 @@
             </p:txBody>
           </p:sp>
         </mc:Choice>
-        <mc:Fallback>
+        <mc:Fallback xmlns="">
           <p:sp>
             <p:nvSpPr>
               <p:cNvPr id="7" name="TextBox 6">
@@ -15414,8 +15413,8 @@
           </p:sp>
         </mc:Fallback>
       </mc:AlternateContent>
-      <mc:AlternateContent xmlns:mc="http://schemas.openxmlformats.org/markup-compatibility/2006">
-        <mc:Choice xmlns:a14="http://schemas.microsoft.com/office/drawing/2010/main" Requires="a14">
+      <mc:AlternateContent xmlns:mc="http://schemas.openxmlformats.org/markup-compatibility/2006" xmlns:a14="http://schemas.microsoft.com/office/drawing/2010/main">
+        <mc:Choice Requires="a14">
           <p:sp>
             <p:nvSpPr>
               <p:cNvPr id="4" name="TextBox 3">
@@ -15511,7 +15510,7 @@
             </p:txBody>
           </p:sp>
         </mc:Choice>
-        <mc:Fallback>
+        <mc:Fallback xmlns="">
           <p:sp>
             <p:nvSpPr>
               <p:cNvPr id="4" name="TextBox 3">
@@ -15556,8 +15555,8 @@
           </p:sp>
         </mc:Fallback>
       </mc:AlternateContent>
-      <mc:AlternateContent xmlns:mc="http://schemas.openxmlformats.org/markup-compatibility/2006">
-        <mc:Choice xmlns:a14="http://schemas.microsoft.com/office/drawing/2010/main" Requires="a14">
+      <mc:AlternateContent xmlns:mc="http://schemas.openxmlformats.org/markup-compatibility/2006" xmlns:a14="http://schemas.microsoft.com/office/drawing/2010/main">
+        <mc:Choice Requires="a14">
           <p:sp>
             <p:nvSpPr>
               <p:cNvPr id="9" name="Content Placeholder 2">
@@ -15925,7 +15924,7 @@
             </p:txBody>
           </p:sp>
         </mc:Choice>
-        <mc:Fallback>
+        <mc:Fallback xmlns="">
           <p:sp>
             <p:nvSpPr>
               <p:cNvPr id="9" name="Content Placeholder 2">
@@ -15970,8 +15969,8 @@
           </p:sp>
         </mc:Fallback>
       </mc:AlternateContent>
-      <mc:AlternateContent xmlns:mc="http://schemas.openxmlformats.org/markup-compatibility/2006">
-        <mc:Choice xmlns:a14="http://schemas.microsoft.com/office/drawing/2010/main" Requires="a14">
+      <mc:AlternateContent xmlns:mc="http://schemas.openxmlformats.org/markup-compatibility/2006" xmlns:a14="http://schemas.microsoft.com/office/drawing/2010/main">
+        <mc:Choice Requires="a14">
           <p:sp>
             <p:nvSpPr>
               <p:cNvPr id="10" name="TextBox 9">
@@ -16102,7 +16101,7 @@
             </p:txBody>
           </p:sp>
         </mc:Choice>
-        <mc:Fallback>
+        <mc:Fallback xmlns="">
           <p:sp>
             <p:nvSpPr>
               <p:cNvPr id="10" name="TextBox 9">
@@ -16147,8 +16146,8 @@
           </p:sp>
         </mc:Fallback>
       </mc:AlternateContent>
-      <mc:AlternateContent xmlns:mc="http://schemas.openxmlformats.org/markup-compatibility/2006">
-        <mc:Choice xmlns:a14="http://schemas.microsoft.com/office/drawing/2010/main" Requires="a14">
+      <mc:AlternateContent xmlns:mc="http://schemas.openxmlformats.org/markup-compatibility/2006" xmlns:a14="http://schemas.microsoft.com/office/drawing/2010/main">
+        <mc:Choice Requires="a14">
           <p:sp>
             <p:nvSpPr>
               <p:cNvPr id="11" name="Speech Bubble: Rectangle with Corners Rounded 10">
@@ -16311,7 +16310,7 @@
             </p:txBody>
           </p:sp>
         </mc:Choice>
-        <mc:Fallback>
+        <mc:Fallback xmlns="">
           <p:sp>
             <p:nvSpPr>
               <p:cNvPr id="11" name="Speech Bubble: Rectangle with Corners Rounded 10">
@@ -16424,8 +16423,8 @@
           </a:p>
         </p:txBody>
       </p:sp>
-      <mc:AlternateContent xmlns:mc="http://schemas.openxmlformats.org/markup-compatibility/2006">
-        <mc:Choice xmlns:a14="http://schemas.microsoft.com/office/drawing/2010/main" Requires="a14">
+      <mc:AlternateContent xmlns:mc="http://schemas.openxmlformats.org/markup-compatibility/2006" xmlns:a14="http://schemas.microsoft.com/office/drawing/2010/main">
+        <mc:Choice Requires="a14">
           <p:sp>
             <p:nvSpPr>
               <p:cNvPr id="3" name="Content Placeholder 2">
@@ -16890,7 +16889,7 @@
             </p:txBody>
           </p:sp>
         </mc:Choice>
-        <mc:Fallback>
+        <mc:Fallback xmlns="">
           <p:sp>
             <p:nvSpPr>
               <p:cNvPr id="3" name="Content Placeholder 2">
@@ -16964,8 +16963,8 @@
           </a:prstGeom>
         </p:spPr>
       </p:pic>
-      <mc:AlternateContent xmlns:mc="http://schemas.openxmlformats.org/markup-compatibility/2006">
-        <mc:Choice xmlns:a14="http://schemas.microsoft.com/office/drawing/2010/main" Requires="a14">
+      <mc:AlternateContent xmlns:mc="http://schemas.openxmlformats.org/markup-compatibility/2006" xmlns:a14="http://schemas.microsoft.com/office/drawing/2010/main">
+        <mc:Choice Requires="a14">
           <p:sp>
             <p:nvSpPr>
               <p:cNvPr id="10" name="TextBox 9">
@@ -16994,7 +16993,6 @@
               </a:bodyPr>
               <a:lstStyle/>
               <a:p>
-                <a:pPr/>
                 <a:r>
                   <a:rPr lang="en-US" dirty="0">
                     <a:ea typeface="Cambria Math" panose="02040503050406030204" pitchFamily="18" charset="0"/>
@@ -17046,7 +17044,7 @@
             </p:txBody>
           </p:sp>
         </mc:Choice>
-        <mc:Fallback>
+        <mc:Fallback xmlns="">
           <p:sp>
             <p:nvSpPr>
               <p:cNvPr id="10" name="TextBox 9">

--- a/slides/Lecture_Chapter13.pptx
+++ b/slides/Lecture_Chapter13.pptx
@@ -6,20 +6,21 @@
   </p:sldMasterIdLst>
   <p:sldIdLst>
     <p:sldId id="256" r:id="rId2"/>
-    <p:sldId id="384" r:id="rId3"/>
-    <p:sldId id="393" r:id="rId4"/>
-    <p:sldId id="394" r:id="rId5"/>
-    <p:sldId id="395" r:id="rId6"/>
-    <p:sldId id="396" r:id="rId7"/>
-    <p:sldId id="397" r:id="rId8"/>
-    <p:sldId id="398" r:id="rId9"/>
-    <p:sldId id="405" r:id="rId10"/>
-    <p:sldId id="403" r:id="rId11"/>
-    <p:sldId id="404" r:id="rId12"/>
-    <p:sldId id="399" r:id="rId13"/>
-    <p:sldId id="400" r:id="rId14"/>
-    <p:sldId id="401" r:id="rId15"/>
-    <p:sldId id="402" r:id="rId16"/>
+    <p:sldId id="313" r:id="rId3"/>
+    <p:sldId id="478" r:id="rId4"/>
+    <p:sldId id="393" r:id="rId5"/>
+    <p:sldId id="394" r:id="rId6"/>
+    <p:sldId id="395" r:id="rId7"/>
+    <p:sldId id="396" r:id="rId8"/>
+    <p:sldId id="397" r:id="rId9"/>
+    <p:sldId id="398" r:id="rId10"/>
+    <p:sldId id="405" r:id="rId11"/>
+    <p:sldId id="403" r:id="rId12"/>
+    <p:sldId id="404" r:id="rId13"/>
+    <p:sldId id="399" r:id="rId14"/>
+    <p:sldId id="400" r:id="rId15"/>
+    <p:sldId id="401" r:id="rId16"/>
+    <p:sldId id="402" r:id="rId17"/>
   </p:sldIdLst>
   <p:sldSz cx="12192000" cy="6858000"/>
   <p:notesSz cx="6858000" cy="9144000"/>
@@ -124,7 +125,8 @@
         <p14:section name="Default Section" id="{83286E67-F0F0-421C-8F74-7B93ABA17FBF}">
           <p14:sldIdLst>
             <p14:sldId id="256"/>
-            <p14:sldId id="384"/>
+            <p14:sldId id="313"/>
+            <p14:sldId id="478"/>
             <p14:sldId id="393"/>
             <p14:sldId id="394"/>
             <p14:sldId id="395"/>
@@ -296,7 +298,7 @@
           <a:p>
             <a:fld id="{3E22BF2E-04DA-469E-97C5-BB68A0368813}" type="datetimeFigureOut">
               <a:rPr lang="en-US" smtClean="0"/>
-              <a:t>1/1/2026</a:t>
+              <a:t>2/6/2026</a:t>
             </a:fld>
             <a:endParaRPr lang="en-US"/>
           </a:p>
@@ -494,7 +496,7 @@
           <a:p>
             <a:fld id="{3E22BF2E-04DA-469E-97C5-BB68A0368813}" type="datetimeFigureOut">
               <a:rPr lang="en-US" smtClean="0"/>
-              <a:t>1/1/2026</a:t>
+              <a:t>2/6/2026</a:t>
             </a:fld>
             <a:endParaRPr lang="en-US"/>
           </a:p>
@@ -702,7 +704,7 @@
           <a:p>
             <a:fld id="{3E22BF2E-04DA-469E-97C5-BB68A0368813}" type="datetimeFigureOut">
               <a:rPr lang="en-US" smtClean="0"/>
-              <a:t>1/1/2026</a:t>
+              <a:t>2/6/2026</a:t>
             </a:fld>
             <a:endParaRPr lang="en-US"/>
           </a:p>
@@ -910,7 +912,7 @@
           <a:p>
             <a:fld id="{3E22BF2E-04DA-469E-97C5-BB68A0368813}" type="datetimeFigureOut">
               <a:rPr lang="en-US" smtClean="0"/>
-              <a:t>1/1/2026</a:t>
+              <a:t>2/6/2026</a:t>
             </a:fld>
             <a:endParaRPr lang="en-US"/>
           </a:p>
@@ -1185,7 +1187,7 @@
           <a:p>
             <a:fld id="{3E22BF2E-04DA-469E-97C5-BB68A0368813}" type="datetimeFigureOut">
               <a:rPr lang="en-US" smtClean="0"/>
-              <a:t>1/1/2026</a:t>
+              <a:t>2/6/2026</a:t>
             </a:fld>
             <a:endParaRPr lang="en-US"/>
           </a:p>
@@ -1450,7 +1452,7 @@
           <a:p>
             <a:fld id="{3E22BF2E-04DA-469E-97C5-BB68A0368813}" type="datetimeFigureOut">
               <a:rPr lang="en-US" smtClean="0"/>
-              <a:t>1/1/2026</a:t>
+              <a:t>2/6/2026</a:t>
             </a:fld>
             <a:endParaRPr lang="en-US"/>
           </a:p>
@@ -1862,7 +1864,7 @@
           <a:p>
             <a:fld id="{3E22BF2E-04DA-469E-97C5-BB68A0368813}" type="datetimeFigureOut">
               <a:rPr lang="en-US" smtClean="0"/>
-              <a:t>1/1/2026</a:t>
+              <a:t>2/6/2026</a:t>
             </a:fld>
             <a:endParaRPr lang="en-US"/>
           </a:p>
@@ -2003,7 +2005,7 @@
           <a:p>
             <a:fld id="{3E22BF2E-04DA-469E-97C5-BB68A0368813}" type="datetimeFigureOut">
               <a:rPr lang="en-US" smtClean="0"/>
-              <a:t>1/1/2026</a:t>
+              <a:t>2/6/2026</a:t>
             </a:fld>
             <a:endParaRPr lang="en-US"/>
           </a:p>
@@ -2116,7 +2118,7 @@
           <a:p>
             <a:fld id="{3E22BF2E-04DA-469E-97C5-BB68A0368813}" type="datetimeFigureOut">
               <a:rPr lang="en-US" smtClean="0"/>
-              <a:t>1/1/2026</a:t>
+              <a:t>2/6/2026</a:t>
             </a:fld>
             <a:endParaRPr lang="en-US"/>
           </a:p>
@@ -2427,7 +2429,7 @@
           <a:p>
             <a:fld id="{3E22BF2E-04DA-469E-97C5-BB68A0368813}" type="datetimeFigureOut">
               <a:rPr lang="en-US" smtClean="0"/>
-              <a:t>1/1/2026</a:t>
+              <a:t>2/6/2026</a:t>
             </a:fld>
             <a:endParaRPr lang="en-US"/>
           </a:p>
@@ -2715,7 +2717,7 @@
           <a:p>
             <a:fld id="{3E22BF2E-04DA-469E-97C5-BB68A0368813}" type="datetimeFigureOut">
               <a:rPr lang="en-US" smtClean="0"/>
-              <a:t>1/1/2026</a:t>
+              <a:t>2/6/2026</a:t>
             </a:fld>
             <a:endParaRPr lang="en-US"/>
           </a:p>
@@ -2956,7 +2958,7 @@
           <a:p>
             <a:fld id="{3E22BF2E-04DA-469E-97C5-BB68A0368813}" type="datetimeFigureOut">
               <a:rPr lang="en-US" smtClean="0"/>
-              <a:t>1/1/2026</a:t>
+              <a:t>2/6/2026</a:t>
             </a:fld>
             <a:endParaRPr lang="en-US"/>
           </a:p>
@@ -3998,6 +4000,780 @@
   <p:cSld>
     <p:spTree>
       <p:nvGrpSpPr>
+        <p:cNvPr id="1" name="">
+          <a:extLst>
+            <a:ext uri="{FF2B5EF4-FFF2-40B4-BE49-F238E27FC236}">
+              <a16:creationId xmlns:a16="http://schemas.microsoft.com/office/drawing/2014/main" id="{9C1A846B-68DA-9665-F3C8-EFD6C97E66FB}"/>
+            </a:ext>
+          </a:extLst>
+        </p:cNvPr>
+        <p:cNvGrpSpPr/>
+        <p:nvPr/>
+      </p:nvGrpSpPr>
+      <p:grpSpPr>
+        <a:xfrm>
+          <a:off x="0" y="0"/>
+          <a:ext cx="0" cy="0"/>
+          <a:chOff x="0" y="0"/>
+          <a:chExt cx="0" cy="0"/>
+        </a:xfrm>
+      </p:grpSpPr>
+      <p:sp>
+        <p:nvSpPr>
+          <p:cNvPr id="2" name="Title 1">
+            <a:extLst>
+              <a:ext uri="{FF2B5EF4-FFF2-40B4-BE49-F238E27FC236}">
+                <a16:creationId xmlns:a16="http://schemas.microsoft.com/office/drawing/2014/main" id="{38B2F899-1499-8E06-0445-BD2138EDB85A}"/>
+              </a:ext>
+            </a:extLst>
+          </p:cNvPr>
+          <p:cNvSpPr>
+            <a:spLocks noGrp="1"/>
+          </p:cNvSpPr>
+          <p:nvPr>
+            <p:ph type="title"/>
+          </p:nvPr>
+        </p:nvSpPr>
+        <p:spPr/>
+        <p:txBody>
+          <a:bodyPr/>
+          <a:lstStyle/>
+          <a:p>
+            <a:r>
+              <a:rPr lang="en-US" dirty="0"/>
+              <a:t>MC Policy Gradient</a:t>
+            </a:r>
+          </a:p>
+        </p:txBody>
+      </p:sp>
+      <mc:AlternateContent xmlns:mc="http://schemas.openxmlformats.org/markup-compatibility/2006" xmlns:a14="http://schemas.microsoft.com/office/drawing/2010/main">
+        <mc:Choice Requires="a14">
+          <p:sp>
+            <p:nvSpPr>
+              <p:cNvPr id="3" name="Content Placeholder 2">
+                <a:extLst>
+                  <a:ext uri="{FF2B5EF4-FFF2-40B4-BE49-F238E27FC236}">
+                    <a16:creationId xmlns:a16="http://schemas.microsoft.com/office/drawing/2014/main" id="{8638C852-25DD-4671-ED13-10B8DE619084}"/>
+                  </a:ext>
+                </a:extLst>
+              </p:cNvPr>
+              <p:cNvSpPr>
+                <a:spLocks noGrp="1"/>
+              </p:cNvSpPr>
+              <p:nvPr>
+                <p:ph idx="1"/>
+              </p:nvPr>
+            </p:nvSpPr>
+            <p:spPr>
+              <a:xfrm>
+                <a:off x="838200" y="1124198"/>
+                <a:ext cx="9967076" cy="2527762"/>
+              </a:xfrm>
+            </p:spPr>
+            <p:txBody>
+              <a:bodyPr>
+                <a:normAutofit/>
+              </a:bodyPr>
+              <a:lstStyle/>
+              <a:p>
+                <a:pPr marL="0" indent="0" algn="ctr">
+                  <a:buNone/>
+                </a:pPr>
+                <a14:m>
+                  <m:oMathPara xmlns:m="http://schemas.openxmlformats.org/officeDocument/2006/math">
+                    <m:oMathParaPr>
+                      <m:jc m:val="centerGroup"/>
+                    </m:oMathParaPr>
+                    <m:oMath xmlns:m="http://schemas.openxmlformats.org/officeDocument/2006/math">
+                      <m:sSub>
+                        <m:sSubPr>
+                          <m:ctrlPr>
+                            <a:rPr lang="en-US" i="1" smtClean="0">
+                              <a:latin typeface="Cambria Math" panose="02040503050406030204" pitchFamily="18" charset="0"/>
+                            </a:rPr>
+                          </m:ctrlPr>
+                        </m:sSubPr>
+                        <m:e>
+                          <m:r>
+                            <a:rPr lang="en-US" b="1" i="1">
+                              <a:latin typeface="Cambria Math" panose="02040503050406030204" pitchFamily="18" charset="0"/>
+                            </a:rPr>
+                            <m:t>𝜽</m:t>
+                          </m:r>
+                        </m:e>
+                        <m:sub>
+                          <m:r>
+                            <a:rPr lang="en-US" i="1">
+                              <a:latin typeface="Cambria Math" panose="02040503050406030204" pitchFamily="18" charset="0"/>
+                            </a:rPr>
+                            <m:t>𝑡</m:t>
+                          </m:r>
+                          <m:r>
+                            <a:rPr lang="en-US" i="1">
+                              <a:latin typeface="Cambria Math" panose="02040503050406030204" pitchFamily="18" charset="0"/>
+                            </a:rPr>
+                            <m:t>+1</m:t>
+                          </m:r>
+                        </m:sub>
+                      </m:sSub>
+                      <m:r>
+                        <a:rPr lang="en-US" i="1">
+                          <a:latin typeface="Cambria Math" panose="02040503050406030204" pitchFamily="18" charset="0"/>
+                        </a:rPr>
+                        <m:t>=</m:t>
+                      </m:r>
+                      <m:sSub>
+                        <m:sSubPr>
+                          <m:ctrlPr>
+                            <a:rPr lang="en-US" i="1">
+                              <a:latin typeface="Cambria Math" panose="02040503050406030204" pitchFamily="18" charset="0"/>
+                            </a:rPr>
+                          </m:ctrlPr>
+                        </m:sSubPr>
+                        <m:e>
+                          <m:r>
+                            <a:rPr lang="en-US" b="1" i="1">
+                              <a:latin typeface="Cambria Math" panose="02040503050406030204" pitchFamily="18" charset="0"/>
+                            </a:rPr>
+                            <m:t>𝜽</m:t>
+                          </m:r>
+                        </m:e>
+                        <m:sub>
+                          <m:r>
+                            <a:rPr lang="en-US" i="1">
+                              <a:latin typeface="Cambria Math" panose="02040503050406030204" pitchFamily="18" charset="0"/>
+                            </a:rPr>
+                            <m:t>𝑡</m:t>
+                          </m:r>
+                        </m:sub>
+                      </m:sSub>
+                      <m:r>
+                        <a:rPr lang="en-US" i="1">
+                          <a:latin typeface="Cambria Math" panose="02040503050406030204" pitchFamily="18" charset="0"/>
+                        </a:rPr>
+                        <m:t>+</m:t>
+                      </m:r>
+                      <m:r>
+                        <a:rPr lang="en-US" i="1">
+                          <a:latin typeface="Cambria Math" panose="02040503050406030204" pitchFamily="18" charset="0"/>
+                        </a:rPr>
+                        <m:t>𝛼</m:t>
+                      </m:r>
+                      <m:sSub>
+                        <m:sSubPr>
+                          <m:ctrlPr>
+                            <a:rPr lang="en-US" i="1">
+                              <a:latin typeface="Cambria Math" panose="02040503050406030204" pitchFamily="18" charset="0"/>
+                              <a:ea typeface="Cambria Math" panose="02040503050406030204" pitchFamily="18" charset="0"/>
+                            </a:rPr>
+                          </m:ctrlPr>
+                        </m:sSubPr>
+                        <m:e>
+                          <m:r>
+                            <a:rPr lang="en-US" i="1">
+                              <a:latin typeface="Cambria Math" panose="02040503050406030204" pitchFamily="18" charset="0"/>
+                              <a:ea typeface="Cambria Math" panose="02040503050406030204" pitchFamily="18" charset="0"/>
+                            </a:rPr>
+                            <m:t>𝔼</m:t>
+                          </m:r>
+                        </m:e>
+                        <m:sub>
+                          <m:r>
+                            <a:rPr lang="en-US" i="1">
+                              <a:latin typeface="Cambria Math" panose="02040503050406030204" pitchFamily="18" charset="0"/>
+                              <a:ea typeface="Cambria Math" panose="02040503050406030204" pitchFamily="18" charset="0"/>
+                            </a:rPr>
+                            <m:t>𝜋</m:t>
+                          </m:r>
+                        </m:sub>
+                      </m:sSub>
+                      <m:d>
+                        <m:dPr>
+                          <m:begChr m:val="["/>
+                          <m:endChr m:val="]"/>
+                          <m:ctrlPr>
+                            <a:rPr lang="en-US" i="1">
+                              <a:latin typeface="Cambria Math" panose="02040503050406030204" pitchFamily="18" charset="0"/>
+                              <a:ea typeface="Cambria Math" panose="02040503050406030204" pitchFamily="18" charset="0"/>
+                            </a:rPr>
+                          </m:ctrlPr>
+                        </m:dPr>
+                        <m:e>
+                          <m:sSub>
+                            <m:sSubPr>
+                              <m:ctrlPr>
+                                <a:rPr lang="en-US" i="1">
+                                  <a:latin typeface="Cambria Math" panose="02040503050406030204" pitchFamily="18" charset="0"/>
+                                  <a:ea typeface="Cambria Math" panose="02040503050406030204" pitchFamily="18" charset="0"/>
+                                </a:rPr>
+                              </m:ctrlPr>
+                            </m:sSubPr>
+                            <m:e>
+                              <m:r>
+                                <a:rPr lang="en-US" i="1">
+                                  <a:latin typeface="Cambria Math" panose="02040503050406030204" pitchFamily="18" charset="0"/>
+                                  <a:ea typeface="Cambria Math" panose="02040503050406030204" pitchFamily="18" charset="0"/>
+                                </a:rPr>
+                                <m:t>𝐺</m:t>
+                              </m:r>
+                            </m:e>
+                            <m:sub>
+                              <m:r>
+                                <a:rPr lang="en-US" i="1">
+                                  <a:latin typeface="Cambria Math" panose="02040503050406030204" pitchFamily="18" charset="0"/>
+                                  <a:ea typeface="Cambria Math" panose="02040503050406030204" pitchFamily="18" charset="0"/>
+                                </a:rPr>
+                                <m:t>𝑡</m:t>
+                              </m:r>
+                            </m:sub>
+                          </m:sSub>
+                          <m:func>
+                            <m:funcPr>
+                              <m:ctrlPr>
+                                <a:rPr lang="en-US" i="1">
+                                  <a:latin typeface="Cambria Math" panose="02040503050406030204" pitchFamily="18" charset="0"/>
+                                  <a:ea typeface="Cambria Math" panose="02040503050406030204" pitchFamily="18" charset="0"/>
+                                </a:rPr>
+                              </m:ctrlPr>
+                            </m:funcPr>
+                            <m:fName>
+                              <m:r>
+                                <m:rPr>
+                                  <m:sty m:val="p"/>
+                                </m:rPr>
+                                <a:rPr lang="en-US">
+                                  <a:latin typeface="Cambria Math" panose="02040503050406030204" pitchFamily="18" charset="0"/>
+                                  <a:ea typeface="Cambria Math" panose="02040503050406030204" pitchFamily="18" charset="0"/>
+                                </a:rPr>
+                                <m:t>ln</m:t>
+                              </m:r>
+                            </m:fName>
+                            <m:e>
+                              <m:r>
+                                <m:rPr>
+                                  <m:sty m:val="p"/>
+                                </m:rPr>
+                                <a:rPr lang="en-US" i="1">
+                                  <a:latin typeface="Cambria Math" panose="02040503050406030204" pitchFamily="18" charset="0"/>
+                                  <a:ea typeface="Cambria Math" panose="02040503050406030204" pitchFamily="18" charset="0"/>
+                                </a:rPr>
+                                <m:t>∇</m:t>
+                              </m:r>
+                              <m:r>
+                                <a:rPr lang="en-US" i="1">
+                                  <a:latin typeface="Cambria Math" panose="02040503050406030204" pitchFamily="18" charset="0"/>
+                                  <a:ea typeface="Cambria Math" panose="02040503050406030204" pitchFamily="18" charset="0"/>
+                                </a:rPr>
+                                <m:t>𝜋</m:t>
+                              </m:r>
+                              <m:r>
+                                <a:rPr lang="en-US" i="1">
+                                  <a:latin typeface="Cambria Math" panose="02040503050406030204" pitchFamily="18" charset="0"/>
+                                  <a:ea typeface="Cambria Math" panose="02040503050406030204" pitchFamily="18" charset="0"/>
+                                </a:rPr>
+                                <m:t>(</m:t>
+                              </m:r>
+                              <m:sSub>
+                                <m:sSubPr>
+                                  <m:ctrlPr>
+                                    <a:rPr lang="en-US" i="1">
+                                      <a:latin typeface="Cambria Math" panose="02040503050406030204" pitchFamily="18" charset="0"/>
+                                      <a:ea typeface="Cambria Math" panose="02040503050406030204" pitchFamily="18" charset="0"/>
+                                    </a:rPr>
+                                  </m:ctrlPr>
+                                </m:sSubPr>
+                                <m:e>
+                                  <m:r>
+                                    <a:rPr lang="en-US" i="1">
+                                      <a:latin typeface="Cambria Math" panose="02040503050406030204" pitchFamily="18" charset="0"/>
+                                      <a:ea typeface="Cambria Math" panose="02040503050406030204" pitchFamily="18" charset="0"/>
+                                    </a:rPr>
+                                    <m:t>𝐴</m:t>
+                                  </m:r>
+                                </m:e>
+                                <m:sub>
+                                  <m:r>
+                                    <a:rPr lang="en-US" i="1">
+                                      <a:latin typeface="Cambria Math" panose="02040503050406030204" pitchFamily="18" charset="0"/>
+                                      <a:ea typeface="Cambria Math" panose="02040503050406030204" pitchFamily="18" charset="0"/>
+                                    </a:rPr>
+                                    <m:t>𝑡</m:t>
+                                  </m:r>
+                                </m:sub>
+                              </m:sSub>
+                              <m:r>
+                                <a:rPr lang="en-US" i="1">
+                                  <a:latin typeface="Cambria Math" panose="02040503050406030204" pitchFamily="18" charset="0"/>
+                                  <a:ea typeface="Cambria Math" panose="02040503050406030204" pitchFamily="18" charset="0"/>
+                                </a:rPr>
+                                <m:t>|</m:t>
+                              </m:r>
+                              <m:sSub>
+                                <m:sSubPr>
+                                  <m:ctrlPr>
+                                    <a:rPr lang="en-US" i="1">
+                                      <a:latin typeface="Cambria Math" panose="02040503050406030204" pitchFamily="18" charset="0"/>
+                                      <a:ea typeface="Cambria Math" panose="02040503050406030204" pitchFamily="18" charset="0"/>
+                                    </a:rPr>
+                                  </m:ctrlPr>
+                                </m:sSubPr>
+                                <m:e>
+                                  <m:r>
+                                    <a:rPr lang="en-US" i="1">
+                                      <a:latin typeface="Cambria Math" panose="02040503050406030204" pitchFamily="18" charset="0"/>
+                                      <a:ea typeface="Cambria Math" panose="02040503050406030204" pitchFamily="18" charset="0"/>
+                                    </a:rPr>
+                                    <m:t>𝑆</m:t>
+                                  </m:r>
+                                </m:e>
+                                <m:sub>
+                                  <m:r>
+                                    <a:rPr lang="en-US" i="1">
+                                      <a:latin typeface="Cambria Math" panose="02040503050406030204" pitchFamily="18" charset="0"/>
+                                      <a:ea typeface="Cambria Math" panose="02040503050406030204" pitchFamily="18" charset="0"/>
+                                    </a:rPr>
+                                    <m:t>𝑡</m:t>
+                                  </m:r>
+                                </m:sub>
+                              </m:sSub>
+                              <m:r>
+                                <a:rPr lang="en-US" i="1">
+                                  <a:latin typeface="Cambria Math" panose="02040503050406030204" pitchFamily="18" charset="0"/>
+                                  <a:ea typeface="Cambria Math" panose="02040503050406030204" pitchFamily="18" charset="0"/>
+                                </a:rPr>
+                                <m:t>,</m:t>
+                              </m:r>
+                              <m:r>
+                                <a:rPr lang="en-US" b="1" i="1">
+                                  <a:latin typeface="Cambria Math" panose="02040503050406030204" pitchFamily="18" charset="0"/>
+                                  <a:ea typeface="Cambria Math" panose="02040503050406030204" pitchFamily="18" charset="0"/>
+                                </a:rPr>
+                                <m:t>𝜽</m:t>
+                              </m:r>
+                              <m:r>
+                                <a:rPr lang="en-US" b="1" i="1">
+                                  <a:latin typeface="Cambria Math" panose="02040503050406030204" pitchFamily="18" charset="0"/>
+                                  <a:ea typeface="Cambria Math" panose="02040503050406030204" pitchFamily="18" charset="0"/>
+                                </a:rPr>
+                                <m:t>)</m:t>
+                              </m:r>
+                            </m:e>
+                          </m:func>
+                        </m:e>
+                      </m:d>
+                    </m:oMath>
+                  </m:oMathPara>
+                </a14:m>
+                <a:endParaRPr lang="en-US" dirty="0"/>
+              </a:p>
+              <a:p>
+                <a:pPr marL="0" indent="0">
+                  <a:buNone/>
+                </a:pPr>
+                <a:endParaRPr lang="en-US" dirty="0"/>
+              </a:p>
+              <a:p>
+                <a:pPr marL="0" indent="0">
+                  <a:buNone/>
+                </a:pPr>
+                <a:endParaRPr lang="en-US" dirty="0"/>
+              </a:p>
+              <a:p>
+                <a:pPr marL="0" indent="0">
+                  <a:buNone/>
+                </a:pPr>
+                <a14:m>
+                  <m:oMath xmlns:m="http://schemas.openxmlformats.org/officeDocument/2006/math">
+                    <m:sSub>
+                      <m:sSubPr>
+                        <m:ctrlPr>
+                          <a:rPr lang="en-US" b="0" i="1" smtClean="0">
+                            <a:latin typeface="Cambria Math" panose="02040503050406030204" pitchFamily="18" charset="0"/>
+                          </a:rPr>
+                        </m:ctrlPr>
+                      </m:sSubPr>
+                      <m:e>
+                        <m:r>
+                          <a:rPr lang="en-US" b="0" i="1" smtClean="0">
+                            <a:latin typeface="Cambria Math" panose="02040503050406030204" pitchFamily="18" charset="0"/>
+                          </a:rPr>
+                          <m:t>𝐴</m:t>
+                        </m:r>
+                      </m:e>
+                      <m:sub>
+                        <m:r>
+                          <a:rPr lang="en-US" b="0" i="1" smtClean="0">
+                            <a:latin typeface="Cambria Math" panose="02040503050406030204" pitchFamily="18" charset="0"/>
+                          </a:rPr>
+                          <m:t>𝑡</m:t>
+                        </m:r>
+                      </m:sub>
+                    </m:sSub>
+                    <m:r>
+                      <a:rPr lang="en-US" b="0" i="0" smtClean="0">
+                        <a:latin typeface="Cambria Math" panose="02040503050406030204" pitchFamily="18" charset="0"/>
+                      </a:rPr>
+                      <m:t>,</m:t>
+                    </m:r>
+                  </m:oMath>
+                </a14:m>
+                <a:r>
+                  <a:rPr lang="en-US" dirty="0"/>
+                  <a:t> </a:t>
+                </a:r>
+                <a14:m>
+                  <m:oMath xmlns:m="http://schemas.openxmlformats.org/officeDocument/2006/math">
+                    <m:sSub>
+                      <m:sSubPr>
+                        <m:ctrlPr>
+                          <a:rPr lang="en-US" b="0" i="1" smtClean="0">
+                            <a:latin typeface="Cambria Math" panose="02040503050406030204" pitchFamily="18" charset="0"/>
+                          </a:rPr>
+                        </m:ctrlPr>
+                      </m:sSubPr>
+                      <m:e>
+                        <m:r>
+                          <a:rPr lang="en-US" b="0" i="1" smtClean="0">
+                            <a:latin typeface="Cambria Math" panose="02040503050406030204" pitchFamily="18" charset="0"/>
+                          </a:rPr>
+                          <m:t>𝑆</m:t>
+                        </m:r>
+                      </m:e>
+                      <m:sub>
+                        <m:r>
+                          <a:rPr lang="en-US" b="0" i="1" smtClean="0">
+                            <a:latin typeface="Cambria Math" panose="02040503050406030204" pitchFamily="18" charset="0"/>
+                          </a:rPr>
+                          <m:t>𝑡</m:t>
+                        </m:r>
+                      </m:sub>
+                    </m:sSub>
+                  </m:oMath>
+                </a14:m>
+                <a:r>
+                  <a:rPr lang="en-US" dirty="0"/>
+                  <a:t> and an unbiased estimate of </a:t>
+                </a:r>
+                <a14:m>
+                  <m:oMath xmlns:m="http://schemas.openxmlformats.org/officeDocument/2006/math">
+                    <m:sSub>
+                      <m:sSubPr>
+                        <m:ctrlPr>
+                          <a:rPr lang="en-US" b="0" i="1" smtClean="0">
+                            <a:latin typeface="Cambria Math" panose="02040503050406030204" pitchFamily="18" charset="0"/>
+                          </a:rPr>
+                        </m:ctrlPr>
+                      </m:sSubPr>
+                      <m:e>
+                        <m:r>
+                          <a:rPr lang="en-US" b="0" i="1" smtClean="0">
+                            <a:latin typeface="Cambria Math" panose="02040503050406030204" pitchFamily="18" charset="0"/>
+                          </a:rPr>
+                          <m:t>𝐺</m:t>
+                        </m:r>
+                      </m:e>
+                      <m:sub>
+                        <m:r>
+                          <a:rPr lang="en-US" b="0" i="1" smtClean="0">
+                            <a:latin typeface="Cambria Math" panose="02040503050406030204" pitchFamily="18" charset="0"/>
+                          </a:rPr>
+                          <m:t>𝑡</m:t>
+                        </m:r>
+                      </m:sub>
+                    </m:sSub>
+                  </m:oMath>
+                </a14:m>
+                <a:r>
+                  <a:rPr lang="en-US" i="1" dirty="0">
+                    <a:latin typeface="Cambria Math" panose="02040503050406030204" pitchFamily="18" charset="0"/>
+                    <a:ea typeface="Cambria Math" panose="02040503050406030204" pitchFamily="18" charset="0"/>
+                  </a:rPr>
+                  <a:t> </a:t>
+                </a:r>
+                <a:r>
+                  <a:rPr lang="en-US" dirty="0"/>
+                  <a:t>under the current </a:t>
+                </a:r>
+                <a14:m>
+                  <m:oMath xmlns:m="http://schemas.openxmlformats.org/officeDocument/2006/math">
+                    <m:r>
+                      <a:rPr lang="en-US" b="0" i="1" smtClean="0">
+                        <a:latin typeface="Cambria Math" panose="02040503050406030204" pitchFamily="18" charset="0"/>
+                      </a:rPr>
+                      <m:t>𝜋</m:t>
+                    </m:r>
+                  </m:oMath>
+                </a14:m>
+                <a:r>
+                  <a:rPr lang="en-US" dirty="0"/>
+                  <a:t> can be obtained via MC.</a:t>
+                </a:r>
+              </a:p>
+            </p:txBody>
+          </p:sp>
+        </mc:Choice>
+        <mc:Fallback xmlns="">
+          <p:sp>
+            <p:nvSpPr>
+              <p:cNvPr id="3" name="Content Placeholder 2">
+                <a:extLst>
+                  <a:ext uri="{FF2B5EF4-FFF2-40B4-BE49-F238E27FC236}">
+                    <a16:creationId xmlns:a16="http://schemas.microsoft.com/office/drawing/2014/main" id="{8638C852-25DD-4671-ED13-10B8DE619084}"/>
+                  </a:ext>
+                </a:extLst>
+              </p:cNvPr>
+              <p:cNvSpPr>
+                <a:spLocks noGrp="1" noRot="1" noChangeAspect="1" noMove="1" noResize="1" noEditPoints="1" noAdjustHandles="1" noChangeArrowheads="1" noChangeShapeType="1" noTextEdit="1"/>
+              </p:cNvSpPr>
+              <p:nvPr>
+                <p:ph idx="1"/>
+              </p:nvPr>
+            </p:nvSpPr>
+            <p:spPr>
+              <a:xfrm>
+                <a:off x="838200" y="1124198"/>
+                <a:ext cx="9967076" cy="2527762"/>
+              </a:xfrm>
+              <a:blipFill>
+                <a:blip r:embed="rId2"/>
+                <a:stretch>
+                  <a:fillRect l="-1284" r="-1896" b="-1446"/>
+                </a:stretch>
+              </a:blipFill>
+            </p:spPr>
+            <p:txBody>
+              <a:bodyPr/>
+              <a:lstStyle/>
+              <a:p>
+                <a:r>
+                  <a:rPr lang="en-US">
+                    <a:noFill/>
+                  </a:rPr>
+                  <a:t> </a:t>
+                </a:r>
+              </a:p>
+            </p:txBody>
+          </p:sp>
+        </mc:Fallback>
+      </mc:AlternateContent>
+      <p:pic>
+        <p:nvPicPr>
+          <p:cNvPr id="5" name="Picture 4">
+            <a:extLst>
+              <a:ext uri="{FF2B5EF4-FFF2-40B4-BE49-F238E27FC236}">
+                <a16:creationId xmlns:a16="http://schemas.microsoft.com/office/drawing/2014/main" id="{7A46DFC6-5448-DD38-1C4B-9AD716BBC796}"/>
+              </a:ext>
+            </a:extLst>
+          </p:cNvPr>
+          <p:cNvPicPr>
+            <a:picLocks noChangeAspect="1"/>
+          </p:cNvPicPr>
+          <p:nvPr/>
+        </p:nvPicPr>
+        <p:blipFill>
+          <a:blip r:embed="rId3"/>
+          <a:stretch>
+            <a:fillRect/>
+          </a:stretch>
+        </p:blipFill>
+        <p:spPr>
+          <a:xfrm>
+            <a:off x="2101608" y="3485992"/>
+            <a:ext cx="8158842" cy="3006882"/>
+          </a:xfrm>
+          <a:prstGeom prst="rect">
+            <a:avLst/>
+          </a:prstGeom>
+        </p:spPr>
+      </p:pic>
+      <mc:AlternateContent xmlns:mc="http://schemas.openxmlformats.org/markup-compatibility/2006" xmlns:a14="http://schemas.microsoft.com/office/drawing/2010/main">
+        <mc:Choice Requires="a14">
+          <p:sp>
+            <p:nvSpPr>
+              <p:cNvPr id="10" name="TextBox 9">
+                <a:extLst>
+                  <a:ext uri="{FF2B5EF4-FFF2-40B4-BE49-F238E27FC236}">
+                    <a16:creationId xmlns:a16="http://schemas.microsoft.com/office/drawing/2014/main" id="{06AF3609-FA43-5326-AF3B-FFE2F982DE19}"/>
+                  </a:ext>
+                </a:extLst>
+              </p:cNvPr>
+              <p:cNvSpPr txBox="1"/>
+              <p:nvPr/>
+            </p:nvSpPr>
+            <p:spPr>
+              <a:xfrm>
+                <a:off x="5821738" y="1794518"/>
+                <a:ext cx="2333116" cy="369332"/>
+              </a:xfrm>
+              <a:prstGeom prst="rect">
+                <a:avLst/>
+              </a:prstGeom>
+              <a:noFill/>
+            </p:spPr>
+            <p:txBody>
+              <a:bodyPr wrap="square">
+                <a:spAutoFit/>
+              </a:bodyPr>
+              <a:lstStyle/>
+              <a:p>
+                <a:r>
+                  <a:rPr lang="en-US" dirty="0">
+                    <a:ea typeface="Cambria Math" panose="02040503050406030204" pitchFamily="18" charset="0"/>
+                  </a:rPr>
+                  <a:t>Proportional to </a:t>
+                </a:r>
+                <a14:m>
+                  <m:oMath xmlns:m="http://schemas.openxmlformats.org/officeDocument/2006/math">
+                    <m:r>
+                      <m:rPr>
+                        <m:sty m:val="p"/>
+                      </m:rPr>
+                      <a:rPr lang="en-US" i="0" smtClean="0">
+                        <a:latin typeface="Cambria Math" panose="02040503050406030204" pitchFamily="18" charset="0"/>
+                        <a:ea typeface="Cambria Math" panose="02040503050406030204" pitchFamily="18" charset="0"/>
+                      </a:rPr>
+                      <m:t>∇</m:t>
+                    </m:r>
+                    <m:r>
+                      <a:rPr lang="en-US" b="0" i="1" smtClean="0">
+                        <a:latin typeface="Cambria Math" panose="02040503050406030204" pitchFamily="18" charset="0"/>
+                        <a:ea typeface="Cambria Math" panose="02040503050406030204" pitchFamily="18" charset="0"/>
+                      </a:rPr>
+                      <m:t>𝐽</m:t>
+                    </m:r>
+                    <m:d>
+                      <m:dPr>
+                        <m:ctrlPr>
+                          <a:rPr lang="en-US" b="0" i="1" smtClean="0">
+                            <a:latin typeface="Cambria Math" panose="02040503050406030204" pitchFamily="18" charset="0"/>
+                            <a:ea typeface="Cambria Math" panose="02040503050406030204" pitchFamily="18" charset="0"/>
+                          </a:rPr>
+                        </m:ctrlPr>
+                      </m:dPr>
+                      <m:e>
+                        <m:r>
+                          <a:rPr lang="en-US" b="1" i="1" smtClean="0">
+                            <a:latin typeface="Cambria Math" panose="02040503050406030204" pitchFamily="18" charset="0"/>
+                            <a:ea typeface="Cambria Math" panose="02040503050406030204" pitchFamily="18" charset="0"/>
+                          </a:rPr>
+                          <m:t>𝜽</m:t>
+                        </m:r>
+                      </m:e>
+                    </m:d>
+                  </m:oMath>
+                </a14:m>
+                <a:endParaRPr lang="en-US" dirty="0"/>
+              </a:p>
+            </p:txBody>
+          </p:sp>
+        </mc:Choice>
+        <mc:Fallback xmlns="">
+          <p:sp>
+            <p:nvSpPr>
+              <p:cNvPr id="10" name="TextBox 9">
+                <a:extLst>
+                  <a:ext uri="{FF2B5EF4-FFF2-40B4-BE49-F238E27FC236}">
+                    <a16:creationId xmlns:a16="http://schemas.microsoft.com/office/drawing/2014/main" id="{06AF3609-FA43-5326-AF3B-FFE2F982DE19}"/>
+                  </a:ext>
+                </a:extLst>
+              </p:cNvPr>
+              <p:cNvSpPr txBox="1">
+                <a:spLocks noRot="1" noChangeAspect="1" noMove="1" noResize="1" noEditPoints="1" noAdjustHandles="1" noChangeArrowheads="1" noChangeShapeType="1" noTextEdit="1"/>
+              </p:cNvSpPr>
+              <p:nvPr/>
+            </p:nvSpPr>
+            <p:spPr>
+              <a:xfrm>
+                <a:off x="5821738" y="1794518"/>
+                <a:ext cx="2333116" cy="369332"/>
+              </a:xfrm>
+              <a:prstGeom prst="rect">
+                <a:avLst/>
+              </a:prstGeom>
+              <a:blipFill>
+                <a:blip r:embed="rId4"/>
+                <a:stretch>
+                  <a:fillRect l="-2089" t="-6557" b="-26230"/>
+                </a:stretch>
+              </a:blipFill>
+            </p:spPr>
+            <p:txBody>
+              <a:bodyPr/>
+              <a:lstStyle/>
+              <a:p>
+                <a:r>
+                  <a:rPr lang="en-US">
+                    <a:noFill/>
+                  </a:rPr>
+                  <a:t> </a:t>
+                </a:r>
+              </a:p>
+            </p:txBody>
+          </p:sp>
+        </mc:Fallback>
+      </mc:AlternateContent>
+      <p:sp>
+        <p:nvSpPr>
+          <p:cNvPr id="11" name="Right Brace 10">
+            <a:extLst>
+              <a:ext uri="{FF2B5EF4-FFF2-40B4-BE49-F238E27FC236}">
+                <a16:creationId xmlns:a16="http://schemas.microsoft.com/office/drawing/2014/main" id="{EB3A8549-16BB-3E54-649D-973665D06710}"/>
+              </a:ext>
+            </a:extLst>
+          </p:cNvPr>
+          <p:cNvSpPr/>
+          <p:nvPr/>
+        </p:nvSpPr>
+        <p:spPr>
+          <a:xfrm rot="5400000">
+            <a:off x="6795245" y="59707"/>
+            <a:ext cx="172536" cy="3254585"/>
+          </a:xfrm>
+          <a:prstGeom prst="rightBrace">
+            <a:avLst/>
+          </a:prstGeom>
+        </p:spPr>
+        <p:style>
+          <a:lnRef idx="2">
+            <a:schemeClr val="accent1"/>
+          </a:lnRef>
+          <a:fillRef idx="0">
+            <a:schemeClr val="accent1"/>
+          </a:fillRef>
+          <a:effectRef idx="1">
+            <a:schemeClr val="accent1"/>
+          </a:effectRef>
+          <a:fontRef idx="minor">
+            <a:schemeClr val="tx1"/>
+          </a:fontRef>
+        </p:style>
+        <p:txBody>
+          <a:bodyPr rtlCol="0" anchor="ctr"/>
+          <a:lstStyle/>
+          <a:p>
+            <a:pPr algn="ctr"/>
+            <a:endParaRPr lang="en-US"/>
+          </a:p>
+        </p:txBody>
+      </p:sp>
+    </p:spTree>
+    <p:extLst>
+      <p:ext uri="{BB962C8B-B14F-4D97-AF65-F5344CB8AC3E}">
+        <p14:creationId xmlns:p14="http://schemas.microsoft.com/office/powerpoint/2010/main" val="2693499901"/>
+      </p:ext>
+    </p:extLst>
+  </p:cSld>
+  <p:clrMapOvr>
+    <a:masterClrMapping/>
+  </p:clrMapOvr>
+</p:sld>
+</file>
+
+<file path=ppt/slides/slide11.xml><?xml version="1.0" encoding="utf-8"?>
+<p:sld xmlns:a="http://schemas.openxmlformats.org/drawingml/2006/main" xmlns:r="http://schemas.openxmlformats.org/officeDocument/2006/relationships" xmlns:p="http://schemas.openxmlformats.org/presentationml/2006/main">
+  <p:cSld>
+    <p:spTree>
+      <p:nvGrpSpPr>
         <p:cNvPr id="1" name=""/>
         <p:cNvGrpSpPr/>
         <p:nvPr/>
@@ -4079,7 +4855,7 @@
 </p:sld>
 </file>
 
-<file path=ppt/slides/slide11.xml><?xml version="1.0" encoding="utf-8"?>
+<file path=ppt/slides/slide12.xml><?xml version="1.0" encoding="utf-8"?>
 <p:sld xmlns:a="http://schemas.openxmlformats.org/drawingml/2006/main" xmlns:r="http://schemas.openxmlformats.org/officeDocument/2006/relationships" xmlns:p="http://schemas.openxmlformats.org/presentationml/2006/main">
   <p:cSld>
     <p:spTree>
@@ -4654,7 +5430,7 @@
 </p:sld>
 </file>
 
-<file path=ppt/slides/slide12.xml><?xml version="1.0" encoding="utf-8"?>
+<file path=ppt/slides/slide13.xml><?xml version="1.0" encoding="utf-8"?>
 <p:sld xmlns:a="http://schemas.openxmlformats.org/drawingml/2006/main" xmlns:r="http://schemas.openxmlformats.org/officeDocument/2006/relationships" xmlns:p="http://schemas.openxmlformats.org/presentationml/2006/main">
   <p:cSld>
     <p:spTree>
@@ -5470,7 +6246,7 @@
 </p:sld>
 </file>
 
-<file path=ppt/slides/slide13.xml><?xml version="1.0" encoding="utf-8"?>
+<file path=ppt/slides/slide14.xml><?xml version="1.0" encoding="utf-8"?>
 <p:sld xmlns:a="http://schemas.openxmlformats.org/drawingml/2006/main" xmlns:r="http://schemas.openxmlformats.org/officeDocument/2006/relationships" xmlns:p="http://schemas.openxmlformats.org/presentationml/2006/main">
   <p:cSld>
     <p:spTree>
@@ -5698,7 +6474,7 @@
 </p:sld>
 </file>
 
-<file path=ppt/slides/slide14.xml><?xml version="1.0" encoding="utf-8"?>
+<file path=ppt/slides/slide15.xml><?xml version="1.0" encoding="utf-8"?>
 <p:sld xmlns:a="http://schemas.openxmlformats.org/drawingml/2006/main" xmlns:r="http://schemas.openxmlformats.org/officeDocument/2006/relationships" xmlns:p="http://schemas.openxmlformats.org/presentationml/2006/main">
   <p:cSld>
     <p:spTree>
@@ -6970,7 +7746,7 @@
 </p:sld>
 </file>
 
-<file path=ppt/slides/slide15.xml><?xml version="1.0" encoding="utf-8"?>
+<file path=ppt/slides/slide16.xml><?xml version="1.0" encoding="utf-8"?>
 <p:sld xmlns:a="http://schemas.openxmlformats.org/drawingml/2006/main" xmlns:r="http://schemas.openxmlformats.org/officeDocument/2006/relationships" xmlns:p="http://schemas.openxmlformats.org/presentationml/2006/main">
   <p:cSld>
     <p:spTree>
@@ -7125,6 +7901,188 @@
           <p:cNvPr id="2" name="Title 1">
             <a:extLst>
               <a:ext uri="{FF2B5EF4-FFF2-40B4-BE49-F238E27FC236}">
+                <a16:creationId xmlns:a16="http://schemas.microsoft.com/office/drawing/2014/main" id="{9E7A3493-2ED6-DF09-F569-7F3DCA81AB18}"/>
+              </a:ext>
+            </a:extLst>
+          </p:cNvPr>
+          <p:cNvSpPr>
+            <a:spLocks noGrp="1"/>
+          </p:cNvSpPr>
+          <p:nvPr>
+            <p:ph type="title"/>
+          </p:nvPr>
+        </p:nvSpPr>
+        <p:spPr/>
+        <p:txBody>
+          <a:bodyPr/>
+          <a:lstStyle/>
+          <a:p>
+            <a:r>
+              <a:rPr lang="en-US" dirty="0"/>
+              <a:t>Topics of this Course</a:t>
+            </a:r>
+          </a:p>
+        </p:txBody>
+      </p:sp>
+      <p:sp>
+        <p:nvSpPr>
+          <p:cNvPr id="3" name="Content Placeholder 2">
+            <a:extLst>
+              <a:ext uri="{FF2B5EF4-FFF2-40B4-BE49-F238E27FC236}">
+                <a16:creationId xmlns:a16="http://schemas.microsoft.com/office/drawing/2014/main" id="{8F95E019-92A5-79AC-D777-59B4926F61AA}"/>
+              </a:ext>
+            </a:extLst>
+          </p:cNvPr>
+          <p:cNvSpPr>
+            <a:spLocks noGrp="1"/>
+          </p:cNvSpPr>
+          <p:nvPr>
+            <p:ph idx="1"/>
+          </p:nvPr>
+        </p:nvSpPr>
+        <p:spPr/>
+        <p:txBody>
+          <a:bodyPr>
+            <a:normAutofit fontScale="85000" lnSpcReduction="20000"/>
+          </a:bodyPr>
+          <a:lstStyle/>
+          <a:p>
+            <a:r>
+              <a:rPr lang="en-US" dirty="0"/>
+              <a:t>Introduction to reinforcement learning</a:t>
+            </a:r>
+          </a:p>
+          <a:p>
+            <a:r>
+              <a:rPr lang="en-US" dirty="0"/>
+              <a:t>Markov decision processes</a:t>
+            </a:r>
+          </a:p>
+          <a:p>
+            <a:r>
+              <a:rPr lang="en-US" dirty="0"/>
+              <a:t>Part I: Tabular Methods</a:t>
+            </a:r>
+          </a:p>
+          <a:p>
+            <a:pPr lvl="1"/>
+            <a:r>
+              <a:rPr lang="en-US" dirty="0"/>
+              <a:t>Dynamic programming</a:t>
+            </a:r>
+          </a:p>
+          <a:p>
+            <a:pPr lvl="1"/>
+            <a:r>
+              <a:rPr lang="en-US" dirty="0"/>
+              <a:t>Monte Carlo methods</a:t>
+            </a:r>
+          </a:p>
+          <a:p>
+            <a:pPr lvl="1"/>
+            <a:r>
+              <a:rPr lang="en-US" dirty="0"/>
+              <a:t>Temporal-difference learning</a:t>
+            </a:r>
+          </a:p>
+          <a:p>
+            <a:pPr lvl="1"/>
+            <a:r>
+              <a:rPr lang="en-US" dirty="0"/>
+              <a:t>Multi-step bootstrapping</a:t>
+            </a:r>
+          </a:p>
+          <a:p>
+            <a:pPr lvl="1"/>
+            <a:r>
+              <a:rPr lang="en-US" dirty="0"/>
+              <a:t>Planning and learning with tabular methods</a:t>
+            </a:r>
+          </a:p>
+          <a:p>
+            <a:r>
+              <a:rPr lang="en-US" b="1" dirty="0"/>
+              <a:t>Part II: Approximate Solution Methods</a:t>
+            </a:r>
+          </a:p>
+          <a:p>
+            <a:pPr lvl="1"/>
+            <a:r>
+              <a:rPr lang="en-US" dirty="0"/>
+              <a:t>Prediction and Control using Approximation</a:t>
+            </a:r>
+          </a:p>
+          <a:p>
+            <a:pPr lvl="1"/>
+            <a:r>
+              <a:rPr lang="en-US" dirty="0"/>
+              <a:t>Eligibility Traces</a:t>
+            </a:r>
+          </a:p>
+          <a:p>
+            <a:pPr lvl="1"/>
+            <a:r>
+              <a:rPr lang="en-US" b="1" dirty="0"/>
+              <a:t>Policy Gradient Methods</a:t>
+            </a:r>
+          </a:p>
+          <a:p>
+            <a:r>
+              <a:rPr lang="en-US" dirty="0"/>
+              <a:t>Part III: Modern RL Methods</a:t>
+            </a:r>
+          </a:p>
+          <a:p>
+            <a:pPr lvl="1"/>
+            <a:r>
+              <a:rPr lang="en-US" dirty="0"/>
+              <a:t>Deep Reinforcement Learning</a:t>
+            </a:r>
+          </a:p>
+          <a:p>
+            <a:pPr lvl="1"/>
+            <a:r>
+              <a:rPr lang="en-US" dirty="0"/>
+              <a:t>Current Applications</a:t>
+            </a:r>
+          </a:p>
+        </p:txBody>
+      </p:sp>
+    </p:spTree>
+    <p:extLst>
+      <p:ext uri="{BB962C8B-B14F-4D97-AF65-F5344CB8AC3E}">
+        <p14:creationId xmlns:p14="http://schemas.microsoft.com/office/powerpoint/2010/main" val="3653367536"/>
+      </p:ext>
+    </p:extLst>
+  </p:cSld>
+  <p:clrMapOvr>
+    <a:masterClrMapping/>
+  </p:clrMapOvr>
+</p:sld>
+</file>
+
+<file path=ppt/slides/slide3.xml><?xml version="1.0" encoding="utf-8"?>
+<p:sld xmlns:a="http://schemas.openxmlformats.org/drawingml/2006/main" xmlns:r="http://schemas.openxmlformats.org/officeDocument/2006/relationships" xmlns:p="http://schemas.openxmlformats.org/presentationml/2006/main">
+  <p:cSld>
+    <p:spTree>
+      <p:nvGrpSpPr>
+        <p:cNvPr id="1" name=""/>
+        <p:cNvGrpSpPr/>
+        <p:nvPr/>
+      </p:nvGrpSpPr>
+      <p:grpSpPr>
+        <a:xfrm>
+          <a:off x="0" y="0"/>
+          <a:ext cx="0" cy="0"/>
+          <a:chOff x="0" y="0"/>
+          <a:chExt cx="0" cy="0"/>
+        </a:xfrm>
+      </p:grpSpPr>
+      <p:sp>
+        <p:nvSpPr>
+          <p:cNvPr id="2" name="Title 1">
+            <a:extLst>
+              <a:ext uri="{FF2B5EF4-FFF2-40B4-BE49-F238E27FC236}">
                 <a16:creationId xmlns:a16="http://schemas.microsoft.com/office/drawing/2014/main" id="{5BA4E1A2-75E3-3C9C-6C10-EE078C5AD54A}"/>
               </a:ext>
             </a:extLst>
@@ -7168,8 +8126,8 @@
             </p:nvSpPr>
             <p:spPr>
               <a:xfrm>
-                <a:off x="6211474" y="1140632"/>
-                <a:ext cx="5273179" cy="2049857"/>
+                <a:off x="822819" y="3658891"/>
+                <a:ext cx="5273179" cy="1902124"/>
               </a:xfrm>
             </p:spPr>
             <p:style>
@@ -7392,6 +8350,20 @@
                   </a:spcBef>
                   <a:buNone/>
                 </a:pPr>
+                <a:endParaRPr lang="en-US" sz="1200" i="1" dirty="0">
+                  <a:latin typeface="Cambria Math" panose="02040503050406030204" pitchFamily="18" charset="0"/>
+                </a:endParaRPr>
+              </a:p>
+              <a:p>
+                <a:pPr marL="0" indent="0">
+                  <a:lnSpc>
+                    <a:spcPct val="100000"/>
+                  </a:lnSpc>
+                  <a:spcBef>
+                    <a:spcPts val="0"/>
+                  </a:spcBef>
+                  <a:buNone/>
+                </a:pPr>
                 <a14:m>
                   <m:oMath xmlns:m="http://schemas.openxmlformats.org/officeDocument/2006/math">
                     <m:sSub>
@@ -8108,183 +9080,6 @@
                         </m:r>
                       </m:sub>
                     </m:sSub>
-                  </m:oMath>
-                </a14:m>
-                <a:endParaRPr lang="en-US" sz="1200" dirty="0">
-                  <a:solidFill>
-                    <a:schemeClr val="tx1"/>
-                  </a:solidFill>
-                </a:endParaRPr>
-              </a:p>
-              <a:p>
-                <a:pPr marL="0" indent="0">
-                  <a:spcBef>
-                    <a:spcPts val="0"/>
-                  </a:spcBef>
-                  <a:buNone/>
-                </a:pPr>
-                <a14:m>
-                  <m:oMath xmlns:m="http://schemas.openxmlformats.org/officeDocument/2006/math">
-                    <m:sSub>
-                      <m:sSubPr>
-                        <m:ctrlPr>
-                          <a:rPr lang="en-US" sz="1200" i="1" dirty="0">
-                            <a:solidFill>
-                              <a:schemeClr val="tx1"/>
-                            </a:solidFill>
-                            <a:latin typeface="Cambria Math" panose="02040503050406030204" pitchFamily="18" charset="0"/>
-                          </a:rPr>
-                        </m:ctrlPr>
-                      </m:sSubPr>
-                      <m:e>
-                        <m:acc>
-                          <m:accPr>
-                            <m:chr m:val="̅"/>
-                            <m:ctrlPr>
-                              <a:rPr lang="en-US" sz="1200" i="1" dirty="0">
-                                <a:solidFill>
-                                  <a:schemeClr val="tx1"/>
-                                </a:solidFill>
-                                <a:latin typeface="Cambria Math" panose="02040503050406030204" pitchFamily="18" charset="0"/>
-                              </a:rPr>
-                            </m:ctrlPr>
-                          </m:accPr>
-                          <m:e>
-                            <m:r>
-                              <a:rPr lang="en-US" sz="1200" i="1" dirty="0">
-                                <a:solidFill>
-                                  <a:schemeClr val="tx1"/>
-                                </a:solidFill>
-                                <a:latin typeface="Cambria Math" panose="02040503050406030204" pitchFamily="18" charset="0"/>
-                              </a:rPr>
-                              <m:t>𝑉</m:t>
-                            </m:r>
-                          </m:e>
-                        </m:acc>
-                      </m:e>
-                      <m:sub>
-                        <m:r>
-                          <a:rPr lang="en-US" sz="1200" i="1" dirty="0">
-                            <a:solidFill>
-                              <a:schemeClr val="tx1"/>
-                            </a:solidFill>
-                            <a:latin typeface="Cambria Math" panose="02040503050406030204" pitchFamily="18" charset="0"/>
-                          </a:rPr>
-                          <m:t>𝑡</m:t>
-                        </m:r>
-                      </m:sub>
-                    </m:sSub>
-                    <m:r>
-                      <a:rPr lang="en-US" sz="1200" i="1" dirty="0">
-                        <a:solidFill>
-                          <a:schemeClr val="tx1"/>
-                        </a:solidFill>
-                        <a:latin typeface="Cambria Math" panose="02040503050406030204" pitchFamily="18" charset="0"/>
-                      </a:rPr>
-                      <m:t>(</m:t>
-                    </m:r>
-                    <m:r>
-                      <a:rPr lang="en-US" sz="1200" i="1" dirty="0">
-                        <a:solidFill>
-                          <a:schemeClr val="tx1"/>
-                        </a:solidFill>
-                        <a:latin typeface="Cambria Math" panose="02040503050406030204" pitchFamily="18" charset="0"/>
-                      </a:rPr>
-                      <m:t>𝑠</m:t>
-                    </m:r>
-                    <m:r>
-                      <a:rPr lang="en-US" sz="1200" i="1" dirty="0">
-                        <a:solidFill>
-                          <a:schemeClr val="tx1"/>
-                        </a:solidFill>
-                        <a:latin typeface="Cambria Math" panose="02040503050406030204" pitchFamily="18" charset="0"/>
-                      </a:rPr>
-                      <m:t>) </m:t>
-                    </m:r>
-                  </m:oMath>
-                </a14:m>
-                <a:r>
-                  <a:rPr lang="en-US" sz="1200" dirty="0">
-                    <a:solidFill>
-                      <a:schemeClr val="tx1"/>
-                    </a:solidFill>
-                  </a:rPr>
-                  <a:t>	expected approximate action value</a:t>
-                </a:r>
-              </a:p>
-              <a:p>
-                <a:pPr marL="0" indent="0">
-                  <a:spcBef>
-                    <a:spcPts val="0"/>
-                  </a:spcBef>
-                  <a:buNone/>
-                </a:pPr>
-                <a14:m>
-                  <m:oMath xmlns:m="http://schemas.openxmlformats.org/officeDocument/2006/math">
-                    <m:sSub>
-                      <m:sSubPr>
-                        <m:ctrlPr>
-                          <a:rPr lang="en-US" sz="1200" i="1" dirty="0">
-                            <a:solidFill>
-                              <a:schemeClr val="tx1"/>
-                            </a:solidFill>
-                            <a:latin typeface="Cambria Math" panose="02040503050406030204" pitchFamily="18" charset="0"/>
-                          </a:rPr>
-                        </m:ctrlPr>
-                      </m:sSubPr>
-                      <m:e>
-                        <m:r>
-                          <a:rPr lang="en-US" sz="1200" i="1" dirty="0">
-                            <a:solidFill>
-                              <a:schemeClr val="tx1"/>
-                            </a:solidFill>
-                            <a:latin typeface="Cambria Math" panose="02040503050406030204" pitchFamily="18" charset="0"/>
-                          </a:rPr>
-                          <m:t>𝑈</m:t>
-                        </m:r>
-                      </m:e>
-                      <m:sub>
-                        <m:r>
-                          <a:rPr lang="en-US" sz="1200" i="1" dirty="0">
-                            <a:solidFill>
-                              <a:schemeClr val="tx1"/>
-                            </a:solidFill>
-                            <a:latin typeface="Cambria Math" panose="02040503050406030204" pitchFamily="18" charset="0"/>
-                          </a:rPr>
-                          <m:t>𝑡</m:t>
-                        </m:r>
-                      </m:sub>
-                    </m:sSub>
-                  </m:oMath>
-                </a14:m>
-                <a:r>
-                  <a:rPr lang="en-US" sz="1200" dirty="0">
-                    <a:solidFill>
-                      <a:schemeClr val="tx1"/>
-                    </a:solidFill>
-                  </a:rPr>
-                  <a:t>	target for estimate at time</a:t>
-                </a:r>
-                <a14:m>
-                  <m:oMath xmlns:m="http://schemas.openxmlformats.org/officeDocument/2006/math">
-                    <m:r>
-                      <a:rPr lang="en-US" sz="1200" i="1" dirty="0">
-                        <a:solidFill>
-                          <a:schemeClr val="tx1"/>
-                        </a:solidFill>
-                        <a:latin typeface="Cambria Math" panose="02040503050406030204" pitchFamily="18" charset="0"/>
-                      </a:rPr>
-                      <m:t> </m:t>
-                    </m:r>
-                    <m:r>
-                      <a:rPr lang="en-US" sz="1200" i="1" dirty="0">
-                        <a:solidFill>
-                          <a:schemeClr val="tx1"/>
-                        </a:solidFill>
-                        <a:latin typeface="Cambria Math" panose="02040503050406030204" pitchFamily="18" charset="0"/>
-                      </a:rPr>
-                      <m:t>𝑡</m:t>
-                    </m:r>
                   </m:oMath>
                 </a14:m>
                 <a:endParaRPr lang="en-US" sz="1200" dirty="0">
@@ -8315,13 +9110,13 @@
             </p:nvSpPr>
             <p:spPr>
               <a:xfrm>
-                <a:off x="6211474" y="1140632"/>
-                <a:ext cx="5273179" cy="2049857"/>
+                <a:off x="822819" y="3658891"/>
+                <a:ext cx="5273179" cy="1902124"/>
               </a:xfrm>
               <a:blipFill>
                 <a:blip r:embed="rId2"/>
                 <a:stretch>
-                  <a:fillRect b="-885"/>
+                  <a:fillRect b="-952"/>
                 </a:stretch>
               </a:blipFill>
             </p:spPr>
@@ -8340,8 +9135,8 @@
           </p:sp>
         </mc:Fallback>
       </mc:AlternateContent>
-      <mc:AlternateContent xmlns:mc="http://schemas.openxmlformats.org/markup-compatibility/2006">
-        <mc:Choice xmlns:a14="http://schemas.microsoft.com/office/drawing/2010/main" Requires="a14">
+      <mc:AlternateContent xmlns:mc="http://schemas.openxmlformats.org/markup-compatibility/2006" xmlns:a14="http://schemas.microsoft.com/office/drawing/2010/main">
+        <mc:Choice Requires="a14">
           <p:sp>
             <p:nvSpPr>
               <p:cNvPr id="10" name="TextBox 9">
@@ -8609,7 +9404,7 @@
                 </a14:m>
                 <a:r>
                   <a:rPr lang="en-US" sz="1200" dirty="0"/>
-                  <a:t> selected from distribution</a:t>
+                  <a:t> selected from distribution </a:t>
                 </a:r>
                 <a14:m>
                   <m:oMath xmlns:m="http://schemas.openxmlformats.org/officeDocument/2006/math">
@@ -8956,7 +9751,7 @@
             </p:txBody>
           </p:sp>
         </mc:Choice>
-        <mc:Fallback>
+        <mc:Fallback xmlns="">
           <p:sp>
             <p:nvSpPr>
               <p:cNvPr id="10" name="TextBox 9">
@@ -9019,8 +9814,8 @@
             </p:nvSpPr>
             <p:spPr>
               <a:xfrm>
-                <a:off x="822819" y="3570646"/>
-                <a:ext cx="5273179" cy="2985823"/>
+                <a:off x="6267338" y="1124198"/>
+                <a:ext cx="5273179" cy="3693383"/>
               </a:xfrm>
               <a:prstGeom prst="rect">
                 <a:avLst/>
@@ -9041,7 +9836,7 @@
               </a:fontRef>
             </p:style>
             <p:txBody>
-              <a:bodyPr vert="horz" lIns="91440" tIns="45720" rIns="91440" bIns="45720" rtlCol="0">
+              <a:bodyPr vert="horz" wrap="square" lIns="91440" tIns="45720" rIns="91440" bIns="45720" rtlCol="0">
                 <a:spAutoFit/>
               </a:bodyPr>
               <a:lstStyle>
@@ -9650,6 +10445,20 @@
                   </a:spcBef>
                   <a:buNone/>
                 </a:pPr>
+                <a:endParaRPr lang="en-US" sz="1200" i="1" dirty="0">
+                  <a:latin typeface="Cambria Math" panose="02040503050406030204" pitchFamily="18" charset="0"/>
+                </a:endParaRPr>
+              </a:p>
+              <a:p>
+                <a:pPr marL="0" indent="0">
+                  <a:lnSpc>
+                    <a:spcPct val="100000"/>
+                  </a:lnSpc>
+                  <a:spcBef>
+                    <a:spcPts val="0"/>
+                  </a:spcBef>
+                  <a:buNone/>
+                </a:pPr>
                 <a14:m>
                   <m:oMath xmlns:m="http://schemas.openxmlformats.org/officeDocument/2006/math">
                     <m:r>
@@ -9808,7 +10617,10 @@
                     </m:r>
                   </m:oMath>
                 </a14:m>
-                <a:endParaRPr lang="en-US" sz="1200" dirty="0"/>
+                <a:r>
+                  <a:rPr lang="en-US" sz="1200" dirty="0"/>
+                  <a:t>.</a:t>
+                </a:r>
               </a:p>
               <a:p>
                 <a:pPr marL="0" indent="0">
@@ -9820,6 +10632,180 @@
                   </a:spcBef>
                   <a:buNone/>
                 </a:pPr>
+                <a14:m>
+                  <m:oMath xmlns:m="http://schemas.openxmlformats.org/officeDocument/2006/math">
+                    <m:r>
+                      <a:rPr lang="en-US" sz="1200" i="1" dirty="0">
+                        <a:latin typeface="Cambria Math" panose="02040503050406030204" pitchFamily="18" charset="0"/>
+                      </a:rPr>
+                      <m:t>𝑝</m:t>
+                    </m:r>
+                    <m:d>
+                      <m:dPr>
+                        <m:endChr m:val="|"/>
+                        <m:ctrlPr>
+                          <a:rPr lang="en-US" sz="1200" i="1" dirty="0">
+                            <a:latin typeface="Cambria Math" panose="02040503050406030204" pitchFamily="18" charset="0"/>
+                          </a:rPr>
+                        </m:ctrlPr>
+                      </m:dPr>
+                      <m:e>
+                        <m:sSup>
+                          <m:sSupPr>
+                            <m:ctrlPr>
+                              <a:rPr lang="en-US" sz="1200" i="1" dirty="0">
+                                <a:latin typeface="Cambria Math" panose="02040503050406030204" pitchFamily="18" charset="0"/>
+                              </a:rPr>
+                            </m:ctrlPr>
+                          </m:sSupPr>
+                          <m:e>
+                            <m:r>
+                              <a:rPr lang="en-US" sz="1200" i="1" dirty="0">
+                                <a:latin typeface="Cambria Math" panose="02040503050406030204" pitchFamily="18" charset="0"/>
+                              </a:rPr>
+                              <m:t>𝑠</m:t>
+                            </m:r>
+                          </m:e>
+                          <m:sup>
+                            <m:r>
+                              <a:rPr lang="en-US" sz="1200" i="1" dirty="0">
+                                <a:latin typeface="Cambria Math" panose="02040503050406030204" pitchFamily="18" charset="0"/>
+                              </a:rPr>
+                              <m:t>′</m:t>
+                            </m:r>
+                          </m:sup>
+                        </m:sSup>
+                      </m:e>
+                    </m:d>
+                    <m:r>
+                      <a:rPr lang="en-US" sz="1200" i="1" dirty="0">
+                        <a:latin typeface="Cambria Math" panose="02040503050406030204" pitchFamily="18" charset="0"/>
+                      </a:rPr>
+                      <m:t>𝑠</m:t>
+                    </m:r>
+                    <m:r>
+                      <a:rPr lang="en-US" sz="1200" i="1" dirty="0">
+                        <a:latin typeface="Cambria Math" panose="02040503050406030204" pitchFamily="18" charset="0"/>
+                      </a:rPr>
+                      <m:t>, </m:t>
+                    </m:r>
+                    <m:r>
+                      <a:rPr lang="en-US" sz="1200" i="1" dirty="0">
+                        <a:latin typeface="Cambria Math" panose="02040503050406030204" pitchFamily="18" charset="0"/>
+                      </a:rPr>
+                      <m:t>𝑎</m:t>
+                    </m:r>
+                    <m:r>
+                      <a:rPr lang="en-US" sz="1200" i="1" dirty="0">
+                        <a:latin typeface="Cambria Math" panose="02040503050406030204" pitchFamily="18" charset="0"/>
+                      </a:rPr>
+                      <m:t>)</m:t>
+                    </m:r>
+                  </m:oMath>
+                </a14:m>
+                <a:r>
+                  <a:rPr lang="en-US" sz="1200" dirty="0"/>
+                  <a:t> 	probability of transition to state </a:t>
+                </a:r>
+                <a14:m>
+                  <m:oMath xmlns:m="http://schemas.openxmlformats.org/officeDocument/2006/math">
+                    <m:r>
+                      <a:rPr lang="en-US" sz="1200" i="1" dirty="0">
+                        <a:latin typeface="Cambria Math" panose="02040503050406030204" pitchFamily="18" charset="0"/>
+                      </a:rPr>
+                      <m:t>𝑠</m:t>
+                    </m:r>
+                    <m:r>
+                      <a:rPr lang="en-US" sz="1200" i="1" dirty="0">
+                        <a:latin typeface="Cambria Math" panose="02040503050406030204" pitchFamily="18" charset="0"/>
+                      </a:rPr>
+                      <m:t>′</m:t>
+                    </m:r>
+                  </m:oMath>
+                </a14:m>
+                <a:r>
+                  <a:rPr lang="en-US" sz="1200" dirty="0"/>
+                  <a:t> fom state </a:t>
+                </a:r>
+                <a14:m>
+                  <m:oMath xmlns:m="http://schemas.openxmlformats.org/officeDocument/2006/math">
+                    <m:r>
+                      <a:rPr lang="en-US" sz="1200" i="1" dirty="0">
+                        <a:latin typeface="Cambria Math" panose="02040503050406030204" pitchFamily="18" charset="0"/>
+                      </a:rPr>
+                      <m:t>𝑠</m:t>
+                    </m:r>
+                  </m:oMath>
+                </a14:m>
+                <a:r>
+                  <a:rPr lang="en-US" sz="1200" dirty="0"/>
+                  <a:t> taking action </a:t>
+                </a:r>
+                <a14:m>
+                  <m:oMath xmlns:m="http://schemas.openxmlformats.org/officeDocument/2006/math">
+                    <m:r>
+                      <a:rPr lang="en-US" sz="1200" i="1" dirty="0">
+                        <a:latin typeface="Cambria Math" panose="02040503050406030204" pitchFamily="18" charset="0"/>
+                      </a:rPr>
+                      <m:t>𝑎</m:t>
+                    </m:r>
+                  </m:oMath>
+                </a14:m>
+                <a:r>
+                  <a:rPr lang="en-US" sz="1200" dirty="0"/>
+                  <a:t>.</a:t>
+                </a:r>
+              </a:p>
+              <a:p>
+                <a:pPr marL="0" indent="0">
+                  <a:lnSpc>
+                    <a:spcPct val="100000"/>
+                  </a:lnSpc>
+                  <a:spcBef>
+                    <a:spcPts val="0"/>
+                  </a:spcBef>
+                  <a:buNone/>
+                </a:pPr>
+                <a14:m>
+                  <m:oMath xmlns:m="http://schemas.openxmlformats.org/officeDocument/2006/math">
+                    <m:r>
+                      <a:rPr lang="en-US" sz="1200" b="0" i="1" smtClean="0">
+                        <a:latin typeface="Cambria Math" panose="02040503050406030204" pitchFamily="18" charset="0"/>
+                      </a:rPr>
+                      <m:t>𝑟</m:t>
+                    </m:r>
+                    <m:r>
+                      <a:rPr lang="en-US" sz="1200" b="0" i="1" smtClean="0">
+                        <a:latin typeface="Cambria Math" panose="02040503050406030204" pitchFamily="18" charset="0"/>
+                      </a:rPr>
+                      <m:t>(</m:t>
+                    </m:r>
+                    <m:r>
+                      <a:rPr lang="en-US" sz="1200" b="0" i="1" smtClean="0">
+                        <a:latin typeface="Cambria Math" panose="02040503050406030204" pitchFamily="18" charset="0"/>
+                      </a:rPr>
+                      <m:t>𝑠</m:t>
+                    </m:r>
+                    <m:r>
+                      <a:rPr lang="en-US" sz="1200" b="0" i="1" smtClean="0">
+                        <a:latin typeface="Cambria Math" panose="02040503050406030204" pitchFamily="18" charset="0"/>
+                      </a:rPr>
+                      <m:t>,</m:t>
+                    </m:r>
+                    <m:r>
+                      <a:rPr lang="en-US" sz="1200" b="0" i="1" smtClean="0">
+                        <a:latin typeface="Cambria Math" panose="02040503050406030204" pitchFamily="18" charset="0"/>
+                      </a:rPr>
+                      <m:t>𝑎</m:t>
+                    </m:r>
+                    <m:r>
+                      <a:rPr lang="en-US" sz="1200" b="0" i="1" smtClean="0">
+                        <a:latin typeface="Cambria Math" panose="02040503050406030204" pitchFamily="18" charset="0"/>
+                      </a:rPr>
+                      <m:t>)</m:t>
+                    </m:r>
+                  </m:oMath>
+                </a14:m>
                 <a:r>
                   <a:rPr lang="en-US" sz="1200" dirty="0"/>
                   <a:t>	expected immediate reward from state </a:t>
@@ -9846,8 +10832,156 @@
                       </a:rPr>
                       <m:t>𝑎</m:t>
                     </m:r>
+                    <m:r>
+                      <a:rPr lang="en-US" sz="1200" b="0" i="1" dirty="0" smtClean="0">
+                        <a:latin typeface="Cambria Math" panose="02040503050406030204" pitchFamily="18" charset="0"/>
+                      </a:rPr>
+                      <m:t>.</m:t>
+                    </m:r>
                   </m:oMath>
                 </a14:m>
+                <a:endParaRPr lang="en-US" sz="1200" b="0" dirty="0"/>
+              </a:p>
+              <a:p>
+                <a:pPr marL="0" indent="0">
+                  <a:lnSpc>
+                    <a:spcPct val="100000"/>
+                  </a:lnSpc>
+                  <a:spcBef>
+                    <a:spcPts val="0"/>
+                  </a:spcBef>
+                  <a:buNone/>
+                </a:pPr>
+                <a14:m>
+                  <m:oMath xmlns:m="http://schemas.openxmlformats.org/officeDocument/2006/math">
+                    <m:r>
+                      <a:rPr lang="en-US" sz="1200" i="1">
+                        <a:latin typeface="Cambria Math" panose="02040503050406030204" pitchFamily="18" charset="0"/>
+                      </a:rPr>
+                      <m:t>𝑟</m:t>
+                    </m:r>
+                    <m:r>
+                      <a:rPr lang="en-US" sz="1200" i="1">
+                        <a:latin typeface="Cambria Math" panose="02040503050406030204" pitchFamily="18" charset="0"/>
+                      </a:rPr>
+                      <m:t>(</m:t>
+                    </m:r>
+                    <m:r>
+                      <a:rPr lang="en-US" sz="1200" i="1">
+                        <a:latin typeface="Cambria Math" panose="02040503050406030204" pitchFamily="18" charset="0"/>
+                      </a:rPr>
+                      <m:t>𝑠</m:t>
+                    </m:r>
+                    <m:r>
+                      <a:rPr lang="en-US" sz="1200" i="1">
+                        <a:latin typeface="Cambria Math" panose="02040503050406030204" pitchFamily="18" charset="0"/>
+                      </a:rPr>
+                      <m:t>,</m:t>
+                    </m:r>
+                    <m:r>
+                      <a:rPr lang="en-US" sz="1200" i="1">
+                        <a:latin typeface="Cambria Math" panose="02040503050406030204" pitchFamily="18" charset="0"/>
+                      </a:rPr>
+                      <m:t>𝑎</m:t>
+                    </m:r>
+                    <m:r>
+                      <a:rPr lang="en-US" sz="1200" b="0" i="1" smtClean="0">
+                        <a:latin typeface="Cambria Math" panose="02040503050406030204" pitchFamily="18" charset="0"/>
+                      </a:rPr>
+                      <m:t>,</m:t>
+                    </m:r>
+                    <m:r>
+                      <a:rPr lang="en-US" sz="1200" b="0" i="1" smtClean="0">
+                        <a:latin typeface="Cambria Math" panose="02040503050406030204" pitchFamily="18" charset="0"/>
+                      </a:rPr>
+                      <m:t>𝑠</m:t>
+                    </m:r>
+                    <m:r>
+                      <a:rPr lang="en-US" sz="1200" b="0" i="1" smtClean="0">
+                        <a:latin typeface="Cambria Math" panose="02040503050406030204" pitchFamily="18" charset="0"/>
+                      </a:rPr>
+                      <m:t>′)</m:t>
+                    </m:r>
+                  </m:oMath>
+                </a14:m>
+                <a:r>
+                  <a:rPr lang="en-US" sz="1200" dirty="0"/>
+                  <a:t>	expected immediate reward from state </a:t>
+                </a:r>
+                <a14:m>
+                  <m:oMath xmlns:m="http://schemas.openxmlformats.org/officeDocument/2006/math">
+                    <m:r>
+                      <a:rPr lang="en-US" sz="1200" i="1" dirty="0">
+                        <a:latin typeface="Cambria Math" panose="02040503050406030204" pitchFamily="18" charset="0"/>
+                      </a:rPr>
+                      <m:t>𝑠</m:t>
+                    </m:r>
+                  </m:oMath>
+                </a14:m>
+                <a:r>
+                  <a:rPr lang="en-US" sz="1200" dirty="0"/>
+                  <a:t> to </a:t>
+                </a:r>
+                <a14:m>
+                  <m:oMath xmlns:m="http://schemas.openxmlformats.org/officeDocument/2006/math">
+                    <m:sSup>
+                      <m:sSupPr>
+                        <m:ctrlPr>
+                          <a:rPr lang="en-US" sz="1200" b="0" i="1" smtClean="0">
+                            <a:latin typeface="Cambria Math" panose="02040503050406030204" pitchFamily="18" charset="0"/>
+                          </a:rPr>
+                        </m:ctrlPr>
+                      </m:sSupPr>
+                      <m:e>
+                        <m:r>
+                          <a:rPr lang="en-US" sz="1200" b="0" i="1" smtClean="0">
+                            <a:latin typeface="Cambria Math" panose="02040503050406030204" pitchFamily="18" charset="0"/>
+                          </a:rPr>
+                          <m:t>𝑠</m:t>
+                        </m:r>
+                      </m:e>
+                      <m:sup>
+                        <m:r>
+                          <a:rPr lang="en-US" sz="1200" b="0" i="1" smtClean="0">
+                            <a:latin typeface="Cambria Math" panose="02040503050406030204" pitchFamily="18" charset="0"/>
+                          </a:rPr>
+                          <m:t>′</m:t>
+                        </m:r>
+                      </m:sup>
+                    </m:sSup>
+                  </m:oMath>
+                </a14:m>
+                <a:r>
+                  <a:rPr lang="en-US" sz="1200" dirty="0"/>
+                  <a:t> with action </a:t>
+                </a:r>
+                <a14:m>
+                  <m:oMath xmlns:m="http://schemas.openxmlformats.org/officeDocument/2006/math">
+                    <m:r>
+                      <a:rPr lang="en-US" sz="1200" i="1" dirty="0">
+                        <a:latin typeface="Cambria Math" panose="02040503050406030204" pitchFamily="18" charset="0"/>
+                      </a:rPr>
+                      <m:t>𝑎</m:t>
+                    </m:r>
+                    <m:r>
+                      <a:rPr lang="en-US" sz="1200" b="0" i="1" dirty="0" smtClean="0">
+                        <a:latin typeface="Cambria Math" panose="02040503050406030204" pitchFamily="18" charset="0"/>
+                      </a:rPr>
+                      <m:t>.</m:t>
+                    </m:r>
+                  </m:oMath>
+                </a14:m>
+                <a:endParaRPr lang="en-US" sz="1200" i="1" dirty="0">
+                  <a:latin typeface="Cambria Math" panose="02040503050406030204" pitchFamily="18" charset="0"/>
+                </a:endParaRPr>
+              </a:p>
+              <a:p>
+                <a:pPr marL="0" indent="0">
+                  <a:spcBef>
+                    <a:spcPts val="0"/>
+                  </a:spcBef>
+                  <a:buNone/>
+                </a:pPr>
                 <a:endParaRPr lang="en-US" sz="1200" i="1" dirty="0">
                   <a:latin typeface="Cambria Math" panose="02040503050406030204" pitchFamily="18" charset="0"/>
                 </a:endParaRPr>
@@ -10030,8 +11164,8 @@
             </p:nvSpPr>
             <p:spPr>
               <a:xfrm>
-                <a:off x="822819" y="3570646"/>
-                <a:ext cx="5273179" cy="2985823"/>
+                <a:off x="6267338" y="1124198"/>
+                <a:ext cx="5273179" cy="3693383"/>
               </a:xfrm>
               <a:prstGeom prst="rect">
                 <a:avLst/>
@@ -10039,7 +11173,7 @@
               <a:blipFill>
                 <a:blip r:embed="rId4"/>
                 <a:stretch>
-                  <a:fillRect t="-609"/>
+                  <a:fillRect t="-328"/>
                 </a:stretch>
               </a:blipFill>
             </p:spPr>
@@ -10061,7 +11195,7 @@
     </p:spTree>
     <p:extLst>
       <p:ext uri="{BB962C8B-B14F-4D97-AF65-F5344CB8AC3E}">
-        <p14:creationId xmlns:p14="http://schemas.microsoft.com/office/powerpoint/2010/main" val="920694018"/>
+        <p14:creationId xmlns:p14="http://schemas.microsoft.com/office/powerpoint/2010/main" val="3945362088"/>
       </p:ext>
     </p:extLst>
   </p:cSld>
@@ -10071,7 +11205,7 @@
 </p:sld>
 </file>
 
-<file path=ppt/slides/slide3.xml><?xml version="1.0" encoding="utf-8"?>
+<file path=ppt/slides/slide4.xml><?xml version="1.0" encoding="utf-8"?>
 <p:sld xmlns:a="http://schemas.openxmlformats.org/drawingml/2006/main" xmlns:r="http://schemas.openxmlformats.org/officeDocument/2006/relationships" xmlns:p="http://schemas.openxmlformats.org/presentationml/2006/main">
   <p:cSld>
     <p:spTree>
@@ -10163,7 +11297,7 @@
 </p:sld>
 </file>
 
-<file path=ppt/slides/slide4.xml><?xml version="1.0" encoding="utf-8"?>
+<file path=ppt/slides/slide5.xml><?xml version="1.0" encoding="utf-8"?>
 <p:sld xmlns:a="http://schemas.openxmlformats.org/drawingml/2006/main" xmlns:r="http://schemas.openxmlformats.org/officeDocument/2006/relationships" xmlns:p="http://schemas.openxmlformats.org/presentationml/2006/main">
   <p:cSld>
     <p:spTree>
@@ -10965,7 +12099,7 @@
 </p:sld>
 </file>
 
-<file path=ppt/slides/slide5.xml><?xml version="1.0" encoding="utf-8"?>
+<file path=ppt/slides/slide6.xml><?xml version="1.0" encoding="utf-8"?>
 <p:sld xmlns:a="http://schemas.openxmlformats.org/drawingml/2006/main" xmlns:r="http://schemas.openxmlformats.org/officeDocument/2006/relationships" xmlns:p="http://schemas.openxmlformats.org/presentationml/2006/main">
   <p:cSld>
     <p:spTree>
@@ -11799,7 +12933,7 @@
 </p:sld>
 </file>
 
-<file path=ppt/slides/slide6.xml><?xml version="1.0" encoding="utf-8"?>
+<file path=ppt/slides/slide7.xml><?xml version="1.0" encoding="utf-8"?>
 <p:sld xmlns:a="http://schemas.openxmlformats.org/drawingml/2006/main" xmlns:r="http://schemas.openxmlformats.org/officeDocument/2006/relationships" xmlns:p="http://schemas.openxmlformats.org/presentationml/2006/main">
   <p:cSld>
     <p:spTree>
@@ -12055,7 +13189,7 @@
 </p:sld>
 </file>
 
-<file path=ppt/slides/slide7.xml><?xml version="1.0" encoding="utf-8"?>
+<file path=ppt/slides/slide8.xml><?xml version="1.0" encoding="utf-8"?>
 <p:sld xmlns:a="http://schemas.openxmlformats.org/drawingml/2006/main" xmlns:r="http://schemas.openxmlformats.org/officeDocument/2006/relationships" xmlns:p="http://schemas.openxmlformats.org/presentationml/2006/main">
   <p:cSld>
     <p:spTree>
@@ -13544,7 +14678,7 @@
 </p:sld>
 </file>
 
-<file path=ppt/slides/slide8.xml><?xml version="1.0" encoding="utf-8"?>
+<file path=ppt/slides/slide9.xml><?xml version="1.0" encoding="utf-8"?>
 <p:sld xmlns:a="http://schemas.openxmlformats.org/drawingml/2006/main" xmlns:r="http://schemas.openxmlformats.org/officeDocument/2006/relationships" xmlns:p="http://schemas.openxmlformats.org/presentationml/2006/main">
   <p:cSld>
     <p:spTree>
@@ -16372,780 +17506,6 @@
 </p:sld>
 </file>
 
-<file path=ppt/slides/slide9.xml><?xml version="1.0" encoding="utf-8"?>
-<p:sld xmlns:a="http://schemas.openxmlformats.org/drawingml/2006/main" xmlns:r="http://schemas.openxmlformats.org/officeDocument/2006/relationships" xmlns:p="http://schemas.openxmlformats.org/presentationml/2006/main">
-  <p:cSld>
-    <p:spTree>
-      <p:nvGrpSpPr>
-        <p:cNvPr id="1" name="">
-          <a:extLst>
-            <a:ext uri="{FF2B5EF4-FFF2-40B4-BE49-F238E27FC236}">
-              <a16:creationId xmlns:a16="http://schemas.microsoft.com/office/drawing/2014/main" id="{9C1A846B-68DA-9665-F3C8-EFD6C97E66FB}"/>
-            </a:ext>
-          </a:extLst>
-        </p:cNvPr>
-        <p:cNvGrpSpPr/>
-        <p:nvPr/>
-      </p:nvGrpSpPr>
-      <p:grpSpPr>
-        <a:xfrm>
-          <a:off x="0" y="0"/>
-          <a:ext cx="0" cy="0"/>
-          <a:chOff x="0" y="0"/>
-          <a:chExt cx="0" cy="0"/>
-        </a:xfrm>
-      </p:grpSpPr>
-      <p:sp>
-        <p:nvSpPr>
-          <p:cNvPr id="2" name="Title 1">
-            <a:extLst>
-              <a:ext uri="{FF2B5EF4-FFF2-40B4-BE49-F238E27FC236}">
-                <a16:creationId xmlns:a16="http://schemas.microsoft.com/office/drawing/2014/main" id="{38B2F899-1499-8E06-0445-BD2138EDB85A}"/>
-              </a:ext>
-            </a:extLst>
-          </p:cNvPr>
-          <p:cNvSpPr>
-            <a:spLocks noGrp="1"/>
-          </p:cNvSpPr>
-          <p:nvPr>
-            <p:ph type="title"/>
-          </p:nvPr>
-        </p:nvSpPr>
-        <p:spPr/>
-        <p:txBody>
-          <a:bodyPr/>
-          <a:lstStyle/>
-          <a:p>
-            <a:r>
-              <a:rPr lang="en-US" dirty="0"/>
-              <a:t>MC Policy Gradient</a:t>
-            </a:r>
-          </a:p>
-        </p:txBody>
-      </p:sp>
-      <mc:AlternateContent xmlns:mc="http://schemas.openxmlformats.org/markup-compatibility/2006" xmlns:a14="http://schemas.microsoft.com/office/drawing/2010/main">
-        <mc:Choice Requires="a14">
-          <p:sp>
-            <p:nvSpPr>
-              <p:cNvPr id="3" name="Content Placeholder 2">
-                <a:extLst>
-                  <a:ext uri="{FF2B5EF4-FFF2-40B4-BE49-F238E27FC236}">
-                    <a16:creationId xmlns:a16="http://schemas.microsoft.com/office/drawing/2014/main" id="{8638C852-25DD-4671-ED13-10B8DE619084}"/>
-                  </a:ext>
-                </a:extLst>
-              </p:cNvPr>
-              <p:cNvSpPr>
-                <a:spLocks noGrp="1"/>
-              </p:cNvSpPr>
-              <p:nvPr>
-                <p:ph idx="1"/>
-              </p:nvPr>
-            </p:nvSpPr>
-            <p:spPr>
-              <a:xfrm>
-                <a:off x="838200" y="1124198"/>
-                <a:ext cx="9967076" cy="2527762"/>
-              </a:xfrm>
-            </p:spPr>
-            <p:txBody>
-              <a:bodyPr>
-                <a:normAutofit/>
-              </a:bodyPr>
-              <a:lstStyle/>
-              <a:p>
-                <a:pPr marL="0" indent="0" algn="ctr">
-                  <a:buNone/>
-                </a:pPr>
-                <a14:m>
-                  <m:oMathPara xmlns:m="http://schemas.openxmlformats.org/officeDocument/2006/math">
-                    <m:oMathParaPr>
-                      <m:jc m:val="centerGroup"/>
-                    </m:oMathParaPr>
-                    <m:oMath xmlns:m="http://schemas.openxmlformats.org/officeDocument/2006/math">
-                      <m:sSub>
-                        <m:sSubPr>
-                          <m:ctrlPr>
-                            <a:rPr lang="en-US" i="1" smtClean="0">
-                              <a:latin typeface="Cambria Math" panose="02040503050406030204" pitchFamily="18" charset="0"/>
-                            </a:rPr>
-                          </m:ctrlPr>
-                        </m:sSubPr>
-                        <m:e>
-                          <m:r>
-                            <a:rPr lang="en-US" b="1" i="1">
-                              <a:latin typeface="Cambria Math" panose="02040503050406030204" pitchFamily="18" charset="0"/>
-                            </a:rPr>
-                            <m:t>𝜽</m:t>
-                          </m:r>
-                        </m:e>
-                        <m:sub>
-                          <m:r>
-                            <a:rPr lang="en-US" i="1">
-                              <a:latin typeface="Cambria Math" panose="02040503050406030204" pitchFamily="18" charset="0"/>
-                            </a:rPr>
-                            <m:t>𝑡</m:t>
-                          </m:r>
-                          <m:r>
-                            <a:rPr lang="en-US" i="1">
-                              <a:latin typeface="Cambria Math" panose="02040503050406030204" pitchFamily="18" charset="0"/>
-                            </a:rPr>
-                            <m:t>+1</m:t>
-                          </m:r>
-                        </m:sub>
-                      </m:sSub>
-                      <m:r>
-                        <a:rPr lang="en-US" i="1">
-                          <a:latin typeface="Cambria Math" panose="02040503050406030204" pitchFamily="18" charset="0"/>
-                        </a:rPr>
-                        <m:t>=</m:t>
-                      </m:r>
-                      <m:sSub>
-                        <m:sSubPr>
-                          <m:ctrlPr>
-                            <a:rPr lang="en-US" i="1">
-                              <a:latin typeface="Cambria Math" panose="02040503050406030204" pitchFamily="18" charset="0"/>
-                            </a:rPr>
-                          </m:ctrlPr>
-                        </m:sSubPr>
-                        <m:e>
-                          <m:r>
-                            <a:rPr lang="en-US" b="1" i="1">
-                              <a:latin typeface="Cambria Math" panose="02040503050406030204" pitchFamily="18" charset="0"/>
-                            </a:rPr>
-                            <m:t>𝜽</m:t>
-                          </m:r>
-                        </m:e>
-                        <m:sub>
-                          <m:r>
-                            <a:rPr lang="en-US" i="1">
-                              <a:latin typeface="Cambria Math" panose="02040503050406030204" pitchFamily="18" charset="0"/>
-                            </a:rPr>
-                            <m:t>𝑡</m:t>
-                          </m:r>
-                        </m:sub>
-                      </m:sSub>
-                      <m:r>
-                        <a:rPr lang="en-US" i="1">
-                          <a:latin typeface="Cambria Math" panose="02040503050406030204" pitchFamily="18" charset="0"/>
-                        </a:rPr>
-                        <m:t>+</m:t>
-                      </m:r>
-                      <m:r>
-                        <a:rPr lang="en-US" i="1">
-                          <a:latin typeface="Cambria Math" panose="02040503050406030204" pitchFamily="18" charset="0"/>
-                        </a:rPr>
-                        <m:t>𝛼</m:t>
-                      </m:r>
-                      <m:sSub>
-                        <m:sSubPr>
-                          <m:ctrlPr>
-                            <a:rPr lang="en-US" i="1">
-                              <a:latin typeface="Cambria Math" panose="02040503050406030204" pitchFamily="18" charset="0"/>
-                              <a:ea typeface="Cambria Math" panose="02040503050406030204" pitchFamily="18" charset="0"/>
-                            </a:rPr>
-                          </m:ctrlPr>
-                        </m:sSubPr>
-                        <m:e>
-                          <m:r>
-                            <a:rPr lang="en-US" i="1">
-                              <a:latin typeface="Cambria Math" panose="02040503050406030204" pitchFamily="18" charset="0"/>
-                              <a:ea typeface="Cambria Math" panose="02040503050406030204" pitchFamily="18" charset="0"/>
-                            </a:rPr>
-                            <m:t>𝔼</m:t>
-                          </m:r>
-                        </m:e>
-                        <m:sub>
-                          <m:r>
-                            <a:rPr lang="en-US" i="1">
-                              <a:latin typeface="Cambria Math" panose="02040503050406030204" pitchFamily="18" charset="0"/>
-                              <a:ea typeface="Cambria Math" panose="02040503050406030204" pitchFamily="18" charset="0"/>
-                            </a:rPr>
-                            <m:t>𝜋</m:t>
-                          </m:r>
-                        </m:sub>
-                      </m:sSub>
-                      <m:d>
-                        <m:dPr>
-                          <m:begChr m:val="["/>
-                          <m:endChr m:val="]"/>
-                          <m:ctrlPr>
-                            <a:rPr lang="en-US" i="1">
-                              <a:latin typeface="Cambria Math" panose="02040503050406030204" pitchFamily="18" charset="0"/>
-                              <a:ea typeface="Cambria Math" panose="02040503050406030204" pitchFamily="18" charset="0"/>
-                            </a:rPr>
-                          </m:ctrlPr>
-                        </m:dPr>
-                        <m:e>
-                          <m:sSub>
-                            <m:sSubPr>
-                              <m:ctrlPr>
-                                <a:rPr lang="en-US" i="1">
-                                  <a:latin typeface="Cambria Math" panose="02040503050406030204" pitchFamily="18" charset="0"/>
-                                  <a:ea typeface="Cambria Math" panose="02040503050406030204" pitchFamily="18" charset="0"/>
-                                </a:rPr>
-                              </m:ctrlPr>
-                            </m:sSubPr>
-                            <m:e>
-                              <m:r>
-                                <a:rPr lang="en-US" i="1">
-                                  <a:latin typeface="Cambria Math" panose="02040503050406030204" pitchFamily="18" charset="0"/>
-                                  <a:ea typeface="Cambria Math" panose="02040503050406030204" pitchFamily="18" charset="0"/>
-                                </a:rPr>
-                                <m:t>𝐺</m:t>
-                              </m:r>
-                            </m:e>
-                            <m:sub>
-                              <m:r>
-                                <a:rPr lang="en-US" i="1">
-                                  <a:latin typeface="Cambria Math" panose="02040503050406030204" pitchFamily="18" charset="0"/>
-                                  <a:ea typeface="Cambria Math" panose="02040503050406030204" pitchFamily="18" charset="0"/>
-                                </a:rPr>
-                                <m:t>𝑡</m:t>
-                              </m:r>
-                            </m:sub>
-                          </m:sSub>
-                          <m:func>
-                            <m:funcPr>
-                              <m:ctrlPr>
-                                <a:rPr lang="en-US" i="1">
-                                  <a:latin typeface="Cambria Math" panose="02040503050406030204" pitchFamily="18" charset="0"/>
-                                  <a:ea typeface="Cambria Math" panose="02040503050406030204" pitchFamily="18" charset="0"/>
-                                </a:rPr>
-                              </m:ctrlPr>
-                            </m:funcPr>
-                            <m:fName>
-                              <m:r>
-                                <m:rPr>
-                                  <m:sty m:val="p"/>
-                                </m:rPr>
-                                <a:rPr lang="en-US">
-                                  <a:latin typeface="Cambria Math" panose="02040503050406030204" pitchFamily="18" charset="0"/>
-                                  <a:ea typeface="Cambria Math" panose="02040503050406030204" pitchFamily="18" charset="0"/>
-                                </a:rPr>
-                                <m:t>ln</m:t>
-                              </m:r>
-                            </m:fName>
-                            <m:e>
-                              <m:r>
-                                <m:rPr>
-                                  <m:sty m:val="p"/>
-                                </m:rPr>
-                                <a:rPr lang="en-US" i="1">
-                                  <a:latin typeface="Cambria Math" panose="02040503050406030204" pitchFamily="18" charset="0"/>
-                                  <a:ea typeface="Cambria Math" panose="02040503050406030204" pitchFamily="18" charset="0"/>
-                                </a:rPr>
-                                <m:t>∇</m:t>
-                              </m:r>
-                              <m:r>
-                                <a:rPr lang="en-US" i="1">
-                                  <a:latin typeface="Cambria Math" panose="02040503050406030204" pitchFamily="18" charset="0"/>
-                                  <a:ea typeface="Cambria Math" panose="02040503050406030204" pitchFamily="18" charset="0"/>
-                                </a:rPr>
-                                <m:t>𝜋</m:t>
-                              </m:r>
-                              <m:r>
-                                <a:rPr lang="en-US" i="1">
-                                  <a:latin typeface="Cambria Math" panose="02040503050406030204" pitchFamily="18" charset="0"/>
-                                  <a:ea typeface="Cambria Math" panose="02040503050406030204" pitchFamily="18" charset="0"/>
-                                </a:rPr>
-                                <m:t>(</m:t>
-                              </m:r>
-                              <m:sSub>
-                                <m:sSubPr>
-                                  <m:ctrlPr>
-                                    <a:rPr lang="en-US" i="1">
-                                      <a:latin typeface="Cambria Math" panose="02040503050406030204" pitchFamily="18" charset="0"/>
-                                      <a:ea typeface="Cambria Math" panose="02040503050406030204" pitchFamily="18" charset="0"/>
-                                    </a:rPr>
-                                  </m:ctrlPr>
-                                </m:sSubPr>
-                                <m:e>
-                                  <m:r>
-                                    <a:rPr lang="en-US" i="1">
-                                      <a:latin typeface="Cambria Math" panose="02040503050406030204" pitchFamily="18" charset="0"/>
-                                      <a:ea typeface="Cambria Math" panose="02040503050406030204" pitchFamily="18" charset="0"/>
-                                    </a:rPr>
-                                    <m:t>𝐴</m:t>
-                                  </m:r>
-                                </m:e>
-                                <m:sub>
-                                  <m:r>
-                                    <a:rPr lang="en-US" i="1">
-                                      <a:latin typeface="Cambria Math" panose="02040503050406030204" pitchFamily="18" charset="0"/>
-                                      <a:ea typeface="Cambria Math" panose="02040503050406030204" pitchFamily="18" charset="0"/>
-                                    </a:rPr>
-                                    <m:t>𝑡</m:t>
-                                  </m:r>
-                                </m:sub>
-                              </m:sSub>
-                              <m:r>
-                                <a:rPr lang="en-US" i="1">
-                                  <a:latin typeface="Cambria Math" panose="02040503050406030204" pitchFamily="18" charset="0"/>
-                                  <a:ea typeface="Cambria Math" panose="02040503050406030204" pitchFamily="18" charset="0"/>
-                                </a:rPr>
-                                <m:t>|</m:t>
-                              </m:r>
-                              <m:sSub>
-                                <m:sSubPr>
-                                  <m:ctrlPr>
-                                    <a:rPr lang="en-US" i="1">
-                                      <a:latin typeface="Cambria Math" panose="02040503050406030204" pitchFamily="18" charset="0"/>
-                                      <a:ea typeface="Cambria Math" panose="02040503050406030204" pitchFamily="18" charset="0"/>
-                                    </a:rPr>
-                                  </m:ctrlPr>
-                                </m:sSubPr>
-                                <m:e>
-                                  <m:r>
-                                    <a:rPr lang="en-US" i="1">
-                                      <a:latin typeface="Cambria Math" panose="02040503050406030204" pitchFamily="18" charset="0"/>
-                                      <a:ea typeface="Cambria Math" panose="02040503050406030204" pitchFamily="18" charset="0"/>
-                                    </a:rPr>
-                                    <m:t>𝑆</m:t>
-                                  </m:r>
-                                </m:e>
-                                <m:sub>
-                                  <m:r>
-                                    <a:rPr lang="en-US" i="1">
-                                      <a:latin typeface="Cambria Math" panose="02040503050406030204" pitchFamily="18" charset="0"/>
-                                      <a:ea typeface="Cambria Math" panose="02040503050406030204" pitchFamily="18" charset="0"/>
-                                    </a:rPr>
-                                    <m:t>𝑡</m:t>
-                                  </m:r>
-                                </m:sub>
-                              </m:sSub>
-                              <m:r>
-                                <a:rPr lang="en-US" i="1">
-                                  <a:latin typeface="Cambria Math" panose="02040503050406030204" pitchFamily="18" charset="0"/>
-                                  <a:ea typeface="Cambria Math" panose="02040503050406030204" pitchFamily="18" charset="0"/>
-                                </a:rPr>
-                                <m:t>,</m:t>
-                              </m:r>
-                              <m:r>
-                                <a:rPr lang="en-US" b="1" i="1">
-                                  <a:latin typeface="Cambria Math" panose="02040503050406030204" pitchFamily="18" charset="0"/>
-                                  <a:ea typeface="Cambria Math" panose="02040503050406030204" pitchFamily="18" charset="0"/>
-                                </a:rPr>
-                                <m:t>𝜽</m:t>
-                              </m:r>
-                              <m:r>
-                                <a:rPr lang="en-US" b="1" i="1">
-                                  <a:latin typeface="Cambria Math" panose="02040503050406030204" pitchFamily="18" charset="0"/>
-                                  <a:ea typeface="Cambria Math" panose="02040503050406030204" pitchFamily="18" charset="0"/>
-                                </a:rPr>
-                                <m:t>)</m:t>
-                              </m:r>
-                            </m:e>
-                          </m:func>
-                        </m:e>
-                      </m:d>
-                    </m:oMath>
-                  </m:oMathPara>
-                </a14:m>
-                <a:endParaRPr lang="en-US" dirty="0"/>
-              </a:p>
-              <a:p>
-                <a:pPr marL="0" indent="0">
-                  <a:buNone/>
-                </a:pPr>
-                <a:endParaRPr lang="en-US" dirty="0"/>
-              </a:p>
-              <a:p>
-                <a:pPr marL="0" indent="0">
-                  <a:buNone/>
-                </a:pPr>
-                <a:endParaRPr lang="en-US" dirty="0"/>
-              </a:p>
-              <a:p>
-                <a:pPr marL="0" indent="0">
-                  <a:buNone/>
-                </a:pPr>
-                <a14:m>
-                  <m:oMath xmlns:m="http://schemas.openxmlformats.org/officeDocument/2006/math">
-                    <m:sSub>
-                      <m:sSubPr>
-                        <m:ctrlPr>
-                          <a:rPr lang="en-US" b="0" i="1" smtClean="0">
-                            <a:latin typeface="Cambria Math" panose="02040503050406030204" pitchFamily="18" charset="0"/>
-                          </a:rPr>
-                        </m:ctrlPr>
-                      </m:sSubPr>
-                      <m:e>
-                        <m:r>
-                          <a:rPr lang="en-US" b="0" i="1" smtClean="0">
-                            <a:latin typeface="Cambria Math" panose="02040503050406030204" pitchFamily="18" charset="0"/>
-                          </a:rPr>
-                          <m:t>𝐴</m:t>
-                        </m:r>
-                      </m:e>
-                      <m:sub>
-                        <m:r>
-                          <a:rPr lang="en-US" b="0" i="1" smtClean="0">
-                            <a:latin typeface="Cambria Math" panose="02040503050406030204" pitchFamily="18" charset="0"/>
-                          </a:rPr>
-                          <m:t>𝑡</m:t>
-                        </m:r>
-                      </m:sub>
-                    </m:sSub>
-                    <m:r>
-                      <a:rPr lang="en-US" b="0" i="0" smtClean="0">
-                        <a:latin typeface="Cambria Math" panose="02040503050406030204" pitchFamily="18" charset="0"/>
-                      </a:rPr>
-                      <m:t>,</m:t>
-                    </m:r>
-                  </m:oMath>
-                </a14:m>
-                <a:r>
-                  <a:rPr lang="en-US" dirty="0"/>
-                  <a:t> </a:t>
-                </a:r>
-                <a14:m>
-                  <m:oMath xmlns:m="http://schemas.openxmlformats.org/officeDocument/2006/math">
-                    <m:sSub>
-                      <m:sSubPr>
-                        <m:ctrlPr>
-                          <a:rPr lang="en-US" b="0" i="1" smtClean="0">
-                            <a:latin typeface="Cambria Math" panose="02040503050406030204" pitchFamily="18" charset="0"/>
-                          </a:rPr>
-                        </m:ctrlPr>
-                      </m:sSubPr>
-                      <m:e>
-                        <m:r>
-                          <a:rPr lang="en-US" b="0" i="1" smtClean="0">
-                            <a:latin typeface="Cambria Math" panose="02040503050406030204" pitchFamily="18" charset="0"/>
-                          </a:rPr>
-                          <m:t>𝑆</m:t>
-                        </m:r>
-                      </m:e>
-                      <m:sub>
-                        <m:r>
-                          <a:rPr lang="en-US" b="0" i="1" smtClean="0">
-                            <a:latin typeface="Cambria Math" panose="02040503050406030204" pitchFamily="18" charset="0"/>
-                          </a:rPr>
-                          <m:t>𝑡</m:t>
-                        </m:r>
-                      </m:sub>
-                    </m:sSub>
-                  </m:oMath>
-                </a14:m>
-                <a:r>
-                  <a:rPr lang="en-US" dirty="0"/>
-                  <a:t> and an unbiased estimate of </a:t>
-                </a:r>
-                <a14:m>
-                  <m:oMath xmlns:m="http://schemas.openxmlformats.org/officeDocument/2006/math">
-                    <m:sSub>
-                      <m:sSubPr>
-                        <m:ctrlPr>
-                          <a:rPr lang="en-US" b="0" i="1" smtClean="0">
-                            <a:latin typeface="Cambria Math" panose="02040503050406030204" pitchFamily="18" charset="0"/>
-                          </a:rPr>
-                        </m:ctrlPr>
-                      </m:sSubPr>
-                      <m:e>
-                        <m:r>
-                          <a:rPr lang="en-US" b="0" i="1" smtClean="0">
-                            <a:latin typeface="Cambria Math" panose="02040503050406030204" pitchFamily="18" charset="0"/>
-                          </a:rPr>
-                          <m:t>𝐺</m:t>
-                        </m:r>
-                      </m:e>
-                      <m:sub>
-                        <m:r>
-                          <a:rPr lang="en-US" b="0" i="1" smtClean="0">
-                            <a:latin typeface="Cambria Math" panose="02040503050406030204" pitchFamily="18" charset="0"/>
-                          </a:rPr>
-                          <m:t>𝑡</m:t>
-                        </m:r>
-                      </m:sub>
-                    </m:sSub>
-                  </m:oMath>
-                </a14:m>
-                <a:r>
-                  <a:rPr lang="en-US" i="1" dirty="0">
-                    <a:latin typeface="Cambria Math" panose="02040503050406030204" pitchFamily="18" charset="0"/>
-                    <a:ea typeface="Cambria Math" panose="02040503050406030204" pitchFamily="18" charset="0"/>
-                  </a:rPr>
-                  <a:t> </a:t>
-                </a:r>
-                <a:r>
-                  <a:rPr lang="en-US" dirty="0"/>
-                  <a:t>under the current </a:t>
-                </a:r>
-                <a14:m>
-                  <m:oMath xmlns:m="http://schemas.openxmlformats.org/officeDocument/2006/math">
-                    <m:r>
-                      <a:rPr lang="en-US" b="0" i="1" smtClean="0">
-                        <a:latin typeface="Cambria Math" panose="02040503050406030204" pitchFamily="18" charset="0"/>
-                      </a:rPr>
-                      <m:t>𝜋</m:t>
-                    </m:r>
-                  </m:oMath>
-                </a14:m>
-                <a:r>
-                  <a:rPr lang="en-US" dirty="0"/>
-                  <a:t> can be obtained via MC.</a:t>
-                </a:r>
-              </a:p>
-            </p:txBody>
-          </p:sp>
-        </mc:Choice>
-        <mc:Fallback xmlns="">
-          <p:sp>
-            <p:nvSpPr>
-              <p:cNvPr id="3" name="Content Placeholder 2">
-                <a:extLst>
-                  <a:ext uri="{FF2B5EF4-FFF2-40B4-BE49-F238E27FC236}">
-                    <a16:creationId xmlns:a16="http://schemas.microsoft.com/office/drawing/2014/main" id="{8638C852-25DD-4671-ED13-10B8DE619084}"/>
-                  </a:ext>
-                </a:extLst>
-              </p:cNvPr>
-              <p:cNvSpPr>
-                <a:spLocks noGrp="1" noRot="1" noChangeAspect="1" noMove="1" noResize="1" noEditPoints="1" noAdjustHandles="1" noChangeArrowheads="1" noChangeShapeType="1" noTextEdit="1"/>
-              </p:cNvSpPr>
-              <p:nvPr>
-                <p:ph idx="1"/>
-              </p:nvPr>
-            </p:nvSpPr>
-            <p:spPr>
-              <a:xfrm>
-                <a:off x="838200" y="1124198"/>
-                <a:ext cx="9967076" cy="2527762"/>
-              </a:xfrm>
-              <a:blipFill>
-                <a:blip r:embed="rId2"/>
-                <a:stretch>
-                  <a:fillRect l="-1284" r="-1896" b="-1446"/>
-                </a:stretch>
-              </a:blipFill>
-            </p:spPr>
-            <p:txBody>
-              <a:bodyPr/>
-              <a:lstStyle/>
-              <a:p>
-                <a:r>
-                  <a:rPr lang="en-US">
-                    <a:noFill/>
-                  </a:rPr>
-                  <a:t> </a:t>
-                </a:r>
-              </a:p>
-            </p:txBody>
-          </p:sp>
-        </mc:Fallback>
-      </mc:AlternateContent>
-      <p:pic>
-        <p:nvPicPr>
-          <p:cNvPr id="5" name="Picture 4">
-            <a:extLst>
-              <a:ext uri="{FF2B5EF4-FFF2-40B4-BE49-F238E27FC236}">
-                <a16:creationId xmlns:a16="http://schemas.microsoft.com/office/drawing/2014/main" id="{7A46DFC6-5448-DD38-1C4B-9AD716BBC796}"/>
-              </a:ext>
-            </a:extLst>
-          </p:cNvPr>
-          <p:cNvPicPr>
-            <a:picLocks noChangeAspect="1"/>
-          </p:cNvPicPr>
-          <p:nvPr/>
-        </p:nvPicPr>
-        <p:blipFill>
-          <a:blip r:embed="rId3"/>
-          <a:stretch>
-            <a:fillRect/>
-          </a:stretch>
-        </p:blipFill>
-        <p:spPr>
-          <a:xfrm>
-            <a:off x="2101608" y="3485992"/>
-            <a:ext cx="8158842" cy="3006882"/>
-          </a:xfrm>
-          <a:prstGeom prst="rect">
-            <a:avLst/>
-          </a:prstGeom>
-        </p:spPr>
-      </p:pic>
-      <mc:AlternateContent xmlns:mc="http://schemas.openxmlformats.org/markup-compatibility/2006" xmlns:a14="http://schemas.microsoft.com/office/drawing/2010/main">
-        <mc:Choice Requires="a14">
-          <p:sp>
-            <p:nvSpPr>
-              <p:cNvPr id="10" name="TextBox 9">
-                <a:extLst>
-                  <a:ext uri="{FF2B5EF4-FFF2-40B4-BE49-F238E27FC236}">
-                    <a16:creationId xmlns:a16="http://schemas.microsoft.com/office/drawing/2014/main" id="{06AF3609-FA43-5326-AF3B-FFE2F982DE19}"/>
-                  </a:ext>
-                </a:extLst>
-              </p:cNvPr>
-              <p:cNvSpPr txBox="1"/>
-              <p:nvPr/>
-            </p:nvSpPr>
-            <p:spPr>
-              <a:xfrm>
-                <a:off x="5821738" y="1794518"/>
-                <a:ext cx="2333116" cy="369332"/>
-              </a:xfrm>
-              <a:prstGeom prst="rect">
-                <a:avLst/>
-              </a:prstGeom>
-              <a:noFill/>
-            </p:spPr>
-            <p:txBody>
-              <a:bodyPr wrap="square">
-                <a:spAutoFit/>
-              </a:bodyPr>
-              <a:lstStyle/>
-              <a:p>
-                <a:r>
-                  <a:rPr lang="en-US" dirty="0">
-                    <a:ea typeface="Cambria Math" panose="02040503050406030204" pitchFamily="18" charset="0"/>
-                  </a:rPr>
-                  <a:t>Proportional to </a:t>
-                </a:r>
-                <a14:m>
-                  <m:oMath xmlns:m="http://schemas.openxmlformats.org/officeDocument/2006/math">
-                    <m:r>
-                      <m:rPr>
-                        <m:sty m:val="p"/>
-                      </m:rPr>
-                      <a:rPr lang="en-US" i="0" smtClean="0">
-                        <a:latin typeface="Cambria Math" panose="02040503050406030204" pitchFamily="18" charset="0"/>
-                        <a:ea typeface="Cambria Math" panose="02040503050406030204" pitchFamily="18" charset="0"/>
-                      </a:rPr>
-                      <m:t>∇</m:t>
-                    </m:r>
-                    <m:r>
-                      <a:rPr lang="en-US" b="0" i="1" smtClean="0">
-                        <a:latin typeface="Cambria Math" panose="02040503050406030204" pitchFamily="18" charset="0"/>
-                        <a:ea typeface="Cambria Math" panose="02040503050406030204" pitchFamily="18" charset="0"/>
-                      </a:rPr>
-                      <m:t>𝐽</m:t>
-                    </m:r>
-                    <m:d>
-                      <m:dPr>
-                        <m:ctrlPr>
-                          <a:rPr lang="en-US" b="0" i="1" smtClean="0">
-                            <a:latin typeface="Cambria Math" panose="02040503050406030204" pitchFamily="18" charset="0"/>
-                            <a:ea typeface="Cambria Math" panose="02040503050406030204" pitchFamily="18" charset="0"/>
-                          </a:rPr>
-                        </m:ctrlPr>
-                      </m:dPr>
-                      <m:e>
-                        <m:r>
-                          <a:rPr lang="en-US" b="1" i="1" smtClean="0">
-                            <a:latin typeface="Cambria Math" panose="02040503050406030204" pitchFamily="18" charset="0"/>
-                            <a:ea typeface="Cambria Math" panose="02040503050406030204" pitchFamily="18" charset="0"/>
-                          </a:rPr>
-                          <m:t>𝜽</m:t>
-                        </m:r>
-                      </m:e>
-                    </m:d>
-                  </m:oMath>
-                </a14:m>
-                <a:endParaRPr lang="en-US" dirty="0"/>
-              </a:p>
-            </p:txBody>
-          </p:sp>
-        </mc:Choice>
-        <mc:Fallback xmlns="">
-          <p:sp>
-            <p:nvSpPr>
-              <p:cNvPr id="10" name="TextBox 9">
-                <a:extLst>
-                  <a:ext uri="{FF2B5EF4-FFF2-40B4-BE49-F238E27FC236}">
-                    <a16:creationId xmlns:a16="http://schemas.microsoft.com/office/drawing/2014/main" id="{06AF3609-FA43-5326-AF3B-FFE2F982DE19}"/>
-                  </a:ext>
-                </a:extLst>
-              </p:cNvPr>
-              <p:cNvSpPr txBox="1">
-                <a:spLocks noRot="1" noChangeAspect="1" noMove="1" noResize="1" noEditPoints="1" noAdjustHandles="1" noChangeArrowheads="1" noChangeShapeType="1" noTextEdit="1"/>
-              </p:cNvSpPr>
-              <p:nvPr/>
-            </p:nvSpPr>
-            <p:spPr>
-              <a:xfrm>
-                <a:off x="5821738" y="1794518"/>
-                <a:ext cx="2333116" cy="369332"/>
-              </a:xfrm>
-              <a:prstGeom prst="rect">
-                <a:avLst/>
-              </a:prstGeom>
-              <a:blipFill>
-                <a:blip r:embed="rId4"/>
-                <a:stretch>
-                  <a:fillRect l="-2089" t="-6557" b="-26230"/>
-                </a:stretch>
-              </a:blipFill>
-            </p:spPr>
-            <p:txBody>
-              <a:bodyPr/>
-              <a:lstStyle/>
-              <a:p>
-                <a:r>
-                  <a:rPr lang="en-US">
-                    <a:noFill/>
-                  </a:rPr>
-                  <a:t> </a:t>
-                </a:r>
-              </a:p>
-            </p:txBody>
-          </p:sp>
-        </mc:Fallback>
-      </mc:AlternateContent>
-      <p:sp>
-        <p:nvSpPr>
-          <p:cNvPr id="11" name="Right Brace 10">
-            <a:extLst>
-              <a:ext uri="{FF2B5EF4-FFF2-40B4-BE49-F238E27FC236}">
-                <a16:creationId xmlns:a16="http://schemas.microsoft.com/office/drawing/2014/main" id="{EB3A8549-16BB-3E54-649D-973665D06710}"/>
-              </a:ext>
-            </a:extLst>
-          </p:cNvPr>
-          <p:cNvSpPr/>
-          <p:nvPr/>
-        </p:nvSpPr>
-        <p:spPr>
-          <a:xfrm rot="5400000">
-            <a:off x="6795245" y="59707"/>
-            <a:ext cx="172536" cy="3254585"/>
-          </a:xfrm>
-          <a:prstGeom prst="rightBrace">
-            <a:avLst/>
-          </a:prstGeom>
-        </p:spPr>
-        <p:style>
-          <a:lnRef idx="2">
-            <a:schemeClr val="accent1"/>
-          </a:lnRef>
-          <a:fillRef idx="0">
-            <a:schemeClr val="accent1"/>
-          </a:fillRef>
-          <a:effectRef idx="1">
-            <a:schemeClr val="accent1"/>
-          </a:effectRef>
-          <a:fontRef idx="minor">
-            <a:schemeClr val="tx1"/>
-          </a:fontRef>
-        </p:style>
-        <p:txBody>
-          <a:bodyPr rtlCol="0" anchor="ctr"/>
-          <a:lstStyle/>
-          <a:p>
-            <a:pPr algn="ctr"/>
-            <a:endParaRPr lang="en-US"/>
-          </a:p>
-        </p:txBody>
-      </p:sp>
-    </p:spTree>
-    <p:extLst>
-      <p:ext uri="{BB962C8B-B14F-4D97-AF65-F5344CB8AC3E}">
-        <p14:creationId xmlns:p14="http://schemas.microsoft.com/office/powerpoint/2010/main" val="2693499901"/>
-      </p:ext>
-    </p:extLst>
-  </p:cSld>
-  <p:clrMapOvr>
-    <a:masterClrMapping/>
-  </p:clrMapOvr>
-</p:sld>
-</file>
-
 <file path=ppt/theme/theme1.xml><?xml version="1.0" encoding="utf-8"?>
 <a:theme xmlns:a="http://schemas.openxmlformats.org/drawingml/2006/main" name="Office Theme">
   <a:themeElements>

--- a/slides/Lecture_Chapter13.pptx
+++ b/slides/Lecture_Chapter13.pptx
@@ -298,7 +298,7 @@
           <a:p>
             <a:fld id="{3E22BF2E-04DA-469E-97C5-BB68A0368813}" type="datetimeFigureOut">
               <a:rPr lang="en-US" smtClean="0"/>
-              <a:t>2/6/2026</a:t>
+              <a:t>3/30/2026</a:t>
             </a:fld>
             <a:endParaRPr lang="en-US"/>
           </a:p>
@@ -496,7 +496,7 @@
           <a:p>
             <a:fld id="{3E22BF2E-04DA-469E-97C5-BB68A0368813}" type="datetimeFigureOut">
               <a:rPr lang="en-US" smtClean="0"/>
-              <a:t>2/6/2026</a:t>
+              <a:t>3/30/2026</a:t>
             </a:fld>
             <a:endParaRPr lang="en-US"/>
           </a:p>
@@ -704,7 +704,7 @@
           <a:p>
             <a:fld id="{3E22BF2E-04DA-469E-97C5-BB68A0368813}" type="datetimeFigureOut">
               <a:rPr lang="en-US" smtClean="0"/>
-              <a:t>2/6/2026</a:t>
+              <a:t>3/30/2026</a:t>
             </a:fld>
             <a:endParaRPr lang="en-US"/>
           </a:p>
@@ -912,7 +912,7 @@
           <a:p>
             <a:fld id="{3E22BF2E-04DA-469E-97C5-BB68A0368813}" type="datetimeFigureOut">
               <a:rPr lang="en-US" smtClean="0"/>
-              <a:t>2/6/2026</a:t>
+              <a:t>3/30/2026</a:t>
             </a:fld>
             <a:endParaRPr lang="en-US"/>
           </a:p>
@@ -1187,7 +1187,7 @@
           <a:p>
             <a:fld id="{3E22BF2E-04DA-469E-97C5-BB68A0368813}" type="datetimeFigureOut">
               <a:rPr lang="en-US" smtClean="0"/>
-              <a:t>2/6/2026</a:t>
+              <a:t>3/30/2026</a:t>
             </a:fld>
             <a:endParaRPr lang="en-US"/>
           </a:p>
@@ -1452,7 +1452,7 @@
           <a:p>
             <a:fld id="{3E22BF2E-04DA-469E-97C5-BB68A0368813}" type="datetimeFigureOut">
               <a:rPr lang="en-US" smtClean="0"/>
-              <a:t>2/6/2026</a:t>
+              <a:t>3/30/2026</a:t>
             </a:fld>
             <a:endParaRPr lang="en-US"/>
           </a:p>
@@ -1864,7 +1864,7 @@
           <a:p>
             <a:fld id="{3E22BF2E-04DA-469E-97C5-BB68A0368813}" type="datetimeFigureOut">
               <a:rPr lang="en-US" smtClean="0"/>
-              <a:t>2/6/2026</a:t>
+              <a:t>3/30/2026</a:t>
             </a:fld>
             <a:endParaRPr lang="en-US"/>
           </a:p>
@@ -2005,7 +2005,7 @@
           <a:p>
             <a:fld id="{3E22BF2E-04DA-469E-97C5-BB68A0368813}" type="datetimeFigureOut">
               <a:rPr lang="en-US" smtClean="0"/>
-              <a:t>2/6/2026</a:t>
+              <a:t>3/30/2026</a:t>
             </a:fld>
             <a:endParaRPr lang="en-US"/>
           </a:p>
@@ -2118,7 +2118,7 @@
           <a:p>
             <a:fld id="{3E22BF2E-04DA-469E-97C5-BB68A0368813}" type="datetimeFigureOut">
               <a:rPr lang="en-US" smtClean="0"/>
-              <a:t>2/6/2026</a:t>
+              <a:t>3/30/2026</a:t>
             </a:fld>
             <a:endParaRPr lang="en-US"/>
           </a:p>
@@ -2429,7 +2429,7 @@
           <a:p>
             <a:fld id="{3E22BF2E-04DA-469E-97C5-BB68A0368813}" type="datetimeFigureOut">
               <a:rPr lang="en-US" smtClean="0"/>
-              <a:t>2/6/2026</a:t>
+              <a:t>3/30/2026</a:t>
             </a:fld>
             <a:endParaRPr lang="en-US"/>
           </a:p>
@@ -2717,7 +2717,7 @@
           <a:p>
             <a:fld id="{3E22BF2E-04DA-469E-97C5-BB68A0368813}" type="datetimeFigureOut">
               <a:rPr lang="en-US" smtClean="0"/>
-              <a:t>2/6/2026</a:t>
+              <a:t>3/30/2026</a:t>
             </a:fld>
             <a:endParaRPr lang="en-US"/>
           </a:p>
@@ -2958,7 +2958,7 @@
           <a:p>
             <a:fld id="{3E22BF2E-04DA-469E-97C5-BB68A0368813}" type="datetimeFigureOut">
               <a:rPr lang="en-US" smtClean="0"/>
-              <a:t>2/6/2026</a:t>
+              <a:t>3/30/2026</a:t>
             </a:fld>
             <a:endParaRPr lang="en-US"/>
           </a:p>
@@ -3982,6 +3982,87 @@
           </a:extLst>
         </p:spPr>
       </p:pic>
+      <p:grpSp>
+        <p:nvGrpSpPr>
+          <p:cNvPr id="7" name="Group 6">
+            <a:extLst>
+              <a:ext uri="{FF2B5EF4-FFF2-40B4-BE49-F238E27FC236}">
+                <a16:creationId xmlns:a16="http://schemas.microsoft.com/office/drawing/2014/main" id="{F1C24C8A-95D3-8F99-1FB0-70508AB77601}"/>
+              </a:ext>
+            </a:extLst>
+          </p:cNvPr>
+          <p:cNvGrpSpPr/>
+          <p:nvPr/>
+        </p:nvGrpSpPr>
+        <p:grpSpPr>
+          <a:xfrm>
+            <a:off x="10961015" y="4868822"/>
+            <a:ext cx="1037459" cy="1303078"/>
+            <a:chOff x="5248582" y="2401735"/>
+            <a:chExt cx="1694835" cy="2054530"/>
+          </a:xfrm>
+        </p:grpSpPr>
+        <p:pic>
+          <p:nvPicPr>
+            <p:cNvPr id="8" name="Picture 7">
+              <a:extLst>
+                <a:ext uri="{FF2B5EF4-FFF2-40B4-BE49-F238E27FC236}">
+                  <a16:creationId xmlns:a16="http://schemas.microsoft.com/office/drawing/2014/main" id="{1C3B0490-3071-FC79-8647-56FAA92E213A}"/>
+                </a:ext>
+              </a:extLst>
+            </p:cNvPr>
+            <p:cNvPicPr>
+              <a:picLocks noChangeAspect="1"/>
+            </p:cNvPicPr>
+            <p:nvPr/>
+          </p:nvPicPr>
+          <p:blipFill>
+            <a:blip r:embed="rId6"/>
+            <a:stretch>
+              <a:fillRect/>
+            </a:stretch>
+          </p:blipFill>
+          <p:spPr>
+            <a:xfrm>
+              <a:off x="5248582" y="2401735"/>
+              <a:ext cx="1694835" cy="2054530"/>
+            </a:xfrm>
+            <a:prstGeom prst="rect">
+              <a:avLst/>
+            </a:prstGeom>
+          </p:spPr>
+        </p:pic>
+        <p:pic>
+          <p:nvPicPr>
+            <p:cNvPr id="9" name="Picture 8">
+              <a:extLst>
+                <a:ext uri="{FF2B5EF4-FFF2-40B4-BE49-F238E27FC236}">
+                  <a16:creationId xmlns:a16="http://schemas.microsoft.com/office/drawing/2014/main" id="{DFB0167B-6BE4-3396-4D41-07DD00E5B926}"/>
+                </a:ext>
+              </a:extLst>
+            </p:cNvPr>
+            <p:cNvPicPr>
+              <a:picLocks noChangeAspect="1"/>
+            </p:cNvPicPr>
+            <p:nvPr/>
+          </p:nvPicPr>
+          <p:blipFill>
+            <a:blip r:embed="rId7"/>
+            <a:stretch>
+              <a:fillRect/>
+            </a:stretch>
+          </p:blipFill>
+          <p:spPr>
+            <a:xfrm>
+              <a:off x="5315643" y="2435129"/>
+              <a:ext cx="1560711" cy="1560711"/>
+            </a:xfrm>
+            <a:prstGeom prst="rect">
+              <a:avLst/>
+            </a:prstGeom>
+          </p:spPr>
+        </p:pic>
+      </p:grpSp>
     </p:spTree>
     <p:extLst>
       <p:ext uri="{BB962C8B-B14F-4D97-AF65-F5344CB8AC3E}">

--- a/slides/Lecture_Chapter13.pptx
+++ b/slides/Lecture_Chapter13.pptx
@@ -7,7 +7,7 @@
   <p:sldIdLst>
     <p:sldId id="256" r:id="rId2"/>
     <p:sldId id="313" r:id="rId3"/>
-    <p:sldId id="478" r:id="rId4"/>
+    <p:sldId id="481" r:id="rId4"/>
     <p:sldId id="393" r:id="rId5"/>
     <p:sldId id="394" r:id="rId6"/>
     <p:sldId id="397" r:id="rId7"/>
@@ -128,7 +128,7 @@
           <p14:sldIdLst>
             <p14:sldId id="256"/>
             <p14:sldId id="313"/>
-            <p14:sldId id="478"/>
+            <p14:sldId id="481"/>
           </p14:sldIdLst>
         </p14:section>
         <p14:section name="Parameterized Policies" id="{C2DBD4EA-9EBA-4A8A-BF9F-3F181F6852A2}">
@@ -318,7 +318,7 @@
           <a:p>
             <a:fld id="{3E22BF2E-04DA-469E-97C5-BB68A0368813}" type="datetimeFigureOut">
               <a:rPr lang="en-US" smtClean="0"/>
-              <a:t>4/7/2026</a:t>
+              <a:t>4/8/2026</a:t>
             </a:fld>
             <a:endParaRPr lang="en-US"/>
           </a:p>
@@ -516,7 +516,7 @@
           <a:p>
             <a:fld id="{3E22BF2E-04DA-469E-97C5-BB68A0368813}" type="datetimeFigureOut">
               <a:rPr lang="en-US" smtClean="0"/>
-              <a:t>4/7/2026</a:t>
+              <a:t>4/8/2026</a:t>
             </a:fld>
             <a:endParaRPr lang="en-US"/>
           </a:p>
@@ -724,7 +724,7 @@
           <a:p>
             <a:fld id="{3E22BF2E-04DA-469E-97C5-BB68A0368813}" type="datetimeFigureOut">
               <a:rPr lang="en-US" smtClean="0"/>
-              <a:t>4/7/2026</a:t>
+              <a:t>4/8/2026</a:t>
             </a:fld>
             <a:endParaRPr lang="en-US"/>
           </a:p>
@@ -932,7 +932,7 @@
           <a:p>
             <a:fld id="{3E22BF2E-04DA-469E-97C5-BB68A0368813}" type="datetimeFigureOut">
               <a:rPr lang="en-US" smtClean="0"/>
-              <a:t>4/7/2026</a:t>
+              <a:t>4/8/2026</a:t>
             </a:fld>
             <a:endParaRPr lang="en-US"/>
           </a:p>
@@ -1207,7 +1207,7 @@
           <a:p>
             <a:fld id="{3E22BF2E-04DA-469E-97C5-BB68A0368813}" type="datetimeFigureOut">
               <a:rPr lang="en-US" smtClean="0"/>
-              <a:t>4/7/2026</a:t>
+              <a:t>4/8/2026</a:t>
             </a:fld>
             <a:endParaRPr lang="en-US"/>
           </a:p>
@@ -1472,7 +1472,7 @@
           <a:p>
             <a:fld id="{3E22BF2E-04DA-469E-97C5-BB68A0368813}" type="datetimeFigureOut">
               <a:rPr lang="en-US" smtClean="0"/>
-              <a:t>4/7/2026</a:t>
+              <a:t>4/8/2026</a:t>
             </a:fld>
             <a:endParaRPr lang="en-US"/>
           </a:p>
@@ -1884,7 +1884,7 @@
           <a:p>
             <a:fld id="{3E22BF2E-04DA-469E-97C5-BB68A0368813}" type="datetimeFigureOut">
               <a:rPr lang="en-US" smtClean="0"/>
-              <a:t>4/7/2026</a:t>
+              <a:t>4/8/2026</a:t>
             </a:fld>
             <a:endParaRPr lang="en-US"/>
           </a:p>
@@ -2025,7 +2025,7 @@
           <a:p>
             <a:fld id="{3E22BF2E-04DA-469E-97C5-BB68A0368813}" type="datetimeFigureOut">
               <a:rPr lang="en-US" smtClean="0"/>
-              <a:t>4/7/2026</a:t>
+              <a:t>4/8/2026</a:t>
             </a:fld>
             <a:endParaRPr lang="en-US"/>
           </a:p>
@@ -2138,7 +2138,7 @@
           <a:p>
             <a:fld id="{3E22BF2E-04DA-469E-97C5-BB68A0368813}" type="datetimeFigureOut">
               <a:rPr lang="en-US" smtClean="0"/>
-              <a:t>4/7/2026</a:t>
+              <a:t>4/8/2026</a:t>
             </a:fld>
             <a:endParaRPr lang="en-US"/>
           </a:p>
@@ -2449,7 +2449,7 @@
           <a:p>
             <a:fld id="{3E22BF2E-04DA-469E-97C5-BB68A0368813}" type="datetimeFigureOut">
               <a:rPr lang="en-US" smtClean="0"/>
-              <a:t>4/7/2026</a:t>
+              <a:t>4/8/2026</a:t>
             </a:fld>
             <a:endParaRPr lang="en-US"/>
           </a:p>
@@ -2737,7 +2737,7 @@
           <a:p>
             <a:fld id="{3E22BF2E-04DA-469E-97C5-BB68A0368813}" type="datetimeFigureOut">
               <a:rPr lang="en-US" smtClean="0"/>
-              <a:t>4/7/2026</a:t>
+              <a:t>4/8/2026</a:t>
             </a:fld>
             <a:endParaRPr lang="en-US"/>
           </a:p>
@@ -2978,7 +2978,7 @@
           <a:p>
             <a:fld id="{3E22BF2E-04DA-469E-97C5-BB68A0368813}" type="datetimeFigureOut">
               <a:rPr lang="en-US" smtClean="0"/>
-              <a:t>4/7/2026</a:t>
+              <a:t>4/8/2026</a:t>
             </a:fld>
             <a:endParaRPr lang="en-US"/>
           </a:p>
@@ -6107,8 +6107,8 @@
           </p:sp>
         </mc:Fallback>
       </mc:AlternateContent>
-      <mc:AlternateContent xmlns:mc="http://schemas.openxmlformats.org/markup-compatibility/2006">
-        <mc:Choice xmlns:a14="http://schemas.microsoft.com/office/drawing/2010/main" Requires="a14">
+      <mc:AlternateContent xmlns:mc="http://schemas.openxmlformats.org/markup-compatibility/2006" xmlns:a14="http://schemas.microsoft.com/office/drawing/2010/main">
+        <mc:Choice Requires="a14">
           <p:sp>
             <p:nvSpPr>
               <p:cNvPr id="9" name="Content Placeholder 2">
@@ -6469,7 +6469,7 @@
             </p:txBody>
           </p:sp>
         </mc:Choice>
-        <mc:Fallback>
+        <mc:Fallback xmlns="">
           <p:sp>
             <p:nvSpPr>
               <p:cNvPr id="9" name="Content Placeholder 2">
@@ -6691,8 +6691,8 @@
           </p:sp>
         </mc:Fallback>
       </mc:AlternateContent>
-      <mc:AlternateContent xmlns:mc="http://schemas.openxmlformats.org/markup-compatibility/2006">
-        <mc:Choice xmlns:a14="http://schemas.microsoft.com/office/drawing/2010/main" Requires="a14">
+      <mc:AlternateContent xmlns:mc="http://schemas.openxmlformats.org/markup-compatibility/2006" xmlns:a14="http://schemas.microsoft.com/office/drawing/2010/main">
+        <mc:Choice Requires="a14">
           <p:sp>
             <p:nvSpPr>
               <p:cNvPr id="11" name="Speech Bubble: Rectangle with Corners Rounded 10">
@@ -6868,7 +6868,7 @@
             </p:txBody>
           </p:sp>
         </mc:Choice>
-        <mc:Fallback>
+        <mc:Fallback xmlns="">
           <p:sp>
             <p:nvSpPr>
               <p:cNvPr id="11" name="Speech Bubble: Rectangle with Corners Rounded 10">
@@ -7368,8 +7368,8 @@
           </a:prstGeom>
         </p:spPr>
       </p:pic>
-      <mc:AlternateContent xmlns:mc="http://schemas.openxmlformats.org/markup-compatibility/2006">
-        <mc:Choice xmlns:a14="http://schemas.microsoft.com/office/drawing/2010/main" Requires="a14">
+      <mc:AlternateContent xmlns:mc="http://schemas.openxmlformats.org/markup-compatibility/2006" xmlns:a14="http://schemas.microsoft.com/office/drawing/2010/main">
+        <mc:Choice Requires="a14">
           <p:sp>
             <p:nvSpPr>
               <p:cNvPr id="7" name="TextBox 6">
@@ -7520,7 +7520,7 @@
             </p:txBody>
           </p:sp>
         </mc:Choice>
-        <mc:Fallback>
+        <mc:Fallback xmlns="">
           <p:sp>
             <p:nvSpPr>
               <p:cNvPr id="7" name="TextBox 6">
@@ -7807,8 +7807,8 @@
           </a:p>
         </p:txBody>
       </p:sp>
-      <mc:AlternateContent xmlns:mc="http://schemas.openxmlformats.org/markup-compatibility/2006">
-        <mc:Choice xmlns:a14="http://schemas.microsoft.com/office/drawing/2010/main" Requires="a14">
+      <mc:AlternateContent xmlns:mc="http://schemas.openxmlformats.org/markup-compatibility/2006" xmlns:a14="http://schemas.microsoft.com/office/drawing/2010/main">
+        <mc:Choice Requires="a14">
           <p:sp>
             <p:nvSpPr>
               <p:cNvPr id="5" name="Content Placeholder 4">
@@ -8184,7 +8184,7 @@
             </p:txBody>
           </p:sp>
         </mc:Choice>
-        <mc:Fallback>
+        <mc:Fallback xmlns="">
           <p:sp>
             <p:nvSpPr>
               <p:cNvPr id="5" name="Content Placeholder 4">
@@ -8334,8 +8334,8 @@
             </a:p>
           </p:txBody>
         </p:sp>
-        <mc:AlternateContent xmlns:mc="http://schemas.openxmlformats.org/markup-compatibility/2006">
-          <mc:Choice xmlns:a14="http://schemas.microsoft.com/office/drawing/2010/main" Requires="a14">
+        <mc:AlternateContent xmlns:mc="http://schemas.openxmlformats.org/markup-compatibility/2006" xmlns:a14="http://schemas.microsoft.com/office/drawing/2010/main">
+          <mc:Choice Requires="a14">
             <p:sp>
               <p:nvSpPr>
                 <p:cNvPr id="3" name="TextBox 2">
@@ -8404,7 +8404,7 @@
               </p:txBody>
             </p:sp>
           </mc:Choice>
-          <mc:Fallback>
+          <mc:Fallback xmlns="">
             <p:sp>
               <p:nvSpPr>
                 <p:cNvPr id="3" name="TextBox 2">
@@ -9091,8 +9091,8 @@
           </a:p>
         </p:txBody>
       </p:sp>
-      <mc:AlternateContent xmlns:mc="http://schemas.openxmlformats.org/markup-compatibility/2006">
-        <mc:Choice xmlns:a14="http://schemas.microsoft.com/office/drawing/2010/main" Requires="a14">
+      <mc:AlternateContent xmlns:mc="http://schemas.openxmlformats.org/markup-compatibility/2006" xmlns:a14="http://schemas.microsoft.com/office/drawing/2010/main">
+        <mc:Choice Requires="a14">
           <p:sp>
             <p:nvSpPr>
               <p:cNvPr id="10" name="Speech Bubble: Rectangle with Corners Rounded 9">
@@ -9202,7 +9202,7 @@
             </p:txBody>
           </p:sp>
         </mc:Choice>
-        <mc:Fallback>
+        <mc:Fallback xmlns="">
           <p:sp>
             <p:nvSpPr>
               <p:cNvPr id="10" name="Speech Bubble: Rectangle with Corners Rounded 9">
@@ -9305,8 +9305,8 @@
           </a:p>
         </p:txBody>
       </p:sp>
-      <mc:AlternateContent xmlns:mc="http://schemas.openxmlformats.org/markup-compatibility/2006">
-        <mc:Choice xmlns:a14="http://schemas.microsoft.com/office/drawing/2010/main" Requires="a14">
+      <mc:AlternateContent xmlns:mc="http://schemas.openxmlformats.org/markup-compatibility/2006" xmlns:a14="http://schemas.microsoft.com/office/drawing/2010/main">
+        <mc:Choice Requires="a14">
           <p:sp>
             <p:nvSpPr>
               <p:cNvPr id="12" name="Speech Bubble: Rectangle with Corners Rounded 11">
@@ -9404,7 +9404,7 @@
             </p:txBody>
           </p:sp>
         </mc:Choice>
-        <mc:Fallback>
+        <mc:Fallback xmlns="">
           <p:sp>
             <p:nvSpPr>
               <p:cNvPr id="12" name="Speech Bubble: Rectangle with Corners Rounded 11">
@@ -9619,8 +9619,8 @@
           </a:p>
         </p:txBody>
       </p:sp>
-      <mc:AlternateContent xmlns:mc="http://schemas.openxmlformats.org/markup-compatibility/2006">
-        <mc:Choice xmlns:a14="http://schemas.microsoft.com/office/drawing/2010/main" Requires="a14">
+      <mc:AlternateContent xmlns:mc="http://schemas.openxmlformats.org/markup-compatibility/2006" xmlns:a14="http://schemas.microsoft.com/office/drawing/2010/main">
+        <mc:Choice Requires="a14">
           <p:sp>
             <p:nvSpPr>
               <p:cNvPr id="6" name="Speech Bubble: Rectangle with Corners Rounded 5">
@@ -9692,7 +9692,7 @@
             </p:txBody>
           </p:sp>
         </mc:Choice>
-        <mc:Fallback>
+        <mc:Fallback xmlns="">
           <p:sp>
             <p:nvSpPr>
               <p:cNvPr id="6" name="Speech Bubble: Rectangle with Corners Rounded 5">
@@ -10270,8 +10270,8 @@
           </a:p>
         </p:txBody>
       </p:sp>
-      <mc:AlternateContent xmlns:mc="http://schemas.openxmlformats.org/markup-compatibility/2006">
-        <mc:Choice xmlns:a14="http://schemas.microsoft.com/office/drawing/2010/main" Requires="a14">
+      <mc:AlternateContent xmlns:mc="http://schemas.openxmlformats.org/markup-compatibility/2006" xmlns:a14="http://schemas.microsoft.com/office/drawing/2010/main">
+        <mc:Choice Requires="a14">
           <p:sp>
             <p:nvSpPr>
               <p:cNvPr id="3" name="Content Placeholder 2">
@@ -11104,7 +11104,7 @@
             </p:txBody>
           </p:sp>
         </mc:Choice>
-        <mc:Fallback>
+        <mc:Fallback xmlns="">
           <p:sp>
             <p:nvSpPr>
               <p:cNvPr id="3" name="Content Placeholder 2">
@@ -11406,8 +11406,8 @@
             </p:txBody>
           </p:sp>
         </p:grpSp>
-        <mc:AlternateContent xmlns:mc="http://schemas.openxmlformats.org/markup-compatibility/2006">
-          <mc:Choice xmlns:a14="http://schemas.microsoft.com/office/drawing/2010/main" Requires="a14">
+        <mc:AlternateContent xmlns:mc="http://schemas.openxmlformats.org/markup-compatibility/2006" xmlns:a14="http://schemas.microsoft.com/office/drawing/2010/main">
+          <mc:Choice Requires="a14">
             <p:sp>
               <p:nvSpPr>
                 <p:cNvPr id="9" name="Speech Bubble: Rectangle with Corners Rounded 8">
@@ -11473,7 +11473,7 @@
               </p:txBody>
             </p:sp>
           </mc:Choice>
-          <mc:Fallback>
+          <mc:Fallback xmlns="">
             <p:sp>
               <p:nvSpPr>
                 <p:cNvPr id="9" name="Speech Bubble: Rectangle with Corners Rounded 8">
@@ -13014,8 +13014,8 @@
           </a:p>
         </p:txBody>
       </p:sp>
-      <mc:AlternateContent xmlns:mc="http://schemas.openxmlformats.org/markup-compatibility/2006" xmlns:a14="http://schemas.microsoft.com/office/drawing/2010/main">
-        <mc:Choice Requires="a14">
+      <mc:AlternateContent xmlns:mc="http://schemas.openxmlformats.org/markup-compatibility/2006">
+        <mc:Choice xmlns:a14="http://schemas.microsoft.com/office/drawing/2010/main" Requires="a14">
           <p:sp>
             <p:nvSpPr>
               <p:cNvPr id="3" name="Content Placeholder 2">
@@ -13034,7 +13034,7 @@
             </p:nvSpPr>
             <p:spPr>
               <a:xfrm>
-                <a:off x="822819" y="3658891"/>
+                <a:off x="822817" y="3545635"/>
                 <a:ext cx="5273179" cy="1902124"/>
               </a:xfrm>
             </p:spPr>
@@ -13999,7 +13999,7 @@
             </p:txBody>
           </p:sp>
         </mc:Choice>
-        <mc:Fallback xmlns="">
+        <mc:Fallback>
           <p:sp>
             <p:nvSpPr>
               <p:cNvPr id="3" name="Content Placeholder 2">
@@ -14018,7 +14018,7 @@
             </p:nvSpPr>
             <p:spPr>
               <a:xfrm>
-                <a:off x="822819" y="3658891"/>
+                <a:off x="822817" y="3545635"/>
                 <a:ext cx="5273179" cy="1902124"/>
               </a:xfrm>
               <a:blipFill>
@@ -16100,10 +16100,1217 @@
           </p:sp>
         </mc:Fallback>
       </mc:AlternateContent>
+      <mc:AlternateContent xmlns:mc="http://schemas.openxmlformats.org/markup-compatibility/2006">
+        <mc:Choice xmlns:a14="http://schemas.microsoft.com/office/drawing/2010/main" Requires="a14">
+          <p:sp>
+            <p:nvSpPr>
+              <p:cNvPr id="4" name="Content Placeholder 2">
+                <a:extLst>
+                  <a:ext uri="{FF2B5EF4-FFF2-40B4-BE49-F238E27FC236}">
+                    <a16:creationId xmlns:a16="http://schemas.microsoft.com/office/drawing/2014/main" id="{4C5E539A-F9A7-F959-ACD3-4ADE5900F587}"/>
+                  </a:ext>
+                </a:extLst>
+              </p:cNvPr>
+              <p:cNvSpPr txBox="1">
+                <a:spLocks/>
+              </p:cNvSpPr>
+              <p:nvPr/>
+            </p:nvSpPr>
+            <p:spPr>
+              <a:xfrm>
+                <a:off x="822817" y="5567468"/>
+                <a:ext cx="5273179" cy="646331"/>
+              </a:xfrm>
+              <a:prstGeom prst="rect">
+                <a:avLst/>
+              </a:prstGeom>
+            </p:spPr>
+            <p:style>
+              <a:lnRef idx="2">
+                <a:schemeClr val="accent2"/>
+              </a:lnRef>
+              <a:fillRef idx="1">
+                <a:schemeClr val="lt1"/>
+              </a:fillRef>
+              <a:effectRef idx="0">
+                <a:schemeClr val="accent2"/>
+              </a:effectRef>
+              <a:fontRef idx="minor">
+                <a:schemeClr val="dk1"/>
+              </a:fontRef>
+            </p:style>
+            <p:txBody>
+              <a:bodyPr vert="horz" lIns="91440" tIns="45720" rIns="91440" bIns="45720" rtlCol="0">
+                <a:spAutoFit/>
+              </a:bodyPr>
+              <a:lstStyle>
+                <a:lvl1pPr marL="228600" indent="-228600" algn="l" defTabSz="914400" rtl="0" eaLnBrk="1" latinLnBrk="0" hangingPunct="1">
+                  <a:lnSpc>
+                    <a:spcPct val="90000"/>
+                  </a:lnSpc>
+                  <a:spcBef>
+                    <a:spcPts val="1000"/>
+                  </a:spcBef>
+                  <a:buFont typeface="Arial" panose="020B0604020202020204" pitchFamily="34" charset="0"/>
+                  <a:buChar char="•"/>
+                  <a:defRPr sz="2800" kern="1200">
+                    <a:solidFill>
+                      <a:schemeClr val="dk1"/>
+                    </a:solidFill>
+                    <a:latin typeface="+mn-lt"/>
+                    <a:ea typeface="+mn-ea"/>
+                    <a:cs typeface="+mn-cs"/>
+                  </a:defRPr>
+                </a:lvl1pPr>
+                <a:lvl2pPr marL="685800" indent="-228600" algn="l" defTabSz="914400" rtl="0" eaLnBrk="1" latinLnBrk="0" hangingPunct="1">
+                  <a:lnSpc>
+                    <a:spcPct val="90000"/>
+                  </a:lnSpc>
+                  <a:spcBef>
+                    <a:spcPts val="500"/>
+                  </a:spcBef>
+                  <a:buFont typeface="Arial" panose="020B0604020202020204" pitchFamily="34" charset="0"/>
+                  <a:buChar char="•"/>
+                  <a:defRPr sz="2400" kern="1200">
+                    <a:solidFill>
+                      <a:schemeClr val="dk1"/>
+                    </a:solidFill>
+                    <a:latin typeface="+mn-lt"/>
+                    <a:ea typeface="+mn-ea"/>
+                    <a:cs typeface="+mn-cs"/>
+                  </a:defRPr>
+                </a:lvl2pPr>
+                <a:lvl3pPr marL="1143000" indent="-228600" algn="l" defTabSz="914400" rtl="0" eaLnBrk="1" latinLnBrk="0" hangingPunct="1">
+                  <a:lnSpc>
+                    <a:spcPct val="90000"/>
+                  </a:lnSpc>
+                  <a:spcBef>
+                    <a:spcPts val="500"/>
+                  </a:spcBef>
+                  <a:buFont typeface="Arial" panose="020B0604020202020204" pitchFamily="34" charset="0"/>
+                  <a:buChar char="•"/>
+                  <a:defRPr sz="2000" kern="1200">
+                    <a:solidFill>
+                      <a:schemeClr val="dk1"/>
+                    </a:solidFill>
+                    <a:latin typeface="+mn-lt"/>
+                    <a:ea typeface="+mn-ea"/>
+                    <a:cs typeface="+mn-cs"/>
+                  </a:defRPr>
+                </a:lvl3pPr>
+                <a:lvl4pPr marL="1600200" indent="-228600" algn="l" defTabSz="914400" rtl="0" eaLnBrk="1" latinLnBrk="0" hangingPunct="1">
+                  <a:lnSpc>
+                    <a:spcPct val="90000"/>
+                  </a:lnSpc>
+                  <a:spcBef>
+                    <a:spcPts val="500"/>
+                  </a:spcBef>
+                  <a:buFont typeface="Arial" panose="020B0604020202020204" pitchFamily="34" charset="0"/>
+                  <a:buChar char="•"/>
+                  <a:defRPr sz="1800" kern="1200">
+                    <a:solidFill>
+                      <a:schemeClr val="dk1"/>
+                    </a:solidFill>
+                    <a:latin typeface="+mn-lt"/>
+                    <a:ea typeface="+mn-ea"/>
+                    <a:cs typeface="+mn-cs"/>
+                  </a:defRPr>
+                </a:lvl4pPr>
+                <a:lvl5pPr marL="2057400" indent="-228600" algn="l" defTabSz="914400" rtl="0" eaLnBrk="1" latinLnBrk="0" hangingPunct="1">
+                  <a:lnSpc>
+                    <a:spcPct val="90000"/>
+                  </a:lnSpc>
+                  <a:spcBef>
+                    <a:spcPts val="500"/>
+                  </a:spcBef>
+                  <a:buFont typeface="Arial" panose="020B0604020202020204" pitchFamily="34" charset="0"/>
+                  <a:buChar char="•"/>
+                  <a:defRPr sz="1800" kern="1200">
+                    <a:solidFill>
+                      <a:schemeClr val="dk1"/>
+                    </a:solidFill>
+                    <a:latin typeface="+mn-lt"/>
+                    <a:ea typeface="+mn-ea"/>
+                    <a:cs typeface="+mn-cs"/>
+                  </a:defRPr>
+                </a:lvl5pPr>
+                <a:lvl6pPr marL="2514600" indent="-228600" algn="l" defTabSz="914400" rtl="0" eaLnBrk="1" latinLnBrk="0" hangingPunct="1">
+                  <a:lnSpc>
+                    <a:spcPct val="90000"/>
+                  </a:lnSpc>
+                  <a:spcBef>
+                    <a:spcPts val="500"/>
+                  </a:spcBef>
+                  <a:buFont typeface="Arial" panose="020B0604020202020204" pitchFamily="34" charset="0"/>
+                  <a:buChar char="•"/>
+                  <a:defRPr sz="1800" kern="1200">
+                    <a:solidFill>
+                      <a:schemeClr val="dk1"/>
+                    </a:solidFill>
+                    <a:latin typeface="+mn-lt"/>
+                    <a:ea typeface="+mn-ea"/>
+                    <a:cs typeface="+mn-cs"/>
+                  </a:defRPr>
+                </a:lvl6pPr>
+                <a:lvl7pPr marL="2971800" indent="-228600" algn="l" defTabSz="914400" rtl="0" eaLnBrk="1" latinLnBrk="0" hangingPunct="1">
+                  <a:lnSpc>
+                    <a:spcPct val="90000"/>
+                  </a:lnSpc>
+                  <a:spcBef>
+                    <a:spcPts val="500"/>
+                  </a:spcBef>
+                  <a:buFont typeface="Arial" panose="020B0604020202020204" pitchFamily="34" charset="0"/>
+                  <a:buChar char="•"/>
+                  <a:defRPr sz="1800" kern="1200">
+                    <a:solidFill>
+                      <a:schemeClr val="dk1"/>
+                    </a:solidFill>
+                    <a:latin typeface="+mn-lt"/>
+                    <a:ea typeface="+mn-ea"/>
+                    <a:cs typeface="+mn-cs"/>
+                  </a:defRPr>
+                </a:lvl7pPr>
+                <a:lvl8pPr marL="3429000" indent="-228600" algn="l" defTabSz="914400" rtl="0" eaLnBrk="1" latinLnBrk="0" hangingPunct="1">
+                  <a:lnSpc>
+                    <a:spcPct val="90000"/>
+                  </a:lnSpc>
+                  <a:spcBef>
+                    <a:spcPts val="500"/>
+                  </a:spcBef>
+                  <a:buFont typeface="Arial" panose="020B0604020202020204" pitchFamily="34" charset="0"/>
+                  <a:buChar char="•"/>
+                  <a:defRPr sz="1800" kern="1200">
+                    <a:solidFill>
+                      <a:schemeClr val="dk1"/>
+                    </a:solidFill>
+                    <a:latin typeface="+mn-lt"/>
+                    <a:ea typeface="+mn-ea"/>
+                    <a:cs typeface="+mn-cs"/>
+                  </a:defRPr>
+                </a:lvl8pPr>
+                <a:lvl9pPr marL="3886200" indent="-228600" algn="l" defTabSz="914400" rtl="0" eaLnBrk="1" latinLnBrk="0" hangingPunct="1">
+                  <a:lnSpc>
+                    <a:spcPct val="90000"/>
+                  </a:lnSpc>
+                  <a:spcBef>
+                    <a:spcPts val="500"/>
+                  </a:spcBef>
+                  <a:buFont typeface="Arial" panose="020B0604020202020204" pitchFamily="34" charset="0"/>
+                  <a:buChar char="•"/>
+                  <a:defRPr sz="1800" kern="1200">
+                    <a:solidFill>
+                      <a:schemeClr val="dk1"/>
+                    </a:solidFill>
+                    <a:latin typeface="+mn-lt"/>
+                    <a:ea typeface="+mn-ea"/>
+                    <a:cs typeface="+mn-cs"/>
+                  </a:defRPr>
+                </a:lvl9pPr>
+              </a:lstStyle>
+              <a:p>
+                <a:pPr marL="0" indent="0">
+                  <a:lnSpc>
+                    <a:spcPct val="100000"/>
+                  </a:lnSpc>
+                  <a:spcBef>
+                    <a:spcPts val="0"/>
+                  </a:spcBef>
+                  <a:buFont typeface="Arial" panose="020B0604020202020204" pitchFamily="34" charset="0"/>
+                  <a:buNone/>
+                </a:pPr>
+                <a:r>
+                  <a:rPr lang="en-US" sz="1200" b="1" dirty="0"/>
+                  <a:t>Temporal Difference Learning</a:t>
+                </a:r>
+                <a:endParaRPr lang="en-US" sz="1200" i="1" dirty="0">
+                  <a:latin typeface="Cambria Math" panose="02040503050406030204" pitchFamily="18" charset="0"/>
+                </a:endParaRPr>
+              </a:p>
+              <a:p>
+                <a:pPr marL="0" indent="0">
+                  <a:lnSpc>
+                    <a:spcPct val="100000"/>
+                  </a:lnSpc>
+                  <a:spcBef>
+                    <a:spcPts val="0"/>
+                  </a:spcBef>
+                  <a:buNone/>
+                </a:pPr>
+                <a14:m>
+                  <m:oMath xmlns:m="http://schemas.openxmlformats.org/officeDocument/2006/math">
+                    <m:sSub>
+                      <m:sSubPr>
+                        <m:ctrlPr>
+                          <a:rPr lang="en-US" sz="1200" i="1" dirty="0">
+                            <a:solidFill>
+                              <a:schemeClr val="tx1"/>
+                            </a:solidFill>
+                            <a:latin typeface="Cambria Math" panose="02040503050406030204" pitchFamily="18" charset="0"/>
+                          </a:rPr>
+                        </m:ctrlPr>
+                      </m:sSubPr>
+                      <m:e>
+                        <m:r>
+                          <a:rPr lang="en-US" sz="1200" i="1" dirty="0">
+                            <a:solidFill>
+                              <a:schemeClr val="tx1"/>
+                            </a:solidFill>
+                            <a:latin typeface="Cambria Math" panose="02040503050406030204" pitchFamily="18" charset="0"/>
+                          </a:rPr>
+                          <m:t>𝑈</m:t>
+                        </m:r>
+                      </m:e>
+                      <m:sub>
+                        <m:r>
+                          <a:rPr lang="en-US" sz="1200" i="1" dirty="0">
+                            <a:solidFill>
+                              <a:schemeClr val="tx1"/>
+                            </a:solidFill>
+                            <a:latin typeface="Cambria Math" panose="02040503050406030204" pitchFamily="18" charset="0"/>
+                          </a:rPr>
+                          <m:t>𝑡</m:t>
+                        </m:r>
+                      </m:sub>
+                    </m:sSub>
+                  </m:oMath>
+                </a14:m>
+                <a:r>
+                  <a:rPr lang="en-US" sz="1200" dirty="0">
+                    <a:solidFill>
+                      <a:schemeClr val="tx1"/>
+                    </a:solidFill>
+                  </a:rPr>
+                  <a:t>	target for estimate at time</a:t>
+                </a:r>
+                <a14:m>
+                  <m:oMath xmlns:m="http://schemas.openxmlformats.org/officeDocument/2006/math">
+                    <m:r>
+                      <a:rPr lang="en-US" sz="1200" i="1" dirty="0">
+                        <a:solidFill>
+                          <a:schemeClr val="tx1"/>
+                        </a:solidFill>
+                        <a:latin typeface="Cambria Math" panose="02040503050406030204" pitchFamily="18" charset="0"/>
+                      </a:rPr>
+                      <m:t> </m:t>
+                    </m:r>
+                    <m:r>
+                      <a:rPr lang="en-US" sz="1200" i="1" dirty="0">
+                        <a:solidFill>
+                          <a:schemeClr val="tx1"/>
+                        </a:solidFill>
+                        <a:latin typeface="Cambria Math" panose="02040503050406030204" pitchFamily="18" charset="0"/>
+                      </a:rPr>
+                      <m:t>𝑡</m:t>
+                    </m:r>
+                  </m:oMath>
+                </a14:m>
+                <a:endParaRPr lang="en-US" sz="1200" dirty="0">
+                  <a:solidFill>
+                    <a:schemeClr val="tx1"/>
+                  </a:solidFill>
+                </a:endParaRPr>
+              </a:p>
+              <a:p>
+                <a:pPr marL="0" indent="0">
+                  <a:lnSpc>
+                    <a:spcPct val="100000"/>
+                  </a:lnSpc>
+                  <a:spcBef>
+                    <a:spcPts val="0"/>
+                  </a:spcBef>
+                  <a:buNone/>
+                </a:pPr>
+                <a14:m>
+                  <m:oMath xmlns:m="http://schemas.openxmlformats.org/officeDocument/2006/math">
+                    <m:sSub>
+                      <m:sSubPr>
+                        <m:ctrlPr>
+                          <a:rPr lang="en-US" sz="1200" i="1" dirty="0">
+                            <a:solidFill>
+                              <a:schemeClr val="tx1"/>
+                            </a:solidFill>
+                            <a:latin typeface="Cambria Math" panose="02040503050406030204" pitchFamily="18" charset="0"/>
+                          </a:rPr>
+                        </m:ctrlPr>
+                      </m:sSubPr>
+                      <m:e>
+                        <m:r>
+                          <a:rPr lang="en-US" sz="1200" b="0" i="1" dirty="0" smtClean="0">
+                            <a:solidFill>
+                              <a:schemeClr val="tx1"/>
+                            </a:solidFill>
+                            <a:latin typeface="Cambria Math" panose="02040503050406030204" pitchFamily="18" charset="0"/>
+                          </a:rPr>
+                          <m:t>𝛿</m:t>
+                        </m:r>
+                      </m:e>
+                      <m:sub>
+                        <m:r>
+                          <a:rPr lang="en-US" sz="1200" i="1" dirty="0">
+                            <a:solidFill>
+                              <a:schemeClr val="tx1"/>
+                            </a:solidFill>
+                            <a:latin typeface="Cambria Math" panose="02040503050406030204" pitchFamily="18" charset="0"/>
+                          </a:rPr>
+                          <m:t>𝑡</m:t>
+                        </m:r>
+                      </m:sub>
+                    </m:sSub>
+                  </m:oMath>
+                </a14:m>
+                <a:r>
+                  <a:rPr lang="en-US" sz="1200" dirty="0">
+                    <a:solidFill>
+                      <a:schemeClr val="tx1"/>
+                    </a:solidFill>
+                  </a:rPr>
+                  <a:t>	TD error</a:t>
+                </a:r>
+              </a:p>
+            </p:txBody>
+          </p:sp>
+        </mc:Choice>
+        <mc:Fallback>
+          <p:sp>
+            <p:nvSpPr>
+              <p:cNvPr id="4" name="Content Placeholder 2">
+                <a:extLst>
+                  <a:ext uri="{FF2B5EF4-FFF2-40B4-BE49-F238E27FC236}">
+                    <a16:creationId xmlns:a16="http://schemas.microsoft.com/office/drawing/2014/main" id="{4C5E539A-F9A7-F959-ACD3-4ADE5900F587}"/>
+                  </a:ext>
+                </a:extLst>
+              </p:cNvPr>
+              <p:cNvSpPr txBox="1">
+                <a:spLocks noRot="1" noChangeAspect="1" noMove="1" noResize="1" noEditPoints="1" noAdjustHandles="1" noChangeArrowheads="1" noChangeShapeType="1" noTextEdit="1"/>
+              </p:cNvSpPr>
+              <p:nvPr/>
+            </p:nvSpPr>
+            <p:spPr>
+              <a:xfrm>
+                <a:off x="822817" y="5567468"/>
+                <a:ext cx="5273179" cy="646331"/>
+              </a:xfrm>
+              <a:prstGeom prst="rect">
+                <a:avLst/>
+              </a:prstGeom>
+              <a:blipFill>
+                <a:blip r:embed="rId5"/>
+                <a:stretch>
+                  <a:fillRect b="-4587"/>
+                </a:stretch>
+              </a:blipFill>
+            </p:spPr>
+            <p:txBody>
+              <a:bodyPr/>
+              <a:lstStyle/>
+              <a:p>
+                <a:r>
+                  <a:rPr lang="en-US">
+                    <a:noFill/>
+                  </a:rPr>
+                  <a:t> </a:t>
+                </a:r>
+              </a:p>
+            </p:txBody>
+          </p:sp>
+        </mc:Fallback>
+      </mc:AlternateContent>
+      <mc:AlternateContent xmlns:mc="http://schemas.openxmlformats.org/markup-compatibility/2006">
+        <mc:Choice xmlns:a14="http://schemas.microsoft.com/office/drawing/2010/main" Requires="a14">
+          <p:sp>
+            <p:nvSpPr>
+              <p:cNvPr id="5" name="Content Placeholder 2">
+                <a:extLst>
+                  <a:ext uri="{FF2B5EF4-FFF2-40B4-BE49-F238E27FC236}">
+                    <a16:creationId xmlns:a16="http://schemas.microsoft.com/office/drawing/2014/main" id="{9FA76CFB-B55E-EFC6-DA3D-BEB7A8763838}"/>
+                  </a:ext>
+                </a:extLst>
+              </p:cNvPr>
+              <p:cNvSpPr txBox="1">
+                <a:spLocks/>
+              </p:cNvSpPr>
+              <p:nvPr/>
+            </p:nvSpPr>
+            <p:spPr>
+              <a:xfrm>
+                <a:off x="6267338" y="4942028"/>
+                <a:ext cx="5273179" cy="1597104"/>
+              </a:xfrm>
+              <a:prstGeom prst="rect">
+                <a:avLst/>
+              </a:prstGeom>
+            </p:spPr>
+            <p:style>
+              <a:lnRef idx="2">
+                <a:schemeClr val="accent2"/>
+              </a:lnRef>
+              <a:fillRef idx="1">
+                <a:schemeClr val="lt1"/>
+              </a:fillRef>
+              <a:effectRef idx="0">
+                <a:schemeClr val="accent2"/>
+              </a:effectRef>
+              <a:fontRef idx="minor">
+                <a:schemeClr val="dk1"/>
+              </a:fontRef>
+            </p:style>
+            <p:txBody>
+              <a:bodyPr vert="horz" lIns="91440" tIns="45720" rIns="91440" bIns="45720" rtlCol="0">
+                <a:spAutoFit/>
+              </a:bodyPr>
+              <a:lstStyle>
+                <a:lvl1pPr marL="228600" indent="-228600" algn="l" defTabSz="914400" rtl="0" eaLnBrk="1" latinLnBrk="0" hangingPunct="1">
+                  <a:lnSpc>
+                    <a:spcPct val="90000"/>
+                  </a:lnSpc>
+                  <a:spcBef>
+                    <a:spcPts val="1000"/>
+                  </a:spcBef>
+                  <a:buFont typeface="Arial" panose="020B0604020202020204" pitchFamily="34" charset="0"/>
+                  <a:buChar char="•"/>
+                  <a:defRPr sz="2800" kern="1200">
+                    <a:solidFill>
+                      <a:schemeClr val="dk1"/>
+                    </a:solidFill>
+                    <a:latin typeface="+mn-lt"/>
+                    <a:ea typeface="+mn-ea"/>
+                    <a:cs typeface="+mn-cs"/>
+                  </a:defRPr>
+                </a:lvl1pPr>
+                <a:lvl2pPr marL="685800" indent="-228600" algn="l" defTabSz="914400" rtl="0" eaLnBrk="1" latinLnBrk="0" hangingPunct="1">
+                  <a:lnSpc>
+                    <a:spcPct val="90000"/>
+                  </a:lnSpc>
+                  <a:spcBef>
+                    <a:spcPts val="500"/>
+                  </a:spcBef>
+                  <a:buFont typeface="Arial" panose="020B0604020202020204" pitchFamily="34" charset="0"/>
+                  <a:buChar char="•"/>
+                  <a:defRPr sz="2400" kern="1200">
+                    <a:solidFill>
+                      <a:schemeClr val="dk1"/>
+                    </a:solidFill>
+                    <a:latin typeface="+mn-lt"/>
+                    <a:ea typeface="+mn-ea"/>
+                    <a:cs typeface="+mn-cs"/>
+                  </a:defRPr>
+                </a:lvl2pPr>
+                <a:lvl3pPr marL="1143000" indent="-228600" algn="l" defTabSz="914400" rtl="0" eaLnBrk="1" latinLnBrk="0" hangingPunct="1">
+                  <a:lnSpc>
+                    <a:spcPct val="90000"/>
+                  </a:lnSpc>
+                  <a:spcBef>
+                    <a:spcPts val="500"/>
+                  </a:spcBef>
+                  <a:buFont typeface="Arial" panose="020B0604020202020204" pitchFamily="34" charset="0"/>
+                  <a:buChar char="•"/>
+                  <a:defRPr sz="2000" kern="1200">
+                    <a:solidFill>
+                      <a:schemeClr val="dk1"/>
+                    </a:solidFill>
+                    <a:latin typeface="+mn-lt"/>
+                    <a:ea typeface="+mn-ea"/>
+                    <a:cs typeface="+mn-cs"/>
+                  </a:defRPr>
+                </a:lvl3pPr>
+                <a:lvl4pPr marL="1600200" indent="-228600" algn="l" defTabSz="914400" rtl="0" eaLnBrk="1" latinLnBrk="0" hangingPunct="1">
+                  <a:lnSpc>
+                    <a:spcPct val="90000"/>
+                  </a:lnSpc>
+                  <a:spcBef>
+                    <a:spcPts val="500"/>
+                  </a:spcBef>
+                  <a:buFont typeface="Arial" panose="020B0604020202020204" pitchFamily="34" charset="0"/>
+                  <a:buChar char="•"/>
+                  <a:defRPr sz="1800" kern="1200">
+                    <a:solidFill>
+                      <a:schemeClr val="dk1"/>
+                    </a:solidFill>
+                    <a:latin typeface="+mn-lt"/>
+                    <a:ea typeface="+mn-ea"/>
+                    <a:cs typeface="+mn-cs"/>
+                  </a:defRPr>
+                </a:lvl4pPr>
+                <a:lvl5pPr marL="2057400" indent="-228600" algn="l" defTabSz="914400" rtl="0" eaLnBrk="1" latinLnBrk="0" hangingPunct="1">
+                  <a:lnSpc>
+                    <a:spcPct val="90000"/>
+                  </a:lnSpc>
+                  <a:spcBef>
+                    <a:spcPts val="500"/>
+                  </a:spcBef>
+                  <a:buFont typeface="Arial" panose="020B0604020202020204" pitchFamily="34" charset="0"/>
+                  <a:buChar char="•"/>
+                  <a:defRPr sz="1800" kern="1200">
+                    <a:solidFill>
+                      <a:schemeClr val="dk1"/>
+                    </a:solidFill>
+                    <a:latin typeface="+mn-lt"/>
+                    <a:ea typeface="+mn-ea"/>
+                    <a:cs typeface="+mn-cs"/>
+                  </a:defRPr>
+                </a:lvl5pPr>
+                <a:lvl6pPr marL="2514600" indent="-228600" algn="l" defTabSz="914400" rtl="0" eaLnBrk="1" latinLnBrk="0" hangingPunct="1">
+                  <a:lnSpc>
+                    <a:spcPct val="90000"/>
+                  </a:lnSpc>
+                  <a:spcBef>
+                    <a:spcPts val="500"/>
+                  </a:spcBef>
+                  <a:buFont typeface="Arial" panose="020B0604020202020204" pitchFamily="34" charset="0"/>
+                  <a:buChar char="•"/>
+                  <a:defRPr sz="1800" kern="1200">
+                    <a:solidFill>
+                      <a:schemeClr val="dk1"/>
+                    </a:solidFill>
+                    <a:latin typeface="+mn-lt"/>
+                    <a:ea typeface="+mn-ea"/>
+                    <a:cs typeface="+mn-cs"/>
+                  </a:defRPr>
+                </a:lvl6pPr>
+                <a:lvl7pPr marL="2971800" indent="-228600" algn="l" defTabSz="914400" rtl="0" eaLnBrk="1" latinLnBrk="0" hangingPunct="1">
+                  <a:lnSpc>
+                    <a:spcPct val="90000"/>
+                  </a:lnSpc>
+                  <a:spcBef>
+                    <a:spcPts val="500"/>
+                  </a:spcBef>
+                  <a:buFont typeface="Arial" panose="020B0604020202020204" pitchFamily="34" charset="0"/>
+                  <a:buChar char="•"/>
+                  <a:defRPr sz="1800" kern="1200">
+                    <a:solidFill>
+                      <a:schemeClr val="dk1"/>
+                    </a:solidFill>
+                    <a:latin typeface="+mn-lt"/>
+                    <a:ea typeface="+mn-ea"/>
+                    <a:cs typeface="+mn-cs"/>
+                  </a:defRPr>
+                </a:lvl7pPr>
+                <a:lvl8pPr marL="3429000" indent="-228600" algn="l" defTabSz="914400" rtl="0" eaLnBrk="1" latinLnBrk="0" hangingPunct="1">
+                  <a:lnSpc>
+                    <a:spcPct val="90000"/>
+                  </a:lnSpc>
+                  <a:spcBef>
+                    <a:spcPts val="500"/>
+                  </a:spcBef>
+                  <a:buFont typeface="Arial" panose="020B0604020202020204" pitchFamily="34" charset="0"/>
+                  <a:buChar char="•"/>
+                  <a:defRPr sz="1800" kern="1200">
+                    <a:solidFill>
+                      <a:schemeClr val="dk1"/>
+                    </a:solidFill>
+                    <a:latin typeface="+mn-lt"/>
+                    <a:ea typeface="+mn-ea"/>
+                    <a:cs typeface="+mn-cs"/>
+                  </a:defRPr>
+                </a:lvl8pPr>
+                <a:lvl9pPr marL="3886200" indent="-228600" algn="l" defTabSz="914400" rtl="0" eaLnBrk="1" latinLnBrk="0" hangingPunct="1">
+                  <a:lnSpc>
+                    <a:spcPct val="90000"/>
+                  </a:lnSpc>
+                  <a:spcBef>
+                    <a:spcPts val="500"/>
+                  </a:spcBef>
+                  <a:buFont typeface="Arial" panose="020B0604020202020204" pitchFamily="34" charset="0"/>
+                  <a:buChar char="•"/>
+                  <a:defRPr sz="1800" kern="1200">
+                    <a:solidFill>
+                      <a:schemeClr val="dk1"/>
+                    </a:solidFill>
+                    <a:latin typeface="+mn-lt"/>
+                    <a:ea typeface="+mn-ea"/>
+                    <a:cs typeface="+mn-cs"/>
+                  </a:defRPr>
+                </a:lvl9pPr>
+              </a:lstStyle>
+              <a:p>
+                <a:pPr marL="0" indent="0">
+                  <a:lnSpc>
+                    <a:spcPct val="100000"/>
+                  </a:lnSpc>
+                  <a:spcBef>
+                    <a:spcPts val="0"/>
+                  </a:spcBef>
+                  <a:buFont typeface="Arial" panose="020B0604020202020204" pitchFamily="34" charset="0"/>
+                  <a:buNone/>
+                </a:pPr>
+                <a:r>
+                  <a:rPr lang="en-US" sz="1200" b="1" dirty="0"/>
+                  <a:t>Approximation</a:t>
+                </a:r>
+                <a:endParaRPr lang="en-US" sz="1200" i="1" dirty="0">
+                  <a:latin typeface="Cambria Math" panose="02040503050406030204" pitchFamily="18" charset="0"/>
+                </a:endParaRPr>
+              </a:p>
+              <a:p>
+                <a:pPr marL="0" indent="0">
+                  <a:lnSpc>
+                    <a:spcPct val="100000"/>
+                  </a:lnSpc>
+                  <a:spcBef>
+                    <a:spcPts val="0"/>
+                  </a:spcBef>
+                  <a:buNone/>
+                </a:pPr>
+                <a14:m>
+                  <m:oMath xmlns:m="http://schemas.openxmlformats.org/officeDocument/2006/math">
+                    <m:r>
+                      <a:rPr lang="en-US" sz="1200" b="0" i="1" dirty="0" smtClean="0">
+                        <a:solidFill>
+                          <a:schemeClr val="tx1"/>
+                        </a:solidFill>
+                        <a:latin typeface="Cambria Math" panose="02040503050406030204" pitchFamily="18" charset="0"/>
+                      </a:rPr>
+                      <m:t>𝜇</m:t>
+                    </m:r>
+                    <m:r>
+                      <a:rPr lang="en-US" sz="1200" b="0" i="1" dirty="0" smtClean="0">
+                        <a:solidFill>
+                          <a:schemeClr val="tx1"/>
+                        </a:solidFill>
+                        <a:latin typeface="Cambria Math" panose="02040503050406030204" pitchFamily="18" charset="0"/>
+                      </a:rPr>
+                      <m:t>(</m:t>
+                    </m:r>
+                    <m:r>
+                      <a:rPr lang="en-US" sz="1200" b="0" i="1" dirty="0" smtClean="0">
+                        <a:solidFill>
+                          <a:schemeClr val="tx1"/>
+                        </a:solidFill>
+                        <a:latin typeface="Cambria Math" panose="02040503050406030204" pitchFamily="18" charset="0"/>
+                      </a:rPr>
+                      <m:t>𝑠</m:t>
+                    </m:r>
+                    <m:r>
+                      <a:rPr lang="en-US" sz="1200" b="0" i="1" dirty="0" smtClean="0">
+                        <a:solidFill>
+                          <a:schemeClr val="tx1"/>
+                        </a:solidFill>
+                        <a:latin typeface="Cambria Math" panose="02040503050406030204" pitchFamily="18" charset="0"/>
+                      </a:rPr>
+                      <m:t>)</m:t>
+                    </m:r>
+                  </m:oMath>
+                </a14:m>
+                <a:r>
+                  <a:rPr lang="en-US" sz="1200" dirty="0">
+                    <a:solidFill>
+                      <a:schemeClr val="tx1"/>
+                    </a:solidFill>
+                  </a:rPr>
+                  <a:t>	on policy distribution (fraction of time spent in state)</a:t>
+                </a:r>
+              </a:p>
+              <a:p>
+                <a:pPr marL="0" indent="0">
+                  <a:lnSpc>
+                    <a:spcPct val="100000"/>
+                  </a:lnSpc>
+                  <a:spcBef>
+                    <a:spcPts val="0"/>
+                  </a:spcBef>
+                  <a:buNone/>
+                </a:pPr>
+                <a14:m>
+                  <m:oMath xmlns:m="http://schemas.openxmlformats.org/officeDocument/2006/math">
+                    <m:r>
+                      <a:rPr lang="en-US" sz="1200" i="1" dirty="0" smtClean="0">
+                        <a:solidFill>
+                          <a:schemeClr val="tx1"/>
+                        </a:solidFill>
+                        <a:latin typeface="Cambria Math" panose="02040503050406030204" pitchFamily="18" charset="0"/>
+                      </a:rPr>
+                      <m:t>𝛼</m:t>
+                    </m:r>
+                  </m:oMath>
+                </a14:m>
+                <a:r>
+                  <a:rPr lang="en-US" sz="1200" dirty="0">
+                    <a:solidFill>
+                      <a:schemeClr val="tx1"/>
+                    </a:solidFill>
+                  </a:rPr>
+                  <a:t>	step size (gradient descent learning rate)</a:t>
+                </a:r>
+              </a:p>
+              <a:p>
+                <a:pPr marL="0" indent="0">
+                  <a:lnSpc>
+                    <a:spcPct val="100000"/>
+                  </a:lnSpc>
+                  <a:spcBef>
+                    <a:spcPts val="0"/>
+                  </a:spcBef>
+                  <a:buNone/>
+                </a:pPr>
+                <a14:m>
+                  <m:oMath xmlns:m="http://schemas.openxmlformats.org/officeDocument/2006/math">
+                    <m:acc>
+                      <m:accPr>
+                        <m:chr m:val="̂"/>
+                        <m:ctrlPr>
+                          <a:rPr lang="en-US" sz="1200" i="1" dirty="0" smtClean="0">
+                            <a:solidFill>
+                              <a:schemeClr val="tx1"/>
+                            </a:solidFill>
+                            <a:latin typeface="Cambria Math" panose="02040503050406030204" pitchFamily="18" charset="0"/>
+                          </a:rPr>
+                        </m:ctrlPr>
+                      </m:accPr>
+                      <m:e>
+                        <m:r>
+                          <a:rPr lang="en-US" sz="1200" b="0" i="1" dirty="0" smtClean="0">
+                            <a:solidFill>
+                              <a:schemeClr val="tx1"/>
+                            </a:solidFill>
+                            <a:latin typeface="Cambria Math" panose="02040503050406030204" pitchFamily="18" charset="0"/>
+                          </a:rPr>
+                          <m:t>𝑣</m:t>
+                        </m:r>
+                      </m:e>
+                    </m:acc>
+                    <m:r>
+                      <a:rPr lang="en-US" sz="1200" b="0" i="1" dirty="0" smtClean="0">
+                        <a:latin typeface="Cambria Math" panose="02040503050406030204" pitchFamily="18" charset="0"/>
+                      </a:rPr>
+                      <m:t>(</m:t>
+                    </m:r>
+                    <m:r>
+                      <a:rPr lang="en-US" sz="1200" b="0" i="1" dirty="0" smtClean="0">
+                        <a:latin typeface="Cambria Math" panose="02040503050406030204" pitchFamily="18" charset="0"/>
+                      </a:rPr>
+                      <m:t>𝑠</m:t>
+                    </m:r>
+                    <m:r>
+                      <a:rPr lang="en-US" sz="1200" b="0" i="1" dirty="0" smtClean="0">
+                        <a:latin typeface="Cambria Math" panose="02040503050406030204" pitchFamily="18" charset="0"/>
+                      </a:rPr>
+                      <m:t>, </m:t>
+                    </m:r>
+                    <m:r>
+                      <a:rPr lang="en-US" sz="1200" b="1" i="1" dirty="0" smtClean="0">
+                        <a:solidFill>
+                          <a:schemeClr val="tx1"/>
+                        </a:solidFill>
+                        <a:latin typeface="Cambria Math" panose="02040503050406030204" pitchFamily="18" charset="0"/>
+                      </a:rPr>
+                      <m:t>𝒘</m:t>
+                    </m:r>
+                    <m:r>
+                      <a:rPr lang="en-US" sz="1200" b="0" i="1" dirty="0" smtClean="0">
+                        <a:solidFill>
+                          <a:schemeClr val="tx1"/>
+                        </a:solidFill>
+                        <a:latin typeface="Cambria Math" panose="02040503050406030204" pitchFamily="18" charset="0"/>
+                      </a:rPr>
+                      <m:t>)</m:t>
+                    </m:r>
+                  </m:oMath>
+                </a14:m>
+                <a:r>
+                  <a:rPr lang="en-US" sz="1200" dirty="0">
+                    <a:solidFill>
+                      <a:schemeClr val="tx1"/>
+                    </a:solidFill>
+                  </a:rPr>
+                  <a:t>	approximate value function</a:t>
+                </a:r>
+                <a:br>
+                  <a:rPr lang="en-US" sz="1200" dirty="0">
+                    <a:solidFill>
+                      <a:schemeClr val="tx1"/>
+                    </a:solidFill>
+                  </a:rPr>
+                </a:br>
+                <a14:m>
+                  <m:oMath xmlns:m="http://schemas.openxmlformats.org/officeDocument/2006/math">
+                    <m:acc>
+                      <m:accPr>
+                        <m:chr m:val="̂"/>
+                        <m:ctrlPr>
+                          <a:rPr lang="en-US" sz="1200" i="1" dirty="0">
+                            <a:solidFill>
+                              <a:schemeClr val="tx1"/>
+                            </a:solidFill>
+                            <a:latin typeface="Cambria Math" panose="02040503050406030204" pitchFamily="18" charset="0"/>
+                          </a:rPr>
+                        </m:ctrlPr>
+                      </m:accPr>
+                      <m:e>
+                        <m:r>
+                          <a:rPr lang="en-US" sz="1200" b="0" i="1" dirty="0" smtClean="0">
+                            <a:solidFill>
+                              <a:schemeClr val="tx1"/>
+                            </a:solidFill>
+                            <a:latin typeface="Cambria Math" panose="02040503050406030204" pitchFamily="18" charset="0"/>
+                          </a:rPr>
+                          <m:t>𝑞</m:t>
+                        </m:r>
+                      </m:e>
+                    </m:acc>
+                    <m:r>
+                      <a:rPr lang="en-US" sz="1200" i="1" dirty="0">
+                        <a:latin typeface="Cambria Math" panose="02040503050406030204" pitchFamily="18" charset="0"/>
+                      </a:rPr>
+                      <m:t>(</m:t>
+                    </m:r>
+                    <m:r>
+                      <a:rPr lang="en-US" sz="1200" i="1" dirty="0">
+                        <a:latin typeface="Cambria Math" panose="02040503050406030204" pitchFamily="18" charset="0"/>
+                      </a:rPr>
+                      <m:t>𝑠</m:t>
+                    </m:r>
+                    <m:r>
+                      <a:rPr lang="en-US" sz="1200" i="1" dirty="0">
+                        <a:latin typeface="Cambria Math" panose="02040503050406030204" pitchFamily="18" charset="0"/>
+                      </a:rPr>
+                      <m:t>, </m:t>
+                    </m:r>
+                    <m:r>
+                      <a:rPr lang="en-US" sz="1200" b="0" i="1" dirty="0" smtClean="0">
+                        <a:latin typeface="Cambria Math" panose="02040503050406030204" pitchFamily="18" charset="0"/>
+                      </a:rPr>
+                      <m:t>𝑎</m:t>
+                    </m:r>
+                    <m:r>
+                      <a:rPr lang="en-US" sz="1200" b="0" i="1" dirty="0" smtClean="0">
+                        <a:latin typeface="Cambria Math" panose="02040503050406030204" pitchFamily="18" charset="0"/>
+                      </a:rPr>
+                      <m:t>, </m:t>
+                    </m:r>
+                    <m:r>
+                      <a:rPr lang="en-US" sz="1200" b="1" i="1" dirty="0">
+                        <a:solidFill>
+                          <a:schemeClr val="tx1"/>
+                        </a:solidFill>
+                        <a:latin typeface="Cambria Math" panose="02040503050406030204" pitchFamily="18" charset="0"/>
+                      </a:rPr>
+                      <m:t>𝒘</m:t>
+                    </m:r>
+                    <m:r>
+                      <a:rPr lang="en-US" sz="1200" i="1" dirty="0">
+                        <a:solidFill>
+                          <a:schemeClr val="tx1"/>
+                        </a:solidFill>
+                        <a:latin typeface="Cambria Math" panose="02040503050406030204" pitchFamily="18" charset="0"/>
+                      </a:rPr>
+                      <m:t>)</m:t>
+                    </m:r>
+                  </m:oMath>
+                </a14:m>
+                <a:r>
+                  <a:rPr lang="en-US" sz="1200" dirty="0">
+                    <a:solidFill>
+                      <a:schemeClr val="tx1"/>
+                    </a:solidFill>
+                  </a:rPr>
+                  <a:t>	approximate action-value function</a:t>
+                </a:r>
+                <a:br>
+                  <a:rPr lang="en-US" sz="1200" dirty="0">
+                    <a:solidFill>
+                      <a:schemeClr val="tx1"/>
+                    </a:solidFill>
+                  </a:rPr>
+                </a:br>
+                <a14:m>
+                  <m:oMath xmlns:m="http://schemas.openxmlformats.org/officeDocument/2006/math">
+                    <m:r>
+                      <a:rPr lang="en-US" sz="1200" b="0" i="1" smtClean="0">
+                        <a:solidFill>
+                          <a:schemeClr val="tx1"/>
+                        </a:solidFill>
+                        <a:latin typeface="Cambria Math" panose="02040503050406030204" pitchFamily="18" charset="0"/>
+                      </a:rPr>
+                      <m:t>𝜋</m:t>
+                    </m:r>
+                    <m:r>
+                      <a:rPr lang="en-US" sz="1200" b="0" i="1" smtClean="0">
+                        <a:solidFill>
+                          <a:schemeClr val="tx1"/>
+                        </a:solidFill>
+                        <a:latin typeface="Cambria Math" panose="02040503050406030204" pitchFamily="18" charset="0"/>
+                      </a:rPr>
+                      <m:t>(</m:t>
+                    </m:r>
+                    <m:r>
+                      <a:rPr lang="en-US" sz="1200" b="0" i="1" smtClean="0">
+                        <a:solidFill>
+                          <a:schemeClr val="tx1"/>
+                        </a:solidFill>
+                        <a:latin typeface="Cambria Math" panose="02040503050406030204" pitchFamily="18" charset="0"/>
+                      </a:rPr>
+                      <m:t>𝑎</m:t>
+                    </m:r>
+                    <m:r>
+                      <a:rPr lang="en-US" sz="1200" b="0" i="1" smtClean="0">
+                        <a:solidFill>
+                          <a:schemeClr val="tx1"/>
+                        </a:solidFill>
+                        <a:latin typeface="Cambria Math" panose="02040503050406030204" pitchFamily="18" charset="0"/>
+                      </a:rPr>
+                      <m:t>|</m:t>
+                    </m:r>
+                    <m:r>
+                      <a:rPr lang="en-US" sz="1200" b="0" i="1" smtClean="0">
+                        <a:solidFill>
+                          <a:schemeClr val="tx1"/>
+                        </a:solidFill>
+                        <a:latin typeface="Cambria Math" panose="02040503050406030204" pitchFamily="18" charset="0"/>
+                      </a:rPr>
+                      <m:t>𝑠</m:t>
+                    </m:r>
+                    <m:r>
+                      <a:rPr lang="en-US" sz="1200" b="0" i="1" smtClean="0">
+                        <a:solidFill>
+                          <a:schemeClr val="tx1"/>
+                        </a:solidFill>
+                        <a:latin typeface="Cambria Math" panose="02040503050406030204" pitchFamily="18" charset="0"/>
+                      </a:rPr>
+                      <m:t>,</m:t>
+                    </m:r>
+                    <m:r>
+                      <a:rPr lang="en-US" sz="1200" b="1" i="1" smtClean="0">
+                        <a:solidFill>
+                          <a:schemeClr val="tx1"/>
+                        </a:solidFill>
+                        <a:latin typeface="Cambria Math" panose="02040503050406030204" pitchFamily="18" charset="0"/>
+                      </a:rPr>
+                      <m:t>𝜽</m:t>
+                    </m:r>
+                    <m:r>
+                      <a:rPr lang="en-US" sz="1200" b="0" i="1" smtClean="0">
+                        <a:solidFill>
+                          <a:schemeClr val="tx1"/>
+                        </a:solidFill>
+                        <a:latin typeface="Cambria Math" panose="02040503050406030204" pitchFamily="18" charset="0"/>
+                      </a:rPr>
+                      <m:t>)</m:t>
+                    </m:r>
+                  </m:oMath>
+                </a14:m>
+                <a:r>
+                  <a:rPr lang="en-US" sz="1200" dirty="0">
+                    <a:solidFill>
+                      <a:schemeClr val="tx1"/>
+                    </a:solidFill>
+                  </a:rPr>
+                  <a:t>	approximate policy</a:t>
+                </a:r>
+              </a:p>
+              <a:p>
+                <a:pPr marL="0" indent="0">
+                  <a:lnSpc>
+                    <a:spcPct val="100000"/>
+                  </a:lnSpc>
+                  <a:spcBef>
+                    <a:spcPts val="0"/>
+                  </a:spcBef>
+                  <a:buNone/>
+                </a:pPr>
+                <a14:m>
+                  <m:oMath xmlns:m="http://schemas.openxmlformats.org/officeDocument/2006/math">
+                    <m:acc>
+                      <m:accPr>
+                        <m:chr m:val="̂"/>
+                        <m:ctrlPr>
+                          <a:rPr lang="en-US" sz="1200" i="1" dirty="0" smtClean="0">
+                            <a:solidFill>
+                              <a:schemeClr val="tx1"/>
+                            </a:solidFill>
+                            <a:latin typeface="Cambria Math" panose="02040503050406030204" pitchFamily="18" charset="0"/>
+                          </a:rPr>
+                        </m:ctrlPr>
+                      </m:accPr>
+                      <m:e>
+                        <m:r>
+                          <a:rPr lang="en-US" sz="1200" b="0" i="1" dirty="0" smtClean="0">
+                            <a:solidFill>
+                              <a:schemeClr val="tx1"/>
+                            </a:solidFill>
+                            <a:latin typeface="Cambria Math" panose="02040503050406030204" pitchFamily="18" charset="0"/>
+                          </a:rPr>
+                          <m:t>𝑉𝐸</m:t>
+                        </m:r>
+                      </m:e>
+                    </m:acc>
+                  </m:oMath>
+                </a14:m>
+                <a:r>
+                  <a:rPr lang="en-US" sz="1200" dirty="0">
+                    <a:solidFill>
+                      <a:schemeClr val="tx1"/>
+                    </a:solidFill>
+                  </a:rPr>
+                  <a:t>	mean squared value error</a:t>
+                </a:r>
+              </a:p>
+              <a:p>
+                <a:pPr marL="0" indent="0">
+                  <a:lnSpc>
+                    <a:spcPct val="100000"/>
+                  </a:lnSpc>
+                  <a:spcBef>
+                    <a:spcPts val="0"/>
+                  </a:spcBef>
+                  <a:buNone/>
+                </a:pPr>
+                <a14:m>
+                  <m:oMath xmlns:m="http://schemas.openxmlformats.org/officeDocument/2006/math">
+                    <m:r>
+                      <m:rPr>
+                        <m:sty m:val="p"/>
+                      </m:rPr>
+                      <a:rPr lang="en-US" sz="1200" i="1" dirty="0" smtClean="0">
+                        <a:solidFill>
+                          <a:schemeClr val="tx1"/>
+                        </a:solidFill>
+                        <a:latin typeface="Cambria Math" panose="02040503050406030204" pitchFamily="18" charset="0"/>
+                        <a:ea typeface="Cambria Math" panose="02040503050406030204" pitchFamily="18" charset="0"/>
+                      </a:rPr>
+                      <m:t>∇</m:t>
+                    </m:r>
+                    <m:r>
+                      <a:rPr lang="en-US" sz="1200" b="0" i="1" dirty="0" smtClean="0">
+                        <a:solidFill>
+                          <a:schemeClr val="tx1"/>
+                        </a:solidFill>
+                        <a:latin typeface="Cambria Math" panose="02040503050406030204" pitchFamily="18" charset="0"/>
+                        <a:ea typeface="Cambria Math" panose="02040503050406030204" pitchFamily="18" charset="0"/>
+                      </a:rPr>
+                      <m:t>𝑓</m:t>
+                    </m:r>
+                    <m:r>
+                      <a:rPr lang="en-US" sz="1200" b="0" i="1" dirty="0" smtClean="0">
+                        <a:solidFill>
+                          <a:schemeClr val="tx1"/>
+                        </a:solidFill>
+                        <a:latin typeface="Cambria Math" panose="02040503050406030204" pitchFamily="18" charset="0"/>
+                        <a:ea typeface="Cambria Math" panose="02040503050406030204" pitchFamily="18" charset="0"/>
+                      </a:rPr>
+                      <m:t>(</m:t>
+                    </m:r>
+                    <m:r>
+                      <a:rPr lang="en-US" sz="1200" b="0" i="1" dirty="0" smtClean="0">
+                        <a:solidFill>
+                          <a:schemeClr val="tx1"/>
+                        </a:solidFill>
+                        <a:latin typeface="Cambria Math" panose="02040503050406030204" pitchFamily="18" charset="0"/>
+                        <a:ea typeface="Cambria Math" panose="02040503050406030204" pitchFamily="18" charset="0"/>
+                      </a:rPr>
+                      <m:t>𝑥</m:t>
+                    </m:r>
+                    <m:r>
+                      <a:rPr lang="en-US" sz="1200" b="0" i="1" dirty="0" smtClean="0">
+                        <a:solidFill>
+                          <a:schemeClr val="tx1"/>
+                        </a:solidFill>
+                        <a:latin typeface="Cambria Math" panose="02040503050406030204" pitchFamily="18" charset="0"/>
+                        <a:ea typeface="Cambria Math" panose="02040503050406030204" pitchFamily="18" charset="0"/>
+                      </a:rPr>
+                      <m:t>)</m:t>
+                    </m:r>
+                  </m:oMath>
+                </a14:m>
+                <a:r>
+                  <a:rPr lang="en-US" sz="1200" dirty="0">
+                    <a:solidFill>
+                      <a:schemeClr val="tx1"/>
+                    </a:solidFill>
+                  </a:rPr>
+                  <a:t>	gradient of function </a:t>
+                </a:r>
+                <a14:m>
+                  <m:oMath xmlns:m="http://schemas.openxmlformats.org/officeDocument/2006/math">
+                    <m:r>
+                      <a:rPr lang="en-US" sz="1200" b="0" i="1" smtClean="0">
+                        <a:solidFill>
+                          <a:schemeClr val="tx1"/>
+                        </a:solidFill>
+                        <a:latin typeface="Cambria Math" panose="02040503050406030204" pitchFamily="18" charset="0"/>
+                      </a:rPr>
+                      <m:t>𝑓</m:t>
+                    </m:r>
+                  </m:oMath>
+                </a14:m>
+                <a:r>
+                  <a:rPr lang="en-US" sz="1200" dirty="0">
+                    <a:solidFill>
+                      <a:schemeClr val="tx1"/>
+                    </a:solidFill>
+                  </a:rPr>
+                  <a:t> evaluated at </a:t>
+                </a:r>
+                <a14:m>
+                  <m:oMath xmlns:m="http://schemas.openxmlformats.org/officeDocument/2006/math">
+                    <m:r>
+                      <a:rPr lang="en-US" sz="1200" b="0" i="1" smtClean="0">
+                        <a:solidFill>
+                          <a:schemeClr val="tx1"/>
+                        </a:solidFill>
+                        <a:latin typeface="Cambria Math" panose="02040503050406030204" pitchFamily="18" charset="0"/>
+                      </a:rPr>
+                      <m:t>𝑥</m:t>
+                    </m:r>
+                  </m:oMath>
+                </a14:m>
+                <a:endParaRPr lang="en-US" sz="1200" dirty="0">
+                  <a:solidFill>
+                    <a:schemeClr val="tx1"/>
+                  </a:solidFill>
+                </a:endParaRPr>
+              </a:p>
+            </p:txBody>
+          </p:sp>
+        </mc:Choice>
+        <mc:Fallback>
+          <p:sp>
+            <p:nvSpPr>
+              <p:cNvPr id="5" name="Content Placeholder 2">
+                <a:extLst>
+                  <a:ext uri="{FF2B5EF4-FFF2-40B4-BE49-F238E27FC236}">
+                    <a16:creationId xmlns:a16="http://schemas.microsoft.com/office/drawing/2014/main" id="{9FA76CFB-B55E-EFC6-DA3D-BEB7A8763838}"/>
+                  </a:ext>
+                </a:extLst>
+              </p:cNvPr>
+              <p:cNvSpPr txBox="1">
+                <a:spLocks noRot="1" noChangeAspect="1" noMove="1" noResize="1" noEditPoints="1" noAdjustHandles="1" noChangeArrowheads="1" noChangeShapeType="1" noTextEdit="1"/>
+              </p:cNvSpPr>
+              <p:nvPr/>
+            </p:nvSpPr>
+            <p:spPr>
+              <a:xfrm>
+                <a:off x="6267338" y="4942028"/>
+                <a:ext cx="5273179" cy="1597104"/>
+              </a:xfrm>
+              <a:prstGeom prst="rect">
+                <a:avLst/>
+              </a:prstGeom>
+              <a:blipFill>
+                <a:blip r:embed="rId6"/>
+                <a:stretch>
+                  <a:fillRect/>
+                </a:stretch>
+              </a:blipFill>
+            </p:spPr>
+            <p:txBody>
+              <a:bodyPr/>
+              <a:lstStyle/>
+              <a:p>
+                <a:r>
+                  <a:rPr lang="en-US">
+                    <a:noFill/>
+                  </a:rPr>
+                  <a:t> </a:t>
+                </a:r>
+              </a:p>
+            </p:txBody>
+          </p:sp>
+        </mc:Fallback>
+      </mc:AlternateContent>
     </p:spTree>
     <p:extLst>
       <p:ext uri="{BB962C8B-B14F-4D97-AF65-F5344CB8AC3E}">
-        <p14:creationId xmlns:p14="http://schemas.microsoft.com/office/powerpoint/2010/main" val="3945362088"/>
+        <p14:creationId xmlns:p14="http://schemas.microsoft.com/office/powerpoint/2010/main" val="920694018"/>
       </p:ext>
     </p:extLst>
   </p:cSld>
@@ -16250,8 +17457,8 @@
           </a:p>
         </p:txBody>
       </p:sp>
-      <mc:AlternateContent xmlns:mc="http://schemas.openxmlformats.org/markup-compatibility/2006">
-        <mc:Choice xmlns:a14="http://schemas.microsoft.com/office/drawing/2010/main" Requires="a14">
+      <mc:AlternateContent xmlns:mc="http://schemas.openxmlformats.org/markup-compatibility/2006" xmlns:a14="http://schemas.microsoft.com/office/drawing/2010/main">
+        <mc:Choice Requires="a14">
           <p:sp>
             <p:nvSpPr>
               <p:cNvPr id="5" name="Content Placeholder 4">
@@ -16395,13 +17602,7 @@
                       <a:rPr lang="en-US" b="0" i="1" dirty="0" smtClean="0">
                         <a:latin typeface="Cambria Math" panose="02040503050406030204" pitchFamily="18" charset="0"/>
                       </a:rPr>
-                      <m:t>)</m:t>
-                    </m:r>
-                    <m:r>
-                      <a:rPr lang="en-US" b="0" i="1" dirty="0" smtClean="0">
-                        <a:latin typeface="Cambria Math" panose="02040503050406030204" pitchFamily="18" charset="0"/>
-                      </a:rPr>
-                      <m:t>=</m:t>
+                      <m:t>)=</m:t>
                     </m:r>
                     <m:r>
                       <m:rPr>
@@ -16970,7 +18171,7 @@
             </p:txBody>
           </p:sp>
         </mc:Choice>
-        <mc:Fallback>
+        <mc:Fallback xmlns="">
           <p:sp>
             <p:nvSpPr>
               <p:cNvPr id="5" name="Content Placeholder 4">
@@ -17252,8 +18453,8 @@
           </a:p>
         </p:txBody>
       </p:sp>
-      <mc:AlternateContent xmlns:mc="http://schemas.openxmlformats.org/markup-compatibility/2006">
-        <mc:Choice xmlns:a14="http://schemas.microsoft.com/office/drawing/2010/main" Requires="a14">
+      <mc:AlternateContent xmlns:mc="http://schemas.openxmlformats.org/markup-compatibility/2006" xmlns:a14="http://schemas.microsoft.com/office/drawing/2010/main">
+        <mc:Choice Requires="a14">
           <p:sp>
             <p:nvSpPr>
               <p:cNvPr id="3" name="Content Placeholder 2">
@@ -18254,7 +19455,7 @@
             </p:txBody>
           </p:sp>
         </mc:Choice>
-        <mc:Fallback>
+        <mc:Fallback xmlns="">
           <p:sp>
             <p:nvSpPr>
               <p:cNvPr id="3" name="Content Placeholder 2">
@@ -18298,8 +19499,8 @@
           </p:sp>
         </mc:Fallback>
       </mc:AlternateContent>
-      <mc:AlternateContent xmlns:mc="http://schemas.openxmlformats.org/markup-compatibility/2006">
-        <mc:Choice xmlns:a14="http://schemas.microsoft.com/office/drawing/2010/main" Requires="a14">
+      <mc:AlternateContent xmlns:mc="http://schemas.openxmlformats.org/markup-compatibility/2006" xmlns:a14="http://schemas.microsoft.com/office/drawing/2010/main">
+        <mc:Choice Requires="a14">
           <p:sp>
             <p:nvSpPr>
               <p:cNvPr id="4" name="Speech Bubble: Rectangle with Corners Rounded 3">
@@ -18365,7 +19566,7 @@
             </p:txBody>
           </p:sp>
         </mc:Choice>
-        <mc:Fallback>
+        <mc:Fallback xmlns="">
           <p:sp>
             <p:nvSpPr>
               <p:cNvPr id="4" name="Speech Bubble: Rectangle with Corners Rounded 3">
@@ -18468,8 +19669,8 @@
           </a:p>
         </p:txBody>
       </p:sp>
-      <mc:AlternateContent xmlns:mc="http://schemas.openxmlformats.org/markup-compatibility/2006">
-        <mc:Choice xmlns:a14="http://schemas.microsoft.com/office/drawing/2010/main" Requires="a14">
+      <mc:AlternateContent xmlns:mc="http://schemas.openxmlformats.org/markup-compatibility/2006" xmlns:a14="http://schemas.microsoft.com/office/drawing/2010/main">
+        <mc:Choice Requires="a14">
           <p:sp>
             <p:nvSpPr>
               <p:cNvPr id="10" name="Speech Bubble: Rectangle with Corners Rounded 9">
@@ -18535,7 +19736,7 @@
             </p:txBody>
           </p:sp>
         </mc:Choice>
-        <mc:Fallback>
+        <mc:Fallback xmlns="">
           <p:sp>
             <p:nvSpPr>
               <p:cNvPr id="10" name="Speech Bubble: Rectangle with Corners Rounded 9">
@@ -18986,8 +20187,8 @@
           </a:p>
         </p:txBody>
       </p:sp>
-      <mc:AlternateContent xmlns:mc="http://schemas.openxmlformats.org/markup-compatibility/2006">
-        <mc:Choice xmlns:a14="http://schemas.microsoft.com/office/drawing/2010/main" Requires="a14">
+      <mc:AlternateContent xmlns:mc="http://schemas.openxmlformats.org/markup-compatibility/2006" xmlns:a14="http://schemas.microsoft.com/office/drawing/2010/main">
+        <mc:Choice Requires="a14">
           <p:sp>
             <p:nvSpPr>
               <p:cNvPr id="3" name="Content Placeholder 2">
@@ -19504,12 +20705,6 @@
                             <a:latin typeface="Cambria Math" panose="02040503050406030204" pitchFamily="18" charset="0"/>
                           </a:rPr>
                           <m:t>𝑎</m:t>
-                        </m:r>
-                        <m:r>
-                          <a:rPr lang="en-US" i="1">
-                            <a:latin typeface="Cambria Math" panose="02040503050406030204" pitchFamily="18" charset="0"/>
-                          </a:rPr>
-                          <m:t>,</m:t>
                         </m:r>
                       </m:e>
                       <m:e>
@@ -20050,7 +21245,7 @@
             </p:txBody>
           </p:sp>
         </mc:Choice>
-        <mc:Fallback>
+        <mc:Fallback xmlns="">
           <p:sp>
             <p:nvSpPr>
               <p:cNvPr id="3" name="Content Placeholder 2">
@@ -20702,8 +21897,8 @@
           </p:sp>
         </mc:Fallback>
       </mc:AlternateContent>
-      <mc:AlternateContent xmlns:mc="http://schemas.openxmlformats.org/markup-compatibility/2006">
-        <mc:Choice xmlns:a14="http://schemas.microsoft.com/office/drawing/2010/main" Requires="a14">
+      <mc:AlternateContent xmlns:mc="http://schemas.openxmlformats.org/markup-compatibility/2006" xmlns:a14="http://schemas.microsoft.com/office/drawing/2010/main">
+        <mc:Choice Requires="a14">
           <p:sp>
             <p:nvSpPr>
               <p:cNvPr id="3" name="Content Placeholder 2">
@@ -20854,7 +22049,7 @@
             </p:txBody>
           </p:sp>
         </mc:Choice>
-        <mc:Fallback>
+        <mc:Fallback xmlns="">
           <p:sp>
             <p:nvSpPr>
               <p:cNvPr id="3" name="Content Placeholder 2">

--- a/slides/Lecture_Chapter13.pptx
+++ b/slides/Lecture_Chapter13.pptx
@@ -13014,8 +13014,8 @@
           </a:p>
         </p:txBody>
       </p:sp>
-      <mc:AlternateContent xmlns:mc="http://schemas.openxmlformats.org/markup-compatibility/2006">
-        <mc:Choice xmlns:a14="http://schemas.microsoft.com/office/drawing/2010/main" Requires="a14">
+      <mc:AlternateContent xmlns:mc="http://schemas.openxmlformats.org/markup-compatibility/2006" xmlns:a14="http://schemas.microsoft.com/office/drawing/2010/main">
+        <mc:Choice Requires="a14">
           <p:sp>
             <p:nvSpPr>
               <p:cNvPr id="3" name="Content Placeholder 2">
@@ -13999,7 +13999,7 @@
             </p:txBody>
           </p:sp>
         </mc:Choice>
-        <mc:Fallback>
+        <mc:Fallback xmlns="">
           <p:sp>
             <p:nvSpPr>
               <p:cNvPr id="3" name="Content Placeholder 2">
@@ -16100,8 +16100,8 @@
           </p:sp>
         </mc:Fallback>
       </mc:AlternateContent>
-      <mc:AlternateContent xmlns:mc="http://schemas.openxmlformats.org/markup-compatibility/2006">
-        <mc:Choice xmlns:a14="http://schemas.microsoft.com/office/drawing/2010/main" Requires="a14">
+      <mc:AlternateContent xmlns:mc="http://schemas.openxmlformats.org/markup-compatibility/2006" xmlns:a14="http://schemas.microsoft.com/office/drawing/2010/main">
+        <mc:Choice Requires="a14">
           <p:sp>
             <p:nvSpPr>
               <p:cNvPr id="4" name="Content Placeholder 2">
@@ -16470,7 +16470,7 @@
             </p:txBody>
           </p:sp>
         </mc:Choice>
-        <mc:Fallback>
+        <mc:Fallback xmlns="">
           <p:sp>
             <p:nvSpPr>
               <p:cNvPr id="4" name="Content Placeholder 2">
@@ -16515,8 +16515,8 @@
           </p:sp>
         </mc:Fallback>
       </mc:AlternateContent>
-      <mc:AlternateContent xmlns:mc="http://schemas.openxmlformats.org/markup-compatibility/2006">
-        <mc:Choice xmlns:a14="http://schemas.microsoft.com/office/drawing/2010/main" Requires="a14">
+      <mc:AlternateContent xmlns:mc="http://schemas.openxmlformats.org/markup-compatibility/2006" xmlns:a14="http://schemas.microsoft.com/office/drawing/2010/main">
+        <mc:Choice Requires="a14">
           <p:sp>
             <p:nvSpPr>
               <p:cNvPr id="5" name="Content Placeholder 2">
@@ -17262,7 +17262,7 @@
             </p:txBody>
           </p:sp>
         </mc:Choice>
-        <mc:Fallback>
+        <mc:Fallback xmlns="">
           <p:sp>
             <p:nvSpPr>
               <p:cNvPr id="5" name="Content Placeholder 2">
@@ -20187,8 +20187,8 @@
           </a:p>
         </p:txBody>
       </p:sp>
-      <mc:AlternateContent xmlns:mc="http://schemas.openxmlformats.org/markup-compatibility/2006" xmlns:a14="http://schemas.microsoft.com/office/drawing/2010/main">
-        <mc:Choice Requires="a14">
+      <mc:AlternateContent xmlns:mc="http://schemas.openxmlformats.org/markup-compatibility/2006">
+        <mc:Choice xmlns:a14="http://schemas.microsoft.com/office/drawing/2010/main" Requires="a14">
           <p:sp>
             <p:nvSpPr>
               <p:cNvPr id="3" name="Content Placeholder 2">
@@ -21021,11 +21021,11 @@
                           <m:t>=</m:t>
                         </m:r>
                         <m:r>
-                          <a:rPr lang="en-US" i="1">
+                          <a:rPr lang="en-US" b="1" i="1" smtClean="0">
                             <a:latin typeface="Cambria Math" panose="02040503050406030204" pitchFamily="18" charset="0"/>
                             <a:ea typeface="Cambria Math" panose="02040503050406030204" pitchFamily="18" charset="0"/>
                           </a:rPr>
-                          <m:t>h</m:t>
+                          <m:t>𝒙</m:t>
                         </m:r>
                         <m:d>
                           <m:dPr>
@@ -21067,110 +21067,106 @@
                           </a:rPr>
                           <m:t>−</m:t>
                         </m:r>
-                        <m:nary>
-                          <m:naryPr>
-                            <m:chr m:val="∑"/>
+                      </m:e>
+                    </m:func>
+                    <m:nary>
+                      <m:naryPr>
+                        <m:chr m:val="∑"/>
+                        <m:supHide m:val="on"/>
+                        <m:ctrlPr>
+                          <a:rPr lang="en-US" i="1" smtClean="0">
+                            <a:latin typeface="Cambria Math" panose="02040503050406030204" pitchFamily="18" charset="0"/>
+                            <a:ea typeface="Cambria Math" panose="02040503050406030204" pitchFamily="18" charset="0"/>
+                          </a:rPr>
+                        </m:ctrlPr>
+                      </m:naryPr>
+                      <m:sub>
+                        <m:r>
+                          <m:rPr>
+                            <m:brk m:alnAt="7"/>
+                          </m:rPr>
+                          <a:rPr lang="en-US" b="0" i="1" smtClean="0">
+                            <a:latin typeface="Cambria Math" panose="02040503050406030204" pitchFamily="18" charset="0"/>
+                            <a:ea typeface="Cambria Math" panose="02040503050406030204" pitchFamily="18" charset="0"/>
+                          </a:rPr>
+                          <m:t>𝑏</m:t>
+                        </m:r>
+                      </m:sub>
+                      <m:sup/>
+                      <m:e>
+                        <m:r>
+                          <a:rPr lang="en-US" i="1">
+                            <a:latin typeface="Cambria Math" panose="02040503050406030204" pitchFamily="18" charset="0"/>
+                            <a:ea typeface="Cambria Math" panose="02040503050406030204" pitchFamily="18" charset="0"/>
+                          </a:rPr>
+                          <m:t>𝜋</m:t>
+                        </m:r>
+                        <m:r>
+                          <a:rPr lang="en-US" i="1">
+                            <a:latin typeface="Cambria Math" panose="02040503050406030204" pitchFamily="18" charset="0"/>
+                            <a:ea typeface="Cambria Math" panose="02040503050406030204" pitchFamily="18" charset="0"/>
+                          </a:rPr>
+                          <m:t>(</m:t>
+                        </m:r>
+                        <m:r>
+                          <a:rPr lang="en-US" i="1">
+                            <a:latin typeface="Cambria Math" panose="02040503050406030204" pitchFamily="18" charset="0"/>
+                            <a:ea typeface="Cambria Math" panose="02040503050406030204" pitchFamily="18" charset="0"/>
+                          </a:rPr>
+                          <m:t>𝑏</m:t>
+                        </m:r>
+                        <m:r>
+                          <a:rPr lang="en-US" i="1">
+                            <a:latin typeface="Cambria Math" panose="02040503050406030204" pitchFamily="18" charset="0"/>
+                            <a:ea typeface="Cambria Math" panose="02040503050406030204" pitchFamily="18" charset="0"/>
+                          </a:rPr>
+                          <m:t>|</m:t>
+                        </m:r>
+                        <m:r>
+                          <a:rPr lang="en-US" i="1">
+                            <a:latin typeface="Cambria Math" panose="02040503050406030204" pitchFamily="18" charset="0"/>
+                            <a:ea typeface="Cambria Math" panose="02040503050406030204" pitchFamily="18" charset="0"/>
+                          </a:rPr>
+                          <m:t>𝑠</m:t>
+                        </m:r>
+                        <m:r>
+                          <a:rPr lang="en-US" i="1">
+                            <a:latin typeface="Cambria Math" panose="02040503050406030204" pitchFamily="18" charset="0"/>
+                            <a:ea typeface="Cambria Math" panose="02040503050406030204" pitchFamily="18" charset="0"/>
+                          </a:rPr>
+                          <m:t>, </m:t>
+                        </m:r>
+                        <m:r>
+                          <a:rPr lang="en-US" b="1" i="1">
+                            <a:latin typeface="Cambria Math" panose="02040503050406030204" pitchFamily="18" charset="0"/>
+                            <a:ea typeface="Cambria Math" panose="02040503050406030204" pitchFamily="18" charset="0"/>
+                          </a:rPr>
+                          <m:t>𝜽</m:t>
+                        </m:r>
+                        <m:r>
+                          <a:rPr lang="en-US" b="1" i="1">
+                            <a:latin typeface="Cambria Math" panose="02040503050406030204" pitchFamily="18" charset="0"/>
+                            <a:ea typeface="Cambria Math" panose="02040503050406030204" pitchFamily="18" charset="0"/>
+                          </a:rPr>
+                          <m:t>)</m:t>
+                        </m:r>
+                        <m:r>
+                          <a:rPr lang="en-US" b="1" i="1">
+                            <a:latin typeface="Cambria Math" panose="02040503050406030204" pitchFamily="18" charset="0"/>
+                            <a:ea typeface="Cambria Math" panose="02040503050406030204" pitchFamily="18" charset="0"/>
+                          </a:rPr>
+                          <m:t>𝒙</m:t>
+                        </m:r>
+                        <m:d>
+                          <m:dPr>
                             <m:ctrlPr>
                               <a:rPr lang="en-US" i="1">
                                 <a:latin typeface="Cambria Math" panose="02040503050406030204" pitchFamily="18" charset="0"/>
                                 <a:ea typeface="Cambria Math" panose="02040503050406030204" pitchFamily="18" charset="0"/>
                               </a:rPr>
                             </m:ctrlPr>
-                          </m:naryPr>
-                          <m:sub>
-                            <m:r>
-                              <a:rPr lang="en-US" i="1">
-                                <a:latin typeface="Cambria Math" panose="02040503050406030204" pitchFamily="18" charset="0"/>
-                                <a:ea typeface="Cambria Math" panose="02040503050406030204" pitchFamily="18" charset="0"/>
-                              </a:rPr>
-                              <m:t>𝑎</m:t>
-                            </m:r>
-                          </m:sub>
-                          <m:sup>
-                            <m:r>
-                              <a:rPr lang="en-US" i="1">
-                                <a:latin typeface="Cambria Math" panose="02040503050406030204" pitchFamily="18" charset="0"/>
-                                <a:ea typeface="Cambria Math" panose="02040503050406030204" pitchFamily="18" charset="0"/>
-                              </a:rPr>
-                              <m:t>′</m:t>
-                            </m:r>
-                          </m:sup>
+                          </m:dPr>
                           <m:e>
-                            <m:r>
-                              <a:rPr lang="en-US" i="1">
-                                <a:latin typeface="Cambria Math" panose="02040503050406030204" pitchFamily="18" charset="0"/>
-                                <a:ea typeface="Cambria Math" panose="02040503050406030204" pitchFamily="18" charset="0"/>
-                              </a:rPr>
-                              <m:t>h</m:t>
-                            </m:r>
-                            <m:d>
-                              <m:dPr>
-                                <m:ctrlPr>
-                                  <a:rPr lang="en-US" i="1">
-                                    <a:latin typeface="Cambria Math" panose="02040503050406030204" pitchFamily="18" charset="0"/>
-                                    <a:ea typeface="Cambria Math" panose="02040503050406030204" pitchFamily="18" charset="0"/>
-                                  </a:rPr>
-                                </m:ctrlPr>
-                              </m:dPr>
-                              <m:e>
-                                <m:r>
-                                  <a:rPr lang="en-US" i="1">
-                                    <a:latin typeface="Cambria Math" panose="02040503050406030204" pitchFamily="18" charset="0"/>
-                                    <a:ea typeface="Cambria Math" panose="02040503050406030204" pitchFamily="18" charset="0"/>
-                                  </a:rPr>
-                                  <m:t>𝑠</m:t>
-                                </m:r>
-                                <m:r>
-                                  <a:rPr lang="en-US" i="1">
-                                    <a:latin typeface="Cambria Math" panose="02040503050406030204" pitchFamily="18" charset="0"/>
-                                    <a:ea typeface="Cambria Math" panose="02040503050406030204" pitchFamily="18" charset="0"/>
-                                  </a:rPr>
-                                  <m:t>,</m:t>
-                                </m:r>
-                                <m:sSup>
-                                  <m:sSupPr>
-                                    <m:ctrlPr>
-                                      <a:rPr lang="en-US" i="1">
-                                        <a:latin typeface="Cambria Math" panose="02040503050406030204" pitchFamily="18" charset="0"/>
-                                        <a:ea typeface="Cambria Math" panose="02040503050406030204" pitchFamily="18" charset="0"/>
-                                      </a:rPr>
-                                    </m:ctrlPr>
-                                  </m:sSupPr>
-                                  <m:e>
-                                    <m:r>
-                                      <a:rPr lang="en-US" i="1">
-                                        <a:latin typeface="Cambria Math" panose="02040503050406030204" pitchFamily="18" charset="0"/>
-                                        <a:ea typeface="Cambria Math" panose="02040503050406030204" pitchFamily="18" charset="0"/>
-                                      </a:rPr>
-                                      <m:t>𝑎</m:t>
-                                    </m:r>
-                                  </m:e>
-                                  <m:sup>
-                                    <m:r>
-                                      <a:rPr lang="en-US" i="1">
-                                        <a:latin typeface="Cambria Math" panose="02040503050406030204" pitchFamily="18" charset="0"/>
-                                        <a:ea typeface="Cambria Math" panose="02040503050406030204" pitchFamily="18" charset="0"/>
-                                      </a:rPr>
-                                      <m:t>′</m:t>
-                                    </m:r>
-                                  </m:sup>
-                                </m:sSup>
-                              </m:e>
-                            </m:d>
-                            <m:r>
-                              <a:rPr lang="en-US" i="1">
-                                <a:latin typeface="Cambria Math" panose="02040503050406030204" pitchFamily="18" charset="0"/>
-                                <a:ea typeface="Cambria Math" panose="02040503050406030204" pitchFamily="18" charset="0"/>
-                              </a:rPr>
-                              <m:t>𝜋</m:t>
-                            </m:r>
-                            <m:r>
-                              <a:rPr lang="en-US" i="1">
-                                <a:latin typeface="Cambria Math" panose="02040503050406030204" pitchFamily="18" charset="0"/>
-                                <a:ea typeface="Cambria Math" panose="02040503050406030204" pitchFamily="18" charset="0"/>
-                              </a:rPr>
-                              <m:t>(</m:t>
-                            </m:r>
                             <m:r>
                               <a:rPr lang="en-US" i="1">
                                 <a:latin typeface="Cambria Math" panose="02040503050406030204" pitchFamily="18" charset="0"/>
@@ -21183,61 +21179,19 @@
                                 <a:latin typeface="Cambria Math" panose="02040503050406030204" pitchFamily="18" charset="0"/>
                                 <a:ea typeface="Cambria Math" panose="02040503050406030204" pitchFamily="18" charset="0"/>
                               </a:rPr>
-                              <m:t>|</m:t>
-                            </m:r>
-                            <m:sSup>
-                              <m:sSupPr>
-                                <m:ctrlPr>
-                                  <a:rPr lang="en-US" i="1">
-                                    <a:latin typeface="Cambria Math" panose="02040503050406030204" pitchFamily="18" charset="0"/>
-                                    <a:ea typeface="Cambria Math" panose="02040503050406030204" pitchFamily="18" charset="0"/>
-                                  </a:rPr>
-                                </m:ctrlPr>
-                              </m:sSupPr>
-                              <m:e>
-                                <m:r>
-                                  <a:rPr lang="en-US" i="1">
-                                    <a:latin typeface="Cambria Math" panose="02040503050406030204" pitchFamily="18" charset="0"/>
-                                    <a:ea typeface="Cambria Math" panose="02040503050406030204" pitchFamily="18" charset="0"/>
-                                  </a:rPr>
-                                  <m:t>𝑎</m:t>
-                                </m:r>
-                              </m:e>
-                              <m:sup>
-                                <m:r>
-                                  <a:rPr lang="en-US" i="1">
-                                    <a:latin typeface="Cambria Math" panose="02040503050406030204" pitchFamily="18" charset="0"/>
-                                    <a:ea typeface="Cambria Math" panose="02040503050406030204" pitchFamily="18" charset="0"/>
-                                  </a:rPr>
-                                  <m:t>′</m:t>
-                                </m:r>
-                              </m:sup>
-                            </m:sSup>
-                            <m:r>
-                              <a:rPr lang="en-US" i="1">
-                                <a:latin typeface="Cambria Math" panose="02040503050406030204" pitchFamily="18" charset="0"/>
-                                <a:ea typeface="Cambria Math" panose="02040503050406030204" pitchFamily="18" charset="0"/>
-                              </a:rPr>
-                              <m:t>, </m:t>
-                            </m:r>
-                            <m:r>
-                              <a:rPr lang="en-US" b="1" i="1">
-                                <a:latin typeface="Cambria Math" panose="02040503050406030204" pitchFamily="18" charset="0"/>
-                                <a:ea typeface="Cambria Math" panose="02040503050406030204" pitchFamily="18" charset="0"/>
-                              </a:rPr>
-                              <m:t>𝜽</m:t>
+                              <m:t>,</m:t>
                             </m:r>
                             <m:r>
                               <a:rPr lang="en-US" i="1">
                                 <a:latin typeface="Cambria Math" panose="02040503050406030204" pitchFamily="18" charset="0"/>
                                 <a:ea typeface="Cambria Math" panose="02040503050406030204" pitchFamily="18" charset="0"/>
                               </a:rPr>
-                              <m:t>)</m:t>
+                              <m:t>𝑏</m:t>
                             </m:r>
                           </m:e>
-                        </m:nary>
+                        </m:d>
                       </m:e>
-                    </m:func>
+                    </m:nary>
                   </m:oMath>
                 </a14:m>
                 <a:endParaRPr lang="en-US" b="1" dirty="0"/>
@@ -21245,7 +21199,7 @@
             </p:txBody>
           </p:sp>
         </mc:Choice>
-        <mc:Fallback xmlns="">
+        <mc:Fallback>
           <p:sp>
             <p:nvSpPr>
               <p:cNvPr id="3" name="Content Placeholder 2">
@@ -21515,26 +21469,39 @@
                                   </p:childTnLst>
                                 </p:cTn>
                               </p:par>
-                            </p:childTnLst>
-                          </p:cTn>
-                        </p:par>
-                      </p:childTnLst>
-                    </p:cTn>
-                  </p:par>
-                  <p:par>
-                    <p:cTn id="15" fill="hold">
-                      <p:stCondLst>
-                        <p:cond delay="indefinite"/>
-                      </p:stCondLst>
-                      <p:childTnLst>
-                        <p:par>
-                          <p:cTn id="16" fill="hold">
-                            <p:stCondLst>
-                              <p:cond delay="0"/>
-                            </p:stCondLst>
-                            <p:childTnLst>
                               <p:par>
-                                <p:cTn id="17" presetID="1" presetClass="entr" presetSubtype="0" fill="hold" grpId="0" nodeType="clickEffect">
+                                <p:cTn id="15" presetID="1" presetClass="entr" presetSubtype="0" fill="hold" grpId="0" nodeType="withEffect">
+                                  <p:stCondLst>
+                                    <p:cond delay="0"/>
+                                  </p:stCondLst>
+                                  <p:childTnLst>
+                                    <p:set>
+                                      <p:cBhvr>
+                                        <p:cTn id="16" dur="1" fill="hold">
+                                          <p:stCondLst>
+                                            <p:cond delay="0"/>
+                                          </p:stCondLst>
+                                        </p:cTn>
+                                        <p:tgtEl>
+                                          <p:spTgt spid="3">
+                                            <p:txEl>
+                                              <p:pRg st="5" end="5"/>
+                                            </p:txEl>
+                                          </p:spTgt>
+                                        </p:tgtEl>
+                                        <p:attrNameLst>
+                                          <p:attrName>style.visibility</p:attrName>
+                                        </p:attrNameLst>
+                                      </p:cBhvr>
+                                      <p:to>
+                                        <p:strVal val="visible"/>
+                                      </p:to>
+                                    </p:set>
+                                  </p:childTnLst>
+                                </p:cTn>
+                              </p:par>
+                              <p:par>
+                                <p:cTn id="17" presetID="1" presetClass="entr" presetSubtype="0" fill="hold" grpId="0" nodeType="withEffect">
                                   <p:stCondLst>
                                     <p:cond delay="0"/>
                                   </p:stCondLst>
@@ -21549,7 +21516,7 @@
                                         <p:tgtEl>
                                           <p:spTgt spid="3">
                                             <p:txEl>
-                                              <p:pRg st="5" end="5"/>
+                                              <p:pRg st="6" end="6"/>
                                             </p:txEl>
                                           </p:spTgt>
                                         </p:tgtEl>
@@ -21580,7 +21547,7 @@
                                         <p:tgtEl>
                                           <p:spTgt spid="3">
                                             <p:txEl>
-                                              <p:pRg st="6" end="6"/>
+                                              <p:pRg st="7" end="7"/>
                                             </p:txEl>
                                           </p:spTgt>
                                         </p:tgtEl>
@@ -21611,7 +21578,7 @@
                                         <p:tgtEl>
                                           <p:spTgt spid="3">
                                             <p:txEl>
-                                              <p:pRg st="7" end="7"/>
+                                              <p:pRg st="8" end="8"/>
                                             </p:txEl>
                                           </p:spTgt>
                                         </p:tgtEl>
@@ -21626,33 +21593,15 @@
                                   </p:childTnLst>
                                 </p:cTn>
                               </p:par>
-                            </p:childTnLst>
-                          </p:cTn>
-                        </p:par>
-                      </p:childTnLst>
-                    </p:cTn>
-                  </p:par>
-                  <p:par>
-                    <p:cTn id="23" fill="hold">
-                      <p:stCondLst>
-                        <p:cond delay="indefinite"/>
-                      </p:stCondLst>
-                      <p:childTnLst>
-                        <p:par>
-                          <p:cTn id="24" fill="hold">
-                            <p:stCondLst>
-                              <p:cond delay="0"/>
-                            </p:stCondLst>
-                            <p:childTnLst>
                               <p:par>
-                                <p:cTn id="25" presetID="1" presetClass="entr" presetSubtype="0" fill="hold" grpId="0" nodeType="clickEffect">
+                                <p:cTn id="23" presetID="1" presetClass="entr" presetSubtype="0" fill="hold" grpId="0" nodeType="withEffect">
                                   <p:stCondLst>
                                     <p:cond delay="0"/>
                                   </p:stCondLst>
                                   <p:childTnLst>
                                     <p:set>
                                       <p:cBhvr>
-                                        <p:cTn id="26" dur="1" fill="hold">
+                                        <p:cTn id="24" dur="1" fill="hold">
                                           <p:stCondLst>
                                             <p:cond delay="0"/>
                                           </p:stCondLst>
@@ -21660,7 +21609,7 @@
                                         <p:tgtEl>
                                           <p:spTgt spid="3">
                                             <p:txEl>
-                                              <p:pRg st="8" end="8"/>
+                                              <p:pRg st="9" end="9"/>
                                             </p:txEl>
                                           </p:spTgt>
                                         </p:tgtEl>
@@ -21679,75 +21628,26 @@
                           </p:cTn>
                         </p:par>
                         <p:par>
-                          <p:cTn id="27" fill="hold">
+                          <p:cTn id="25" fill="hold">
                             <p:stCondLst>
                               <p:cond delay="0"/>
                             </p:stCondLst>
                             <p:childTnLst>
                               <p:par>
-                                <p:cTn id="28" presetID="1" presetClass="entr" presetSubtype="0" fill="hold" grpId="0" nodeType="afterEffect">
+                                <p:cTn id="26" presetID="1" presetClass="entr" presetSubtype="0" fill="hold" grpId="0" nodeType="afterEffect">
                                   <p:stCondLst>
                                     <p:cond delay="0"/>
                                   </p:stCondLst>
                                   <p:childTnLst>
                                     <p:set>
                                       <p:cBhvr>
-                                        <p:cTn id="29" dur="1" fill="hold">
+                                        <p:cTn id="27" dur="1" fill="hold">
                                           <p:stCondLst>
                                             <p:cond delay="0"/>
                                           </p:stCondLst>
                                         </p:cTn>
                                         <p:tgtEl>
                                           <p:spTgt spid="4"/>
-                                        </p:tgtEl>
-                                        <p:attrNameLst>
-                                          <p:attrName>style.visibility</p:attrName>
-                                        </p:attrNameLst>
-                                      </p:cBhvr>
-                                      <p:to>
-                                        <p:strVal val="visible"/>
-                                      </p:to>
-                                    </p:set>
-                                  </p:childTnLst>
-                                </p:cTn>
-                              </p:par>
-                            </p:childTnLst>
-                          </p:cTn>
-                        </p:par>
-                      </p:childTnLst>
-                    </p:cTn>
-                  </p:par>
-                  <p:par>
-                    <p:cTn id="30" fill="hold">
-                      <p:stCondLst>
-                        <p:cond delay="indefinite"/>
-                      </p:stCondLst>
-                      <p:childTnLst>
-                        <p:par>
-                          <p:cTn id="31" fill="hold">
-                            <p:stCondLst>
-                              <p:cond delay="0"/>
-                            </p:stCondLst>
-                            <p:childTnLst>
-                              <p:par>
-                                <p:cTn id="32" presetID="1" presetClass="entr" presetSubtype="0" fill="hold" grpId="0" nodeType="clickEffect">
-                                  <p:stCondLst>
-                                    <p:cond delay="0"/>
-                                  </p:stCondLst>
-                                  <p:childTnLst>
-                                    <p:set>
-                                      <p:cBhvr>
-                                        <p:cTn id="33" dur="1" fill="hold">
-                                          <p:stCondLst>
-                                            <p:cond delay="0"/>
-                                          </p:stCondLst>
-                                        </p:cTn>
-                                        <p:tgtEl>
-                                          <p:spTgt spid="3">
-                                            <p:txEl>
-                                              <p:pRg st="9" end="9"/>
-                                            </p:txEl>
-                                          </p:spTgt>
                                         </p:tgtEl>
                                         <p:attrNameLst>
                                           <p:attrName>style.visibility</p:attrName>

--- a/slides/Lecture_Chapter13.pptx
+++ b/slides/Lecture_Chapter13.pptx
@@ -20,9 +20,10 @@
     <p:sldId id="404" r:id="rId14"/>
     <p:sldId id="399" r:id="rId15"/>
     <p:sldId id="400" r:id="rId16"/>
-    <p:sldId id="480" r:id="rId17"/>
-    <p:sldId id="401" r:id="rId18"/>
-    <p:sldId id="402" r:id="rId19"/>
+    <p:sldId id="482" r:id="rId17"/>
+    <p:sldId id="480" r:id="rId18"/>
+    <p:sldId id="401" r:id="rId19"/>
+    <p:sldId id="402" r:id="rId20"/>
   </p:sldIdLst>
   <p:sldSz cx="12192000" cy="6858000"/>
   <p:notesSz cx="6858000" cy="9144000"/>
@@ -153,6 +154,7 @@
             <p14:sldId id="404"/>
             <p14:sldId id="399"/>
             <p14:sldId id="400"/>
+            <p14:sldId id="482"/>
             <p14:sldId id="480"/>
             <p14:sldId id="401"/>
           </p14:sldIdLst>
@@ -318,7 +320,7 @@
           <a:p>
             <a:fld id="{3E22BF2E-04DA-469E-97C5-BB68A0368813}" type="datetimeFigureOut">
               <a:rPr lang="en-US" smtClean="0"/>
-              <a:t>4/8/2026</a:t>
+              <a:t>4/10/2026</a:t>
             </a:fld>
             <a:endParaRPr lang="en-US"/>
           </a:p>
@@ -516,7 +518,7 @@
           <a:p>
             <a:fld id="{3E22BF2E-04DA-469E-97C5-BB68A0368813}" type="datetimeFigureOut">
               <a:rPr lang="en-US" smtClean="0"/>
-              <a:t>4/8/2026</a:t>
+              <a:t>4/10/2026</a:t>
             </a:fld>
             <a:endParaRPr lang="en-US"/>
           </a:p>
@@ -724,7 +726,7 @@
           <a:p>
             <a:fld id="{3E22BF2E-04DA-469E-97C5-BB68A0368813}" type="datetimeFigureOut">
               <a:rPr lang="en-US" smtClean="0"/>
-              <a:t>4/8/2026</a:t>
+              <a:t>4/10/2026</a:t>
             </a:fld>
             <a:endParaRPr lang="en-US"/>
           </a:p>
@@ -932,7 +934,7 @@
           <a:p>
             <a:fld id="{3E22BF2E-04DA-469E-97C5-BB68A0368813}" type="datetimeFigureOut">
               <a:rPr lang="en-US" smtClean="0"/>
-              <a:t>4/8/2026</a:t>
+              <a:t>4/10/2026</a:t>
             </a:fld>
             <a:endParaRPr lang="en-US"/>
           </a:p>
@@ -1207,7 +1209,7 @@
           <a:p>
             <a:fld id="{3E22BF2E-04DA-469E-97C5-BB68A0368813}" type="datetimeFigureOut">
               <a:rPr lang="en-US" smtClean="0"/>
-              <a:t>4/8/2026</a:t>
+              <a:t>4/10/2026</a:t>
             </a:fld>
             <a:endParaRPr lang="en-US"/>
           </a:p>
@@ -1472,7 +1474,7 @@
           <a:p>
             <a:fld id="{3E22BF2E-04DA-469E-97C5-BB68A0368813}" type="datetimeFigureOut">
               <a:rPr lang="en-US" smtClean="0"/>
-              <a:t>4/8/2026</a:t>
+              <a:t>4/10/2026</a:t>
             </a:fld>
             <a:endParaRPr lang="en-US"/>
           </a:p>
@@ -1884,7 +1886,7 @@
           <a:p>
             <a:fld id="{3E22BF2E-04DA-469E-97C5-BB68A0368813}" type="datetimeFigureOut">
               <a:rPr lang="en-US" smtClean="0"/>
-              <a:t>4/8/2026</a:t>
+              <a:t>4/10/2026</a:t>
             </a:fld>
             <a:endParaRPr lang="en-US"/>
           </a:p>
@@ -2025,7 +2027,7 @@
           <a:p>
             <a:fld id="{3E22BF2E-04DA-469E-97C5-BB68A0368813}" type="datetimeFigureOut">
               <a:rPr lang="en-US" smtClean="0"/>
-              <a:t>4/8/2026</a:t>
+              <a:t>4/10/2026</a:t>
             </a:fld>
             <a:endParaRPr lang="en-US"/>
           </a:p>
@@ -2138,7 +2140,7 @@
           <a:p>
             <a:fld id="{3E22BF2E-04DA-469E-97C5-BB68A0368813}" type="datetimeFigureOut">
               <a:rPr lang="en-US" smtClean="0"/>
-              <a:t>4/8/2026</a:t>
+              <a:t>4/10/2026</a:t>
             </a:fld>
             <a:endParaRPr lang="en-US"/>
           </a:p>
@@ -2449,7 +2451,7 @@
           <a:p>
             <a:fld id="{3E22BF2E-04DA-469E-97C5-BB68A0368813}" type="datetimeFigureOut">
               <a:rPr lang="en-US" smtClean="0"/>
-              <a:t>4/8/2026</a:t>
+              <a:t>4/10/2026</a:t>
             </a:fld>
             <a:endParaRPr lang="en-US"/>
           </a:p>
@@ -2737,7 +2739,7 @@
           <a:p>
             <a:fld id="{3E22BF2E-04DA-469E-97C5-BB68A0368813}" type="datetimeFigureOut">
               <a:rPr lang="en-US" smtClean="0"/>
-              <a:t>4/8/2026</a:t>
+              <a:t>4/10/2026</a:t>
             </a:fld>
             <a:endParaRPr lang="en-US"/>
           </a:p>
@@ -2978,7 +2980,7 @@
           <a:p>
             <a:fld id="{3E22BF2E-04DA-469E-97C5-BB68A0368813}" type="datetimeFigureOut">
               <a:rPr lang="en-US" smtClean="0"/>
-              <a:t>4/8/2026</a:t>
+              <a:t>4/10/2026</a:t>
             </a:fld>
             <a:endParaRPr lang="en-US"/>
           </a:p>
@@ -10136,6 +10138,156 @@
   <p:cSld>
     <p:spTree>
       <p:nvGrpSpPr>
+        <p:cNvPr id="1" name=""/>
+        <p:cNvGrpSpPr/>
+        <p:nvPr/>
+      </p:nvGrpSpPr>
+      <p:grpSpPr>
+        <a:xfrm>
+          <a:off x="0" y="0"/>
+          <a:ext cx="0" cy="0"/>
+          <a:chOff x="0" y="0"/>
+          <a:chExt cx="0" cy="0"/>
+        </a:xfrm>
+      </p:grpSpPr>
+      <p:sp>
+        <p:nvSpPr>
+          <p:cNvPr id="2" name="Title 1">
+            <a:extLst>
+              <a:ext uri="{FF2B5EF4-FFF2-40B4-BE49-F238E27FC236}">
+                <a16:creationId xmlns:a16="http://schemas.microsoft.com/office/drawing/2014/main" id="{875C9000-1199-6F7C-6812-37DA6DFCE941}"/>
+              </a:ext>
+            </a:extLst>
+          </p:cNvPr>
+          <p:cNvSpPr>
+            <a:spLocks noGrp="1"/>
+          </p:cNvSpPr>
+          <p:nvPr>
+            <p:ph type="title"/>
+          </p:nvPr>
+        </p:nvSpPr>
+        <p:spPr/>
+        <p:txBody>
+          <a:bodyPr>
+            <a:normAutofit fontScale="90000"/>
+          </a:bodyPr>
+          <a:lstStyle/>
+          <a:p>
+            <a:r>
+              <a:rPr lang="en-US" dirty="0"/>
+              <a:t>Off-Policy Learning with Policy Gradient Methods</a:t>
+            </a:r>
+          </a:p>
+        </p:txBody>
+      </p:sp>
+      <p:sp>
+        <p:nvSpPr>
+          <p:cNvPr id="3" name="Content Placeholder 2">
+            <a:extLst>
+              <a:ext uri="{FF2B5EF4-FFF2-40B4-BE49-F238E27FC236}">
+                <a16:creationId xmlns:a16="http://schemas.microsoft.com/office/drawing/2014/main" id="{928C7FF3-641D-4313-B780-E5F6466E03A2}"/>
+              </a:ext>
+            </a:extLst>
+          </p:cNvPr>
+          <p:cNvSpPr>
+            <a:spLocks noGrp="1"/>
+          </p:cNvSpPr>
+          <p:nvPr>
+            <p:ph idx="1"/>
+          </p:nvPr>
+        </p:nvSpPr>
+        <p:spPr/>
+        <p:txBody>
+          <a:bodyPr>
+            <a:normAutofit lnSpcReduction="10000"/>
+          </a:bodyPr>
+          <a:lstStyle/>
+          <a:p>
+            <a:r>
+              <a:rPr lang="en-US" dirty="0"/>
+              <a:t>We have only talked about on-policy methods. </a:t>
+            </a:r>
+            <a:br>
+              <a:rPr lang="en-US" dirty="0"/>
+            </a:br>
+            <a:br>
+              <a:rPr lang="en-US" dirty="0"/>
+            </a:br>
+            <a:r>
+              <a:rPr lang="en-US" dirty="0"/>
+              <a:t>This is fine since the parameterized policy can approximate the optimal deterministic policy.</a:t>
+            </a:r>
+          </a:p>
+          <a:p>
+            <a:endParaRPr lang="en-US" dirty="0"/>
+          </a:p>
+          <a:p>
+            <a:r>
+              <a:rPr lang="en-US" b="1" dirty="0"/>
+              <a:t>Issue</a:t>
+            </a:r>
+            <a:r>
+              <a:rPr lang="en-US" dirty="0"/>
+              <a:t>: We cannot use data collected from a different policy!</a:t>
+            </a:r>
+          </a:p>
+          <a:p>
+            <a:endParaRPr lang="en-US" b="1" dirty="0"/>
+          </a:p>
+          <a:p>
+            <a:r>
+              <a:rPr lang="en-US" b="1" dirty="0"/>
+              <a:t>Off-policy Actor-Critic methods </a:t>
+            </a:r>
+            <a:r>
+              <a:rPr lang="en-US" dirty="0"/>
+              <a:t>exist and are typically based on neural networks:</a:t>
+            </a:r>
+          </a:p>
+          <a:p>
+            <a:pPr lvl="1"/>
+            <a:r>
+              <a:rPr lang="en-US" dirty="0"/>
+              <a:t>Deep Deterministic Policy Gradient (DDPG) </a:t>
+            </a:r>
+          </a:p>
+          <a:p>
+            <a:pPr lvl="1"/>
+            <a:r>
+              <a:rPr lang="en-US" dirty="0"/>
+              <a:t>Twin Delayed DDPG (TD3) </a:t>
+            </a:r>
+          </a:p>
+          <a:p>
+            <a:pPr lvl="1"/>
+            <a:r>
+              <a:rPr lang="en-US" dirty="0"/>
+              <a:t>Soft Actor Critic (SAC) </a:t>
+            </a:r>
+          </a:p>
+          <a:p>
+            <a:endParaRPr lang="en-US" dirty="0"/>
+          </a:p>
+        </p:txBody>
+      </p:sp>
+    </p:spTree>
+    <p:extLst>
+      <p:ext uri="{BB962C8B-B14F-4D97-AF65-F5344CB8AC3E}">
+        <p14:creationId xmlns:p14="http://schemas.microsoft.com/office/powerpoint/2010/main" val="57481346"/>
+      </p:ext>
+    </p:extLst>
+  </p:cSld>
+  <p:clrMapOvr>
+    <a:masterClrMapping/>
+  </p:clrMapOvr>
+</p:sld>
+</file>
+
+<file path=ppt/slides/slide17.xml><?xml version="1.0" encoding="utf-8"?>
+<p:sld xmlns:a="http://schemas.openxmlformats.org/drawingml/2006/main" xmlns:r="http://schemas.openxmlformats.org/officeDocument/2006/relationships" xmlns:p="http://schemas.openxmlformats.org/presentationml/2006/main">
+  <p:cSld>
+    <p:spTree>
+      <p:nvGrpSpPr>
         <p:cNvPr id="1" name="">
           <a:extLst>
             <a:ext uri="{FF2B5EF4-FFF2-40B4-BE49-F238E27FC236}">
@@ -10223,7 +10375,7 @@
 </p:sld>
 </file>
 
-<file path=ppt/slides/slide17.xml><?xml version="1.0" encoding="utf-8"?>
+<file path=ppt/slides/slide18.xml><?xml version="1.0" encoding="utf-8"?>
 <p:sld xmlns:a="http://schemas.openxmlformats.org/drawingml/2006/main" xmlns:r="http://schemas.openxmlformats.org/officeDocument/2006/relationships" xmlns:p="http://schemas.openxmlformats.org/presentationml/2006/main">
   <p:cSld>
     <p:spTree>
@@ -11962,7 +12114,7 @@
 </p:sld>
 </file>
 
-<file path=ppt/slides/slide18.xml><?xml version="1.0" encoding="utf-8"?>
+<file path=ppt/slides/slide19.xml><?xml version="1.0" encoding="utf-8"?>
 <p:sld xmlns:a="http://schemas.openxmlformats.org/drawingml/2006/main" xmlns:r="http://schemas.openxmlformats.org/officeDocument/2006/relationships" xmlns:p="http://schemas.openxmlformats.org/presentationml/2006/main">
   <p:cSld>
     <p:bg>
@@ -20187,8 +20339,8 @@
           </a:p>
         </p:txBody>
       </p:sp>
-      <mc:AlternateContent xmlns:mc="http://schemas.openxmlformats.org/markup-compatibility/2006">
-        <mc:Choice xmlns:a14="http://schemas.microsoft.com/office/drawing/2010/main" Requires="a14">
+      <mc:AlternateContent xmlns:mc="http://schemas.openxmlformats.org/markup-compatibility/2006" xmlns:a14="http://schemas.microsoft.com/office/drawing/2010/main">
+        <mc:Choice Requires="a14">
           <p:sp>
             <p:nvSpPr>
               <p:cNvPr id="3" name="Content Placeholder 2">
@@ -21199,7 +21351,7 @@
             </p:txBody>
           </p:sp>
         </mc:Choice>
-        <mc:Fallback>
+        <mc:Fallback xmlns="">
           <p:sp>
             <p:nvSpPr>
               <p:cNvPr id="3" name="Content Placeholder 2">

--- a/slides/Lecture_Chapter13.pptx
+++ b/slides/Lecture_Chapter13.pptx
@@ -18,12 +18,13 @@
     <p:sldId id="405" r:id="rId12"/>
     <p:sldId id="403" r:id="rId13"/>
     <p:sldId id="404" r:id="rId14"/>
-    <p:sldId id="399" r:id="rId15"/>
-    <p:sldId id="400" r:id="rId16"/>
-    <p:sldId id="482" r:id="rId17"/>
-    <p:sldId id="480" r:id="rId18"/>
-    <p:sldId id="401" r:id="rId19"/>
-    <p:sldId id="402" r:id="rId20"/>
+    <p:sldId id="508" r:id="rId15"/>
+    <p:sldId id="399" r:id="rId16"/>
+    <p:sldId id="400" r:id="rId17"/>
+    <p:sldId id="482" r:id="rId18"/>
+    <p:sldId id="480" r:id="rId19"/>
+    <p:sldId id="401" r:id="rId20"/>
+    <p:sldId id="402" r:id="rId21"/>
   </p:sldIdLst>
   <p:sldSz cx="12192000" cy="6858000"/>
   <p:notesSz cx="6858000" cy="9144000"/>
@@ -152,6 +153,7 @@
           <p14:sldIdLst>
             <p14:sldId id="403"/>
             <p14:sldId id="404"/>
+            <p14:sldId id="508"/>
             <p14:sldId id="399"/>
             <p14:sldId id="400"/>
             <p14:sldId id="482"/>
@@ -320,7 +322,7 @@
           <a:p>
             <a:fld id="{3E22BF2E-04DA-469E-97C5-BB68A0368813}" type="datetimeFigureOut">
               <a:rPr lang="en-US" smtClean="0"/>
-              <a:t>4/10/2026</a:t>
+              <a:t>4/22/2026</a:t>
             </a:fld>
             <a:endParaRPr lang="en-US"/>
           </a:p>
@@ -518,7 +520,7 @@
           <a:p>
             <a:fld id="{3E22BF2E-04DA-469E-97C5-BB68A0368813}" type="datetimeFigureOut">
               <a:rPr lang="en-US" smtClean="0"/>
-              <a:t>4/10/2026</a:t>
+              <a:t>4/22/2026</a:t>
             </a:fld>
             <a:endParaRPr lang="en-US"/>
           </a:p>
@@ -726,7 +728,7 @@
           <a:p>
             <a:fld id="{3E22BF2E-04DA-469E-97C5-BB68A0368813}" type="datetimeFigureOut">
               <a:rPr lang="en-US" smtClean="0"/>
-              <a:t>4/10/2026</a:t>
+              <a:t>4/22/2026</a:t>
             </a:fld>
             <a:endParaRPr lang="en-US"/>
           </a:p>
@@ -934,7 +936,7 @@
           <a:p>
             <a:fld id="{3E22BF2E-04DA-469E-97C5-BB68A0368813}" type="datetimeFigureOut">
               <a:rPr lang="en-US" smtClean="0"/>
-              <a:t>4/10/2026</a:t>
+              <a:t>4/22/2026</a:t>
             </a:fld>
             <a:endParaRPr lang="en-US"/>
           </a:p>
@@ -1209,7 +1211,7 @@
           <a:p>
             <a:fld id="{3E22BF2E-04DA-469E-97C5-BB68A0368813}" type="datetimeFigureOut">
               <a:rPr lang="en-US" smtClean="0"/>
-              <a:t>4/10/2026</a:t>
+              <a:t>4/22/2026</a:t>
             </a:fld>
             <a:endParaRPr lang="en-US"/>
           </a:p>
@@ -1474,7 +1476,7 @@
           <a:p>
             <a:fld id="{3E22BF2E-04DA-469E-97C5-BB68A0368813}" type="datetimeFigureOut">
               <a:rPr lang="en-US" smtClean="0"/>
-              <a:t>4/10/2026</a:t>
+              <a:t>4/22/2026</a:t>
             </a:fld>
             <a:endParaRPr lang="en-US"/>
           </a:p>
@@ -1886,7 +1888,7 @@
           <a:p>
             <a:fld id="{3E22BF2E-04DA-469E-97C5-BB68A0368813}" type="datetimeFigureOut">
               <a:rPr lang="en-US" smtClean="0"/>
-              <a:t>4/10/2026</a:t>
+              <a:t>4/22/2026</a:t>
             </a:fld>
             <a:endParaRPr lang="en-US"/>
           </a:p>
@@ -2027,7 +2029,7 @@
           <a:p>
             <a:fld id="{3E22BF2E-04DA-469E-97C5-BB68A0368813}" type="datetimeFigureOut">
               <a:rPr lang="en-US" smtClean="0"/>
-              <a:t>4/10/2026</a:t>
+              <a:t>4/22/2026</a:t>
             </a:fld>
             <a:endParaRPr lang="en-US"/>
           </a:p>
@@ -2140,7 +2142,7 @@
           <a:p>
             <a:fld id="{3E22BF2E-04DA-469E-97C5-BB68A0368813}" type="datetimeFigureOut">
               <a:rPr lang="en-US" smtClean="0"/>
-              <a:t>4/10/2026</a:t>
+              <a:t>4/22/2026</a:t>
             </a:fld>
             <a:endParaRPr lang="en-US"/>
           </a:p>
@@ -2451,7 +2453,7 @@
           <a:p>
             <a:fld id="{3E22BF2E-04DA-469E-97C5-BB68A0368813}" type="datetimeFigureOut">
               <a:rPr lang="en-US" smtClean="0"/>
-              <a:t>4/10/2026</a:t>
+              <a:t>4/22/2026</a:t>
             </a:fld>
             <a:endParaRPr lang="en-US"/>
           </a:p>
@@ -2739,7 +2741,7 @@
           <a:p>
             <a:fld id="{3E22BF2E-04DA-469E-97C5-BB68A0368813}" type="datetimeFigureOut">
               <a:rPr lang="en-US" smtClean="0"/>
-              <a:t>4/10/2026</a:t>
+              <a:t>4/22/2026</a:t>
             </a:fld>
             <a:endParaRPr lang="en-US"/>
           </a:p>
@@ -2980,7 +2982,7 @@
           <a:p>
             <a:fld id="{3E22BF2E-04DA-469E-97C5-BB68A0368813}" type="datetimeFigureOut">
               <a:rPr lang="en-US" smtClean="0"/>
-              <a:t>4/10/2026</a:t>
+              <a:t>4/22/2026</a:t>
             </a:fld>
             <a:endParaRPr lang="en-US"/>
           </a:p>
@@ -6722,15 +6724,15 @@
             </p:spPr>
             <p:style>
               <a:lnRef idx="2">
-                <a:schemeClr val="accent2">
+                <a:schemeClr val="accent3">
                   <a:shade val="15000"/>
                 </a:schemeClr>
               </a:lnRef>
               <a:fillRef idx="1">
-                <a:schemeClr val="accent2"/>
+                <a:schemeClr val="accent3"/>
               </a:fillRef>
               <a:effectRef idx="0">
-                <a:schemeClr val="accent2"/>
+                <a:schemeClr val="accent3"/>
               </a:effectRef>
               <a:fontRef idx="minor">
                 <a:schemeClr val="lt1"/>
@@ -6933,13 +6935,13 @@
         </p:nvSpPr>
         <p:spPr>
           <a:xfrm>
-            <a:off x="7510072" y="1761344"/>
+            <a:off x="7354876" y="1611445"/>
             <a:ext cx="2645764" cy="476615"/>
           </a:xfrm>
           <a:prstGeom prst="wedgeRoundRectCallout">
             <a:avLst>
-              <a:gd name="adj1" fmla="val -106669"/>
-              <a:gd name="adj2" fmla="val 86089"/>
+              <a:gd name="adj1" fmla="val -106352"/>
+              <a:gd name="adj2" fmla="val 119531"/>
               <a:gd name="adj3" fmla="val 16667"/>
             </a:avLst>
           </a:prstGeom>
@@ -6968,6 +6970,76 @@
             <a:r>
               <a:rPr lang="en-US" dirty="0"/>
               <a:t>Policy Gradient Theorem</a:t>
+            </a:r>
+          </a:p>
+        </p:txBody>
+      </p:sp>
+      <p:sp>
+        <p:nvSpPr>
+          <p:cNvPr id="8" name="TextBox 7">
+            <a:extLst>
+              <a:ext uri="{FF2B5EF4-FFF2-40B4-BE49-F238E27FC236}">
+                <a16:creationId xmlns:a16="http://schemas.microsoft.com/office/drawing/2014/main" id="{08F7BA38-81CE-5AF0-45F9-43B4CCEA759D}"/>
+              </a:ext>
+            </a:extLst>
+          </p:cNvPr>
+          <p:cNvSpPr txBox="1"/>
+          <p:nvPr/>
+        </p:nvSpPr>
+        <p:spPr>
+          <a:xfrm>
+            <a:off x="8053431" y="5728889"/>
+            <a:ext cx="3783243" cy="923330"/>
+          </a:xfrm>
+          <a:prstGeom prst="rect">
+            <a:avLst/>
+          </a:prstGeom>
+        </p:spPr>
+        <p:style>
+          <a:lnRef idx="2">
+            <a:schemeClr val="accent2">
+              <a:shade val="15000"/>
+            </a:schemeClr>
+          </a:lnRef>
+          <a:fillRef idx="1">
+            <a:schemeClr val="accent2"/>
+          </a:fillRef>
+          <a:effectRef idx="0">
+            <a:schemeClr val="accent2"/>
+          </a:effectRef>
+          <a:fontRef idx="minor">
+            <a:schemeClr val="lt1"/>
+          </a:fontRef>
+        </p:style>
+        <p:txBody>
+          <a:bodyPr wrap="square" rtlCol="0">
+            <a:spAutoFit/>
+          </a:bodyPr>
+          <a:lstStyle/>
+          <a:p>
+            <a:r>
+              <a:rPr lang="en-US" dirty="0"/>
+              <a:t>Convergence to a local optimum:</a:t>
+            </a:r>
+          </a:p>
+          <a:p>
+            <a:pPr marL="285750" indent="-285750">
+              <a:buFont typeface="Arial" panose="020B0604020202020204" pitchFamily="34" charset="0"/>
+              <a:buChar char="•"/>
+            </a:pPr>
+            <a:r>
+              <a:rPr lang="en-US" dirty="0"/>
+              <a:t>linear approximation</a:t>
+            </a:r>
+          </a:p>
+          <a:p>
+            <a:pPr marL="285750" indent="-285750">
+              <a:buFont typeface="Arial" panose="020B0604020202020204" pitchFamily="34" charset="0"/>
+              <a:buChar char="•"/>
+            </a:pPr>
+            <a:r>
+              <a:rPr lang="en-US" dirty="0"/>
+              <a:t>step size reduction</a:t>
             </a:r>
           </a:p>
         </p:txBody>
@@ -7255,6 +7327,51 @@
                       </p:childTnLst>
                     </p:cTn>
                   </p:par>
+                  <p:par>
+                    <p:cTn id="25" fill="hold">
+                      <p:stCondLst>
+                        <p:cond delay="indefinite"/>
+                      </p:stCondLst>
+                      <p:childTnLst>
+                        <p:par>
+                          <p:cTn id="26" fill="hold">
+                            <p:stCondLst>
+                              <p:cond delay="0"/>
+                            </p:stCondLst>
+                            <p:childTnLst>
+                              <p:par>
+                                <p:cTn id="27" presetID="1" presetClass="entr" presetSubtype="0" fill="hold" grpId="0" nodeType="clickEffect">
+                                  <p:stCondLst>
+                                    <p:cond delay="0"/>
+                                  </p:stCondLst>
+                                  <p:childTnLst>
+                                    <p:set>
+                                      <p:cBhvr>
+                                        <p:cTn id="28" dur="1" fill="hold">
+                                          <p:stCondLst>
+                                            <p:cond delay="0"/>
+                                          </p:stCondLst>
+                                        </p:cTn>
+                                        <p:tgtEl>
+                                          <p:spTgt spid="8"/>
+                                        </p:tgtEl>
+                                        <p:attrNameLst>
+                                          <p:attrName>style.visibility</p:attrName>
+                                        </p:attrNameLst>
+                                      </p:cBhvr>
+                                      <p:to>
+                                        <p:strVal val="visible"/>
+                                      </p:to>
+                                    </p:set>
+                                  </p:childTnLst>
+                                </p:cTn>
+                              </p:par>
+                            </p:childTnLst>
+                          </p:cTn>
+                        </p:par>
+                      </p:childTnLst>
+                    </p:cTn>
+                  </p:par>
                 </p:childTnLst>
               </p:cTn>
               <p:prevCondLst>
@@ -7284,6 +7401,7 @@
       <p:bldP spid="10" grpId="0"/>
       <p:bldP spid="11" grpId="0" animBg="1"/>
       <p:bldP spid="5" grpId="0" animBg="1"/>
+      <p:bldP spid="8" grpId="0" animBg="1"/>
     </p:bldLst>
   </p:timing>
 </p:sld>
@@ -8097,69 +8215,62 @@
                       </a:rPr>
                       <m:t>𝑉</m:t>
                     </m:r>
-                    <m:r>
-                      <a:rPr lang="en-US" b="0" i="1" smtClean="0">
-                        <a:latin typeface="Cambria Math" panose="02040503050406030204" pitchFamily="18" charset="0"/>
-                      </a:rPr>
-                      <m:t>(</m:t>
-                    </m:r>
-                    <m:sSub>
-                      <m:sSubPr>
+                    <m:d>
+                      <m:dPr>
                         <m:ctrlPr>
                           <a:rPr lang="en-US" b="0" i="1" smtClean="0">
                             <a:latin typeface="Cambria Math" panose="02040503050406030204" pitchFamily="18" charset="0"/>
                           </a:rPr>
                         </m:ctrlPr>
-                      </m:sSubPr>
+                      </m:dPr>
                       <m:e>
-                        <m:r>
-                          <a:rPr lang="en-US" b="0" i="1" smtClean="0">
-                            <a:latin typeface="Cambria Math" panose="02040503050406030204" pitchFamily="18" charset="0"/>
-                          </a:rPr>
-                          <m:t>𝑆</m:t>
-                        </m:r>
+                        <m:sSub>
+                          <m:sSubPr>
+                            <m:ctrlPr>
+                              <a:rPr lang="en-US" b="0" i="1" smtClean="0">
+                                <a:latin typeface="Cambria Math" panose="02040503050406030204" pitchFamily="18" charset="0"/>
+                              </a:rPr>
+                            </m:ctrlPr>
+                          </m:sSubPr>
+                          <m:e>
+                            <m:r>
+                              <a:rPr lang="en-US" b="0" i="1" smtClean="0">
+                                <a:latin typeface="Cambria Math" panose="02040503050406030204" pitchFamily="18" charset="0"/>
+                              </a:rPr>
+                              <m:t>𝑆</m:t>
+                            </m:r>
+                          </m:e>
+                          <m:sub>
+                            <m:r>
+                              <a:rPr lang="en-US" b="0" i="1" smtClean="0">
+                                <a:latin typeface="Cambria Math" panose="02040503050406030204" pitchFamily="18" charset="0"/>
+                              </a:rPr>
+                              <m:t>𝑡</m:t>
+                            </m:r>
+                          </m:sub>
+                        </m:sSub>
                       </m:e>
-                      <m:sub>
-                        <m:r>
-                          <a:rPr lang="en-US" b="0" i="1" smtClean="0">
-                            <a:latin typeface="Cambria Math" panose="02040503050406030204" pitchFamily="18" charset="0"/>
-                          </a:rPr>
-                          <m:t>𝑡</m:t>
-                        </m:r>
-                      </m:sub>
-                    </m:sSub>
-                    <m:r>
-                      <a:rPr lang="en-US" b="0" i="1" smtClean="0">
-                        <a:latin typeface="Cambria Math" panose="02040503050406030204" pitchFamily="18" charset="0"/>
-                      </a:rPr>
-                      <m:t>)</m:t>
-                    </m:r>
+                    </m:d>
                   </m:oMath>
                 </a14:m>
-                <a:endParaRPr lang="en-US" dirty="0"/>
-              </a:p>
-              <a:p>
-                <a:endParaRPr lang="en-US" dirty="0"/>
-              </a:p>
-              <a:p>
-                <a:endParaRPr lang="en-US" dirty="0"/>
-              </a:p>
-              <a:p>
+                <a:br>
+                  <a:rPr lang="en-US" b="0" i="1" dirty="0">
+                    <a:latin typeface="Cambria Math" panose="02040503050406030204" pitchFamily="18" charset="0"/>
+                  </a:rPr>
+                </a:br>
+                <a:br>
+                  <a:rPr lang="en-US" b="0" i="1" dirty="0">
+                    <a:latin typeface="Cambria Math" panose="02040503050406030204" pitchFamily="18" charset="0"/>
+                  </a:rPr>
+                </a:br>
+                <a:br>
+                  <a:rPr lang="en-US" b="0" i="1" dirty="0">
+                    <a:latin typeface="Cambria Math" panose="02040503050406030204" pitchFamily="18" charset="0"/>
+                  </a:rPr>
+                </a:br>
                 <a:r>
                   <a:rPr lang="en-US" dirty="0"/>
-                  <a:t>The critic judges the actor’s action by comparing the received reward to the expected difference in value. </a:t>
-                </a:r>
-              </a:p>
-              <a:p>
-                <a:r>
-                  <a:rPr lang="en-US" dirty="0"/>
-                  <a:t>The TD error is used to update both approximations.</a:t>
-                </a:r>
-              </a:p>
-              <a:p>
-                <a:r>
-                  <a:rPr lang="en-US" dirty="0"/>
-                  <a:t>Some notes: </a:t>
+                  <a:t>The critic judges the actor’s action by comparing the received reward to the expected value difference. </a:t>
                 </a:r>
               </a:p>
               <a:p>
@@ -8177,10 +8288,33 @@
                 </a:r>
               </a:p>
               <a:p>
+                <a:endParaRPr lang="en-US" dirty="0"/>
+              </a:p>
+              <a:p>
+                <a:r>
+                  <a:rPr lang="en-US" dirty="0"/>
+                  <a:t>The TD error is used to update both approximations! For the policy update this means:</a:t>
+                </a:r>
+              </a:p>
+              <a:p>
                 <a:pPr lvl="1"/>
                 <a:r>
                   <a:rPr lang="en-US" dirty="0"/>
-                  <a:t>The critic’s value function estimate can be seen as an automatic baseline for REINFORCE. Therefore, variance is reduced and leads to more stable and faster learning.</a:t>
+                  <a:t>The update does no longer use MC as in REINFORCE. </a:t>
+                </a:r>
+              </a:p>
+              <a:p>
+                <a:pPr lvl="1"/>
+                <a:r>
+                  <a:rPr lang="en-US" dirty="0"/>
+                  <a:t>It uses a TD estimate of the return minus a value-function estimate as the baseline.</a:t>
+                </a:r>
+              </a:p>
+              <a:p>
+                <a:pPr lvl="1"/>
+                <a:r>
+                  <a:rPr lang="en-US" dirty="0"/>
+                  <a:t>This reduces variability and can improve learning. </a:t>
                 </a:r>
               </a:p>
             </p:txBody>
@@ -8211,7 +8345,7 @@
               <a:blipFill>
                 <a:blip r:embed="rId2"/>
                 <a:stretch>
-                  <a:fillRect l="-543" t="-1921" b="-360"/>
+                  <a:fillRect l="-543" t="-1921"/>
                 </a:stretch>
               </a:blipFill>
             </p:spPr>
@@ -8264,7 +8398,7 @@
         </p:blipFill>
         <p:spPr>
           <a:xfrm>
-            <a:off x="8389575" y="1349962"/>
+            <a:off x="8389575" y="1124198"/>
             <a:ext cx="3362325" cy="3333750"/>
           </a:xfrm>
           <a:prstGeom prst="rect">
@@ -8272,186 +8406,59 @@
           </a:prstGeom>
         </p:spPr>
       </p:pic>
-      <p:grpSp>
-        <p:nvGrpSpPr>
-          <p:cNvPr id="7" name="Group 6">
+      <p:sp>
+        <p:nvSpPr>
+          <p:cNvPr id="8" name="Speech Bubble: Rectangle with Corners Rounded 7">
             <a:extLst>
               <a:ext uri="{FF2B5EF4-FFF2-40B4-BE49-F238E27FC236}">
-                <a16:creationId xmlns:a16="http://schemas.microsoft.com/office/drawing/2014/main" id="{6EE1EC02-0E85-59B4-53D1-CF80106110C6}"/>
+                <a16:creationId xmlns:a16="http://schemas.microsoft.com/office/drawing/2014/main" id="{DCFB1FF7-D494-0158-F859-80659F0FB6F8}"/>
               </a:ext>
             </a:extLst>
           </p:cNvPr>
-          <p:cNvGrpSpPr/>
+          <p:cNvSpPr/>
           <p:nvPr/>
-        </p:nvGrpSpPr>
-        <p:grpSpPr>
+        </p:nvSpPr>
+        <p:spPr>
           <a:xfrm>
-            <a:off x="3443130" y="3382666"/>
-            <a:ext cx="1589562" cy="413183"/>
-            <a:chOff x="3405695" y="3340656"/>
-            <a:chExt cx="1689815" cy="532713"/>
+            <a:off x="6560775" y="3016837"/>
+            <a:ext cx="1828800" cy="635194"/>
           </a:xfrm>
-        </p:grpSpPr>
-        <p:sp>
-          <p:nvSpPr>
-            <p:cNvPr id="2" name="Right Brace 1">
-              <a:extLst>
-                <a:ext uri="{FF2B5EF4-FFF2-40B4-BE49-F238E27FC236}">
-                  <a16:creationId xmlns:a16="http://schemas.microsoft.com/office/drawing/2014/main" id="{F21A47E0-5923-32BA-8CA1-9B8A44E0B299}"/>
-                </a:ext>
-              </a:extLst>
-            </p:cNvPr>
-            <p:cNvSpPr/>
-            <p:nvPr/>
-          </p:nvSpPr>
-          <p:spPr>
-            <a:xfrm rot="5400000">
-              <a:off x="4168912" y="2577439"/>
-              <a:ext cx="163381" cy="1689815"/>
-            </a:xfrm>
-            <a:prstGeom prst="rightBrace">
-              <a:avLst/>
-            </a:prstGeom>
-          </p:spPr>
-          <p:style>
-            <a:lnRef idx="2">
-              <a:schemeClr val="accent1"/>
-            </a:lnRef>
-            <a:fillRef idx="0">
-              <a:schemeClr val="accent1"/>
-            </a:fillRef>
-            <a:effectRef idx="1">
-              <a:schemeClr val="accent1"/>
-            </a:effectRef>
-            <a:fontRef idx="minor">
-              <a:schemeClr val="tx1"/>
-            </a:fontRef>
-          </p:style>
-          <p:txBody>
-            <a:bodyPr rtlCol="0" anchor="ctr"/>
-            <a:lstStyle/>
-            <a:p>
-              <a:pPr algn="ctr"/>
-              <a:endParaRPr lang="en-US"/>
-            </a:p>
-          </p:txBody>
-        </p:sp>
-        <mc:AlternateContent xmlns:mc="http://schemas.openxmlformats.org/markup-compatibility/2006" xmlns:a14="http://schemas.microsoft.com/office/drawing/2010/main">
-          <mc:Choice Requires="a14">
-            <p:sp>
-              <p:nvSpPr>
-                <p:cNvPr id="3" name="TextBox 2">
-                  <a:extLst>
-                    <a:ext uri="{FF2B5EF4-FFF2-40B4-BE49-F238E27FC236}">
-                      <a16:creationId xmlns:a16="http://schemas.microsoft.com/office/drawing/2014/main" id="{FE44EC0C-68CE-F46E-BDCD-00F436214356}"/>
-                    </a:ext>
-                  </a:extLst>
-                </p:cNvPr>
-                <p:cNvSpPr txBox="1"/>
-                <p:nvPr/>
-              </p:nvSpPr>
-              <p:spPr>
-                <a:xfrm>
-                  <a:off x="3955535" y="3504037"/>
-                  <a:ext cx="590133" cy="369332"/>
-                </a:xfrm>
-                <a:prstGeom prst="rect">
-                  <a:avLst/>
-                </a:prstGeom>
-                <a:noFill/>
-              </p:spPr>
-              <p:txBody>
-                <a:bodyPr wrap="square" rtlCol="0">
-                  <a:spAutoFit/>
-                </a:bodyPr>
-                <a:lstStyle/>
-                <a:p>
-                  <a:pPr/>
-                  <a14:m>
-                    <m:oMathPara xmlns:m="http://schemas.openxmlformats.org/officeDocument/2006/math">
-                      <m:oMathParaPr>
-                        <m:jc m:val="centerGroup"/>
-                      </m:oMathParaPr>
-                      <m:oMath xmlns:m="http://schemas.openxmlformats.org/officeDocument/2006/math">
-                        <m:sSub>
-                          <m:sSubPr>
-                            <m:ctrlPr>
-                              <a:rPr lang="en-US" b="0" i="1" smtClean="0">
-                                <a:latin typeface="Cambria Math" panose="02040503050406030204" pitchFamily="18" charset="0"/>
-                              </a:rPr>
-                            </m:ctrlPr>
-                          </m:sSubPr>
-                          <m:e>
-                            <m:r>
-                              <a:rPr lang="en-US" b="0" i="1" smtClean="0">
-                                <a:latin typeface="Cambria Math" panose="02040503050406030204" pitchFamily="18" charset="0"/>
-                              </a:rPr>
-                              <m:t>𝑈</m:t>
-                            </m:r>
-                          </m:e>
-                          <m:sub>
-                            <m:r>
-                              <a:rPr lang="en-US" b="0" i="1" smtClean="0">
-                                <a:latin typeface="Cambria Math" panose="02040503050406030204" pitchFamily="18" charset="0"/>
-                              </a:rPr>
-                              <m:t>𝑡</m:t>
-                            </m:r>
-                          </m:sub>
-                        </m:sSub>
-                      </m:oMath>
-                    </m:oMathPara>
-                  </a14:m>
-                  <a:endParaRPr lang="en-US" dirty="0"/>
-                </a:p>
-              </p:txBody>
-            </p:sp>
-          </mc:Choice>
-          <mc:Fallback xmlns="">
-            <p:sp>
-              <p:nvSpPr>
-                <p:cNvPr id="3" name="TextBox 2">
-                  <a:extLst>
-                    <a:ext uri="{FF2B5EF4-FFF2-40B4-BE49-F238E27FC236}">
-                      <a16:creationId xmlns:a16="http://schemas.microsoft.com/office/drawing/2014/main" id="{FE44EC0C-68CE-F46E-BDCD-00F436214356}"/>
-                    </a:ext>
-                  </a:extLst>
-                </p:cNvPr>
-                <p:cNvSpPr txBox="1">
-                  <a:spLocks noRot="1" noChangeAspect="1" noMove="1" noResize="1" noEditPoints="1" noAdjustHandles="1" noChangeArrowheads="1" noChangeShapeType="1" noTextEdit="1"/>
-                </p:cNvSpPr>
-                <p:nvPr/>
-              </p:nvSpPr>
-              <p:spPr>
-                <a:xfrm>
-                  <a:off x="3955535" y="3504037"/>
-                  <a:ext cx="590133" cy="369332"/>
-                </a:xfrm>
-                <a:prstGeom prst="rect">
-                  <a:avLst/>
-                </a:prstGeom>
-                <a:blipFill>
-                  <a:blip r:embed="rId5"/>
-                  <a:stretch>
-                    <a:fillRect b="-25532"/>
-                  </a:stretch>
-                </a:blipFill>
-              </p:spPr>
-              <p:txBody>
-                <a:bodyPr/>
-                <a:lstStyle/>
-                <a:p>
-                  <a:r>
-                    <a:rPr lang="en-US">
-                      <a:noFill/>
-                    </a:rPr>
-                    <a:t> </a:t>
-                  </a:r>
-                </a:p>
-              </p:txBody>
-            </p:sp>
-          </mc:Fallback>
-        </mc:AlternateContent>
-      </p:grpSp>
+          <a:prstGeom prst="wedgeRoundRectCallout">
+            <a:avLst>
+              <a:gd name="adj1" fmla="val -83535"/>
+              <a:gd name="adj2" fmla="val -24313"/>
+              <a:gd name="adj3" fmla="val 16667"/>
+            </a:avLst>
+          </a:prstGeom>
+        </p:spPr>
+        <p:style>
+          <a:lnRef idx="2">
+            <a:schemeClr val="accent1">
+              <a:shade val="15000"/>
+            </a:schemeClr>
+          </a:lnRef>
+          <a:fillRef idx="1">
+            <a:schemeClr val="accent1"/>
+          </a:fillRef>
+          <a:effectRef idx="0">
+            <a:schemeClr val="accent1"/>
+          </a:effectRef>
+          <a:fontRef idx="minor">
+            <a:schemeClr val="lt1"/>
+          </a:fontRef>
+        </p:style>
+        <p:txBody>
+          <a:bodyPr rtlCol="0" anchor="ctr"/>
+          <a:lstStyle/>
+          <a:p>
+            <a:pPr algn="ctr"/>
+            <a:r>
+              <a:rPr lang="en-US" sz="1400" dirty="0"/>
+              <a:t>Can be seen as a learned baseline for the policy update!</a:t>
+            </a:r>
+          </a:p>
+        </p:txBody>
+      </p:sp>
     </p:spTree>
     <p:extLst>
       <p:ext uri="{BB962C8B-B14F-4D97-AF65-F5344CB8AC3E}">
@@ -8612,7 +8619,7 @@
                                 </p:cTn>
                               </p:par>
                               <p:par>
-                                <p:cTn id="15" presetID="1" presetClass="entr" presetSubtype="0" fill="hold" nodeType="withEffect">
+                                <p:cTn id="15" presetID="1" presetClass="entr" presetSubtype="0" fill="hold" grpId="0" nodeType="withEffect">
                                   <p:stCondLst>
                                     <p:cond delay="0"/>
                                   </p:stCondLst>
@@ -8625,7 +8632,11 @@
                                           </p:stCondLst>
                                         </p:cTn>
                                         <p:tgtEl>
-                                          <p:spTgt spid="7"/>
+                                          <p:spTgt spid="5">
+                                            <p:txEl>
+                                              <p:pRg st="3" end="3"/>
+                                            </p:txEl>
+                                          </p:spTgt>
                                         </p:tgtEl>
                                         <p:attrNameLst>
                                           <p:attrName>style.visibility</p:attrName>
@@ -8638,33 +8649,15 @@
                                   </p:childTnLst>
                                 </p:cTn>
                               </p:par>
-                            </p:childTnLst>
-                          </p:cTn>
-                        </p:par>
-                      </p:childTnLst>
-                    </p:cTn>
-                  </p:par>
-                  <p:par>
-                    <p:cTn id="17" fill="hold">
-                      <p:stCondLst>
-                        <p:cond delay="indefinite"/>
-                      </p:stCondLst>
-                      <p:childTnLst>
-                        <p:par>
-                          <p:cTn id="18" fill="hold">
-                            <p:stCondLst>
-                              <p:cond delay="0"/>
-                            </p:stCondLst>
-                            <p:childTnLst>
                               <p:par>
-                                <p:cTn id="19" presetID="1" presetClass="entr" presetSubtype="0" fill="hold" grpId="0" nodeType="clickEffect">
+                                <p:cTn id="17" presetID="1" presetClass="entr" presetSubtype="0" fill="hold" grpId="0" nodeType="withEffect">
                                   <p:stCondLst>
                                     <p:cond delay="0"/>
                                   </p:stCondLst>
                                   <p:childTnLst>
                                     <p:set>
                                       <p:cBhvr>
-                                        <p:cTn id="20" dur="1" fill="hold">
+                                        <p:cTn id="18" dur="1" fill="hold">
                                           <p:stCondLst>
                                             <p:cond delay="0"/>
                                           </p:stCondLst>
@@ -8672,7 +8665,7 @@
                                         <p:tgtEl>
                                           <p:spTgt spid="5">
                                             <p:txEl>
-                                              <p:pRg st="5" end="5"/>
+                                              <p:pRg st="4" end="4"/>
                                             </p:txEl>
                                           </p:spTgt>
                                         </p:tgtEl>
@@ -8694,26 +8687,26 @@
                     </p:cTn>
                   </p:par>
                   <p:par>
-                    <p:cTn id="21" fill="hold">
+                    <p:cTn id="19" fill="hold">
                       <p:stCondLst>
                         <p:cond delay="indefinite"/>
                       </p:stCondLst>
                       <p:childTnLst>
                         <p:par>
-                          <p:cTn id="22" fill="hold">
+                          <p:cTn id="20" fill="hold">
                             <p:stCondLst>
                               <p:cond delay="0"/>
                             </p:stCondLst>
                             <p:childTnLst>
                               <p:par>
-                                <p:cTn id="23" presetID="1" presetClass="entr" presetSubtype="0" fill="hold" grpId="0" nodeType="clickEffect">
+                                <p:cTn id="21" presetID="1" presetClass="entr" presetSubtype="0" fill="hold" grpId="0" nodeType="clickEffect">
                                   <p:stCondLst>
                                     <p:cond delay="0"/>
                                   </p:stCondLst>
                                   <p:childTnLst>
                                     <p:set>
                                       <p:cBhvr>
-                                        <p:cTn id="24" dur="1" fill="hold">
+                                        <p:cTn id="22" dur="1" fill="hold">
                                           <p:stCondLst>
                                             <p:cond delay="0"/>
                                           </p:stCondLst>
@@ -8736,33 +8729,15 @@
                                   </p:childTnLst>
                                 </p:cTn>
                               </p:par>
-                            </p:childTnLst>
-                          </p:cTn>
-                        </p:par>
-                      </p:childTnLst>
-                    </p:cTn>
-                  </p:par>
-                  <p:par>
-                    <p:cTn id="25" fill="hold">
-                      <p:stCondLst>
-                        <p:cond delay="indefinite"/>
-                      </p:stCondLst>
-                      <p:childTnLst>
-                        <p:par>
-                          <p:cTn id="26" fill="hold">
-                            <p:stCondLst>
-                              <p:cond delay="0"/>
-                            </p:stCondLst>
-                            <p:childTnLst>
                               <p:par>
-                                <p:cTn id="27" presetID="1" presetClass="entr" presetSubtype="0" fill="hold" grpId="0" nodeType="clickEffect">
+                                <p:cTn id="23" presetID="1" presetClass="entr" presetSubtype="0" fill="hold" grpId="0" nodeType="withEffect">
                                   <p:stCondLst>
                                     <p:cond delay="0"/>
                                   </p:stCondLst>
                                   <p:childTnLst>
                                     <p:set>
                                       <p:cBhvr>
-                                        <p:cTn id="28" dur="1" fill="hold">
+                                        <p:cTn id="24" dur="1" fill="hold">
                                           <p:stCondLst>
                                             <p:cond delay="0"/>
                                           </p:stCondLst>
@@ -8786,14 +8761,14 @@
                                 </p:cTn>
                               </p:par>
                               <p:par>
-                                <p:cTn id="29" presetID="1" presetClass="entr" presetSubtype="0" fill="hold" grpId="0" nodeType="withEffect">
+                                <p:cTn id="25" presetID="1" presetClass="entr" presetSubtype="0" fill="hold" grpId="0" nodeType="withEffect">
                                   <p:stCondLst>
                                     <p:cond delay="0"/>
                                   </p:stCondLst>
                                   <p:childTnLst>
                                     <p:set>
                                       <p:cBhvr>
-                                        <p:cTn id="30" dur="1" fill="hold">
+                                        <p:cTn id="26" dur="1" fill="hold">
                                           <p:stCondLst>
                                             <p:cond delay="0"/>
                                           </p:stCondLst>
@@ -8817,14 +8792,14 @@
                                 </p:cTn>
                               </p:par>
                               <p:par>
-                                <p:cTn id="31" presetID="1" presetClass="entr" presetSubtype="0" fill="hold" grpId="0" nodeType="withEffect">
+                                <p:cTn id="27" presetID="1" presetClass="entr" presetSubtype="0" fill="hold" grpId="0" nodeType="withEffect">
                                   <p:stCondLst>
                                     <p:cond delay="0"/>
                                   </p:stCondLst>
                                   <p:childTnLst>
                                     <p:set>
                                       <p:cBhvr>
-                                        <p:cTn id="32" dur="1" fill="hold">
+                                        <p:cTn id="28" dur="1" fill="hold">
                                           <p:stCondLst>
                                             <p:cond delay="0"/>
                                           </p:stCondLst>
@@ -8847,25 +8822,39 @@
                                   </p:childTnLst>
                                 </p:cTn>
                               </p:par>
+                            </p:childTnLst>
+                          </p:cTn>
+                        </p:par>
+                      </p:childTnLst>
+                    </p:cTn>
+                  </p:par>
+                  <p:par>
+                    <p:cTn id="29" fill="hold">
+                      <p:stCondLst>
+                        <p:cond delay="indefinite"/>
+                      </p:stCondLst>
+                      <p:childTnLst>
+                        <p:par>
+                          <p:cTn id="30" fill="hold">
+                            <p:stCondLst>
+                              <p:cond delay="0"/>
+                            </p:stCondLst>
+                            <p:childTnLst>
                               <p:par>
-                                <p:cTn id="33" presetID="1" presetClass="entr" presetSubtype="0" fill="hold" grpId="0" nodeType="withEffect">
+                                <p:cTn id="31" presetID="1" presetClass="entr" presetSubtype="0" fill="hold" grpId="0" nodeType="clickEffect">
                                   <p:stCondLst>
                                     <p:cond delay="0"/>
                                   </p:stCondLst>
                                   <p:childTnLst>
                                     <p:set>
                                       <p:cBhvr>
-                                        <p:cTn id="34" dur="1" fill="hold">
+                                        <p:cTn id="32" dur="1" fill="hold">
                                           <p:stCondLst>
                                             <p:cond delay="0"/>
                                           </p:stCondLst>
                                         </p:cTn>
                                         <p:tgtEl>
-                                          <p:spTgt spid="5">
-                                            <p:txEl>
-                                              <p:pRg st="10" end="10"/>
-                                            </p:txEl>
-                                          </p:spTgt>
+                                          <p:spTgt spid="8"/>
                                         </p:tgtEl>
                                         <p:attrNameLst>
                                           <p:attrName>style.visibility</p:attrName>
@@ -8906,13 +8895,1388 @@
       </p:par>
     </p:tnLst>
     <p:bldLst>
-      <p:bldP spid="5" grpId="0" uiExpand="1" build="p"/>
+      <p:bldP spid="5" grpId="0" build="p"/>
+      <p:bldP spid="8" grpId="0" animBg="1"/>
     </p:bldLst>
   </p:timing>
 </p:sld>
 </file>
 
 <file path=ppt/slides/slide14.xml><?xml version="1.0" encoding="utf-8"?>
+<p:sld xmlns:a="http://schemas.openxmlformats.org/drawingml/2006/main" xmlns:r="http://schemas.openxmlformats.org/officeDocument/2006/relationships" xmlns:p="http://schemas.openxmlformats.org/presentationml/2006/main">
+  <p:cSld>
+    <p:spTree>
+      <p:nvGrpSpPr>
+        <p:cNvPr id="1" name=""/>
+        <p:cNvGrpSpPr/>
+        <p:nvPr/>
+      </p:nvGrpSpPr>
+      <p:grpSpPr>
+        <a:xfrm>
+          <a:off x="0" y="0"/>
+          <a:ext cx="0" cy="0"/>
+          <a:chOff x="0" y="0"/>
+          <a:chExt cx="0" cy="0"/>
+        </a:xfrm>
+      </p:grpSpPr>
+      <p:sp>
+        <p:nvSpPr>
+          <p:cNvPr id="2" name="Title 1">
+            <a:extLst>
+              <a:ext uri="{FF2B5EF4-FFF2-40B4-BE49-F238E27FC236}">
+                <a16:creationId xmlns:a16="http://schemas.microsoft.com/office/drawing/2014/main" id="{B0D5DEE8-3A5A-1680-25D9-56A4677DFF93}"/>
+              </a:ext>
+            </a:extLst>
+          </p:cNvPr>
+          <p:cNvSpPr>
+            <a:spLocks noGrp="1"/>
+          </p:cNvSpPr>
+          <p:nvPr>
+            <p:ph type="title"/>
+          </p:nvPr>
+        </p:nvSpPr>
+        <p:spPr/>
+        <p:txBody>
+          <a:bodyPr/>
+          <a:lstStyle/>
+          <a:p>
+            <a:r>
+              <a:rPr lang="en-US" dirty="0"/>
+              <a:t>The Policy Gradient Update Signal</a:t>
+            </a:r>
+          </a:p>
+        </p:txBody>
+      </p:sp>
+      <mc:AlternateContent xmlns:mc="http://schemas.openxmlformats.org/markup-compatibility/2006">
+        <mc:Choice xmlns:a14="http://schemas.microsoft.com/office/drawing/2010/main" Requires="a14">
+          <p:sp>
+            <p:nvSpPr>
+              <p:cNvPr id="3" name="Content Placeholder 2">
+                <a:extLst>
+                  <a:ext uri="{FF2B5EF4-FFF2-40B4-BE49-F238E27FC236}">
+                    <a16:creationId xmlns:a16="http://schemas.microsoft.com/office/drawing/2014/main" id="{B72662DD-E598-030D-12ED-27652D3DF7F1}"/>
+                  </a:ext>
+                </a:extLst>
+              </p:cNvPr>
+              <p:cNvSpPr>
+                <a:spLocks noGrp="1"/>
+              </p:cNvSpPr>
+              <p:nvPr>
+                <p:ph idx="1"/>
+              </p:nvPr>
+            </p:nvSpPr>
+            <p:spPr/>
+            <p:txBody>
+              <a:bodyPr>
+                <a:normAutofit fontScale="92500" lnSpcReduction="20000"/>
+              </a:bodyPr>
+              <a:lstStyle/>
+              <a:p>
+                <a:r>
+                  <a:rPr lang="en-US" dirty="0"/>
+                  <a:t>True policy gradient</a:t>
+                </a:r>
+                <a:br>
+                  <a:rPr lang="en-US" dirty="0"/>
+                </a:br>
+                <a:br>
+                  <a:rPr lang="en-US" dirty="0"/>
+                </a:br>
+                <a14:m>
+                  <m:oMath xmlns:m="http://schemas.openxmlformats.org/officeDocument/2006/math">
+                    <m:r>
+                      <m:rPr>
+                        <m:sty m:val="p"/>
+                      </m:rPr>
+                      <a:rPr lang="en-US">
+                        <a:latin typeface="Cambria Math" panose="02040503050406030204" pitchFamily="18" charset="0"/>
+                        <a:ea typeface="Cambria Math" panose="02040503050406030204" pitchFamily="18" charset="0"/>
+                      </a:rPr>
+                      <m:t>∇</m:t>
+                    </m:r>
+                    <m:r>
+                      <a:rPr lang="en-US" i="1">
+                        <a:latin typeface="Cambria Math" panose="02040503050406030204" pitchFamily="18" charset="0"/>
+                        <a:ea typeface="Cambria Math" panose="02040503050406030204" pitchFamily="18" charset="0"/>
+                      </a:rPr>
+                      <m:t>𝐽</m:t>
+                    </m:r>
+                    <m:d>
+                      <m:dPr>
+                        <m:ctrlPr>
+                          <a:rPr lang="en-US" i="1">
+                            <a:latin typeface="Cambria Math" panose="02040503050406030204" pitchFamily="18" charset="0"/>
+                            <a:ea typeface="Cambria Math" panose="02040503050406030204" pitchFamily="18" charset="0"/>
+                          </a:rPr>
+                        </m:ctrlPr>
+                      </m:dPr>
+                      <m:e>
+                        <m:r>
+                          <a:rPr lang="en-US" b="1" i="1">
+                            <a:latin typeface="Cambria Math" panose="02040503050406030204" pitchFamily="18" charset="0"/>
+                            <a:ea typeface="Cambria Math" panose="02040503050406030204" pitchFamily="18" charset="0"/>
+                          </a:rPr>
+                          <m:t>𝜽</m:t>
+                        </m:r>
+                      </m:e>
+                    </m:d>
+                    <m:r>
+                      <a:rPr lang="en-US" i="1">
+                        <a:latin typeface="Cambria Math" panose="02040503050406030204" pitchFamily="18" charset="0"/>
+                        <a:ea typeface="Cambria Math" panose="02040503050406030204" pitchFamily="18" charset="0"/>
+                      </a:rPr>
+                      <m:t>=</m:t>
+                    </m:r>
+                    <m:sSub>
+                      <m:sSubPr>
+                        <m:ctrlPr>
+                          <a:rPr lang="en-US" i="1">
+                            <a:latin typeface="Cambria Math" panose="02040503050406030204" pitchFamily="18" charset="0"/>
+                            <a:ea typeface="Cambria Math" panose="02040503050406030204" pitchFamily="18" charset="0"/>
+                          </a:rPr>
+                        </m:ctrlPr>
+                      </m:sSubPr>
+                      <m:e>
+                        <m:r>
+                          <a:rPr lang="en-US" i="1">
+                            <a:latin typeface="Cambria Math" panose="02040503050406030204" pitchFamily="18" charset="0"/>
+                            <a:ea typeface="Cambria Math" panose="02040503050406030204" pitchFamily="18" charset="0"/>
+                          </a:rPr>
+                          <m:t>𝔼</m:t>
+                        </m:r>
+                      </m:e>
+                      <m:sub>
+                        <m:r>
+                          <a:rPr lang="en-US" i="1">
+                            <a:latin typeface="Cambria Math" panose="02040503050406030204" pitchFamily="18" charset="0"/>
+                            <a:ea typeface="Cambria Math" panose="02040503050406030204" pitchFamily="18" charset="0"/>
+                          </a:rPr>
+                          <m:t>𝜋</m:t>
+                        </m:r>
+                      </m:sub>
+                    </m:sSub>
+                    <m:d>
+                      <m:dPr>
+                        <m:begChr m:val="["/>
+                        <m:endChr m:val="]"/>
+                        <m:ctrlPr>
+                          <a:rPr lang="en-US" i="1">
+                            <a:latin typeface="Cambria Math" panose="02040503050406030204" pitchFamily="18" charset="0"/>
+                            <a:ea typeface="Cambria Math" panose="02040503050406030204" pitchFamily="18" charset="0"/>
+                          </a:rPr>
+                        </m:ctrlPr>
+                      </m:dPr>
+                      <m:e>
+                        <m:sSub>
+                          <m:sSubPr>
+                            <m:ctrlPr>
+                              <a:rPr lang="en-US" i="1">
+                                <a:latin typeface="Cambria Math" panose="02040503050406030204" pitchFamily="18" charset="0"/>
+                                <a:ea typeface="Cambria Math" panose="02040503050406030204" pitchFamily="18" charset="0"/>
+                              </a:rPr>
+                            </m:ctrlPr>
+                          </m:sSubPr>
+                          <m:e>
+                            <m:r>
+                              <a:rPr lang="en-US" i="1">
+                                <a:latin typeface="Cambria Math" panose="02040503050406030204" pitchFamily="18" charset="0"/>
+                                <a:ea typeface="Cambria Math" panose="02040503050406030204" pitchFamily="18" charset="0"/>
+                              </a:rPr>
+                              <m:t>𝑞</m:t>
+                            </m:r>
+                          </m:e>
+                          <m:sub>
+                            <m:r>
+                              <a:rPr lang="en-US" i="1">
+                                <a:latin typeface="Cambria Math" panose="02040503050406030204" pitchFamily="18" charset="0"/>
+                                <a:ea typeface="Cambria Math" panose="02040503050406030204" pitchFamily="18" charset="0"/>
+                              </a:rPr>
+                              <m:t>𝜋</m:t>
+                            </m:r>
+                          </m:sub>
+                        </m:sSub>
+                        <m:d>
+                          <m:dPr>
+                            <m:ctrlPr>
+                              <a:rPr lang="en-US" i="1">
+                                <a:latin typeface="Cambria Math" panose="02040503050406030204" pitchFamily="18" charset="0"/>
+                                <a:ea typeface="Cambria Math" panose="02040503050406030204" pitchFamily="18" charset="0"/>
+                              </a:rPr>
+                            </m:ctrlPr>
+                          </m:dPr>
+                          <m:e>
+                            <m:r>
+                              <a:rPr lang="en-US" i="1">
+                                <a:latin typeface="Cambria Math" panose="02040503050406030204" pitchFamily="18" charset="0"/>
+                                <a:ea typeface="Cambria Math" panose="02040503050406030204" pitchFamily="18" charset="0"/>
+                              </a:rPr>
+                              <m:t>𝑠</m:t>
+                            </m:r>
+                            <m:r>
+                              <a:rPr lang="en-US" i="1">
+                                <a:latin typeface="Cambria Math" panose="02040503050406030204" pitchFamily="18" charset="0"/>
+                                <a:ea typeface="Cambria Math" panose="02040503050406030204" pitchFamily="18" charset="0"/>
+                              </a:rPr>
+                              <m:t>,</m:t>
+                            </m:r>
+                            <m:r>
+                              <a:rPr lang="en-US" i="1">
+                                <a:latin typeface="Cambria Math" panose="02040503050406030204" pitchFamily="18" charset="0"/>
+                                <a:ea typeface="Cambria Math" panose="02040503050406030204" pitchFamily="18" charset="0"/>
+                              </a:rPr>
+                              <m:t>𝑎</m:t>
+                            </m:r>
+                          </m:e>
+                        </m:d>
+                        <m:r>
+                          <a:rPr lang="en-US" b="0" i="1" smtClean="0">
+                            <a:latin typeface="Cambria Math" panose="02040503050406030204" pitchFamily="18" charset="0"/>
+                            <a:ea typeface="Cambria Math" panose="02040503050406030204" pitchFamily="18" charset="0"/>
+                          </a:rPr>
+                          <m:t> </m:t>
+                        </m:r>
+                        <m:r>
+                          <m:rPr>
+                            <m:sty m:val="p"/>
+                          </m:rPr>
+                          <a:rPr lang="en-US">
+                            <a:latin typeface="Cambria Math" panose="02040503050406030204" pitchFamily="18" charset="0"/>
+                            <a:ea typeface="Cambria Math" panose="02040503050406030204" pitchFamily="18" charset="0"/>
+                          </a:rPr>
+                          <m:t>∇</m:t>
+                        </m:r>
+                        <m:func>
+                          <m:funcPr>
+                            <m:ctrlPr>
+                              <a:rPr lang="en-US" i="1">
+                                <a:latin typeface="Cambria Math" panose="02040503050406030204" pitchFamily="18" charset="0"/>
+                                <a:ea typeface="Cambria Math" panose="02040503050406030204" pitchFamily="18" charset="0"/>
+                              </a:rPr>
+                            </m:ctrlPr>
+                          </m:funcPr>
+                          <m:fName>
+                            <m:r>
+                              <m:rPr>
+                                <m:sty m:val="p"/>
+                              </m:rPr>
+                              <a:rPr lang="en-US">
+                                <a:latin typeface="Cambria Math" panose="02040503050406030204" pitchFamily="18" charset="0"/>
+                                <a:ea typeface="Cambria Math" panose="02040503050406030204" pitchFamily="18" charset="0"/>
+                              </a:rPr>
+                              <m:t>log</m:t>
+                            </m:r>
+                          </m:fName>
+                          <m:e>
+                            <m:r>
+                              <a:rPr lang="en-US" i="1">
+                                <a:latin typeface="Cambria Math" panose="02040503050406030204" pitchFamily="18" charset="0"/>
+                                <a:ea typeface="Cambria Math" panose="02040503050406030204" pitchFamily="18" charset="0"/>
+                              </a:rPr>
+                              <m:t>𝜋</m:t>
+                            </m:r>
+                            <m:r>
+                              <a:rPr lang="en-US" i="1">
+                                <a:latin typeface="Cambria Math" panose="02040503050406030204" pitchFamily="18" charset="0"/>
+                                <a:ea typeface="Cambria Math" panose="02040503050406030204" pitchFamily="18" charset="0"/>
+                              </a:rPr>
+                              <m:t>(</m:t>
+                            </m:r>
+                            <m:r>
+                              <a:rPr lang="en-US" i="1">
+                                <a:latin typeface="Cambria Math" panose="02040503050406030204" pitchFamily="18" charset="0"/>
+                                <a:ea typeface="Cambria Math" panose="02040503050406030204" pitchFamily="18" charset="0"/>
+                              </a:rPr>
+                              <m:t>𝑎</m:t>
+                            </m:r>
+                            <m:r>
+                              <a:rPr lang="en-US" i="1">
+                                <a:latin typeface="Cambria Math" panose="02040503050406030204" pitchFamily="18" charset="0"/>
+                                <a:ea typeface="Cambria Math" panose="02040503050406030204" pitchFamily="18" charset="0"/>
+                              </a:rPr>
+                              <m:t>|</m:t>
+                            </m:r>
+                            <m:r>
+                              <a:rPr lang="en-US" i="1">
+                                <a:latin typeface="Cambria Math" panose="02040503050406030204" pitchFamily="18" charset="0"/>
+                                <a:ea typeface="Cambria Math" panose="02040503050406030204" pitchFamily="18" charset="0"/>
+                              </a:rPr>
+                              <m:t>𝑠</m:t>
+                            </m:r>
+                            <m:r>
+                              <a:rPr lang="en-US" i="1">
+                                <a:latin typeface="Cambria Math" panose="02040503050406030204" pitchFamily="18" charset="0"/>
+                                <a:ea typeface="Cambria Math" panose="02040503050406030204" pitchFamily="18" charset="0"/>
+                              </a:rPr>
+                              <m:t>)</m:t>
+                            </m:r>
+                          </m:e>
+                        </m:func>
+                      </m:e>
+                    </m:d>
+                  </m:oMath>
+                </a14:m>
+                <a:endParaRPr lang="en-US" i="1" dirty="0">
+                  <a:latin typeface="Cambria Math" panose="02040503050406030204" pitchFamily="18" charset="0"/>
+                  <a:ea typeface="Cambria Math" panose="02040503050406030204" pitchFamily="18" charset="0"/>
+                </a:endParaRPr>
+              </a:p>
+              <a:p>
+                <a:endParaRPr lang="en-US" i="1" dirty="0">
+                  <a:latin typeface="Cambria Math" panose="02040503050406030204" pitchFamily="18" charset="0"/>
+                  <a:ea typeface="Cambria Math" panose="02040503050406030204" pitchFamily="18" charset="0"/>
+                </a:endParaRPr>
+              </a:p>
+              <a:p>
+                <a:r>
+                  <a:rPr lang="en-US" dirty="0"/>
+                  <a:t>The update can use any signal </a:t>
+                </a:r>
+                <a14:m>
+                  <m:oMath xmlns:m="http://schemas.openxmlformats.org/officeDocument/2006/math">
+                    <m:r>
+                      <a:rPr lang="en-US" i="1" dirty="0" smtClean="0">
+                        <a:latin typeface="Cambria Math" panose="02040503050406030204" pitchFamily="18" charset="0"/>
+                      </a:rPr>
+                      <m:t>𝑋</m:t>
+                    </m:r>
+                  </m:oMath>
+                </a14:m>
+                <a:br>
+                  <a:rPr lang="en-US" dirty="0"/>
+                </a:br>
+                <a:br>
+                  <a:rPr lang="en-US" dirty="0"/>
+                </a:br>
+                <a14:m>
+                  <m:oMath xmlns:m="http://schemas.openxmlformats.org/officeDocument/2006/math">
+                    <m:r>
+                      <m:rPr>
+                        <m:sty m:val="p"/>
+                      </m:rPr>
+                      <a:rPr lang="en-US">
+                        <a:latin typeface="Cambria Math" panose="02040503050406030204" pitchFamily="18" charset="0"/>
+                        <a:ea typeface="Cambria Math" panose="02040503050406030204" pitchFamily="18" charset="0"/>
+                      </a:rPr>
+                      <m:t>∇</m:t>
+                    </m:r>
+                    <m:r>
+                      <a:rPr lang="en-US" i="1">
+                        <a:latin typeface="Cambria Math" panose="02040503050406030204" pitchFamily="18" charset="0"/>
+                        <a:ea typeface="Cambria Math" panose="02040503050406030204" pitchFamily="18" charset="0"/>
+                      </a:rPr>
+                      <m:t>𝐽</m:t>
+                    </m:r>
+                    <m:d>
+                      <m:dPr>
+                        <m:ctrlPr>
+                          <a:rPr lang="en-US" i="1">
+                            <a:latin typeface="Cambria Math" panose="02040503050406030204" pitchFamily="18" charset="0"/>
+                            <a:ea typeface="Cambria Math" panose="02040503050406030204" pitchFamily="18" charset="0"/>
+                          </a:rPr>
+                        </m:ctrlPr>
+                      </m:dPr>
+                      <m:e>
+                        <m:r>
+                          <a:rPr lang="en-US" b="1" i="1">
+                            <a:latin typeface="Cambria Math" panose="02040503050406030204" pitchFamily="18" charset="0"/>
+                            <a:ea typeface="Cambria Math" panose="02040503050406030204" pitchFamily="18" charset="0"/>
+                          </a:rPr>
+                          <m:t>𝜽</m:t>
+                        </m:r>
+                      </m:e>
+                    </m:d>
+                    <m:r>
+                      <m:rPr>
+                        <m:aln/>
+                      </m:rPr>
+                      <a:rPr lang="en-US" i="1">
+                        <a:latin typeface="Cambria Math" panose="02040503050406030204" pitchFamily="18" charset="0"/>
+                        <a:ea typeface="Cambria Math" panose="02040503050406030204" pitchFamily="18" charset="0"/>
+                      </a:rPr>
+                      <m:t>∝</m:t>
+                    </m:r>
+                    <m:sSub>
+                      <m:sSubPr>
+                        <m:ctrlPr>
+                          <a:rPr lang="en-US" i="1">
+                            <a:latin typeface="Cambria Math" panose="02040503050406030204" pitchFamily="18" charset="0"/>
+                            <a:ea typeface="Cambria Math" panose="02040503050406030204" pitchFamily="18" charset="0"/>
+                          </a:rPr>
+                        </m:ctrlPr>
+                      </m:sSubPr>
+                      <m:e>
+                        <m:r>
+                          <a:rPr lang="en-US" i="1">
+                            <a:latin typeface="Cambria Math" panose="02040503050406030204" pitchFamily="18" charset="0"/>
+                            <a:ea typeface="Cambria Math" panose="02040503050406030204" pitchFamily="18" charset="0"/>
+                          </a:rPr>
+                          <m:t>𝔼</m:t>
+                        </m:r>
+                      </m:e>
+                      <m:sub>
+                        <m:r>
+                          <a:rPr lang="en-US" i="1">
+                            <a:latin typeface="Cambria Math" panose="02040503050406030204" pitchFamily="18" charset="0"/>
+                            <a:ea typeface="Cambria Math" panose="02040503050406030204" pitchFamily="18" charset="0"/>
+                          </a:rPr>
+                          <m:t>𝜋</m:t>
+                        </m:r>
+                      </m:sub>
+                    </m:sSub>
+                    <m:d>
+                      <m:dPr>
+                        <m:begChr m:val="["/>
+                        <m:endChr m:val="]"/>
+                        <m:ctrlPr>
+                          <a:rPr lang="en-US" i="1">
+                            <a:latin typeface="Cambria Math" panose="02040503050406030204" pitchFamily="18" charset="0"/>
+                            <a:ea typeface="Cambria Math" panose="02040503050406030204" pitchFamily="18" charset="0"/>
+                          </a:rPr>
+                        </m:ctrlPr>
+                      </m:dPr>
+                      <m:e>
+                        <m:r>
+                          <a:rPr lang="en-US" b="0" i="1" smtClean="0">
+                            <a:latin typeface="Cambria Math" panose="02040503050406030204" pitchFamily="18" charset="0"/>
+                            <a:ea typeface="Cambria Math" panose="02040503050406030204" pitchFamily="18" charset="0"/>
+                          </a:rPr>
+                          <m:t>𝑋</m:t>
+                        </m:r>
+                        <m:r>
+                          <a:rPr lang="en-US" i="1">
+                            <a:latin typeface="Cambria Math" panose="02040503050406030204" pitchFamily="18" charset="0"/>
+                            <a:ea typeface="Cambria Math" panose="02040503050406030204" pitchFamily="18" charset="0"/>
+                          </a:rPr>
+                          <m:t> </m:t>
+                        </m:r>
+                        <m:r>
+                          <m:rPr>
+                            <m:sty m:val="p"/>
+                          </m:rPr>
+                          <a:rPr lang="en-US">
+                            <a:latin typeface="Cambria Math" panose="02040503050406030204" pitchFamily="18" charset="0"/>
+                            <a:ea typeface="Cambria Math" panose="02040503050406030204" pitchFamily="18" charset="0"/>
+                          </a:rPr>
+                          <m:t>∇</m:t>
+                        </m:r>
+                        <m:func>
+                          <m:funcPr>
+                            <m:ctrlPr>
+                              <a:rPr lang="en-US" i="1">
+                                <a:latin typeface="Cambria Math" panose="02040503050406030204" pitchFamily="18" charset="0"/>
+                                <a:ea typeface="Cambria Math" panose="02040503050406030204" pitchFamily="18" charset="0"/>
+                              </a:rPr>
+                            </m:ctrlPr>
+                          </m:funcPr>
+                          <m:fName>
+                            <m:r>
+                              <m:rPr>
+                                <m:sty m:val="p"/>
+                              </m:rPr>
+                              <a:rPr lang="en-US">
+                                <a:latin typeface="Cambria Math" panose="02040503050406030204" pitchFamily="18" charset="0"/>
+                                <a:ea typeface="Cambria Math" panose="02040503050406030204" pitchFamily="18" charset="0"/>
+                              </a:rPr>
+                              <m:t>log</m:t>
+                            </m:r>
+                          </m:fName>
+                          <m:e>
+                            <m:r>
+                              <a:rPr lang="en-US" i="1">
+                                <a:latin typeface="Cambria Math" panose="02040503050406030204" pitchFamily="18" charset="0"/>
+                                <a:ea typeface="Cambria Math" panose="02040503050406030204" pitchFamily="18" charset="0"/>
+                              </a:rPr>
+                              <m:t>𝜋</m:t>
+                            </m:r>
+                            <m:r>
+                              <a:rPr lang="en-US" i="1">
+                                <a:latin typeface="Cambria Math" panose="02040503050406030204" pitchFamily="18" charset="0"/>
+                                <a:ea typeface="Cambria Math" panose="02040503050406030204" pitchFamily="18" charset="0"/>
+                              </a:rPr>
+                              <m:t>(</m:t>
+                            </m:r>
+                            <m:r>
+                              <a:rPr lang="en-US" i="1">
+                                <a:latin typeface="Cambria Math" panose="02040503050406030204" pitchFamily="18" charset="0"/>
+                                <a:ea typeface="Cambria Math" panose="02040503050406030204" pitchFamily="18" charset="0"/>
+                              </a:rPr>
+                              <m:t>𝑎</m:t>
+                            </m:r>
+                            <m:r>
+                              <a:rPr lang="en-US" i="1">
+                                <a:latin typeface="Cambria Math" panose="02040503050406030204" pitchFamily="18" charset="0"/>
+                                <a:ea typeface="Cambria Math" panose="02040503050406030204" pitchFamily="18" charset="0"/>
+                              </a:rPr>
+                              <m:t>|</m:t>
+                            </m:r>
+                            <m:r>
+                              <a:rPr lang="en-US" i="1">
+                                <a:latin typeface="Cambria Math" panose="02040503050406030204" pitchFamily="18" charset="0"/>
+                                <a:ea typeface="Cambria Math" panose="02040503050406030204" pitchFamily="18" charset="0"/>
+                              </a:rPr>
+                              <m:t>𝑠</m:t>
+                            </m:r>
+                            <m:r>
+                              <a:rPr lang="en-US" i="1">
+                                <a:latin typeface="Cambria Math" panose="02040503050406030204" pitchFamily="18" charset="0"/>
+                                <a:ea typeface="Cambria Math" panose="02040503050406030204" pitchFamily="18" charset="0"/>
+                              </a:rPr>
+                              <m:t>)</m:t>
+                            </m:r>
+                          </m:e>
+                        </m:func>
+                      </m:e>
+                    </m:d>
+                  </m:oMath>
+                </a14:m>
+                <a:br>
+                  <a:rPr lang="en-US" i="1" dirty="0">
+                    <a:latin typeface="Cambria Math" panose="02040503050406030204" pitchFamily="18" charset="0"/>
+                    <a:ea typeface="Cambria Math" panose="02040503050406030204" pitchFamily="18" charset="0"/>
+                  </a:rPr>
+                </a:br>
+                <a:br>
+                  <a:rPr lang="en-US" i="1" dirty="0">
+                    <a:latin typeface="Cambria Math" panose="02040503050406030204" pitchFamily="18" charset="0"/>
+                    <a:ea typeface="Cambria Math" panose="02040503050406030204" pitchFamily="18" charset="0"/>
+                  </a:rPr>
+                </a:br>
+                <a:r>
+                  <a:rPr lang="en-US" dirty="0"/>
+                  <a:t>as long as </a:t>
+                </a:r>
+                <a14:m>
+                  <m:oMath xmlns:m="http://schemas.openxmlformats.org/officeDocument/2006/math">
+                    <m:sSub>
+                      <m:sSubPr>
+                        <m:ctrlPr>
+                          <a:rPr lang="en-US" i="1">
+                            <a:latin typeface="Cambria Math" panose="02040503050406030204" pitchFamily="18" charset="0"/>
+                            <a:ea typeface="Cambria Math" panose="02040503050406030204" pitchFamily="18" charset="0"/>
+                          </a:rPr>
+                        </m:ctrlPr>
+                      </m:sSubPr>
+                      <m:e>
+                        <m:r>
+                          <a:rPr lang="en-US" i="1">
+                            <a:latin typeface="Cambria Math" panose="02040503050406030204" pitchFamily="18" charset="0"/>
+                            <a:ea typeface="Cambria Math" panose="02040503050406030204" pitchFamily="18" charset="0"/>
+                          </a:rPr>
+                          <m:t>𝔼</m:t>
+                        </m:r>
+                      </m:e>
+                      <m:sub>
+                        <m:r>
+                          <a:rPr lang="en-US" i="1">
+                            <a:latin typeface="Cambria Math" panose="02040503050406030204" pitchFamily="18" charset="0"/>
+                            <a:ea typeface="Cambria Math" panose="02040503050406030204" pitchFamily="18" charset="0"/>
+                          </a:rPr>
+                          <m:t>𝜋</m:t>
+                        </m:r>
+                      </m:sub>
+                    </m:sSub>
+                    <m:d>
+                      <m:dPr>
+                        <m:begChr m:val="["/>
+                        <m:endChr m:val="]"/>
+                        <m:ctrlPr>
+                          <a:rPr lang="en-US" b="0" i="1" smtClean="0">
+                            <a:latin typeface="Cambria Math" panose="02040503050406030204" pitchFamily="18" charset="0"/>
+                            <a:ea typeface="Cambria Math" panose="02040503050406030204" pitchFamily="18" charset="0"/>
+                          </a:rPr>
+                        </m:ctrlPr>
+                      </m:dPr>
+                      <m:e>
+                        <m:r>
+                          <a:rPr lang="en-US" b="0" i="1" smtClean="0">
+                            <a:latin typeface="Cambria Math" panose="02040503050406030204" pitchFamily="18" charset="0"/>
+                            <a:ea typeface="Cambria Math" panose="02040503050406030204" pitchFamily="18" charset="0"/>
+                          </a:rPr>
+                          <m:t>𝑋</m:t>
+                        </m:r>
+                      </m:e>
+                      <m:e>
+                        <m:r>
+                          <a:rPr lang="en-US" b="0" i="1" smtClean="0">
+                            <a:latin typeface="Cambria Math" panose="02040503050406030204" pitchFamily="18" charset="0"/>
+                            <a:ea typeface="Cambria Math" panose="02040503050406030204" pitchFamily="18" charset="0"/>
+                          </a:rPr>
+                          <m:t>𝑠</m:t>
+                        </m:r>
+                        <m:r>
+                          <a:rPr lang="en-US" b="0" i="1" smtClean="0">
+                            <a:latin typeface="Cambria Math" panose="02040503050406030204" pitchFamily="18" charset="0"/>
+                            <a:ea typeface="Cambria Math" panose="02040503050406030204" pitchFamily="18" charset="0"/>
+                          </a:rPr>
+                          <m:t>,</m:t>
+                        </m:r>
+                        <m:r>
+                          <a:rPr lang="en-US" b="0" i="1" smtClean="0">
+                            <a:latin typeface="Cambria Math" panose="02040503050406030204" pitchFamily="18" charset="0"/>
+                            <a:ea typeface="Cambria Math" panose="02040503050406030204" pitchFamily="18" charset="0"/>
+                          </a:rPr>
+                          <m:t>𝑎</m:t>
+                        </m:r>
+                      </m:e>
+                    </m:d>
+                    <m:r>
+                      <m:rPr>
+                        <m:aln/>
+                      </m:rPr>
+                      <a:rPr lang="en-US" i="1">
+                        <a:latin typeface="Cambria Math" panose="02040503050406030204" pitchFamily="18" charset="0"/>
+                        <a:ea typeface="Cambria Math" panose="02040503050406030204" pitchFamily="18" charset="0"/>
+                      </a:rPr>
+                      <m:t>∝</m:t>
+                    </m:r>
+                    <m:sSub>
+                      <m:sSubPr>
+                        <m:ctrlPr>
+                          <a:rPr lang="en-US" b="0" i="1" smtClean="0">
+                            <a:latin typeface="Cambria Math" panose="02040503050406030204" pitchFamily="18" charset="0"/>
+                            <a:ea typeface="Cambria Math" panose="02040503050406030204" pitchFamily="18" charset="0"/>
+                          </a:rPr>
+                        </m:ctrlPr>
+                      </m:sSubPr>
+                      <m:e>
+                        <m:r>
+                          <a:rPr lang="en-US" b="0" i="1" smtClean="0">
+                            <a:latin typeface="Cambria Math" panose="02040503050406030204" pitchFamily="18" charset="0"/>
+                            <a:ea typeface="Cambria Math" panose="02040503050406030204" pitchFamily="18" charset="0"/>
+                          </a:rPr>
+                          <m:t>𝑞</m:t>
+                        </m:r>
+                      </m:e>
+                      <m:sub>
+                        <m:r>
+                          <a:rPr lang="en-US" b="0" i="1" smtClean="0">
+                            <a:latin typeface="Cambria Math" panose="02040503050406030204" pitchFamily="18" charset="0"/>
+                            <a:ea typeface="Cambria Math" panose="02040503050406030204" pitchFamily="18" charset="0"/>
+                          </a:rPr>
+                          <m:t>𝜋</m:t>
+                        </m:r>
+                      </m:sub>
+                    </m:sSub>
+                    <m:d>
+                      <m:dPr>
+                        <m:ctrlPr>
+                          <a:rPr lang="en-US" b="0" i="1" smtClean="0">
+                            <a:latin typeface="Cambria Math" panose="02040503050406030204" pitchFamily="18" charset="0"/>
+                            <a:ea typeface="Cambria Math" panose="02040503050406030204" pitchFamily="18" charset="0"/>
+                          </a:rPr>
+                        </m:ctrlPr>
+                      </m:dPr>
+                      <m:e>
+                        <m:r>
+                          <a:rPr lang="en-US" b="0" i="1" smtClean="0">
+                            <a:latin typeface="Cambria Math" panose="02040503050406030204" pitchFamily="18" charset="0"/>
+                            <a:ea typeface="Cambria Math" panose="02040503050406030204" pitchFamily="18" charset="0"/>
+                          </a:rPr>
+                          <m:t>𝑠</m:t>
+                        </m:r>
+                        <m:r>
+                          <a:rPr lang="en-US" b="0" i="1" smtClean="0">
+                            <a:latin typeface="Cambria Math" panose="02040503050406030204" pitchFamily="18" charset="0"/>
+                            <a:ea typeface="Cambria Math" panose="02040503050406030204" pitchFamily="18" charset="0"/>
+                          </a:rPr>
+                          <m:t>,</m:t>
+                        </m:r>
+                        <m:r>
+                          <a:rPr lang="en-US" b="0" i="1" smtClean="0">
+                            <a:latin typeface="Cambria Math" panose="02040503050406030204" pitchFamily="18" charset="0"/>
+                            <a:ea typeface="Cambria Math" panose="02040503050406030204" pitchFamily="18" charset="0"/>
+                          </a:rPr>
+                          <m:t>𝑎</m:t>
+                        </m:r>
+                      </m:e>
+                    </m:d>
+                  </m:oMath>
+                </a14:m>
+                <a:r>
+                  <a:rPr lang="en-US" dirty="0"/>
+                  <a:t>, i.e., if it tells us how good an action is.</a:t>
+                </a:r>
+              </a:p>
+              <a:p>
+                <a:endParaRPr lang="en-US" i="1" dirty="0">
+                  <a:latin typeface="Cambria Math" panose="02040503050406030204" pitchFamily="18" charset="0"/>
+                  <a:ea typeface="Cambria Math" panose="02040503050406030204" pitchFamily="18" charset="0"/>
+                </a:endParaRPr>
+              </a:p>
+              <a:p>
+                <a:r>
+                  <a:rPr lang="en-US" dirty="0"/>
+                  <a:t>Examples of valid signals:</a:t>
+                </a:r>
+              </a:p>
+              <a:p>
+                <a:pPr lvl="1"/>
+                <a:r>
+                  <a:rPr lang="en-US" dirty="0"/>
+                  <a:t>MC (REINFORCE): </a:t>
+                </a:r>
+                <a14:m>
+                  <m:oMath xmlns:m="http://schemas.openxmlformats.org/officeDocument/2006/math">
+                    <m:r>
+                      <a:rPr lang="en-US" b="0" i="0" smtClean="0">
+                        <a:latin typeface="Cambria Math" panose="02040503050406030204" pitchFamily="18" charset="0"/>
+                      </a:rPr>
+                      <m:t>    </m:t>
+                    </m:r>
+                    <m:r>
+                      <a:rPr lang="en-US" b="0" i="1" smtClean="0">
+                        <a:latin typeface="Cambria Math" panose="02040503050406030204" pitchFamily="18" charset="0"/>
+                      </a:rPr>
+                      <m:t>𝑋</m:t>
+                    </m:r>
+                    <m:r>
+                      <a:rPr lang="en-US" b="0" i="1" smtClean="0">
+                        <a:latin typeface="Cambria Math" panose="02040503050406030204" pitchFamily="18" charset="0"/>
+                      </a:rPr>
+                      <m:t>=</m:t>
+                    </m:r>
+                    <m:sSub>
+                      <m:sSubPr>
+                        <m:ctrlPr>
+                          <a:rPr lang="en-US" b="0" i="1" smtClean="0">
+                            <a:latin typeface="Cambria Math" panose="02040503050406030204" pitchFamily="18" charset="0"/>
+                          </a:rPr>
+                        </m:ctrlPr>
+                      </m:sSubPr>
+                      <m:e>
+                        <m:r>
+                          <a:rPr lang="en-US" b="0" i="1" smtClean="0">
+                            <a:latin typeface="Cambria Math" panose="02040503050406030204" pitchFamily="18" charset="0"/>
+                          </a:rPr>
+                          <m:t>𝐺</m:t>
+                        </m:r>
+                      </m:e>
+                      <m:sub>
+                        <m:r>
+                          <a:rPr lang="en-US" b="0" i="1" smtClean="0">
+                            <a:latin typeface="Cambria Math" panose="02040503050406030204" pitchFamily="18" charset="0"/>
+                          </a:rPr>
+                          <m:t>𝑡</m:t>
+                        </m:r>
+                      </m:sub>
+                    </m:sSub>
+                  </m:oMath>
+                </a14:m>
+                <a:endParaRPr lang="en-US" dirty="0"/>
+              </a:p>
+              <a:p>
+                <a:pPr lvl="1"/>
+                <a:r>
+                  <a:rPr lang="en-US" dirty="0"/>
+                  <a:t>Advantage function: </a:t>
+                </a:r>
+                <a14:m>
+                  <m:oMath xmlns:m="http://schemas.openxmlformats.org/officeDocument/2006/math">
+                    <m:r>
+                      <a:rPr lang="pt-BR" i="1" dirty="0" smtClean="0">
+                        <a:latin typeface="Cambria Math" panose="02040503050406030204" pitchFamily="18" charset="0"/>
+                      </a:rPr>
+                      <m:t>𝑋</m:t>
+                    </m:r>
+                    <m:r>
+                      <a:rPr lang="pt-BR" i="1" dirty="0" smtClean="0">
+                        <a:latin typeface="Cambria Math" panose="02040503050406030204" pitchFamily="18" charset="0"/>
+                      </a:rPr>
+                      <m:t>=</m:t>
+                    </m:r>
+                    <m:r>
+                      <a:rPr lang="pt-BR" i="1" dirty="0" smtClean="0">
+                        <a:latin typeface="Cambria Math" panose="02040503050406030204" pitchFamily="18" charset="0"/>
+                      </a:rPr>
+                      <m:t>𝐴</m:t>
+                    </m:r>
+                    <m:r>
+                      <a:rPr lang="pt-BR" i="1" dirty="0" smtClean="0">
+                        <a:latin typeface="Cambria Math" panose="02040503050406030204" pitchFamily="18" charset="0"/>
+                      </a:rPr>
+                      <m:t>(</m:t>
+                    </m:r>
+                    <m:r>
+                      <a:rPr lang="pt-BR" i="1" dirty="0" smtClean="0">
+                        <a:latin typeface="Cambria Math" panose="02040503050406030204" pitchFamily="18" charset="0"/>
+                      </a:rPr>
+                      <m:t>𝑠</m:t>
+                    </m:r>
+                    <m:r>
+                      <a:rPr lang="pt-BR" i="1" dirty="0" smtClean="0">
+                        <a:latin typeface="Cambria Math" panose="02040503050406030204" pitchFamily="18" charset="0"/>
+                      </a:rPr>
+                      <m:t>,</m:t>
+                    </m:r>
+                    <m:r>
+                      <a:rPr lang="pt-BR" i="1" dirty="0" smtClean="0">
+                        <a:latin typeface="Cambria Math" panose="02040503050406030204" pitchFamily="18" charset="0"/>
+                      </a:rPr>
+                      <m:t>𝑎</m:t>
+                    </m:r>
+                    <m:r>
+                      <a:rPr lang="pt-BR" i="1" dirty="0" smtClean="0">
+                        <a:latin typeface="Cambria Math" panose="02040503050406030204" pitchFamily="18" charset="0"/>
+                      </a:rPr>
+                      <m:t>)=</m:t>
+                    </m:r>
+                    <m:r>
+                      <a:rPr lang="en-US" b="0" i="1" dirty="0" smtClean="0">
+                        <a:latin typeface="Cambria Math" panose="02040503050406030204" pitchFamily="18" charset="0"/>
+                      </a:rPr>
+                      <m:t>𝑞</m:t>
+                    </m:r>
+                    <m:r>
+                      <a:rPr lang="pt-BR" i="1" dirty="0" smtClean="0">
+                        <a:latin typeface="Cambria Math" panose="02040503050406030204" pitchFamily="18" charset="0"/>
+                      </a:rPr>
+                      <m:t>(</m:t>
+                    </m:r>
+                    <m:r>
+                      <a:rPr lang="pt-BR" i="1" dirty="0" smtClean="0">
+                        <a:latin typeface="Cambria Math" panose="02040503050406030204" pitchFamily="18" charset="0"/>
+                      </a:rPr>
+                      <m:t>𝑠</m:t>
+                    </m:r>
+                    <m:r>
+                      <a:rPr lang="pt-BR" i="1" dirty="0" smtClean="0">
+                        <a:latin typeface="Cambria Math" panose="02040503050406030204" pitchFamily="18" charset="0"/>
+                      </a:rPr>
+                      <m:t>,</m:t>
+                    </m:r>
+                    <m:r>
+                      <a:rPr lang="pt-BR" i="1" dirty="0" smtClean="0">
+                        <a:latin typeface="Cambria Math" panose="02040503050406030204" pitchFamily="18" charset="0"/>
+                      </a:rPr>
+                      <m:t>𝑎</m:t>
+                    </m:r>
+                    <m:r>
+                      <a:rPr lang="pt-BR" i="1" dirty="0" smtClean="0">
+                        <a:latin typeface="Cambria Math" panose="02040503050406030204" pitchFamily="18" charset="0"/>
+                      </a:rPr>
+                      <m:t>)−</m:t>
+                    </m:r>
+                    <m:r>
+                      <a:rPr lang="en-US" b="0" i="1" dirty="0" smtClean="0">
+                        <a:latin typeface="Cambria Math" panose="02040503050406030204" pitchFamily="18" charset="0"/>
+                      </a:rPr>
+                      <m:t>𝑣</m:t>
+                    </m:r>
+                    <m:r>
+                      <a:rPr lang="pt-BR" i="1" dirty="0" smtClean="0">
+                        <a:latin typeface="Cambria Math" panose="02040503050406030204" pitchFamily="18" charset="0"/>
+                      </a:rPr>
+                      <m:t>(</m:t>
+                    </m:r>
+                    <m:r>
+                      <a:rPr lang="pt-BR" i="1" dirty="0" smtClean="0">
+                        <a:latin typeface="Cambria Math" panose="02040503050406030204" pitchFamily="18" charset="0"/>
+                      </a:rPr>
+                      <m:t>𝑠</m:t>
+                    </m:r>
+                    <m:r>
+                      <a:rPr lang="pt-BR" i="1" dirty="0" smtClean="0">
+                        <a:latin typeface="Cambria Math" panose="02040503050406030204" pitchFamily="18" charset="0"/>
+                      </a:rPr>
+                      <m:t>)</m:t>
+                    </m:r>
+                  </m:oMath>
+                </a14:m>
+                <a:endParaRPr lang="en-US" dirty="0"/>
+              </a:p>
+              <a:p>
+                <a:pPr lvl="1"/>
+                <a:r>
+                  <a:rPr lang="en-US" dirty="0"/>
+                  <a:t>TD error: </a:t>
+                </a:r>
+                <a14:m>
+                  <m:oMath xmlns:m="http://schemas.openxmlformats.org/officeDocument/2006/math">
+                    <m:r>
+                      <a:rPr lang="en-US" b="0" i="0" smtClean="0">
+                        <a:latin typeface="Cambria Math" panose="02040503050406030204" pitchFamily="18" charset="0"/>
+                      </a:rPr>
+                      <m:t>                      </m:t>
+                    </m:r>
+                    <m:r>
+                      <a:rPr lang="en-US" i="1">
+                        <a:latin typeface="Cambria Math" panose="02040503050406030204" pitchFamily="18" charset="0"/>
+                      </a:rPr>
+                      <m:t>𝑋</m:t>
+                    </m:r>
+                    <m:r>
+                      <a:rPr lang="en-US" i="1">
+                        <a:latin typeface="Cambria Math" panose="02040503050406030204" pitchFamily="18" charset="0"/>
+                      </a:rPr>
+                      <m:t>=</m:t>
+                    </m:r>
+                    <m:sSub>
+                      <m:sSubPr>
+                        <m:ctrlPr>
+                          <a:rPr lang="en-US" i="1">
+                            <a:latin typeface="Cambria Math" panose="02040503050406030204" pitchFamily="18" charset="0"/>
+                          </a:rPr>
+                        </m:ctrlPr>
+                      </m:sSubPr>
+                      <m:e>
+                        <m:r>
+                          <a:rPr lang="en-US" i="1">
+                            <a:latin typeface="Cambria Math" panose="02040503050406030204" pitchFamily="18" charset="0"/>
+                          </a:rPr>
+                          <m:t>𝛿</m:t>
+                        </m:r>
+                      </m:e>
+                      <m:sub>
+                        <m:r>
+                          <a:rPr lang="en-US" i="1">
+                            <a:latin typeface="Cambria Math" panose="02040503050406030204" pitchFamily="18" charset="0"/>
+                          </a:rPr>
+                          <m:t>𝑡</m:t>
+                        </m:r>
+                      </m:sub>
+                    </m:sSub>
+                    <m:r>
+                      <a:rPr lang="en-US" i="1">
+                        <a:latin typeface="Cambria Math" panose="02040503050406030204" pitchFamily="18" charset="0"/>
+                      </a:rPr>
+                      <m:t>=</m:t>
+                    </m:r>
+                    <m:sSub>
+                      <m:sSubPr>
+                        <m:ctrlPr>
+                          <a:rPr lang="en-US" i="1">
+                            <a:latin typeface="Cambria Math" panose="02040503050406030204" pitchFamily="18" charset="0"/>
+                          </a:rPr>
+                        </m:ctrlPr>
+                      </m:sSubPr>
+                      <m:e>
+                        <m:r>
+                          <a:rPr lang="en-US" i="1">
+                            <a:latin typeface="Cambria Math" panose="02040503050406030204" pitchFamily="18" charset="0"/>
+                          </a:rPr>
+                          <m:t>𝑅</m:t>
+                        </m:r>
+                      </m:e>
+                      <m:sub>
+                        <m:r>
+                          <a:rPr lang="en-US" i="1">
+                            <a:latin typeface="Cambria Math" panose="02040503050406030204" pitchFamily="18" charset="0"/>
+                          </a:rPr>
+                          <m:t>𝑡</m:t>
+                        </m:r>
+                        <m:r>
+                          <a:rPr lang="en-US" i="1">
+                            <a:latin typeface="Cambria Math" panose="02040503050406030204" pitchFamily="18" charset="0"/>
+                          </a:rPr>
+                          <m:t>+1</m:t>
+                        </m:r>
+                      </m:sub>
+                    </m:sSub>
+                    <m:r>
+                      <a:rPr lang="en-US" i="1">
+                        <a:latin typeface="Cambria Math" panose="02040503050406030204" pitchFamily="18" charset="0"/>
+                      </a:rPr>
+                      <m:t>+</m:t>
+                    </m:r>
+                    <m:r>
+                      <a:rPr lang="en-US" i="1">
+                        <a:latin typeface="Cambria Math" panose="02040503050406030204" pitchFamily="18" charset="0"/>
+                      </a:rPr>
+                      <m:t>𝛾</m:t>
+                    </m:r>
+                    <m:r>
+                      <a:rPr lang="en-US" i="1">
+                        <a:latin typeface="Cambria Math" panose="02040503050406030204" pitchFamily="18" charset="0"/>
+                      </a:rPr>
+                      <m:t>𝑣</m:t>
+                    </m:r>
+                    <m:d>
+                      <m:dPr>
+                        <m:ctrlPr>
+                          <a:rPr lang="en-US" i="1">
+                            <a:latin typeface="Cambria Math" panose="02040503050406030204" pitchFamily="18" charset="0"/>
+                          </a:rPr>
+                        </m:ctrlPr>
+                      </m:dPr>
+                      <m:e>
+                        <m:sSub>
+                          <m:sSubPr>
+                            <m:ctrlPr>
+                              <a:rPr lang="en-US" i="1">
+                                <a:latin typeface="Cambria Math" panose="02040503050406030204" pitchFamily="18" charset="0"/>
+                              </a:rPr>
+                            </m:ctrlPr>
+                          </m:sSubPr>
+                          <m:e>
+                            <m:r>
+                              <a:rPr lang="en-US" i="1">
+                                <a:latin typeface="Cambria Math" panose="02040503050406030204" pitchFamily="18" charset="0"/>
+                              </a:rPr>
+                              <m:t>𝑆</m:t>
+                            </m:r>
+                          </m:e>
+                          <m:sub>
+                            <m:r>
+                              <a:rPr lang="en-US" i="1">
+                                <a:latin typeface="Cambria Math" panose="02040503050406030204" pitchFamily="18" charset="0"/>
+                              </a:rPr>
+                              <m:t>𝑡</m:t>
+                            </m:r>
+                            <m:r>
+                              <a:rPr lang="en-US" i="1">
+                                <a:latin typeface="Cambria Math" panose="02040503050406030204" pitchFamily="18" charset="0"/>
+                              </a:rPr>
+                              <m:t>+1</m:t>
+                            </m:r>
+                          </m:sub>
+                        </m:sSub>
+                      </m:e>
+                    </m:d>
+                    <m:r>
+                      <a:rPr lang="en-US" i="1">
+                        <a:latin typeface="Cambria Math" panose="02040503050406030204" pitchFamily="18" charset="0"/>
+                      </a:rPr>
+                      <m:t>−</m:t>
+                    </m:r>
+                    <m:r>
+                      <a:rPr lang="en-US" i="1">
+                        <a:latin typeface="Cambria Math" panose="02040503050406030204" pitchFamily="18" charset="0"/>
+                      </a:rPr>
+                      <m:t>𝑣</m:t>
+                    </m:r>
+                    <m:r>
+                      <a:rPr lang="en-US" i="1">
+                        <a:latin typeface="Cambria Math" panose="02040503050406030204" pitchFamily="18" charset="0"/>
+                      </a:rPr>
+                      <m:t>(</m:t>
+                    </m:r>
+                    <m:sSub>
+                      <m:sSubPr>
+                        <m:ctrlPr>
+                          <a:rPr lang="en-US" i="1">
+                            <a:latin typeface="Cambria Math" panose="02040503050406030204" pitchFamily="18" charset="0"/>
+                          </a:rPr>
+                        </m:ctrlPr>
+                      </m:sSubPr>
+                      <m:e>
+                        <m:r>
+                          <a:rPr lang="en-US" i="1">
+                            <a:latin typeface="Cambria Math" panose="02040503050406030204" pitchFamily="18" charset="0"/>
+                          </a:rPr>
+                          <m:t>𝑆</m:t>
+                        </m:r>
+                      </m:e>
+                      <m:sub>
+                        <m:r>
+                          <a:rPr lang="en-US" i="1">
+                            <a:latin typeface="Cambria Math" panose="02040503050406030204" pitchFamily="18" charset="0"/>
+                          </a:rPr>
+                          <m:t>𝑡</m:t>
+                        </m:r>
+                      </m:sub>
+                    </m:sSub>
+                    <m:r>
+                      <a:rPr lang="en-US" i="1">
+                        <a:latin typeface="Cambria Math" panose="02040503050406030204" pitchFamily="18" charset="0"/>
+                      </a:rPr>
+                      <m:t>)</m:t>
+                    </m:r>
+                  </m:oMath>
+                </a14:m>
+                <a:endParaRPr lang="en-US" dirty="0"/>
+              </a:p>
+              <a:p>
+                <a:endParaRPr lang="en-US" dirty="0"/>
+              </a:p>
+              <a:p>
+                <a:endParaRPr lang="en-US" dirty="0"/>
+              </a:p>
+            </p:txBody>
+          </p:sp>
+        </mc:Choice>
+        <mc:Fallback>
+          <p:sp>
+            <p:nvSpPr>
+              <p:cNvPr id="3" name="Content Placeholder 2">
+                <a:extLst>
+                  <a:ext uri="{FF2B5EF4-FFF2-40B4-BE49-F238E27FC236}">
+                    <a16:creationId xmlns:a16="http://schemas.microsoft.com/office/drawing/2014/main" id="{B72662DD-E598-030D-12ED-27652D3DF7F1}"/>
+                  </a:ext>
+                </a:extLst>
+              </p:cNvPr>
+              <p:cNvSpPr>
+                <a:spLocks noGrp="1" noRot="1" noChangeAspect="1" noMove="1" noResize="1" noEditPoints="1" noAdjustHandles="1" noChangeArrowheads="1" noChangeShapeType="1" noTextEdit="1"/>
+              </p:cNvSpPr>
+              <p:nvPr>
+                <p:ph idx="1"/>
+              </p:nvPr>
+            </p:nvSpPr>
+            <p:spPr>
+              <a:blipFill>
+                <a:blip r:embed="rId2"/>
+                <a:stretch>
+                  <a:fillRect l="-928" t="-3189"/>
+                </a:stretch>
+              </a:blipFill>
+            </p:spPr>
+            <p:txBody>
+              <a:bodyPr/>
+              <a:lstStyle/>
+              <a:p>
+                <a:r>
+                  <a:rPr lang="en-US">
+                    <a:noFill/>
+                  </a:rPr>
+                  <a:t> </a:t>
+                </a:r>
+              </a:p>
+            </p:txBody>
+          </p:sp>
+        </mc:Fallback>
+      </mc:AlternateContent>
+      <mc:AlternateContent xmlns:mc="http://schemas.openxmlformats.org/markup-compatibility/2006" xmlns:a14="http://schemas.microsoft.com/office/drawing/2010/main">
+        <mc:Choice Requires="a14">
+          <p:sp>
+            <p:nvSpPr>
+              <p:cNvPr id="4" name="Speech Bubble: Rectangle with Corners Rounded 3">
+                <a:extLst>
+                  <a:ext uri="{FF2B5EF4-FFF2-40B4-BE49-F238E27FC236}">
+                    <a16:creationId xmlns:a16="http://schemas.microsoft.com/office/drawing/2014/main" id="{4DDDB97C-A0EC-DBE3-8245-FF3B04A2682A}"/>
+                  </a:ext>
+                </a:extLst>
+              </p:cNvPr>
+              <p:cNvSpPr/>
+              <p:nvPr/>
+            </p:nvSpPr>
+            <p:spPr>
+              <a:xfrm>
+                <a:off x="9613783" y="4655890"/>
+                <a:ext cx="2369890" cy="935372"/>
+              </a:xfrm>
+              <a:prstGeom prst="wedgeRoundRectCallout">
+                <a:avLst>
+                  <a:gd name="adj1" fmla="val -134651"/>
+                  <a:gd name="adj2" fmla="val 32007"/>
+                  <a:gd name="adj3" fmla="val 16667"/>
+                </a:avLst>
+              </a:prstGeom>
+            </p:spPr>
+            <p:style>
+              <a:lnRef idx="2">
+                <a:schemeClr val="accent1">
+                  <a:shade val="15000"/>
+                </a:schemeClr>
+              </a:lnRef>
+              <a:fillRef idx="1">
+                <a:schemeClr val="accent1"/>
+              </a:fillRef>
+              <a:effectRef idx="0">
+                <a:schemeClr val="accent1"/>
+              </a:effectRef>
+              <a:fontRef idx="minor">
+                <a:schemeClr val="lt1"/>
+              </a:fontRef>
+            </p:style>
+            <p:txBody>
+              <a:bodyPr rtlCol="0" anchor="ctr"/>
+              <a:lstStyle/>
+              <a:p>
+                <a:pPr algn="ctr"/>
+                <a:r>
+                  <a:rPr lang="en-US" sz="1400" dirty="0"/>
+                  <a:t>Advantage: Measures how much better </a:t>
+                </a:r>
+                <a14:m>
+                  <m:oMath xmlns:m="http://schemas.openxmlformats.org/officeDocument/2006/math">
+                    <m:r>
+                      <a:rPr lang="en-US" sz="1400" i="1" dirty="0" smtClean="0">
+                        <a:latin typeface="Cambria Math" panose="02040503050406030204" pitchFamily="18" charset="0"/>
+                      </a:rPr>
+                      <m:t>𝑎</m:t>
+                    </m:r>
+                  </m:oMath>
+                </a14:m>
+                <a:r>
+                  <a:rPr lang="en-US" sz="1400" dirty="0"/>
+                  <a:t> is compared with the current action in </a:t>
+                </a:r>
+                <a14:m>
+                  <m:oMath xmlns:m="http://schemas.openxmlformats.org/officeDocument/2006/math">
+                    <m:r>
+                      <a:rPr lang="en-US" sz="1400" b="0" i="1" smtClean="0">
+                        <a:latin typeface="Cambria Math" panose="02040503050406030204" pitchFamily="18" charset="0"/>
+                      </a:rPr>
+                      <m:t>𝜋</m:t>
+                    </m:r>
+                    <m:r>
+                      <a:rPr lang="en-US" sz="1400" b="0" i="1" smtClean="0">
+                        <a:latin typeface="Cambria Math" panose="02040503050406030204" pitchFamily="18" charset="0"/>
+                      </a:rPr>
+                      <m:t>(</m:t>
+                    </m:r>
+                    <m:r>
+                      <a:rPr lang="en-US" sz="1400" b="0" i="1" smtClean="0">
+                        <a:latin typeface="Cambria Math" panose="02040503050406030204" pitchFamily="18" charset="0"/>
+                      </a:rPr>
+                      <m:t>𝑠</m:t>
+                    </m:r>
+                    <m:r>
+                      <a:rPr lang="en-US" sz="1400" b="0" i="1" smtClean="0">
+                        <a:latin typeface="Cambria Math" panose="02040503050406030204" pitchFamily="18" charset="0"/>
+                      </a:rPr>
+                      <m:t>)</m:t>
+                    </m:r>
+                  </m:oMath>
+                </a14:m>
+                <a:r>
+                  <a:rPr lang="en-US" sz="1400" dirty="0"/>
+                  <a:t>.</a:t>
+                </a:r>
+              </a:p>
+            </p:txBody>
+          </p:sp>
+        </mc:Choice>
+        <mc:Fallback xmlns="">
+          <p:sp>
+            <p:nvSpPr>
+              <p:cNvPr id="4" name="Speech Bubble: Rectangle with Corners Rounded 3">
+                <a:extLst>
+                  <a:ext uri="{FF2B5EF4-FFF2-40B4-BE49-F238E27FC236}">
+                    <a16:creationId xmlns:a16="http://schemas.microsoft.com/office/drawing/2014/main" id="{4DDDB97C-A0EC-DBE3-8245-FF3B04A2682A}"/>
+                  </a:ext>
+                </a:extLst>
+              </p:cNvPr>
+              <p:cNvSpPr>
+                <a:spLocks noRot="1" noChangeAspect="1" noMove="1" noResize="1" noEditPoints="1" noAdjustHandles="1" noChangeArrowheads="1" noChangeShapeType="1" noTextEdit="1"/>
+              </p:cNvSpPr>
+              <p:nvPr/>
+            </p:nvSpPr>
+            <p:spPr>
+              <a:xfrm>
+                <a:off x="9613783" y="4655890"/>
+                <a:ext cx="2369890" cy="935372"/>
+              </a:xfrm>
+              <a:prstGeom prst="wedgeRoundRectCallout">
+                <a:avLst>
+                  <a:gd name="adj1" fmla="val -134651"/>
+                  <a:gd name="adj2" fmla="val 32007"/>
+                  <a:gd name="adj3" fmla="val 16667"/>
+                </a:avLst>
+              </a:prstGeom>
+              <a:blipFill>
+                <a:blip r:embed="rId3"/>
+                <a:stretch>
+                  <a:fillRect t="-1282" b="-5769"/>
+                </a:stretch>
+              </a:blipFill>
+            </p:spPr>
+            <p:txBody>
+              <a:bodyPr/>
+              <a:lstStyle/>
+              <a:p>
+                <a:r>
+                  <a:rPr lang="en-US">
+                    <a:noFill/>
+                  </a:rPr>
+                  <a:t> </a:t>
+                </a:r>
+              </a:p>
+            </p:txBody>
+          </p:sp>
+        </mc:Fallback>
+      </mc:AlternateContent>
+    </p:spTree>
+    <p:extLst>
+      <p:ext uri="{BB962C8B-B14F-4D97-AF65-F5344CB8AC3E}">
+        <p14:creationId xmlns:p14="http://schemas.microsoft.com/office/powerpoint/2010/main" val="2848453492"/>
+      </p:ext>
+    </p:extLst>
+  </p:cSld>
+  <p:clrMapOvr>
+    <a:masterClrMapping/>
+  </p:clrMapOvr>
+  <p:timing>
+    <p:tnLst>
+      <p:par>
+        <p:cTn id="1" dur="indefinite" restart="never" nodeType="tmRoot">
+          <p:childTnLst>
+            <p:seq concurrent="1" nextAc="seek">
+              <p:cTn id="2" dur="indefinite" nodeType="mainSeq">
+                <p:childTnLst>
+                  <p:par>
+                    <p:cTn id="3" fill="hold">
+                      <p:stCondLst>
+                        <p:cond delay="indefinite"/>
+                      </p:stCondLst>
+                      <p:childTnLst>
+                        <p:par>
+                          <p:cTn id="4" fill="hold">
+                            <p:stCondLst>
+                              <p:cond delay="0"/>
+                            </p:stCondLst>
+                            <p:childTnLst>
+                              <p:par>
+                                <p:cTn id="5" presetID="1" presetClass="entr" presetSubtype="0" fill="hold" grpId="0" nodeType="clickEffect">
+                                  <p:stCondLst>
+                                    <p:cond delay="0"/>
+                                  </p:stCondLst>
+                                  <p:childTnLst>
+                                    <p:set>
+                                      <p:cBhvr>
+                                        <p:cTn id="6" dur="1" fill="hold">
+                                          <p:stCondLst>
+                                            <p:cond delay="0"/>
+                                          </p:stCondLst>
+                                        </p:cTn>
+                                        <p:tgtEl>
+                                          <p:spTgt spid="4"/>
+                                        </p:tgtEl>
+                                        <p:attrNameLst>
+                                          <p:attrName>style.visibility</p:attrName>
+                                        </p:attrNameLst>
+                                      </p:cBhvr>
+                                      <p:to>
+                                        <p:strVal val="visible"/>
+                                      </p:to>
+                                    </p:set>
+                                  </p:childTnLst>
+                                </p:cTn>
+                              </p:par>
+                            </p:childTnLst>
+                          </p:cTn>
+                        </p:par>
+                      </p:childTnLst>
+                    </p:cTn>
+                  </p:par>
+                </p:childTnLst>
+              </p:cTn>
+              <p:prevCondLst>
+                <p:cond evt="onPrev" delay="0">
+                  <p:tgtEl>
+                    <p:sldTgt/>
+                  </p:tgtEl>
+                </p:cond>
+              </p:prevCondLst>
+              <p:nextCondLst>
+                <p:cond evt="onNext" delay="0">
+                  <p:tgtEl>
+                    <p:sldTgt/>
+                  </p:tgtEl>
+                </p:cond>
+              </p:nextCondLst>
+            </p:seq>
+          </p:childTnLst>
+        </p:cTn>
+      </p:par>
+    </p:tnLst>
+    <p:bldLst>
+      <p:bldP spid="4" grpId="0" animBg="1"/>
+    </p:bldLst>
+  </p:timing>
+</p:sld>
+</file>
+
+<file path=ppt/slides/slide15.xml><?xml version="1.0" encoding="utf-8"?>
 <p:sld xmlns:a="http://schemas.openxmlformats.org/drawingml/2006/main" xmlns:r="http://schemas.openxmlformats.org/officeDocument/2006/relationships" xmlns:p="http://schemas.openxmlformats.org/presentationml/2006/main">
   <p:cSld>
     <p:spTree>
@@ -9307,8 +10671,8 @@
           </a:p>
         </p:txBody>
       </p:sp>
-      <mc:AlternateContent xmlns:mc="http://schemas.openxmlformats.org/markup-compatibility/2006" xmlns:a14="http://schemas.microsoft.com/office/drawing/2010/main">
-        <mc:Choice Requires="a14">
+      <mc:AlternateContent xmlns:mc="http://schemas.openxmlformats.org/markup-compatibility/2006">
+        <mc:Choice xmlns:a14="http://schemas.microsoft.com/office/drawing/2010/main" Requires="a14">
           <p:sp>
             <p:nvSpPr>
               <p:cNvPr id="12" name="Speech Bubble: Rectangle with Corners Rounded 11">
@@ -9323,13 +10687,13 @@
             </p:nvSpPr>
             <p:spPr>
               <a:xfrm>
-                <a:off x="6096000" y="4385243"/>
-                <a:ext cx="3910632" cy="336241"/>
+                <a:off x="6494448" y="4385243"/>
+                <a:ext cx="3512184" cy="336241"/>
               </a:xfrm>
               <a:prstGeom prst="wedgeRoundRectCallout">
                 <a:avLst>
-                  <a:gd name="adj1" fmla="val -67147"/>
-                  <a:gd name="adj2" fmla="val 91629"/>
+                  <a:gd name="adj1" fmla="val -78612"/>
+                  <a:gd name="adj2" fmla="val 99114"/>
                   <a:gd name="adj3" fmla="val 16667"/>
                 </a:avLst>
               </a:prstGeom>
@@ -9357,24 +10721,7 @@
                 <a:pPr algn="ctr"/>
                 <a:r>
                   <a:rPr lang="en-US" sz="1600" dirty="0"/>
-                  <a:t>TD error: how much is </a:t>
-                </a:r>
-                <a14:m>
-                  <m:oMath xmlns:m="http://schemas.openxmlformats.org/officeDocument/2006/math">
-                    <m:r>
-                      <m:rPr>
-                        <m:sty m:val="p"/>
-                      </m:rPr>
-                      <a:rPr lang="en-US" sz="1600" b="0" i="0" smtClean="0">
-                        <a:latin typeface="Cambria Math" panose="02040503050406030204" pitchFamily="18" charset="0"/>
-                      </a:rPr>
-                      <m:t>G</m:t>
-                    </m:r>
-                  </m:oMath>
-                </a14:m>
-                <a:r>
-                  <a:rPr lang="en-US" sz="1600" dirty="0"/>
-                  <a:t> better than </a:t>
+                  <a:t>TD error: using </a:t>
                 </a:r>
                 <a14:m>
                   <m:oMath xmlns:m="http://schemas.openxmlformats.org/officeDocument/2006/math">
@@ -9400,13 +10747,13 @@
                 </a14:m>
                 <a:r>
                   <a:rPr lang="en-US" sz="1600" dirty="0"/>
-                  <a:t> </a:t>
+                  <a:t> estimates. </a:t>
                 </a:r>
               </a:p>
             </p:txBody>
           </p:sp>
         </mc:Choice>
-        <mc:Fallback xmlns="">
+        <mc:Fallback>
           <p:sp>
             <p:nvSpPr>
               <p:cNvPr id="12" name="Speech Bubble: Rectangle with Corners Rounded 11">
@@ -9423,20 +10770,20 @@
             </p:nvSpPr>
             <p:spPr>
               <a:xfrm>
-                <a:off x="6096000" y="4385243"/>
-                <a:ext cx="3910632" cy="336241"/>
+                <a:off x="6494448" y="4385243"/>
+                <a:ext cx="3512184" cy="336241"/>
               </a:xfrm>
               <a:prstGeom prst="wedgeRoundRectCallout">
                 <a:avLst>
-                  <a:gd name="adj1" fmla="val -67147"/>
-                  <a:gd name="adj2" fmla="val 91629"/>
+                  <a:gd name="adj1" fmla="val -78612"/>
+                  <a:gd name="adj2" fmla="val 99114"/>
                   <a:gd name="adj3" fmla="val 16667"/>
                 </a:avLst>
               </a:prstGeom>
               <a:blipFill>
                 <a:blip r:embed="rId4"/>
                 <a:stretch>
-                  <a:fillRect t="-2381"/>
+                  <a:fillRect t="-2273"/>
                 </a:stretch>
               </a:blipFill>
             </p:spPr>
@@ -9524,7 +10871,7 @@
         <p:spPr>
           <a:xfrm>
             <a:off x="6494448" y="5644274"/>
-            <a:ext cx="4296868" cy="336241"/>
+            <a:ext cx="4666816" cy="429123"/>
           </a:xfrm>
           <a:prstGeom prst="wedgeRoundRectCallout">
             <a:avLst>
@@ -9557,11 +10904,11 @@
             <a:pPr algn="ctr"/>
             <a:r>
               <a:rPr lang="en-US" sz="1600" dirty="0"/>
-              <a:t>Update the actor (policy) </a:t>
+              <a:t>Update the actor (policy) using the TD </a:t>
             </a:r>
             <a:r>
               <a:rPr lang="en-US" sz="1600"/>
-              <a:t>= REINFORCE</a:t>
+              <a:t>error signal.</a:t>
             </a:r>
             <a:endParaRPr lang="en-US" sz="1600" dirty="0"/>
           </a:p>
@@ -9638,7 +10985,7 @@
             <p:spPr>
               <a:xfrm>
                 <a:off x="6494448" y="5229320"/>
-                <a:ext cx="4296868" cy="336241"/>
+                <a:ext cx="4666816" cy="336241"/>
               </a:xfrm>
               <a:prstGeom prst="wedgeRoundRectCallout">
                 <a:avLst>
@@ -9712,7 +11059,7 @@
             <p:spPr>
               <a:xfrm>
                 <a:off x="6494448" y="5229320"/>
-                <a:ext cx="4296868" cy="336241"/>
+                <a:ext cx="4666816" cy="336241"/>
               </a:xfrm>
               <a:prstGeom prst="wedgeRoundRectCallout">
                 <a:avLst>
@@ -9809,7 +11156,7 @@
 </p:sld>
 </file>
 
-<file path=ppt/slides/slide15.xml><?xml version="1.0" encoding="utf-8"?>
+<file path=ppt/slides/slide16.xml><?xml version="1.0" encoding="utf-8"?>
 <p:sld xmlns:a="http://schemas.openxmlformats.org/drawingml/2006/main" xmlns:r="http://schemas.openxmlformats.org/officeDocument/2006/relationships" xmlns:p="http://schemas.openxmlformats.org/presentationml/2006/main">
   <p:cSld>
     <p:spTree>
@@ -10133,7 +11480,7 @@
 </p:sld>
 </file>
 
-<file path=ppt/slides/slide16.xml><?xml version="1.0" encoding="utf-8"?>
+<file path=ppt/slides/slide17.xml><?xml version="1.0" encoding="utf-8"?>
 <p:sld xmlns:a="http://schemas.openxmlformats.org/drawingml/2006/main" xmlns:r="http://schemas.openxmlformats.org/officeDocument/2006/relationships" xmlns:p="http://schemas.openxmlformats.org/presentationml/2006/main">
   <p:cSld>
     <p:spTree>
@@ -10283,7 +11630,7 @@
 </p:sld>
 </file>
 
-<file path=ppt/slides/slide17.xml><?xml version="1.0" encoding="utf-8"?>
+<file path=ppt/slides/slide18.xml><?xml version="1.0" encoding="utf-8"?>
 <p:sld xmlns:a="http://schemas.openxmlformats.org/drawingml/2006/main" xmlns:r="http://schemas.openxmlformats.org/officeDocument/2006/relationships" xmlns:p="http://schemas.openxmlformats.org/presentationml/2006/main">
   <p:cSld>
     <p:spTree>
@@ -10375,7 +11722,7 @@
 </p:sld>
 </file>
 
-<file path=ppt/slides/slide18.xml><?xml version="1.0" encoding="utf-8"?>
+<file path=ppt/slides/slide19.xml><?xml version="1.0" encoding="utf-8"?>
 <p:sld xmlns:a="http://schemas.openxmlformats.org/drawingml/2006/main" xmlns:r="http://schemas.openxmlformats.org/officeDocument/2006/relationships" xmlns:p="http://schemas.openxmlformats.org/presentationml/2006/main">
   <p:cSld>
     <p:spTree>
@@ -11119,10 +12466,10 @@
                         </m:sSubPr>
                         <m:e>
                           <m:r>
-                            <a:rPr lang="en-US" b="1" i="0" smtClean="0">
+                            <a:rPr lang="en-US" b="1" i="1" smtClean="0">
                               <a:latin typeface="Cambria Math" panose="02040503050406030204" pitchFamily="18" charset="0"/>
                             </a:rPr>
-                            <m:t>𝐱</m:t>
+                            <m:t>𝒙</m:t>
                           </m:r>
                         </m:e>
                         <m:sub>
@@ -11314,13 +12661,13 @@
         </p:nvSpPr>
         <p:spPr>
           <a:xfrm>
-            <a:off x="5577143" y="5865997"/>
+            <a:off x="5761701" y="5971772"/>
             <a:ext cx="1633355" cy="559712"/>
           </a:xfrm>
           <a:prstGeom prst="wedgeRoundRectCallout">
             <a:avLst>
-              <a:gd name="adj1" fmla="val -113279"/>
-              <a:gd name="adj2" fmla="val -128024"/>
+              <a:gd name="adj1" fmla="val -61405"/>
+              <a:gd name="adj2" fmla="val -93552"/>
               <a:gd name="adj3" fmla="val 16667"/>
             </a:avLst>
           </a:prstGeom>
@@ -12114,7 +13461,189 @@
 </p:sld>
 </file>
 
-<file path=ppt/slides/slide19.xml><?xml version="1.0" encoding="utf-8"?>
+<file path=ppt/slides/slide2.xml><?xml version="1.0" encoding="utf-8"?>
+<p:sld xmlns:a="http://schemas.openxmlformats.org/drawingml/2006/main" xmlns:r="http://schemas.openxmlformats.org/officeDocument/2006/relationships" xmlns:p="http://schemas.openxmlformats.org/presentationml/2006/main">
+  <p:cSld>
+    <p:spTree>
+      <p:nvGrpSpPr>
+        <p:cNvPr id="1" name=""/>
+        <p:cNvGrpSpPr/>
+        <p:nvPr/>
+      </p:nvGrpSpPr>
+      <p:grpSpPr>
+        <a:xfrm>
+          <a:off x="0" y="0"/>
+          <a:ext cx="0" cy="0"/>
+          <a:chOff x="0" y="0"/>
+          <a:chExt cx="0" cy="0"/>
+        </a:xfrm>
+      </p:grpSpPr>
+      <p:sp>
+        <p:nvSpPr>
+          <p:cNvPr id="2" name="Title 1">
+            <a:extLst>
+              <a:ext uri="{FF2B5EF4-FFF2-40B4-BE49-F238E27FC236}">
+                <a16:creationId xmlns:a16="http://schemas.microsoft.com/office/drawing/2014/main" id="{9E7A3493-2ED6-DF09-F569-7F3DCA81AB18}"/>
+              </a:ext>
+            </a:extLst>
+          </p:cNvPr>
+          <p:cNvSpPr>
+            <a:spLocks noGrp="1"/>
+          </p:cNvSpPr>
+          <p:nvPr>
+            <p:ph type="title"/>
+          </p:nvPr>
+        </p:nvSpPr>
+        <p:spPr/>
+        <p:txBody>
+          <a:bodyPr/>
+          <a:lstStyle/>
+          <a:p>
+            <a:r>
+              <a:rPr lang="en-US" dirty="0"/>
+              <a:t>Topics of this Course</a:t>
+            </a:r>
+          </a:p>
+        </p:txBody>
+      </p:sp>
+      <p:sp>
+        <p:nvSpPr>
+          <p:cNvPr id="3" name="Content Placeholder 2">
+            <a:extLst>
+              <a:ext uri="{FF2B5EF4-FFF2-40B4-BE49-F238E27FC236}">
+                <a16:creationId xmlns:a16="http://schemas.microsoft.com/office/drawing/2014/main" id="{8F95E019-92A5-79AC-D777-59B4926F61AA}"/>
+              </a:ext>
+            </a:extLst>
+          </p:cNvPr>
+          <p:cNvSpPr>
+            <a:spLocks noGrp="1"/>
+          </p:cNvSpPr>
+          <p:nvPr>
+            <p:ph idx="1"/>
+          </p:nvPr>
+        </p:nvSpPr>
+        <p:spPr/>
+        <p:txBody>
+          <a:bodyPr>
+            <a:normAutofit fontScale="85000" lnSpcReduction="20000"/>
+          </a:bodyPr>
+          <a:lstStyle/>
+          <a:p>
+            <a:r>
+              <a:rPr lang="en-US" dirty="0"/>
+              <a:t>Introduction to reinforcement learning</a:t>
+            </a:r>
+          </a:p>
+          <a:p>
+            <a:r>
+              <a:rPr lang="en-US" dirty="0"/>
+              <a:t>Markov decision processes</a:t>
+            </a:r>
+          </a:p>
+          <a:p>
+            <a:r>
+              <a:rPr lang="en-US" dirty="0"/>
+              <a:t>Part I: Tabular Methods</a:t>
+            </a:r>
+          </a:p>
+          <a:p>
+            <a:pPr lvl="1"/>
+            <a:r>
+              <a:rPr lang="en-US" dirty="0"/>
+              <a:t>Dynamic programming</a:t>
+            </a:r>
+          </a:p>
+          <a:p>
+            <a:pPr lvl="1"/>
+            <a:r>
+              <a:rPr lang="en-US" dirty="0"/>
+              <a:t>Monte Carlo methods</a:t>
+            </a:r>
+          </a:p>
+          <a:p>
+            <a:pPr lvl="1"/>
+            <a:r>
+              <a:rPr lang="en-US" dirty="0"/>
+              <a:t>Temporal-difference learning</a:t>
+            </a:r>
+          </a:p>
+          <a:p>
+            <a:pPr lvl="1"/>
+            <a:r>
+              <a:rPr lang="en-US" dirty="0"/>
+              <a:t>Multi-step bootstrapping</a:t>
+            </a:r>
+          </a:p>
+          <a:p>
+            <a:pPr lvl="1"/>
+            <a:r>
+              <a:rPr lang="en-US" dirty="0"/>
+              <a:t>Planning and learning with tabular methods</a:t>
+            </a:r>
+          </a:p>
+          <a:p>
+            <a:r>
+              <a:rPr lang="en-US" b="1" dirty="0"/>
+              <a:t>Part II: Approximate Solution Methods</a:t>
+            </a:r>
+          </a:p>
+          <a:p>
+            <a:pPr lvl="1"/>
+            <a:r>
+              <a:rPr lang="en-US" dirty="0"/>
+              <a:t>Prediction and Control using Approximation</a:t>
+            </a:r>
+          </a:p>
+          <a:p>
+            <a:pPr lvl="1"/>
+            <a:r>
+              <a:rPr lang="en-US" dirty="0"/>
+              <a:t>Eligibility Traces</a:t>
+            </a:r>
+          </a:p>
+          <a:p>
+            <a:pPr lvl="1"/>
+            <a:r>
+              <a:rPr lang="en-US" b="1" dirty="0"/>
+              <a:t>Policy Gradient Methods</a:t>
+            </a:r>
+          </a:p>
+          <a:p>
+            <a:r>
+              <a:rPr lang="en-US" dirty="0"/>
+              <a:t>Part III: Modern RL Methods</a:t>
+            </a:r>
+          </a:p>
+          <a:p>
+            <a:pPr lvl="1"/>
+            <a:r>
+              <a:rPr lang="en-US" dirty="0"/>
+              <a:t>Deep Reinforcement Learning</a:t>
+            </a:r>
+          </a:p>
+          <a:p>
+            <a:pPr lvl="1"/>
+            <a:r>
+              <a:rPr lang="en-US" dirty="0"/>
+              <a:t>Current Applications</a:t>
+            </a:r>
+          </a:p>
+        </p:txBody>
+      </p:sp>
+    </p:spTree>
+    <p:extLst>
+      <p:ext uri="{BB962C8B-B14F-4D97-AF65-F5344CB8AC3E}">
+        <p14:creationId xmlns:p14="http://schemas.microsoft.com/office/powerpoint/2010/main" val="3653367536"/>
+      </p:ext>
+    </p:extLst>
+  </p:cSld>
+  <p:clrMapOvr>
+    <a:masterClrMapping/>
+  </p:clrMapOvr>
+</p:sld>
+</file>
+
+<file path=ppt/slides/slide20.xml><?xml version="1.0" encoding="utf-8"?>
 <p:sld xmlns:a="http://schemas.openxmlformats.org/drawingml/2006/main" xmlns:r="http://schemas.openxmlformats.org/officeDocument/2006/relationships" xmlns:p="http://schemas.openxmlformats.org/presentationml/2006/main">
   <p:cSld>
     <p:bg>
@@ -12509,7 +14038,7 @@
             </a:r>
             <a:r>
               <a:rPr lang="en-US" sz="1600" dirty="0"/>
-              <a:t>Estimate policy and value function parameters together. Reduces REINFORCE’s variance and leads to more stable and faster learning.</a:t>
+              <a:t>Estimate policy and value function parameters together using TD. Reduces REINFORCE’s variance and leads to more stable and faster learning.</a:t>
             </a:r>
             <a:endParaRPr lang="en-US" sz="1600" b="1" dirty="0"/>
           </a:p>
@@ -12939,188 +14468,6 @@
 </p:sld>
 </file>
 
-<file path=ppt/slides/slide2.xml><?xml version="1.0" encoding="utf-8"?>
-<p:sld xmlns:a="http://schemas.openxmlformats.org/drawingml/2006/main" xmlns:r="http://schemas.openxmlformats.org/officeDocument/2006/relationships" xmlns:p="http://schemas.openxmlformats.org/presentationml/2006/main">
-  <p:cSld>
-    <p:spTree>
-      <p:nvGrpSpPr>
-        <p:cNvPr id="1" name=""/>
-        <p:cNvGrpSpPr/>
-        <p:nvPr/>
-      </p:nvGrpSpPr>
-      <p:grpSpPr>
-        <a:xfrm>
-          <a:off x="0" y="0"/>
-          <a:ext cx="0" cy="0"/>
-          <a:chOff x="0" y="0"/>
-          <a:chExt cx="0" cy="0"/>
-        </a:xfrm>
-      </p:grpSpPr>
-      <p:sp>
-        <p:nvSpPr>
-          <p:cNvPr id="2" name="Title 1">
-            <a:extLst>
-              <a:ext uri="{FF2B5EF4-FFF2-40B4-BE49-F238E27FC236}">
-                <a16:creationId xmlns:a16="http://schemas.microsoft.com/office/drawing/2014/main" id="{9E7A3493-2ED6-DF09-F569-7F3DCA81AB18}"/>
-              </a:ext>
-            </a:extLst>
-          </p:cNvPr>
-          <p:cNvSpPr>
-            <a:spLocks noGrp="1"/>
-          </p:cNvSpPr>
-          <p:nvPr>
-            <p:ph type="title"/>
-          </p:nvPr>
-        </p:nvSpPr>
-        <p:spPr/>
-        <p:txBody>
-          <a:bodyPr/>
-          <a:lstStyle/>
-          <a:p>
-            <a:r>
-              <a:rPr lang="en-US" dirty="0"/>
-              <a:t>Topics of this Course</a:t>
-            </a:r>
-          </a:p>
-        </p:txBody>
-      </p:sp>
-      <p:sp>
-        <p:nvSpPr>
-          <p:cNvPr id="3" name="Content Placeholder 2">
-            <a:extLst>
-              <a:ext uri="{FF2B5EF4-FFF2-40B4-BE49-F238E27FC236}">
-                <a16:creationId xmlns:a16="http://schemas.microsoft.com/office/drawing/2014/main" id="{8F95E019-92A5-79AC-D777-59B4926F61AA}"/>
-              </a:ext>
-            </a:extLst>
-          </p:cNvPr>
-          <p:cNvSpPr>
-            <a:spLocks noGrp="1"/>
-          </p:cNvSpPr>
-          <p:nvPr>
-            <p:ph idx="1"/>
-          </p:nvPr>
-        </p:nvSpPr>
-        <p:spPr/>
-        <p:txBody>
-          <a:bodyPr>
-            <a:normAutofit fontScale="85000" lnSpcReduction="20000"/>
-          </a:bodyPr>
-          <a:lstStyle/>
-          <a:p>
-            <a:r>
-              <a:rPr lang="en-US" dirty="0"/>
-              <a:t>Introduction to reinforcement learning</a:t>
-            </a:r>
-          </a:p>
-          <a:p>
-            <a:r>
-              <a:rPr lang="en-US" dirty="0"/>
-              <a:t>Markov decision processes</a:t>
-            </a:r>
-          </a:p>
-          <a:p>
-            <a:r>
-              <a:rPr lang="en-US" dirty="0"/>
-              <a:t>Part I: Tabular Methods</a:t>
-            </a:r>
-          </a:p>
-          <a:p>
-            <a:pPr lvl="1"/>
-            <a:r>
-              <a:rPr lang="en-US" dirty="0"/>
-              <a:t>Dynamic programming</a:t>
-            </a:r>
-          </a:p>
-          <a:p>
-            <a:pPr lvl="1"/>
-            <a:r>
-              <a:rPr lang="en-US" dirty="0"/>
-              <a:t>Monte Carlo methods</a:t>
-            </a:r>
-          </a:p>
-          <a:p>
-            <a:pPr lvl="1"/>
-            <a:r>
-              <a:rPr lang="en-US" dirty="0"/>
-              <a:t>Temporal-difference learning</a:t>
-            </a:r>
-          </a:p>
-          <a:p>
-            <a:pPr lvl="1"/>
-            <a:r>
-              <a:rPr lang="en-US" dirty="0"/>
-              <a:t>Multi-step bootstrapping</a:t>
-            </a:r>
-          </a:p>
-          <a:p>
-            <a:pPr lvl="1"/>
-            <a:r>
-              <a:rPr lang="en-US" dirty="0"/>
-              <a:t>Planning and learning with tabular methods</a:t>
-            </a:r>
-          </a:p>
-          <a:p>
-            <a:r>
-              <a:rPr lang="en-US" b="1" dirty="0"/>
-              <a:t>Part II: Approximate Solution Methods</a:t>
-            </a:r>
-          </a:p>
-          <a:p>
-            <a:pPr lvl="1"/>
-            <a:r>
-              <a:rPr lang="en-US" dirty="0"/>
-              <a:t>Prediction and Control using Approximation</a:t>
-            </a:r>
-          </a:p>
-          <a:p>
-            <a:pPr lvl="1"/>
-            <a:r>
-              <a:rPr lang="en-US" dirty="0"/>
-              <a:t>Eligibility Traces</a:t>
-            </a:r>
-          </a:p>
-          <a:p>
-            <a:pPr lvl="1"/>
-            <a:r>
-              <a:rPr lang="en-US" b="1" dirty="0"/>
-              <a:t>Policy Gradient Methods</a:t>
-            </a:r>
-          </a:p>
-          <a:p>
-            <a:r>
-              <a:rPr lang="en-US" dirty="0"/>
-              <a:t>Part III: Modern RL Methods</a:t>
-            </a:r>
-          </a:p>
-          <a:p>
-            <a:pPr lvl="1"/>
-            <a:r>
-              <a:rPr lang="en-US" dirty="0"/>
-              <a:t>Deep Reinforcement Learning</a:t>
-            </a:r>
-          </a:p>
-          <a:p>
-            <a:pPr lvl="1"/>
-            <a:r>
-              <a:rPr lang="en-US" dirty="0"/>
-              <a:t>Current Applications</a:t>
-            </a:r>
-          </a:p>
-        </p:txBody>
-      </p:sp>
-    </p:spTree>
-    <p:extLst>
-      <p:ext uri="{BB962C8B-B14F-4D97-AF65-F5344CB8AC3E}">
-        <p14:creationId xmlns:p14="http://schemas.microsoft.com/office/powerpoint/2010/main" val="3653367536"/>
-      </p:ext>
-    </p:extLst>
-  </p:cSld>
-  <p:clrMapOvr>
-    <a:masterClrMapping/>
-  </p:clrMapOvr>
-</p:sld>
-</file>
-
 <file path=ppt/slides/slide3.xml><?xml version="1.0" encoding="utf-8"?>
 <p:sld xmlns:a="http://schemas.openxmlformats.org/drawingml/2006/main" xmlns:r="http://schemas.openxmlformats.org/officeDocument/2006/relationships" xmlns:p="http://schemas.openxmlformats.org/presentationml/2006/main">
   <p:cSld>
@@ -18631,7 +19978,7 @@
             </p:spPr>
             <p:txBody>
               <a:bodyPr>
-                <a:normAutofit fontScale="62500" lnSpcReduction="20000"/>
+                <a:normAutofit fontScale="70000" lnSpcReduction="20000"/>
               </a:bodyPr>
               <a:lstStyle/>
               <a:p>
@@ -19541,67 +20888,22 @@
               <a:p>
                 <a:r>
                   <a:rPr lang="en-US" b="1" dirty="0"/>
-                  <a:t>Convergence guarantee</a:t>
-                </a:r>
-                <a:r>
-                  <a:rPr lang="en-US" dirty="0"/>
-                  <a:t>: </a:t>
+                  <a:t>Convergence?</a:t>
                 </a:r>
               </a:p>
               <a:p>
                 <a:pPr lvl="1"/>
                 <a:r>
                   <a:rPr lang="en-US" dirty="0"/>
-                  <a:t>Gradient is unbiased and with reducing step size appropriately,  ascent </a:t>
+                  <a:t>Does </a:t>
                 </a:r>
                 <a:r>
                   <a:rPr lang="en-US" b="1" dirty="0"/>
-                  <a:t>will converge to a local maximum </a:t>
+                  <a:t>NOT</a:t>
                 </a:r>
                 <a:r>
                   <a:rPr lang="en-US" dirty="0"/>
-                  <a:t>of </a:t>
-                </a:r>
-                <a14:m>
-                  <m:oMath xmlns:m="http://schemas.openxmlformats.org/officeDocument/2006/math">
-                    <m:r>
-                      <a:rPr lang="en-US" i="1">
-                        <a:latin typeface="Cambria Math" panose="02040503050406030204" pitchFamily="18" charset="0"/>
-                      </a:rPr>
-                      <m:t>𝐽</m:t>
-                    </m:r>
-                    <m:d>
-                      <m:dPr>
-                        <m:ctrlPr>
-                          <a:rPr lang="en-US" b="1" i="1">
-                            <a:latin typeface="Cambria Math" panose="02040503050406030204" pitchFamily="18" charset="0"/>
-                          </a:rPr>
-                        </m:ctrlPr>
-                      </m:dPr>
-                      <m:e>
-                        <m:r>
-                          <a:rPr lang="en-US" b="1" i="1">
-                            <a:latin typeface="Cambria Math" panose="02040503050406030204" pitchFamily="18" charset="0"/>
-                          </a:rPr>
-                          <m:t>𝜽</m:t>
-                        </m:r>
-                      </m:e>
-                    </m:d>
-                    <m:r>
-                      <a:rPr lang="en-US" b="1" i="1" smtClean="0">
-                        <a:latin typeface="Cambria Math" panose="02040503050406030204" pitchFamily="18" charset="0"/>
-                      </a:rPr>
-                      <m:t>.</m:t>
-                    </m:r>
-                  </m:oMath>
-                </a14:m>
-                <a:endParaRPr lang="en-US" dirty="0"/>
-              </a:p>
-              <a:p>
-                <a:pPr lvl="1"/>
-                <a:r>
-                  <a:rPr lang="en-US" dirty="0"/>
-                  <a:t>Does NOT guarantee: global optimum, fast convergence or stability (with non-linear approximation)</a:t>
+                  <a:t> guarantee: convergence to (global) optimum, fast convergence or stability!</a:t>
                 </a:r>
               </a:p>
             </p:txBody>
@@ -19632,7 +20934,7 @@
               <a:blipFill>
                 <a:blip r:embed="rId2"/>
                 <a:stretch>
-                  <a:fillRect l="-406" t="-15324"/>
+                  <a:fillRect l="-522" t="-17173" b="-1057"/>
                 </a:stretch>
               </a:blipFill>
             </p:spPr>
@@ -19667,13 +20969,13 @@
             </p:nvSpPr>
             <p:spPr>
               <a:xfrm>
-                <a:off x="4791790" y="4394509"/>
+                <a:off x="4791790" y="4499365"/>
                 <a:ext cx="2013018" cy="540281"/>
               </a:xfrm>
               <a:prstGeom prst="wedgeRoundRectCallout">
                 <a:avLst>
-                  <a:gd name="adj1" fmla="val 40574"/>
-                  <a:gd name="adj2" fmla="val -116382"/>
+                  <a:gd name="adj1" fmla="val 49742"/>
+                  <a:gd name="adj2" fmla="val -111724"/>
                   <a:gd name="adj3" fmla="val 16667"/>
                 </a:avLst>
               </a:prstGeom>
@@ -19735,20 +21037,20 @@
             </p:nvSpPr>
             <p:spPr>
               <a:xfrm>
-                <a:off x="4791790" y="4394509"/>
+                <a:off x="4791790" y="4499365"/>
                 <a:ext cx="2013018" cy="540281"/>
               </a:xfrm>
               <a:prstGeom prst="wedgeRoundRectCallout">
                 <a:avLst>
-                  <a:gd name="adj1" fmla="val 40574"/>
-                  <a:gd name="adj2" fmla="val -116382"/>
+                  <a:gd name="adj1" fmla="val 49742"/>
+                  <a:gd name="adj2" fmla="val -111724"/>
                   <a:gd name="adj3" fmla="val 16667"/>
                 </a:avLst>
               </a:prstGeom>
               <a:blipFill>
                 <a:blip r:embed="rId3"/>
                 <a:stretch>
-                  <a:fillRect b="-9150"/>
+                  <a:fillRect b="-9333"/>
                 </a:stretch>
               </a:blipFill>
             </p:spPr>
@@ -19781,13 +21083,13 @@
         </p:nvSpPr>
         <p:spPr>
           <a:xfrm>
-            <a:off x="8987531" y="4389919"/>
+            <a:off x="8987531" y="4494775"/>
             <a:ext cx="2459919" cy="540281"/>
           </a:xfrm>
           <a:prstGeom prst="wedgeRoundRectCallout">
             <a:avLst>
-              <a:gd name="adj1" fmla="val -66091"/>
-              <a:gd name="adj2" fmla="val -123682"/>
+              <a:gd name="adj1" fmla="val -49892"/>
+              <a:gd name="adj2" fmla="val -127564"/>
               <a:gd name="adj3" fmla="val 16667"/>
             </a:avLst>
           </a:prstGeom>
@@ -19815,7 +21117,7 @@
             <a:pPr algn="ctr"/>
             <a:r>
               <a:rPr lang="en-US" sz="1600" dirty="0"/>
-              <a:t>Depends on the policy approximation function.</a:t>
+              <a:t>Gradient of the policy approximation function.</a:t>
             </a:r>
             <a:endParaRPr lang="en-US" sz="1400" dirty="0"/>
           </a:p>
@@ -19837,7 +21139,7 @@
             </p:nvSpPr>
             <p:spPr>
               <a:xfrm>
-                <a:off x="7009327" y="4385533"/>
+                <a:off x="7009327" y="4490389"/>
                 <a:ext cx="1873502" cy="540281"/>
               </a:xfrm>
               <a:prstGeom prst="wedgeRoundRectCallout">
@@ -19905,7 +21207,7 @@
             </p:nvSpPr>
             <p:spPr>
               <a:xfrm>
-                <a:off x="7009327" y="4385533"/>
+                <a:off x="7009327" y="4490389"/>
                 <a:ext cx="1873502" cy="540281"/>
               </a:xfrm>
               <a:prstGeom prst="wedgeRoundRectCallout">
@@ -19918,7 +21220,7 @@
               <a:blipFill>
                 <a:blip r:embed="rId4"/>
                 <a:stretch>
-                  <a:fillRect b="-9150"/>
+                  <a:fillRect b="-9272"/>
                 </a:stretch>
               </a:blipFill>
             </p:spPr>
@@ -20212,37 +21514,6 @@
                                           <p:spTgt spid="3">
                                             <p:txEl>
                                               <p:pRg st="8" end="8"/>
-                                            </p:txEl>
-                                          </p:spTgt>
-                                        </p:tgtEl>
-                                        <p:attrNameLst>
-                                          <p:attrName>style.visibility</p:attrName>
-                                        </p:attrNameLst>
-                                      </p:cBhvr>
-                                      <p:to>
-                                        <p:strVal val="visible"/>
-                                      </p:to>
-                                    </p:set>
-                                  </p:childTnLst>
-                                </p:cTn>
-                              </p:par>
-                              <p:par>
-                                <p:cTn id="25" presetID="1" presetClass="entr" presetSubtype="0" fill="hold" grpId="0" nodeType="withEffect">
-                                  <p:stCondLst>
-                                    <p:cond delay="0"/>
-                                  </p:stCondLst>
-                                  <p:childTnLst>
-                                    <p:set>
-                                      <p:cBhvr>
-                                        <p:cTn id="26" dur="1" fill="hold">
-                                          <p:stCondLst>
-                                            <p:cond delay="0"/>
-                                          </p:stCondLst>
-                                        </p:cTn>
-                                        <p:tgtEl>
-                                          <p:spTgt spid="3">
-                                            <p:txEl>
-                                              <p:pRg st="9" end="9"/>
                                             </p:txEl>
                                           </p:spTgt>
                                         </p:tgtEl>
@@ -21970,7 +23241,7 @@
             <p:spPr/>
             <p:txBody>
               <a:bodyPr>
-                <a:normAutofit fontScale="77500" lnSpcReduction="20000"/>
+                <a:normAutofit fontScale="85000" lnSpcReduction="20000"/>
               </a:bodyPr>
               <a:lstStyle/>
               <a:p>
@@ -21984,35 +23255,30 @@
                 <a:pPr lvl="1"/>
                 <a:r>
                   <a:rPr lang="en-US" dirty="0"/>
-                  <a:t>Value-action methods cannot learn stochastic policies and are often stuck with learning on-policy an </a:t>
+                  <a:t>The </a:t>
                 </a:r>
-                <a14:m>
-                  <m:oMath xmlns:m="http://schemas.openxmlformats.org/officeDocument/2006/math">
-                    <m:r>
-                      <a:rPr lang="en-US" i="1">
-                        <a:latin typeface="Cambria Math" panose="02040503050406030204" pitchFamily="18" charset="0"/>
-                      </a:rPr>
-                      <m:t>𝜖</m:t>
-                    </m:r>
-                  </m:oMath>
-                </a14:m>
+                <a:r>
+                  <a:rPr lang="en-US" b="1" dirty="0"/>
+                  <a:t>stochastic policy will be driven to the optimal policy </a:t>
+                </a:r>
                 <a:r>
                   <a:rPr lang="en-US" dirty="0"/>
-                  <a:t>-greedy policy.</a:t>
+                  <a:t>which can also approach a deterministic policy.</a:t>
                 </a:r>
               </a:p>
               <a:p>
                 <a:pPr lvl="1"/>
                 <a:r>
                   <a:rPr lang="en-US" dirty="0"/>
-                  <a:t>Soft-max defines stochastic policies (i.e., each action has a probability). </a:t>
+                  <a:t>Stochastic policies </a:t>
                 </a:r>
-              </a:p>
-              <a:p>
-                <a:pPr lvl="1"/>
+                <a:r>
+                  <a:rPr lang="en-US" b="1" dirty="0"/>
+                  <a:t>perform exploration implicitly</a:t>
+                </a:r>
                 <a:r>
                   <a:rPr lang="en-US" dirty="0"/>
-                  <a:t>The policy will be driven to the optimal stochastic policy which can also approach a deterministic policy.</a:t>
+                  <a:t>. The amount of exploration is automatically reduced when it converges to the best action.</a:t>
                 </a:r>
                 <a:br>
                   <a:rPr lang="en-US" dirty="0"/>
@@ -22080,7 +23346,7 @@
               <a:p>
                 <a:r>
                   <a:rPr lang="en-US" b="1" dirty="0"/>
-                  <a:t>Incorporating prior knowledge is possible</a:t>
+                  <a:t>Incorporating prior knowledge is easier</a:t>
                 </a:r>
               </a:p>
               <a:p>
@@ -22122,7 +23388,7 @@
               <a:blipFill>
                 <a:blip r:embed="rId3"/>
                 <a:stretch>
-                  <a:fillRect l="-696" t="-2551" r="-754"/>
+                  <a:fillRect l="-812" t="-2806" r="-58" b="-893"/>
                 </a:stretch>
               </a:blipFill>
             </p:spPr>
@@ -22264,15 +23530,33 @@
                                   </p:childTnLst>
                                 </p:cTn>
                               </p:par>
+                            </p:childTnLst>
+                          </p:cTn>
+                        </p:par>
+                      </p:childTnLst>
+                    </p:cTn>
+                  </p:par>
+                  <p:par>
+                    <p:cTn id="11" fill="hold">
+                      <p:stCondLst>
+                        <p:cond delay="indefinite"/>
+                      </p:stCondLst>
+                      <p:childTnLst>
+                        <p:par>
+                          <p:cTn id="12" fill="hold">
+                            <p:stCondLst>
+                              <p:cond delay="0"/>
+                            </p:stCondLst>
+                            <p:childTnLst>
                               <p:par>
-                                <p:cTn id="11" presetID="1" presetClass="entr" presetSubtype="0" fill="hold" grpId="0" nodeType="withEffect">
+                                <p:cTn id="13" presetID="1" presetClass="entr" presetSubtype="0" fill="hold" grpId="0" nodeType="clickEffect">
                                   <p:stCondLst>
                                     <p:cond delay="0"/>
                                   </p:stCondLst>
                                   <p:childTnLst>
                                     <p:set>
                                       <p:cBhvr>
-                                        <p:cTn id="12" dur="1" fill="hold">
+                                        <p:cTn id="14" dur="1" fill="hold">
                                           <p:stCondLst>
                                             <p:cond delay="0"/>
                                           </p:stCondLst>
@@ -22280,7 +23564,7 @@
                                         <p:tgtEl>
                                           <p:spTgt spid="3">
                                             <p:txEl>
-                                              <p:pRg st="3" end="3"/>
+                                              <p:pRg st="4" end="4"/>
                                             </p:txEl>
                                           </p:spTgt>
                                         </p:tgtEl>
@@ -22295,26 +23579,8 @@
                                   </p:childTnLst>
                                 </p:cTn>
                               </p:par>
-                            </p:childTnLst>
-                          </p:cTn>
-                        </p:par>
-                      </p:childTnLst>
-                    </p:cTn>
-                  </p:par>
-                  <p:par>
-                    <p:cTn id="13" fill="hold">
-                      <p:stCondLst>
-                        <p:cond delay="indefinite"/>
-                      </p:stCondLst>
-                      <p:childTnLst>
-                        <p:par>
-                          <p:cTn id="14" fill="hold">
-                            <p:stCondLst>
-                              <p:cond delay="0"/>
-                            </p:stCondLst>
-                            <p:childTnLst>
                               <p:par>
-                                <p:cTn id="15" presetID="1" presetClass="entr" presetSubtype="0" fill="hold" grpId="0" nodeType="clickEffect">
+                                <p:cTn id="15" presetID="1" presetClass="entr" presetSubtype="0" fill="hold" grpId="0" nodeType="withEffect">
                                   <p:stCondLst>
                                     <p:cond delay="0"/>
                                   </p:stCondLst>
@@ -22344,15 +23610,33 @@
                                   </p:childTnLst>
                                 </p:cTn>
                               </p:par>
+                            </p:childTnLst>
+                          </p:cTn>
+                        </p:par>
+                      </p:childTnLst>
+                    </p:cTn>
+                  </p:par>
+                  <p:par>
+                    <p:cTn id="17" fill="hold">
+                      <p:stCondLst>
+                        <p:cond delay="indefinite"/>
+                      </p:stCondLst>
+                      <p:childTnLst>
+                        <p:par>
+                          <p:cTn id="18" fill="hold">
+                            <p:stCondLst>
+                              <p:cond delay="0"/>
+                            </p:stCondLst>
+                            <p:childTnLst>
                               <p:par>
-                                <p:cTn id="17" presetID="1" presetClass="entr" presetSubtype="0" fill="hold" grpId="0" nodeType="withEffect">
+                                <p:cTn id="19" presetID="1" presetClass="entr" presetSubtype="0" fill="hold" grpId="0" nodeType="clickEffect">
                                   <p:stCondLst>
                                     <p:cond delay="0"/>
                                   </p:stCondLst>
                                   <p:childTnLst>
                                     <p:set>
                                       <p:cBhvr>
-                                        <p:cTn id="18" dur="1" fill="hold">
+                                        <p:cTn id="20" dur="1" fill="hold">
                                           <p:stCondLst>
                                             <p:cond delay="0"/>
                                           </p:stCondLst>
@@ -22360,7 +23644,7 @@
                                         <p:tgtEl>
                                           <p:spTgt spid="3">
                                             <p:txEl>
-                                              <p:pRg st="6" end="6"/>
+                                              <p:pRg st="7" end="7"/>
                                             </p:txEl>
                                           </p:spTgt>
                                         </p:tgtEl>
@@ -22375,26 +23659,8 @@
                                   </p:childTnLst>
                                 </p:cTn>
                               </p:par>
-                            </p:childTnLst>
-                          </p:cTn>
-                        </p:par>
-                      </p:childTnLst>
-                    </p:cTn>
-                  </p:par>
-                  <p:par>
-                    <p:cTn id="19" fill="hold">
-                      <p:stCondLst>
-                        <p:cond delay="indefinite"/>
-                      </p:stCondLst>
-                      <p:childTnLst>
-                        <p:par>
-                          <p:cTn id="20" fill="hold">
-                            <p:stCondLst>
-                              <p:cond delay="0"/>
-                            </p:stCondLst>
-                            <p:childTnLst>
                               <p:par>
-                                <p:cTn id="21" presetID="1" presetClass="entr" presetSubtype="0" fill="hold" grpId="0" nodeType="clickEffect">
+                                <p:cTn id="21" presetID="1" presetClass="entr" presetSubtype="0" fill="hold" grpId="0" nodeType="withEffect">
                                   <p:stCondLst>
                                     <p:cond delay="0"/>
                                   </p:stCondLst>
@@ -22410,37 +23676,6 @@
                                           <p:spTgt spid="3">
                                             <p:txEl>
                                               <p:pRg st="8" end="8"/>
-                                            </p:txEl>
-                                          </p:spTgt>
-                                        </p:tgtEl>
-                                        <p:attrNameLst>
-                                          <p:attrName>style.visibility</p:attrName>
-                                        </p:attrNameLst>
-                                      </p:cBhvr>
-                                      <p:to>
-                                        <p:strVal val="visible"/>
-                                      </p:to>
-                                    </p:set>
-                                  </p:childTnLst>
-                                </p:cTn>
-                              </p:par>
-                              <p:par>
-                                <p:cTn id="23" presetID="1" presetClass="entr" presetSubtype="0" fill="hold" grpId="0" nodeType="withEffect">
-                                  <p:stCondLst>
-                                    <p:cond delay="0"/>
-                                  </p:stCondLst>
-                                  <p:childTnLst>
-                                    <p:set>
-                                      <p:cBhvr>
-                                        <p:cTn id="24" dur="1" fill="hold">
-                                          <p:stCondLst>
-                                            <p:cond delay="0"/>
-                                          </p:stCondLst>
-                                        </p:cTn>
-                                        <p:tgtEl>
-                                          <p:spTgt spid="3">
-                                            <p:txEl>
-                                              <p:pRg st="9" end="9"/>
                                             </p:txEl>
                                           </p:spTgt>
                                         </p:tgtEl>
